--- a/docs/student-projects/grassroots-nat-project.pptx
+++ b/docs/student-projects/grassroots-nat-project.pptx
@@ -512,7 +512,7 @@
           <a:p>
             <a:r>
               <a:rPr lang="en-US" dirty="0"/>
-              <a:t>Framing: this is not a survey project. The deliverable is an algorithm — NAT detection without designated servers — validated against a proper oracle. The survey falls out of it.</a:t>
+              <a:t>The deliverable is the detection algorithm, validated against an RFC 5780 reference implementation. The prevalence measurement is a supporting result derived from the same campaign.</a:t>
             </a:r>
             <a:endParaRPr lang="en-US" dirty="0"/>
           </a:p>
@@ -600,7 +600,7 @@
           <a:p>
             <a:r>
               <a:rPr lang="en-US" dirty="0"/>
-              <a:t>Primary claim is the algorithm. Broader testbed coverage — more carriers, more countries via travelling handsets — is explicitly if-time-permits; six months does not hold both. Each added SIM is another stratum cell, not more generality.</a:t>
+              <a:t>The primary claim is the algorithm. Broader testbed coverage, through further carriers and countries, is pursued if time permits; each additional SIM covers one further stratum cell rather than adding generality.</a:t>
             </a:r>
             <a:endParaRPr lang="en-US" dirty="0"/>
           </a:p>
@@ -688,7 +688,7 @@
           <a:p>
             <a:r>
               <a:rPr lang="en-US" dirty="0"/>
-              <a:t>Close on the fact that the audit turned up three production defects on the way. The project pays for itself before it starts.</a:t>
+              <a:t>The three implementation defects listed were found while surveying the transport, and are independent of whether the project proceeds.</a:t>
             </a:r>
             <a:endParaRPr lang="en-US" dirty="0"/>
           </a:p>
@@ -776,7 +776,7 @@
           <a:p>
             <a:r>
               <a:rPr lang="en-US" dirty="0"/>
-              <a:t>Keep this short. The point of the slide is that the no-infrastructure claim is falsifiable, and nobody has tried to falsify it yet.</a:t>
+              <a:t>Context only. The relevant point is that the no-infrastructure property is testable, and has not yet been tested.</a:t>
             </a:r>
             <a:endParaRPr lang="en-US" dirty="0"/>
           </a:p>
@@ -864,7 +864,7 @@
           <a:p>
             <a:r>
               <a:rPr lang="en-US" dirty="0"/>
-              <a:t>Every constant here was read out of the source, not the design docs. 10 s announce is also the de facto NAT keepalive — there is no dedicated one.</a:t>
+              <a:t>Every constant is taken from the source rather than the design documents. The 10 s announce also serves as the de facto NAT keepalive, as there is no dedicated one.</a:t>
             </a:r>
             <a:endParaRPr lang="en-US" dirty="0"/>
           </a:p>
@@ -952,7 +952,7 @@
           <a:p>
             <a:r>
               <a:rPr lang="en-US" dirty="0"/>
-              <a:t>This is the slide to slow down on. It is a real defect, confirmed in source at grassroots_network.dart:3369-3373, and it is also the cleanest motivation for the whole project.</a:t>
+              <a:t>Confirmed in source at grassroots_network.dart:3369-3373. This defect is the clearest motivation for the project.</a:t>
             </a:r>
             <a:endParaRPr lang="en-US" dirty="0"/>
           </a:p>
@@ -1040,7 +1040,7 @@
           <a:p>
             <a:r>
               <a:rPr lang="en-US" dirty="0"/>
-              <a:t>Ranked by how much each blocks a decision. The instrumentation gap is the one that makes the paper impossible, not just the product worse.</a:t>
+              <a:t>Ordered by how far each blocks a decision. The instrumentation gap also prevents any latency or robustness result from being computed after the fact.</a:t>
             </a:r>
             <a:endParaRPr lang="en-US" dirty="0"/>
           </a:p>
@@ -1128,7 +1128,7 @@
           <a:p>
             <a:r>
               <a:rPr lang="en-US" dirty="0"/>
-              <a:t>Every step here is what the current code actually does, traced through the source. The last line is the important one — success teaches us nothing either.</a:t>
+              <a:t>Each step is traced through the current implementation. Note that a successful attempt is equally uninformative, as nothing distinguishes it from a lucky port guess.</a:t>
             </a:r>
             <a:endParaRPr lang="en-US" dirty="0"/>
           </a:p>
@@ -1216,7 +1216,7 @@
           <a:p>
             <a:r>
               <a:rPr lang="en-US" dirty="0"/>
-              <a:t>The contamination guard is the single most important design point in the project. Without it the field results are wrong in a direction that looks like good news.</a:t>
+              <a:t>The contamination guard is the central validity requirement. Without it the results are biased towards permissiveness, which is the direction least likely to be questioned.</a:t>
             </a:r>
             <a:endParaRPr lang="en-US" dirty="0"/>
           </a:p>
@@ -1304,7 +1304,7 @@
           <a:p>
             <a:r>
               <a:rPr lang="en-US" dirty="0"/>
-              <a:t>Say plainly that revision 1 was written before anyone read the transport source. That is fine — it is why we read it.</a:t>
+              <a:t>The measurand and the baseline are separate questions: autoNAT bounds the reachability comparison, and the RFC 5780 server supplies the classification ground truth.</a:t>
             </a:r>
             <a:endParaRPr lang="en-US" dirty="0"/>
           </a:p>
@@ -1392,7 +1392,7 @@
           <a:p>
             <a:r>
               <a:rPr lang="en-US" dirty="0"/>
-              <a:t>RQ2 is the one with a real chance of a surprising answer: witness availability may dominate everything else, and that finding is more useful to us than the accuracy curve.</a:t>
+              <a:t>RQ2 is the most likely source of a surprising result, as witness availability may dominate the accuracy question, which would be the more useful finding for the transport.</a:t>
             </a:r>
             <a:endParaRPr lang="en-US" dirty="0"/>
           </a:p>
@@ -2130,7 +2130,7 @@
                 <a:ea typeface="Cambria" pitchFamily="34" charset="-122"/>
                 <a:cs typeface="Cambria" pitchFamily="34" charset="-120"/>
               </a:rPr>
-              <a:t>Measuring what</a:t>
+              <a:t>NAT detection and</a:t>
             </a:r>
             <a:endParaRPr lang="en-US" sz="4600" dirty="0"/>
           </a:p>
@@ -2150,7 +2150,7 @@
                 <a:ea typeface="Cambria" pitchFamily="34" charset="-122"/>
                 <a:cs typeface="Cambria" pitchFamily="34" charset="-120"/>
               </a:rPr>
-              <a:t>we currently guess</a:t>
+              <a:t>hole punching</a:t>
             </a:r>
             <a:endParaRPr lang="en-US" sz="4600" dirty="0"/>
           </a:p>
@@ -2189,7 +2189,7 @@
                 <a:ea typeface="Calibri" pitchFamily="34" charset="-122"/>
                 <a:cs typeface="Calibri" pitchFamily="34" charset="-120"/>
               </a:rPr>
-              <a:t>NAT detection and hole-punching, using your friends instead of servers</a:t>
+              <a:t>Determining NAT behaviour from the social graph, without designated servers</a:t>
             </a:r>
             <a:endParaRPr lang="en-US" sz="1700" dirty="0"/>
           </a:p>
@@ -2306,7 +2306,7 @@
                 <a:ea typeface="Calibri" pitchFamily="34" charset="-122"/>
                 <a:cs typeface="Calibri" pitchFamily="34" charset="-120"/>
               </a:rPr>
-              <a:t>MILESTONES</a:t>
+              <a:t>SIX MONTHS, WITH EXIT CRITERIA</a:t>
             </a:r>
             <a:endParaRPr lang="en-US" sz="1100" dirty="0"/>
           </a:p>
@@ -2345,7 +2345,7 @@
                 <a:ea typeface="Cambria" pitchFamily="34" charset="-122"/>
                 <a:cs typeface="Cambria" pitchFamily="34" charset="-120"/>
               </a:rPr>
-              <a:t>Six months, with exit criteria</a:t>
+              <a:t>Milestones</a:t>
             </a:r>
             <a:endParaRPr lang="en-US" sz="3400" dirty="0"/>
           </a:p>
@@ -3665,7 +3665,7 @@
                 <a:ea typeface="Calibri" pitchFamily="34" charset="-122"/>
                 <a:cs typeface="Calibri" pitchFamily="34" charset="-120"/>
               </a:rPr>
-              <a:t>Start the IP allocation and firewall work in week 1 — that is latency you cannot absorb in month 2.</a:t>
+              <a:t>Address allocation and firewall rules are procured in week 1, as they gate month 2.</a:t>
             </a:r>
             <a:endParaRPr lang="en-US" sz="1350" dirty="0"/>
           </a:p>
@@ -3736,7 +3736,7 @@
                 <a:ea typeface="Calibri" pitchFamily="34" charset="-122"/>
                 <a:cs typeface="Calibri" pitchFamily="34" charset="-120"/>
               </a:rPr>
-              <a:t>OPEN QUESTIONS</a:t>
+              <a:t>TO SETTLE BEFORE THE WORK BEGINS</a:t>
             </a:r>
             <a:endParaRPr lang="en-US" sz="1100" dirty="0"/>
           </a:p>
@@ -3775,7 +3775,7 @@
                 <a:ea typeface="Cambria" pitchFamily="34" charset="-122"/>
                 <a:cs typeface="Cambria" pitchFamily="34" charset="-120"/>
               </a:rPr>
-              <a:t>Decisions to lock before starting</a:t>
+              <a:t>Open decisions</a:t>
             </a:r>
             <a:endParaRPr lang="en-US" sz="3400" dirty="0"/>
           </a:p>
@@ -3814,7 +3814,7 @@
                 <a:ea typeface="Cambria" pitchFamily="34" charset="-122"/>
                 <a:cs typeface="Cambria" pitchFamily="34" charset="-120"/>
               </a:rPr>
-              <a:t>Stack</a:t>
+              <a:t>Primary claim</a:t>
             </a:r>
             <a:endParaRPr lang="en-US" sz="1600" dirty="0"/>
           </a:p>
@@ -3856,7 +3856,7 @@
                 <a:ea typeface="Calibri" pitchFamily="34" charset="-122"/>
                 <a:cs typeface="Calibri" pitchFamily="34" charset="-120"/>
               </a:rPr>
-              <a:t>Confirm dart_libp2p is rejected and the probe lives on the transport’s own socket.</a:t>
+              <a:t>The algorithm or the measurement? Both cannot be first-class within six months.</a:t>
             </a:r>
             <a:endParaRPr lang="en-US" sz="1250" dirty="0"/>
           </a:p>
@@ -3895,7 +3895,7 @@
                 <a:ea typeface="Cambria" pitchFamily="34" charset="-122"/>
                 <a:cs typeface="Cambria" pitchFamily="34" charset="-120"/>
               </a:rPr>
-              <a:t>Baseline shape</a:t>
+              <a:t>Baseline</a:t>
             </a:r>
             <a:endParaRPr lang="en-US" sz="1600" dirty="0"/>
           </a:p>
@@ -3937,7 +3937,7 @@
                 <a:ea typeface="Calibri" pitchFamily="34" charset="-122"/>
                 <a:cs typeface="Calibri" pitchFamily="34" charset="-120"/>
               </a:rPr>
-              <a:t>go-libp2p sidecar (high fidelity, Android-only) or same-socket reimplementation?</a:t>
+              <a:t>The reference implementation as a sidecar, faithful but Android-only, or a reimplementation over our own socket.</a:t>
             </a:r>
             <a:endParaRPr lang="en-US" sz="1250" dirty="0"/>
           </a:p>
@@ -3976,7 +3976,7 @@
                 <a:ea typeface="Cambria" pitchFamily="34" charset="-122"/>
                 <a:cs typeface="Cambria" pitchFamily="34" charset="-120"/>
               </a:rPr>
-              <a:t>Primary claim</a:t>
+              <a:t>Oracle hosting</a:t>
             </a:r>
             <a:endParaRPr lang="en-US" sz="1600" dirty="0"/>
           </a:p>
@@ -4018,7 +4018,7 @@
                 <a:ea typeface="Calibri" pitchFamily="34" charset="-122"/>
                 <a:cs typeface="Calibri" pitchFamily="34" charset="-120"/>
               </a:rPr>
-              <a:t>The algorithm or the measurement? Both cannot be first-class in six months.</a:t>
+              <a:t>Who provisions the reference server, and can its alternate addresses come from the block already reserved.</a:t>
             </a:r>
             <a:endParaRPr lang="en-US" sz="1250" dirty="0"/>
           </a:p>
@@ -4057,7 +4057,7 @@
                 <a:ea typeface="Cambria" pitchFamily="34" charset="-122"/>
                 <a:cs typeface="Cambria" pitchFamily="34" charset="-120"/>
               </a:rPr>
-              <a:t>Oracle hosting</a:t>
+              <a:t>Anchor IPv4</a:t>
             </a:r>
             <a:endParaRPr lang="en-US" sz="1600" dirty="0"/>
           </a:p>
@@ -4099,7 +4099,7 @@
                 <a:ea typeface="Calibri" pitchFamily="34" charset="-122"/>
                 <a:cs typeface="Calibri" pitchFamily="34" charset="-120"/>
               </a:rPr>
-              <a:t>Who provisions the dual-homed server — and can it come from the /96 already reserved?</a:t>
+              <a:t>The anchor’s data-plane rule is IPv6-only, which excludes the IPv4-only CGNAT population we target.</a:t>
             </a:r>
             <a:endParaRPr lang="en-US" sz="1250" dirty="0"/>
           </a:p>
@@ -4138,7 +4138,7 @@
                 <a:ea typeface="Cambria" pitchFamily="34" charset="-122"/>
                 <a:cs typeface="Cambria" pitchFamily="34" charset="-120"/>
               </a:rPr>
-              <a:t>Anchor IPv4</a:t>
+              <a:t>Testbed budget</a:t>
             </a:r>
             <a:endParaRPr lang="en-US" sz="1600" dirty="0"/>
           </a:p>
@@ -4180,7 +4180,7 @@
                 <a:ea typeface="Calibri" pitchFamily="34" charset="-122"/>
                 <a:cs typeface="Calibri" pitchFamily="34" charset="-120"/>
               </a:rPr>
-              <a:t>The data-plane rule is IPv6-only, excluding exactly the CGNAT population we target.</a:t>
+              <a:t>Each carrier is a candidate stratum, but a SIM covers one carrier, APN and plan; two per carrier are needed before homogeneity is checked rather than assumed.</a:t>
             </a:r>
             <a:endParaRPr lang="en-US" sz="1250" dirty="0"/>
           </a:p>
@@ -4219,7 +4219,7 @@
                 <a:ea typeface="Cambria" pitchFamily="34" charset="-122"/>
                 <a:cs typeface="Cambria" pitchFamily="34" charset="-120"/>
               </a:rPr>
-              <a:t>Testbed budget</a:t>
+              <a:t>Instrumentation</a:t>
             </a:r>
             <a:endParaRPr lang="en-US" sz="1600" dirty="0"/>
           </a:p>
@@ -4261,7 +4261,7 @@
                 <a:ea typeface="Calibri" pitchFamily="34" charset="-122"/>
                 <a:cs typeface="Calibri" pitchFamily="34" charset="-120"/>
               </a:rPr>
-              <a:t>How many handsets and SIMs, and which carriers? Each SIM buys one (carrier, APN, plan) cell — two per carrier before homogeneity is checked rather than assumed.</a:t>
+              <a:t>Whether the per-attempt record lands in main as a permanent subsystem or in a measurement branch.</a:t>
             </a:r>
             <a:endParaRPr lang="en-US" sz="1250" dirty="0"/>
           </a:p>
@@ -4330,7 +4330,7 @@
                 <a:ea typeface="Calibri" pitchFamily="34" charset="-122"/>
                 <a:cs typeface="Calibri" pitchFamily="34" charset="-120"/>
               </a:rPr>
-              <a:t>Also independent of this project: </a:t>
+              <a:t>Independent of this project: </a:t>
             </a:r>
             <a:pPr indent="0" marL="0">
               <a:lnSpc>
@@ -4347,7 +4347,7 @@
                 <a:ea typeface="Calibri" pitchFamily="34" charset="-122"/>
                 <a:cs typeface="Calibri" pitchFamily="34" charset="-120"/>
               </a:rPr>
-              <a:t>the punch target from PUNCH_INITIATE is never checked for global routability, the mediator’s pending map has no TTL, and the stream framer trusts an unbounded 32-bit length. Someone’s backlog needs these.</a:t>
+              <a:t>the punch target from PUNCH_INITIATE is not checked for global routability, the mediator’s pending map has no TTL, and the stream framer trusts an unbounded 32-bit length. Their assignment should be settled in advance.</a:t>
             </a:r>
             <a:endParaRPr lang="en-US" sz="1250" dirty="0"/>
           </a:p>
@@ -4411,7 +4411,7 @@
                 <a:ea typeface="Calibri" pitchFamily="34" charset="-122"/>
                 <a:cs typeface="Calibri" pitchFamily="34" charset="-120"/>
               </a:rPr>
-              <a:t>CONTEXT</a:t>
+              <a:t>SYSTEM CONTEXT</a:t>
             </a:r>
             <a:endParaRPr lang="en-US" sz="1100" dirty="0"/>
           </a:p>
@@ -4450,7 +4450,7 @@
                 <a:ea typeface="Cambria" pitchFamily="34" charset="-122"/>
                 <a:cs typeface="Cambria" pitchFamily="34" charset="-120"/>
               </a:rPr>
-              <a:t>What Grassroots Networking is</a:t>
+              <a:t>Grassroots Networking</a:t>
             </a:r>
             <a:endParaRPr lang="en-US" sz="3400" dirty="0"/>
           </a:p>
@@ -4583,7 +4583,7 @@
                 <a:ea typeface="Calibri" pitchFamily="34" charset="-122"/>
                 <a:cs typeface="Calibri" pitchFamily="34" charset="-120"/>
               </a:rPr>
-              <a:t>Messages go straight from sender to recipient. No relay ever carries another peer's traffic — that is the founding claim, and every server we add erodes it.</a:t>
+              <a:t>Messages are delivered directly from sender to recipient. The system is designed to operate without dedicated servers, so every anchor we add weakens that property.</a:t>
             </a:r>
             <a:endParaRPr lang="en-US" sz="1350" dirty="0"/>
           </a:p>
@@ -4716,7 +4716,7 @@
                 <a:ea typeface="Calibri" pitchFamily="34" charset="-122"/>
                 <a:cs typeface="Calibri" pitchFamily="34" charset="-120"/>
               </a:rPr>
-              <a:t>BLE for peers in range, UDP/UDX for everyone else. Same interface: connect, send, receive. BLE wins when both are available.</a:t>
+              <a:t>BLE for peers in physical proximity, UDP over UDX for remote peers. Both expose the same interface, and BLE is preferred where both are available.</a:t>
             </a:r>
             <a:endParaRPr lang="en-US" sz="1350" dirty="0"/>
           </a:p>
@@ -4849,7 +4849,7 @@
                 <a:ea typeface="Calibri" pitchFamily="34" charset="-122"/>
                 <a:cs typeface="Calibri" pitchFamily="34" charset="-120"/>
               </a:rPr>
-              <a:t>An Ed25519 public key is the peer. Nicknames are cosmetic; every trust decision is a signature check.</a:t>
+              <a:t>An Ed25519 public key identifies the peer. Nicknames are cosmetic, and every trust decision reduces to a signature check.</a:t>
             </a:r>
             <a:endParaRPr lang="en-US" sz="1350" dirty="0"/>
           </a:p>
@@ -4888,7 +4888,7 @@
                 <a:ea typeface="Calibri" pitchFamily="34" charset="-122"/>
                 <a:cs typeface="Calibri" pitchFamily="34" charset="-120"/>
               </a:rPr>
-              <a:t>The IP transport is where this project lives — and it is the half we have never measured.</a:t>
+              <a:t>The Internet relation is the subject of this project. Its NAT behaviour has never been measured.</a:t>
             </a:r>
             <a:endParaRPr lang="en-US" sz="1500" dirty="0"/>
           </a:p>
@@ -4952,7 +4952,7 @@
                 <a:ea typeface="Calibri" pitchFamily="34" charset="-122"/>
                 <a:cs typeface="Calibri" pitchFamily="34" charset="-120"/>
               </a:rPr>
-              <a:t>THE CURRENT PATH</a:t>
+              <a:t>IMPLEMENTATION TODAY</a:t>
             </a:r>
             <a:endParaRPr lang="en-US" sz="1100" dirty="0"/>
           </a:p>
@@ -4991,7 +4991,7 @@
                 <a:ea typeface="Cambria" pitchFamily="34" charset="-122"/>
                 <a:cs typeface="Cambria" pitchFamily="34" charset="-120"/>
               </a:rPr>
-              <a:t>What happens today when two peers connect</a:t>
+              <a:t>The current IP path</a:t>
             </a:r>
             <a:endParaRPr lang="en-US" sz="3400" dirty="0"/>
           </a:p>
@@ -6173,7 +6173,7 @@
                 <a:ea typeface="Cambria" pitchFamily="34" charset="-122"/>
                 <a:cs typeface="Cambria" pitchFamily="34" charset="-120"/>
               </a:rPr>
-              <a:t>Three things this path never does</a:t>
+              <a:t>Not implemented</a:t>
             </a:r>
             <a:endParaRPr lang="en-US" sz="1500" dirty="0"/>
           </a:p>
@@ -6212,7 +6212,7 @@
                 <a:ea typeface="Calibri" pitchFamily="34" charset="-122"/>
                 <a:cs typeface="Calibri" pitchFamily="34" charset="-120"/>
               </a:rPr>
-              <a:t>Discover the NAT-mapped port. </a:t>
+              <a:t>Mapped-port discovery. </a:t>
             </a:r>
             <a:pPr indent="0" marL="0">
               <a:buNone/>
@@ -6226,7 +6226,7 @@
                 <a:ea typeface="Calibri" pitchFamily="34" charset="-122"/>
                 <a:cs typeface="Calibri" pitchFamily="34" charset="-120"/>
               </a:rPr>
-              <a:t>We advertise our public IP paired with our </a:t>
+              <a:t>We advertise the discovered public IP paired with our own </a:t>
             </a:r>
             <a:pPr indent="0" marL="0">
               <a:buNone/>
@@ -6254,7 +6254,7 @@
                 <a:ea typeface="Calibri" pitchFamily="34" charset="-122"/>
                 <a:cs typeface="Calibri" pitchFamily="34" charset="-120"/>
               </a:rPr>
-              <a:t> port — a guess.</a:t>
+              <a:t> port.</a:t>
             </a:r>
             <a:endParaRPr lang="en-US" sz="1250" dirty="0"/>
           </a:p>
@@ -6293,7 +6293,7 @@
                 <a:ea typeface="Calibri" pitchFamily="34" charset="-122"/>
                 <a:cs typeface="Calibri" pitchFamily="34" charset="-120"/>
               </a:rPr>
-              <a:t>Check whether the punch worked. </a:t>
+              <a:t>Punch verification. </a:t>
             </a:r>
             <a:pPr indent="0" marL="0">
               <a:buNone/>
@@ -6307,7 +6307,7 @@
                 <a:ea typeface="Calibri" pitchFamily="34" charset="-122"/>
                 <a:cs typeface="Calibri" pitchFamily="34" charset="-120"/>
               </a:rPr>
-              <a:t>The closed-loop mode has no production caller and cannot run — the multiplexer owns socket reads.</a:t>
+              <a:t>The closed-loop mode has no production caller and cannot run, since the multiplexer owns socket reads.</a:t>
             </a:r>
             <a:endParaRPr lang="en-US" sz="1250" dirty="0"/>
           </a:p>
@@ -6346,7 +6346,7 @@
                 <a:ea typeface="Calibri" pitchFamily="34" charset="-122"/>
                 <a:cs typeface="Calibri" pitchFamily="34" charset="-120"/>
               </a:rPr>
-              <a:t>Record anything. </a:t>
+              <a:t>Instrumentation. </a:t>
             </a:r>
             <a:pPr indent="0" marL="0">
               <a:buNone/>
@@ -6360,7 +6360,7 @@
                 <a:ea typeface="Calibri" pitchFamily="34" charset="-122"/>
                 <a:cs typeface="Calibri" pitchFamily="34" charset="-120"/>
               </a:rPr>
-              <a:t>No timestamps, no attempt id; the reducer discards the failure reason. Nothing is measurable after the fact.</a:t>
+              <a:t>No timestamps and no attempt identifier, and the reducer discards the failure reason.</a:t>
             </a:r>
             <a:endParaRPr lang="en-US" sz="1250" dirty="0"/>
           </a:p>
@@ -6431,7 +6431,7 @@
                 <a:ea typeface="Calibri" pitchFamily="34" charset="-122"/>
                 <a:cs typeface="Calibri" pitchFamily="34" charset="-120"/>
               </a:rPr>
-              <a:t>ONE BOOLEAN, TWO WRONG ANSWERS</a:t>
+              <a:t>ISWELLCONNECTED</a:t>
             </a:r>
             <a:endParaRPr lang="en-US" sz="1100" dirty="0"/>
           </a:p>
@@ -6470,7 +6470,7 @@
                 <a:ea typeface="Cambria" pitchFamily="34" charset="-122"/>
                 <a:cs typeface="Cambria" pitchFamily="34" charset="-120"/>
               </a:rPr>
-              <a:t>The blind spot that bites hardest</a:t>
+              <a:t>Self-classification</a:t>
             </a:r>
             <a:endParaRPr lang="en-US" sz="3400" dirty="0"/>
           </a:p>
@@ -6512,7 +6512,7 @@
                 <a:ea typeface="Calibri" pitchFamily="34" charset="-122"/>
                 <a:cs typeface="Calibri" pitchFamily="34" charset="-120"/>
               </a:rPr>
-              <a:t>A phone behind carrier NAT asks seeip.org for its address. It gets the carrier’s outer public IP — it never sees its own 100.64 inner address. So it advertises a globally routable IP, and every peer agrees:</a:t>
+              <a:t>A handset behind a carrier NAT requests its address from the reflection service and receives the carrier’s outer public IP, as it never observes its own 100.64 inner address. It therefore advertises a globally routable address, and is classified accordingly by itself and by its peers:</a:t>
             </a:r>
             <a:endParaRPr lang="en-US" sz="1500" dirty="0"/>
           </a:p>
@@ -6617,7 +6617,7 @@
                 <a:ea typeface="Calibri" pitchFamily="34" charset="-122"/>
                 <a:cs typeface="Calibri" pitchFamily="34" charset="-120"/>
               </a:rPr>
-              <a:t>The UI tells the user they are well-connected.</a:t>
+              <a:t>Reported to the user as well-connected.</a:t>
             </a:r>
             <a:endParaRPr lang="en-US" sz="1300" dirty="0"/>
           </a:p>
@@ -6683,7 +6683,7 @@
                 <a:ea typeface="Cambria" pitchFamily="34" charset="-122"/>
                 <a:cs typeface="Cambria" pitchFamily="34" charset="-120"/>
               </a:rPr>
-              <a:t>Wrong twice over</a:t>
+              <a:t>Two errors</a:t>
             </a:r>
             <a:endParaRPr lang="en-US" sz="1500" dirty="0"/>
           </a:p>
@@ -6725,7 +6725,7 @@
                 <a:ea typeface="Calibri" pitchFamily="34" charset="-122"/>
                 <a:cs typeface="Calibri" pitchFamily="34" charset="-120"/>
               </a:rPr>
-              <a:t>The advertised port is the local port, not the mapped one — and the carrier NAT will not accept unsolicited inbound at all.</a:t>
+              <a:t>The advertised port is the local port rather than the mapped one, and the carrier NAT does not accept unsolicited inbound traffic at all.</a:t>
             </a:r>
             <a:endParaRPr lang="en-US" sz="1300" dirty="0"/>
           </a:p>
@@ -6764,7 +6764,7 @@
                 <a:ea typeface="Cambria" pitchFamily="34" charset="-122"/>
                 <a:cs typeface="Cambria" pitchFamily="34" charset="-120"/>
               </a:rPr>
-              <a:t>Three live behaviours run off that false positive</a:t>
+              <a:t>Consequences</a:t>
             </a:r>
             <a:endParaRPr lang="en-US" sz="1600" dirty="0"/>
           </a:p>
@@ -6828,7 +6828,7 @@
                 <a:ea typeface="Calibri" pitchFamily="34" charset="-122"/>
                 <a:cs typeface="Calibri" pitchFamily="34" charset="-120"/>
               </a:rPr>
-              <a:t>The pre-connect punch is suppressed for peers that look public — so it is skipped for exactly the peers that need it.</a:t>
+              <a:t>The pre-connect punch is suppressed for peers that appear public, and is therefore skipped for the peers that require it.</a:t>
             </a:r>
             <a:endParaRPr lang="en-US" sz="1350" dirty="0"/>
           </a:p>
@@ -6892,7 +6892,7 @@
                 <a:ea typeface="Calibri" pitchFamily="34" charset="-122"/>
                 <a:cs typeface="Calibri" pitchFamily="34" charset="-120"/>
               </a:rPr>
-              <a:t>The phone starts acting as an address reflector and rendezvous facilitator for its friends.</a:t>
+              <a:t>The device begins acting as an address reflector and rendezvous facilitator for its friends.</a:t>
             </a:r>
             <a:endParaRPr lang="en-US" sz="1350" dirty="0"/>
           </a:p>
@@ -6956,7 +6956,7 @@
                 <a:ea typeface="Calibri" pitchFamily="34" charset="-122"/>
                 <a:cs typeface="Calibri" pitchFamily="34" charset="-120"/>
               </a:rPr>
-              <a:t>Nothing anywhere distinguishes “has a public IP” from “is reachable at that ip:port.”</a:t>
+              <a:t>Nothing distinguishes having a public address from being reachable at it.</a:t>
             </a:r>
             <a:endParaRPr lang="en-US" sz="1350" dirty="0"/>
           </a:p>
@@ -7020,7 +7020,7 @@
                 <a:ea typeface="Calibri" pitchFamily="34" charset="-122"/>
                 <a:cs typeface="Calibri" pitchFamily="34" charset="-120"/>
               </a:rPr>
-              <a:t>THE EVIDENCE GAP</a:t>
+              <a:t>WHAT WE CANNOT DETERMINE</a:t>
             </a:r>
             <a:endParaRPr lang="en-US" sz="1100" dirty="0"/>
           </a:p>
@@ -7059,7 +7059,7 @@
                 <a:ea typeface="Cambria" pitchFamily="34" charset="-122"/>
                 <a:cs typeface="Cambria" pitchFamily="34" charset="-120"/>
               </a:rPr>
-              <a:t>What we do not know</a:t>
+              <a:t>Gaps in the current implementation</a:t>
             </a:r>
             <a:endParaRPr lang="en-US" sz="3400" dirty="0"/>
           </a:p>
@@ -7192,7 +7192,7 @@
                 <a:ea typeface="Calibri" pitchFamily="34" charset="-122"/>
                 <a:cs typeface="Calibri" pitchFamily="34" charset="-120"/>
               </a:rPr>
-              <a:t>Not one line of code determines mapping or filtering behaviour. A routability check on a string stands in for it.</a:t>
+              <a:t>No code determines mapping or filtering behaviour; a routability check over the advertised string stands in for it.</a:t>
             </a:r>
             <a:endParaRPr lang="en-US" sz="1250" dirty="0"/>
           </a:p>
@@ -7325,7 +7325,7 @@
                 <a:ea typeface="Calibri" pitchFamily="34" charset="-122"/>
                 <a:cs typeface="Calibri" pitchFamily="34" charset="-120"/>
               </a:rPr>
-              <a:t>The true port only ever arrives from a peer that is already connected — useless for the case where nothing has connected yet.</a:t>
+              <a:t>The mapped port arrives only from a peer already connected, which is of no use for a first contact.</a:t>
             </a:r>
             <a:endParaRPr lang="en-US" sz="1250" dirty="0"/>
           </a:p>
@@ -7458,7 +7458,7 @@
                 <a:ea typeface="Calibri" pitchFamily="34" charset="-122"/>
                 <a:cs typeface="Calibri" pitchFamily="34" charset="-120"/>
               </a:rPr>
-              <a:t>“Am I reachable from outside?” is asserted from a string prefix. It is never tested.</a:t>
+              <a:t>Reachability from outside is asserted from an address prefix and never tested.</a:t>
             </a:r>
             <a:endParaRPr lang="en-US" sz="1250" dirty="0"/>
           </a:p>
@@ -7591,7 +7591,7 @@
                 <a:ea typeface="Calibri" pitchFamily="34" charset="-122"/>
                 <a:cs typeface="Calibri" pitchFamily="34" charset="-120"/>
               </a:rPr>
-              <a:t>No Stopwatch anywhere in lib/. Punch outcome is a four-value enum with no timestamps and the reason discarded.</a:t>
+              <a:t>Punch outcomes are a four-value enumeration without timestamps, and the failure reason is discarded.</a:t>
             </a:r>
             <a:endParaRPr lang="en-US" sz="1250" dirty="0"/>
           </a:p>
@@ -7633,7 +7633,7 @@
                 <a:ea typeface="Calibri" pitchFamily="34" charset="-122"/>
                 <a:cs typeface="Calibri" pitchFamily="34" charset="-120"/>
               </a:rPr>
-              <a:t>Every give-up constant in the transport — 2 s punch, 10 s handshake, 15 s backoff, 60 s retry — was chosen by intuition. None of them came from a measurement.</a:t>
+              <a:t>Every constant in the transport — the 2 s punch, the 10 s handshake, the 15 s backoff, the 60 s retry — was chosen by intuition rather than derived from measurement.</a:t>
             </a:r>
             <a:endParaRPr lang="en-US" sz="1500" dirty="0"/>
           </a:p>
@@ -7697,7 +7697,7 @@
                 <a:ea typeface="Calibri" pitchFamily="34" charset="-122"/>
                 <a:cs typeface="Calibri" pitchFamily="34" charset="-120"/>
               </a:rPr>
-              <a:t>A CONCRETE FAILURE</a:t>
+              <a:t>CGNAT HANDSET TO HOME NAT</a:t>
             </a:r>
             <a:endParaRPr lang="en-US" sz="1100" dirty="0"/>
           </a:p>
@@ -7736,7 +7736,7 @@
                 <a:ea typeface="Cambria" pitchFamily="34" charset="-122"/>
                 <a:cs typeface="Cambria" pitchFamily="34" charset="-120"/>
               </a:rPr>
-              <a:t>Maya cannot reach Noam, and nobody finds out why</a:t>
+              <a:t>Failure walkthrough</a:t>
             </a:r>
             <a:endParaRPr lang="en-US" sz="3400" dirty="0"/>
           </a:p>
@@ -8823,7 +8823,7 @@
                 <a:ea typeface="Calibri" pitchFamily="34" charset="-122"/>
                 <a:cs typeface="Calibri" pitchFamily="34" charset="-120"/>
               </a:rPr>
-              <a:t>THE IDEA</a:t>
+              <a:t>RELAYED DIAL-BACK</a:t>
             </a:r>
             <a:endParaRPr lang="en-US" sz="1100" dirty="0"/>
           </a:p>
@@ -8862,7 +8862,7 @@
                 <a:ea typeface="Cambria" pitchFamily="34" charset="-122"/>
                 <a:cs typeface="Cambria" pitchFamily="34" charset="-120"/>
               </a:rPr>
-              <a:t>Ask your friends to dial you back</a:t>
+              <a:t>Witness-based detection</a:t>
             </a:r>
             <a:endParaRPr lang="en-US" sz="3400" dirty="0"/>
           </a:p>
@@ -8904,7 +8904,7 @@
                 <a:ea typeface="Calibri" pitchFamily="34" charset="-122"/>
                 <a:cs typeface="Calibri" pitchFamily="34" charset="-120"/>
               </a:rPr>
-              <a:t>libp2p’s autoNAT leans on a small set of well-known dial-back nodes. We have a social graph instead. The hard half is filtering behaviour: it needs an inbound packet from an endpoint you have never sent to — which no single witness can produce for itself.</a:t>
+              <a:t>autoNAT depends in practice on a small set of well-known dial-back nodes, whereas GN already maintains a social graph of authenticated friends. Filtering behaviour is the harder half, as it requires an inbound packet from an endpoint the probe has never contacted, which no single witness can produce for itself.</a:t>
             </a:r>
             <a:endParaRPr lang="en-US" sz="1450" dirty="0"/>
           </a:p>
@@ -9219,7 +9219,7 @@
                 <a:ea typeface="Calibri" pitchFamily="34" charset="-122"/>
                 <a:cs typeface="Calibri" pitchFamily="34" charset="-120"/>
               </a:rPr>
-              <a:t>never contacted</a:t>
+              <a:t>not contacted</a:t>
             </a:r>
             <a:endParaRPr lang="en-US" sz="1100" dirty="0"/>
           </a:p>
@@ -9282,7 +9282,7 @@
                 <a:ea typeface="Calibri" pitchFamily="34" charset="-122"/>
                 <a:cs typeface="Calibri" pitchFamily="34" charset="-120"/>
               </a:rPr>
-              <a:t>nonce + my mapped tuple</a:t>
+              <a:t>nonce, mapped address</a:t>
             </a:r>
             <a:endParaRPr lang="en-US" sz="1150" dirty="0"/>
           </a:p>
@@ -9345,7 +9345,7 @@
                 <a:ea typeface="Calibri" pitchFamily="34" charset="-122"/>
                 <a:cs typeface="Calibri" pitchFamily="34" charset="-120"/>
               </a:rPr>
-              <a:t>dial this peer, from you</a:t>
+              <a:t>relay the dial-back</a:t>
             </a:r>
             <a:endParaRPr lang="en-US" sz="1150" dirty="0"/>
           </a:p>
@@ -9454,7 +9454,7 @@
                 <a:ea typeface="Calibri" pitchFamily="34" charset="-122"/>
                 <a:cs typeface="Calibri" pitchFamily="34" charset="-120"/>
               </a:rPr>
-              <a:t>dial-back carrying the nonce  —  from an endpoint the probe never sent to</a:t>
+              <a:t>dial-back carrying the nonce, from an endpoint the probe has not contacted</a:t>
             </a:r>
             <a:endParaRPr lang="en-US" sz="1150" dirty="0"/>
           </a:p>
@@ -9686,7 +9686,7 @@
                 <a:ea typeface="Calibri" pitchFamily="34" charset="-122"/>
                 <a:cs typeface="Calibri" pitchFamily="34" charset="-120"/>
               </a:rPr>
-              <a:t>The trap: </a:t>
+              <a:t>Contamination: </a:t>
             </a:r>
             <a:pPr indent="0" marL="0">
               <a:lnSpc>
@@ -9703,7 +9703,7 @@
                 <a:ea typeface="Calibri" pitchFamily="34" charset="-122"/>
                 <a:cs typeface="Calibri" pitchFamily="34" charset="-120"/>
               </a:rPr>
-              <a:t>witnesses are exactly the peers you already send to — ANNOUNCE every 10 s, ten punch datagrams per attempt. A dial-back from an endpoint you contacted traverses a hole </a:t>
+              <a:t>witnesses are by construction the peers the device already transmits to, through the 10 s ANNOUNCE and roughly ten punch datagrams per attempt. A dial-back from a previously contacted endpoint traverses a mapping the probe </a:t>
             </a:r>
             <a:pPr indent="0" marL="0">
               <a:lnSpc>
@@ -9720,7 +9720,7 @@
                 <a:ea typeface="Calibri" pitchFamily="34" charset="-122"/>
                 <a:cs typeface="Calibri" pitchFamily="34" charset="-120"/>
               </a:rPr>
-              <a:t>you</a:t>
+              <a:t>itself</a:t>
             </a:r>
             <a:pPr indent="0" marL="0">
               <a:lnSpc>
@@ -9737,7 +9737,7 @@
                 <a:ea typeface="Calibri" pitchFamily="34" charset="-122"/>
                 <a:cs typeface="Calibri" pitchFamily="34" charset="-120"/>
               </a:rPr>
-              <a:t> opened, and reports every NAT as far more permissive than it is. The send-history guard is not optional.</a:t>
+              <a:t> opened, and biases the result towards reporting NATs as more permissive than they are. A per-test send history is required.</a:t>
             </a:r>
             <a:endParaRPr lang="en-US" sz="1300" dirty="0"/>
           </a:p>
@@ -9801,7 +9801,7 @@
                 <a:ea typeface="Calibri" pitchFamily="34" charset="-122"/>
                 <a:cs typeface="Calibri" pitchFamily="34" charset="-120"/>
               </a:rPr>
-              <a:t>FRAMING</a:t>
+              <a:t>WHAT WE MEASURE, AND AGAINST WHAT</a:t>
             </a:r>
             <a:endParaRPr lang="en-US" sz="1100" dirty="0"/>
           </a:p>
@@ -9840,7 +9840,7 @@
                 <a:ea typeface="Cambria" pitchFamily="34" charset="-122"/>
                 <a:cs typeface="Cambria" pitchFamily="34" charset="-120"/>
               </a:rPr>
-              <a:t>Two things the first write-up got wrong</a:t>
+              <a:t>Measurand and baseline</a:t>
             </a:r>
             <a:endParaRPr lang="en-US" sz="3400" dirty="0"/>
           </a:p>
@@ -9906,7 +9906,7 @@
                 <a:ea typeface="Cambria" pitchFamily="34" charset="-122"/>
                 <a:cs typeface="Cambria" pitchFamily="34" charset="-120"/>
               </a:rPr>
-              <a:t>There is no libp2p in this stack</a:t>
+              <a:t>The measurand is a tuple</a:t>
             </a:r>
             <a:endParaRPr lang="en-US" sz="2000" dirty="0"/>
           </a:p>
@@ -9948,7 +9948,7 @@
                 <a:ea typeface="Calibri" pitchFamily="34" charset="-122"/>
                 <a:cs typeface="Calibri" pitchFamily="34" charset="-120"/>
               </a:rPr>
-              <a:t>The IP transport is grassroots_dart_udx 2.1.0, a fork of dart_udx, with its own signaling and its own hole-punch path.</a:t>
+              <a:t>Mapping behaviour × filtering behaviour × port preservation × mapping lifetime, with CGNAT status and IPv6 availability recorded alongside.</a:t>
             </a:r>
             <a:endParaRPr lang="en-US" sz="1300" dirty="0"/>
           </a:p>
@@ -9990,7 +9990,7 @@
                 <a:ea typeface="Calibri" pitchFamily="34" charset="-122"/>
                 <a:cs typeface="Calibri" pitchFamily="34" charset="-120"/>
               </a:rPr>
-              <a:t>Building the probe on dart_libp2p would open a second socket — a different NAT mapping, measuring a different thing, and producing a decision rule for a transport we do not ship.</a:t>
+              <a:t>Reported per address family and per translation path: NAT44, NAT64 with 464XLAT, or native IPv6, where mapping and port preservation are not applicable rather than absent.</a:t>
             </a:r>
             <a:endParaRPr lang="en-US" sz="1300" dirty="0"/>
           </a:p>
@@ -10059,7 +10059,7 @@
                 <a:ea typeface="Calibri" pitchFamily="34" charset="-122"/>
                 <a:cs typeface="Calibri" pitchFamily="34" charset="-120"/>
               </a:rPr>
-              <a:t>Build inside grassroots_networking, probing from the transport’s own socket.</a:t>
+              <a:t>A single-label NAT type may be derived for presentation, but is never the measurand.</a:t>
             </a:r>
             <a:endParaRPr lang="en-US" sz="1250" dirty="0"/>
           </a:p>
@@ -10125,7 +10125,7 @@
                 <a:ea typeface="Cambria" pitchFamily="34" charset="-122"/>
                 <a:cs typeface="Cambria" pitchFamily="34" charset="-120"/>
               </a:rPr>
-              <a:t>autoNAT is not a NAT classifier</a:t>
+              <a:t>autoNAT reports reachability</a:t>
             </a:r>
             <a:endParaRPr lang="en-US" sz="2000" dirty="0"/>
           </a:p>
@@ -10167,7 +10167,7 @@
                 <a:ea typeface="Calibri" pitchFamily="34" charset="-122"/>
                 <a:cs typeface="Calibri" pitchFamily="34" charset="-120"/>
               </a:rPr>
-              <a:t>v1 answers “am I publicly reachable”. v2 answers “is this address dialable”, per address, with a nonce’d dial-back. Neither emits a mapping or filtering label.</a:t>
+              <a:t>Version 1 reports whether a node is publicly reachable; version 2 reports whether a given address is dialable. Neither emits a mapping or filtering label.</a:t>
             </a:r>
             <a:endParaRPr lang="en-US" sz="1300" dirty="0"/>
           </a:p>
@@ -10209,7 +10209,7 @@
                 <a:ea typeface="Calibri" pitchFamily="34" charset="-122"/>
                 <a:cs typeface="Calibri" pitchFamily="34" charset="-120"/>
               </a:rPr>
-              <a:t>“Accuracy versus autoNAT” compares two things with no shared measurand.</a:t>
+              <a:t>The two therefore share no measurand with the classification question, and cannot serve as its ground truth.</a:t>
             </a:r>
             <a:endParaRPr lang="en-US" sz="1300" dirty="0"/>
           </a:p>
@@ -10278,7 +10278,7 @@
                 <a:ea typeface="Calibri" pitchFamily="34" charset="-122"/>
                 <a:cs typeface="Calibri" pitchFamily="34" charset="-120"/>
               </a:rPr>
-              <a:t>Head-to-head is reachability-only; classification ground truth is an RFC 5780 oracle we stand up ourselves.</a:t>
+              <a:t>The comparison is restricted to reachability; classification is validated against an RFC 5780 server we operate.</a:t>
             </a:r>
             <a:endParaRPr lang="en-US" sz="1250" dirty="0"/>
           </a:p>
@@ -10317,7 +10317,7 @@
                 <a:ea typeface="Calibri" pitchFamily="34" charset="-122"/>
                 <a:cs typeface="Calibri" pitchFamily="34" charset="-120"/>
               </a:rPr>
-              <a:t>Neither correction shrinks the project. Both make it a study of our own system rather than of someone else’s.</a:t>
+              <a:t>The probe is implemented inside grassroots_networking and sends from the transport’s own socket, since a second socket receives a different mapping.</a:t>
             </a:r>
             <a:endParaRPr lang="en-US" sz="1450" dirty="0"/>
           </a:p>
@@ -10381,7 +10381,7 @@
                 <a:ea typeface="Calibri" pitchFamily="34" charset="-122"/>
                 <a:cs typeface="Calibri" pitchFamily="34" charset="-120"/>
               </a:rPr>
-              <a:t>RESEARCH QUESTIONS</a:t>
+              <a:t>FOUR AXES</a:t>
             </a:r>
             <a:endParaRPr lang="en-US" sz="1100" dirty="0"/>
           </a:p>
@@ -10420,7 +10420,7 @@
                 <a:ea typeface="Cambria" pitchFamily="34" charset="-122"/>
                 <a:cs typeface="Cambria" pitchFamily="34" charset="-120"/>
               </a:rPr>
-              <a:t>What we are actually asking</a:t>
+              <a:t>Research questions</a:t>
             </a:r>
             <a:endParaRPr lang="en-US" sz="3400" dirty="0"/>
           </a:p>
@@ -10523,7 +10523,7 @@
                 <a:ea typeface="Cambria" pitchFamily="34" charset="-122"/>
                 <a:cs typeface="Cambria" pitchFamily="34" charset="-120"/>
               </a:rPr>
-              <a:t>Can social-graph witnesses replace designated servers?</a:t>
+              <a:t>Can social-graph peers replace designated dial-back servers?</a:t>
             </a:r>
             <a:endParaRPr lang="en-US" sz="1750" dirty="0"/>
           </a:p>
@@ -10565,7 +10565,7 @@
                 <a:ea typeface="Calibri" pitchFamily="34" charset="-122"/>
                 <a:cs typeface="Calibri" pitchFamily="34" charset="-120"/>
               </a:rPr>
-              <a:t>Specify and validate a witness-based algorithm that recovers mapping and filtering behaviour, and measure its agreement with an RFC 5780 oracle.</a:t>
+              <a:t>We specify a witness-based algorithm that recovers mapping and filtering behaviour, and quantify its agreement with an RFC 5780 reference implementation.</a:t>
             </a:r>
             <a:endParaRPr lang="en-US" sz="1300" dirty="0"/>
           </a:p>
@@ -10710,7 +10710,7 @@
                 <a:ea typeface="Calibri" pitchFamily="34" charset="-122"/>
                 <a:cs typeface="Calibri" pitchFamily="34" charset="-120"/>
               </a:rPr>
-              <a:t>False-negative rate and time-to-verdict against witness count k and byzantine fraction f, with lying witnesses we operate. And the constraint that probably dominates: P(≥k witnesses online and dialable).</a:t>
+              <a:t>How the false-negative rate and time to verdict vary with witness count k and byzantine fraction f, using dishonest witnesses we operate, together with the availability constraint P(≥k online and dialable).</a:t>
             </a:r>
             <a:endParaRPr lang="en-US" sz="1300" dirty="0"/>
           </a:p>
@@ -10813,7 +10813,7 @@
                 <a:ea typeface="Cambria" pitchFamily="34" charset="-122"/>
                 <a:cs typeface="Cambria" pitchFamily="34" charset="-120"/>
               </a:rPr>
-              <a:t>What is the NAT reality for a population like ours?</a:t>
+              <a:t>Which NAT behaviours occur in our users’ networks, and how prevalent are they?</a:t>
             </a:r>
             <a:endParaRPr lang="en-US" sz="1750" dirty="0"/>
           </a:p>
@@ -10855,7 +10855,7 @@
                 <a:ea typeface="Calibri" pitchFamily="34" charset="-122"/>
                 <a:cs typeface="Calibri" pitchFamily="34" charset="-120"/>
               </a:rPr>
-              <a:t>Characterize each stratum on our own handsets — carrier and APN for cellular, ISP and CGNAT status for residential — then weight by published subscriber counts and per-AS end-user estimates. Cellular and residential reported apart, as an assumption bound, never a confidence interval.</a:t>
+              <a:t>Each stratum is characterized on our own handsets, by carrier and APN for cellular and by ISP and CGNAT status for residential, and the strata are weighted by published subscriber counts and per-AS end-user estimates.</a:t>
             </a:r>
             <a:endParaRPr lang="en-US" sz="1300" dirty="0"/>
           </a:p>
@@ -11000,7 +11000,7 @@
                 <a:ea typeface="Calibri" pitchFamily="34" charset="-122"/>
                 <a:cs typeface="Calibri" pitchFamily="34" charset="-120"/>
               </a:rPr>
-              <a:t>An empirical decision rule — direct, anchor-mediated, or give up — over the inputs the transport actually holds when it must decide.</a:t>
+              <a:t>A decision rule over the inputs the transport holds at the moment it decides: attempt directly, request mediation, or abort.</a:t>
             </a:r>
             <a:endParaRPr lang="en-US" sz="1300" dirty="0"/>
           </a:p>
@@ -11069,7 +11069,7 @@
                 <a:ea typeface="Calibri" pitchFamily="34" charset="-122"/>
                 <a:cs typeface="Calibri" pitchFamily="34" charset="-120"/>
               </a:rPr>
-              <a:t>Measure a tuple, not a “NAT type”:  </a:t>
+              <a:t>Denominator:  </a:t>
             </a:r>
             <a:pPr indent="0" marL="0">
               <a:lnSpc>
@@ -11086,7 +11086,7 @@
                 <a:ea typeface="Calibri" pitchFamily="34" charset="-122"/>
                 <a:cs typeface="Calibri" pitchFamily="34" charset="-120"/>
               </a:rPr>
-              <a:t>mapping behaviour × filtering behaviour × port preservation × mapping lifetime, plus CGNAT-suspected and IPv6 availability. Any single label is a derived column, marked as such.</a:t>
+              <a:t>consumer-APN mobile lines and residential broadband lines in the countries covered, at the date of measurement, rather than devices, humans, or GN users. No confidence interval is computable, as the design contains no probabilistic sampling.</a:t>
             </a:r>
             <a:endParaRPr lang="en-US" sz="1250" dirty="0"/>
           </a:p>

--- a/docs/student-projects/grassroots-nat-project.pptx
+++ b/docs/student-projects/grassroots-nat-project.pptx
@@ -863,7 +863,7 @@
           <a:p>
             <a:r>
               <a:rPr lang="en-US" dirty="0"/>
-              <a:t>Reflection from two friends at distinct addresses recovers mapping behavior; ADDR_REFLECT already does half of it. Filtering is the harder half and needs the relay, since no single witness can produce a packet from an endpoint the probe has never contacted. Three source variants separate EIF, ADF and APDF.</a:t>
+              <a:t>Reflections from friends at distinct addresses give mapping behavior. Filtering follows from where the dial-backs come from, classified against our own send history: a friend we have a session with, the same friend on a fresh source port, and a friend we have never transmitted to. No friend is ever asked to dial anyone but us, so there is no amplification vector and no relaying for non-friends, which the signaling design forbids anyway.</a:t>
             </a:r>
             <a:endParaRPr lang="en-US" dirty="0"/>
           </a:p>
@@ -4024,12 +4024,117 @@
         </p:nvSpPr>
         <p:spPr>
           <a:xfrm>
-            <a:off x="1051560" y="2651760"/>
-            <a:ext cx="2194560" cy="914400"/>
+            <a:off x="1051560" y="2880360"/>
+            <a:ext cx="2286000" cy="1005840"/>
           </a:xfrm>
           <a:prstGeom prst="roundRect">
             <a:avLst>
-              <a:gd name="adj" fmla="val 6000"/>
+              <a:gd name="adj" fmla="val 5455"/>
+            </a:avLst>
+          </a:prstGeom>
+          <a:solidFill>
+            <a:srgbClr val="EEF3F4"/>
+          </a:solidFill>
+          <a:ln w="17780">
+            <a:solidFill>
+              <a:srgbClr val="0E7C86"/>
+            </a:solidFill>
+            <a:prstDash val="solid"/>
+          </a:ln>
+        </p:spPr>
+      </p:sp>
+      <p:sp>
+        <p:nvSpPr>
+          <p:cNvPr id="5" name="Text 3"/>
+          <p:cNvSpPr/>
+          <p:nvPr/>
+        </p:nvSpPr>
+        <p:spPr>
+          <a:xfrm>
+            <a:off x="1051560" y="3063240"/>
+            <a:ext cx="2286000" cy="329184"/>
+          </a:xfrm>
+          <a:prstGeom prst="rect">
+            <a:avLst/>
+          </a:prstGeom>
+          <a:noFill/>
+          <a:ln/>
+        </p:spPr>
+        <p:txBody>
+          <a:bodyPr wrap="square" lIns="0" tIns="0" rIns="0" bIns="0" rtlCol="0" anchor="ctr"/>
+          <a:lstStyle/>
+          <a:p>
+            <a:pPr algn="ctr" indent="0" marL="0">
+              <a:buNone/>
+            </a:pPr>
+            <a:r>
+              <a:rPr lang="en-US" sz="1700" b="1" dirty="0">
+                <a:solidFill>
+                  <a:srgbClr val="16202A"/>
+                </a:solidFill>
+                <a:latin typeface="Cambria" pitchFamily="34" charset="0"/>
+                <a:ea typeface="Cambria" pitchFamily="34" charset="-122"/>
+                <a:cs typeface="Cambria" pitchFamily="34" charset="-120"/>
+              </a:rPr>
+              <a:t>Probe</a:t>
+            </a:r>
+            <a:endParaRPr lang="en-US" sz="1700" dirty="0"/>
+          </a:p>
+        </p:txBody>
+      </p:sp>
+      <p:sp>
+        <p:nvSpPr>
+          <p:cNvPr id="6" name="Text 4"/>
+          <p:cNvSpPr/>
+          <p:nvPr/>
+        </p:nvSpPr>
+        <p:spPr>
+          <a:xfrm>
+            <a:off x="1051560" y="3410712"/>
+            <a:ext cx="2286000" cy="274320"/>
+          </a:xfrm>
+          <a:prstGeom prst="rect">
+            <a:avLst/>
+          </a:prstGeom>
+          <a:noFill/>
+          <a:ln/>
+        </p:spPr>
+        <p:txBody>
+          <a:bodyPr wrap="square" lIns="0" tIns="0" rIns="0" bIns="0" rtlCol="0" anchor="ctr"/>
+          <a:lstStyle/>
+          <a:p>
+            <a:pPr algn="ctr" indent="0" marL="0">
+              <a:buNone/>
+            </a:pPr>
+            <a:r>
+              <a:rPr lang="en-US" sz="1200" dirty="0">
+                <a:solidFill>
+                  <a:srgbClr val="6E7F8B"/>
+                </a:solidFill>
+                <a:latin typeface="Calibri" pitchFamily="34" charset="0"/>
+                <a:ea typeface="Calibri" pitchFamily="34" charset="-122"/>
+                <a:cs typeface="Calibri" pitchFamily="34" charset="-120"/>
+              </a:rPr>
+              <a:t>the device</a:t>
+            </a:r>
+            <a:endParaRPr lang="en-US" sz="1200" dirty="0"/>
+          </a:p>
+        </p:txBody>
+      </p:sp>
+      <p:sp>
+        <p:nvSpPr>
+          <p:cNvPr id="7" name="Shape 5"/>
+          <p:cNvSpPr/>
+          <p:nvPr/>
+        </p:nvSpPr>
+        <p:spPr>
+          <a:xfrm>
+            <a:off x="8275320" y="1965960"/>
+            <a:ext cx="3017520" cy="868680"/>
+          </a:xfrm>
+          <a:prstGeom prst="roundRect">
+            <a:avLst>
+              <a:gd name="adj" fmla="val 6316"/>
             </a:avLst>
           </a:prstGeom>
           <a:solidFill>
@@ -4045,30 +4150,30 @@
       </p:sp>
       <p:sp>
         <p:nvSpPr>
-          <p:cNvPr id="5" name="Text 3"/>
-          <p:cNvSpPr/>
-          <p:nvPr/>
-        </p:nvSpPr>
-        <p:spPr>
-          <a:xfrm>
-            <a:off x="1143000" y="2816352"/>
-            <a:ext cx="2011680" cy="310896"/>
-          </a:xfrm>
-          <a:prstGeom prst="rect">
-            <a:avLst/>
-          </a:prstGeom>
-          <a:noFill/>
-          <a:ln/>
-        </p:spPr>
-        <p:txBody>
-          <a:bodyPr wrap="square" lIns="0" tIns="0" rIns="0" bIns="0" rtlCol="0" anchor="ctr"/>
-          <a:lstStyle/>
-          <a:p>
-            <a:pPr algn="ctr" indent="0" marL="0">
-              <a:buNone/>
-            </a:pPr>
-            <a:r>
-              <a:rPr lang="en-US" sz="1600" b="1" dirty="0">
+          <p:cNvPr id="8" name="Text 6"/>
+          <p:cNvSpPr/>
+          <p:nvPr/>
+        </p:nvSpPr>
+        <p:spPr>
+          <a:xfrm>
+            <a:off x="8412480" y="2093976"/>
+            <a:ext cx="2743200" cy="292608"/>
+          </a:xfrm>
+          <a:prstGeom prst="rect">
+            <a:avLst/>
+          </a:prstGeom>
+          <a:noFill/>
+          <a:ln/>
+        </p:spPr>
+        <p:txBody>
+          <a:bodyPr wrap="square" lIns="0" tIns="0" rIns="0" bIns="0" rtlCol="0" anchor="ctr"/>
+          <a:lstStyle/>
+          <a:p>
+            <a:pPr indent="0" marL="0">
+              <a:buNone/>
+            </a:pPr>
+            <a:r>
+              <a:rPr lang="en-US" sz="1500" b="1" dirty="0">
                 <a:solidFill>
                   <a:srgbClr val="16202A"/>
                 </a:solidFill>
@@ -4076,46 +4181,46 @@
                 <a:ea typeface="Cambria" pitchFamily="34" charset="-122"/>
                 <a:cs typeface="Cambria" pitchFamily="34" charset="-120"/>
               </a:rPr>
-              <a:t>Probe</a:t>
-            </a:r>
-            <a:endParaRPr lang="en-US" sz="1600" dirty="0"/>
-          </a:p>
-        </p:txBody>
-      </p:sp>
-      <p:sp>
-        <p:nvSpPr>
-          <p:cNvPr id="6" name="Text 4"/>
-          <p:cNvSpPr/>
-          <p:nvPr/>
-        </p:nvSpPr>
-        <p:spPr>
-          <a:xfrm>
-            <a:off x="1143000" y="3154680"/>
-            <a:ext cx="2011680" cy="274320"/>
-          </a:xfrm>
-          <a:prstGeom prst="rect">
-            <a:avLst/>
-          </a:prstGeom>
-          <a:noFill/>
-          <a:ln/>
-        </p:spPr>
-        <p:txBody>
-          <a:bodyPr wrap="square" lIns="0" tIns="0" rIns="0" bIns="0" rtlCol="0" anchor="ctr"/>
-          <a:lstStyle/>
-          <a:p>
-            <a:pPr algn="ctr" indent="0" marL="0">
+              <a:t>Friend A</a:t>
+            </a:r>
+            <a:endParaRPr lang="en-US" sz="1500" dirty="0"/>
+          </a:p>
+        </p:txBody>
+      </p:sp>
+      <p:sp>
+        <p:nvSpPr>
+          <p:cNvPr id="9" name="Text 7"/>
+          <p:cNvSpPr/>
+          <p:nvPr/>
+        </p:nvSpPr>
+        <p:spPr>
+          <a:xfrm>
+            <a:off x="8412480" y="2404872"/>
+            <a:ext cx="2743200" cy="274320"/>
+          </a:xfrm>
+          <a:prstGeom prst="rect">
+            <a:avLst/>
+          </a:prstGeom>
+          <a:noFill/>
+          <a:ln/>
+        </p:spPr>
+        <p:txBody>
+          <a:bodyPr wrap="square" lIns="0" tIns="0" rIns="0" bIns="0" rtlCol="0" anchor="ctr"/>
+          <a:lstStyle/>
+          <a:p>
+            <a:pPr indent="0" marL="0">
               <a:buNone/>
             </a:pPr>
             <a:r>
               <a:rPr lang="en-US" sz="1150" dirty="0">
                 <a:solidFill>
-                  <a:srgbClr val="6E7F8B"/>
+                  <a:srgbClr val="0E7C86"/>
                 </a:solidFill>
                 <a:latin typeface="Calibri" pitchFamily="34" charset="0"/>
                 <a:ea typeface="Calibri" pitchFamily="34" charset="-122"/>
                 <a:cs typeface="Calibri" pitchFamily="34" charset="-120"/>
               </a:rPr>
-              <a:t>the device</a:t>
+              <a:t>session open</a:t>
             </a:r>
             <a:endParaRPr lang="en-US" sz="1150" dirty="0"/>
           </a:p>
@@ -4123,18 +4228,42 @@
       </p:sp>
       <p:sp>
         <p:nvSpPr>
-          <p:cNvPr id="7" name="Shape 5"/>
-          <p:cNvSpPr/>
-          <p:nvPr/>
-        </p:nvSpPr>
-        <p:spPr>
-          <a:xfrm>
-            <a:off x="4892040" y="2651760"/>
-            <a:ext cx="2194560" cy="914400"/>
+          <p:cNvPr id="10" name="Shape 8"/>
+          <p:cNvSpPr/>
+          <p:nvPr/>
+        </p:nvSpPr>
+        <p:spPr>
+          <a:xfrm flipV="1">
+            <a:off x="3337560" y="2400300"/>
+            <a:ext cx="4937760" cy="982980"/>
+          </a:xfrm>
+          <a:prstGeom prst="line">
+            <a:avLst/>
+          </a:prstGeom>
+          <a:noFill/>
+          <a:ln w="17780">
+            <a:solidFill>
+              <a:srgbClr val="0E7C86"/>
+            </a:solidFill>
+            <a:prstDash val="solid"/>
+            <a:headEnd type="triangle"/>
+          </a:ln>
+        </p:spPr>
+      </p:sp>
+      <p:sp>
+        <p:nvSpPr>
+          <p:cNvPr id="11" name="Shape 9"/>
+          <p:cNvSpPr/>
+          <p:nvPr/>
+        </p:nvSpPr>
+        <p:spPr>
+          <a:xfrm>
+            <a:off x="8275320" y="3063240"/>
+            <a:ext cx="3017520" cy="868680"/>
           </a:xfrm>
           <a:prstGeom prst="roundRect">
             <a:avLst>
-              <a:gd name="adj" fmla="val 6000"/>
+              <a:gd name="adj" fmla="val 6316"/>
             </a:avLst>
           </a:prstGeom>
           <a:solidFill>
@@ -4150,30 +4279,30 @@
       </p:sp>
       <p:sp>
         <p:nvSpPr>
-          <p:cNvPr id="8" name="Text 6"/>
-          <p:cNvSpPr/>
-          <p:nvPr/>
-        </p:nvSpPr>
-        <p:spPr>
-          <a:xfrm>
-            <a:off x="4983480" y="2816352"/>
-            <a:ext cx="2011680" cy="310896"/>
-          </a:xfrm>
-          <a:prstGeom prst="rect">
-            <a:avLst/>
-          </a:prstGeom>
-          <a:noFill/>
-          <a:ln/>
-        </p:spPr>
-        <p:txBody>
-          <a:bodyPr wrap="square" lIns="0" tIns="0" rIns="0" bIns="0" rtlCol="0" anchor="ctr"/>
-          <a:lstStyle/>
-          <a:p>
-            <a:pPr algn="ctr" indent="0" marL="0">
-              <a:buNone/>
-            </a:pPr>
-            <a:r>
-              <a:rPr lang="en-US" sz="1600" b="1" dirty="0">
+          <p:cNvPr id="12" name="Text 10"/>
+          <p:cNvSpPr/>
+          <p:nvPr/>
+        </p:nvSpPr>
+        <p:spPr>
+          <a:xfrm>
+            <a:off x="8412480" y="3191256"/>
+            <a:ext cx="2743200" cy="292608"/>
+          </a:xfrm>
+          <a:prstGeom prst="rect">
+            <a:avLst/>
+          </a:prstGeom>
+          <a:noFill/>
+          <a:ln/>
+        </p:spPr>
+        <p:txBody>
+          <a:bodyPr wrap="square" lIns="0" tIns="0" rIns="0" bIns="0" rtlCol="0" anchor="ctr"/>
+          <a:lstStyle/>
+          <a:p>
+            <a:pPr indent="0" marL="0">
+              <a:buNone/>
+            </a:pPr>
+            <a:r>
+              <a:rPr lang="en-US" sz="1500" b="1" dirty="0">
                 <a:solidFill>
                   <a:srgbClr val="16202A"/>
                 </a:solidFill>
@@ -4181,46 +4310,46 @@
                 <a:ea typeface="Cambria" pitchFamily="34" charset="-122"/>
                 <a:cs typeface="Cambria" pitchFamily="34" charset="-120"/>
               </a:rPr>
-              <a:t>Witness 1</a:t>
-            </a:r>
-            <a:endParaRPr lang="en-US" sz="1600" dirty="0"/>
-          </a:p>
-        </p:txBody>
-      </p:sp>
-      <p:sp>
-        <p:nvSpPr>
-          <p:cNvPr id="9" name="Text 7"/>
-          <p:cNvSpPr/>
-          <p:nvPr/>
-        </p:nvSpPr>
-        <p:spPr>
-          <a:xfrm>
-            <a:off x="4983480" y="3154680"/>
-            <a:ext cx="2011680" cy="274320"/>
-          </a:xfrm>
-          <a:prstGeom prst="rect">
-            <a:avLst/>
-          </a:prstGeom>
-          <a:noFill/>
-          <a:ln/>
-        </p:spPr>
-        <p:txBody>
-          <a:bodyPr wrap="square" lIns="0" tIns="0" rIns="0" bIns="0" rtlCol="0" anchor="ctr"/>
-          <a:lstStyle/>
-          <a:p>
-            <a:pPr algn="ctr" indent="0" marL="0">
+              <a:t>Friend B</a:t>
+            </a:r>
+            <a:endParaRPr lang="en-US" sz="1500" dirty="0"/>
+          </a:p>
+        </p:txBody>
+      </p:sp>
+      <p:sp>
+        <p:nvSpPr>
+          <p:cNvPr id="13" name="Text 11"/>
+          <p:cNvSpPr/>
+          <p:nvPr/>
+        </p:nvSpPr>
+        <p:spPr>
+          <a:xfrm>
+            <a:off x="8412480" y="3502152"/>
+            <a:ext cx="2743200" cy="274320"/>
+          </a:xfrm>
+          <a:prstGeom prst="rect">
+            <a:avLst/>
+          </a:prstGeom>
+          <a:noFill/>
+          <a:ln/>
+        </p:spPr>
+        <p:txBody>
+          <a:bodyPr wrap="square" lIns="0" tIns="0" rIns="0" bIns="0" rtlCol="0" anchor="ctr"/>
+          <a:lstStyle/>
+          <a:p>
+            <a:pPr indent="0" marL="0">
               <a:buNone/>
             </a:pPr>
             <a:r>
               <a:rPr lang="en-US" sz="1150" dirty="0">
                 <a:solidFill>
-                  <a:srgbClr val="6E7F8B"/>
+                  <a:srgbClr val="0E7C86"/>
                 </a:solidFill>
                 <a:latin typeface="Calibri" pitchFamily="34" charset="0"/>
                 <a:ea typeface="Calibri" pitchFamily="34" charset="-122"/>
                 <a:cs typeface="Calibri" pitchFamily="34" charset="-120"/>
               </a:rPr>
-              <a:t>a friend</a:t>
+              <a:t>new source port</a:t>
             </a:r>
             <a:endParaRPr lang="en-US" sz="1150" dirty="0"/>
           </a:p>
@@ -4228,18 +4357,42 @@
       </p:sp>
       <p:sp>
         <p:nvSpPr>
-          <p:cNvPr id="10" name="Shape 8"/>
-          <p:cNvSpPr/>
-          <p:nvPr/>
-        </p:nvSpPr>
-        <p:spPr>
-          <a:xfrm>
-            <a:off x="8732520" y="2651760"/>
-            <a:ext cx="2194560" cy="914400"/>
+          <p:cNvPr id="14" name="Shape 12"/>
+          <p:cNvSpPr/>
+          <p:nvPr/>
+        </p:nvSpPr>
+        <p:spPr>
+          <a:xfrm>
+            <a:off x="3337560" y="3383280"/>
+            <a:ext cx="4937760" cy="114300"/>
+          </a:xfrm>
+          <a:prstGeom prst="line">
+            <a:avLst/>
+          </a:prstGeom>
+          <a:noFill/>
+          <a:ln w="17780">
+            <a:solidFill>
+              <a:srgbClr val="0E7C86"/>
+            </a:solidFill>
+            <a:prstDash val="solid"/>
+            <a:headEnd type="triangle"/>
+          </a:ln>
+        </p:spPr>
+      </p:sp>
+      <p:sp>
+        <p:nvSpPr>
+          <p:cNvPr id="15" name="Shape 13"/>
+          <p:cNvSpPr/>
+          <p:nvPr/>
+        </p:nvSpPr>
+        <p:spPr>
+          <a:xfrm>
+            <a:off x="8275320" y="4160520"/>
+            <a:ext cx="3017520" cy="868680"/>
           </a:xfrm>
           <a:prstGeom prst="roundRect">
             <a:avLst>
-              <a:gd name="adj" fmla="val 6000"/>
+              <a:gd name="adj" fmla="val 6316"/>
             </a:avLst>
           </a:prstGeom>
           <a:solidFill>
@@ -4255,30 +4408,30 @@
       </p:sp>
       <p:sp>
         <p:nvSpPr>
-          <p:cNvPr id="11" name="Text 9"/>
-          <p:cNvSpPr/>
-          <p:nvPr/>
-        </p:nvSpPr>
-        <p:spPr>
-          <a:xfrm>
-            <a:off x="8823960" y="2816352"/>
-            <a:ext cx="2011680" cy="310896"/>
-          </a:xfrm>
-          <a:prstGeom prst="rect">
-            <a:avLst/>
-          </a:prstGeom>
-          <a:noFill/>
-          <a:ln/>
-        </p:spPr>
-        <p:txBody>
-          <a:bodyPr wrap="square" lIns="0" tIns="0" rIns="0" bIns="0" rtlCol="0" anchor="ctr"/>
-          <a:lstStyle/>
-          <a:p>
-            <a:pPr algn="ctr" indent="0" marL="0">
-              <a:buNone/>
-            </a:pPr>
-            <a:r>
-              <a:rPr lang="en-US" sz="1600" b="1" dirty="0">
+          <p:cNvPr id="16" name="Text 14"/>
+          <p:cNvSpPr/>
+          <p:nvPr/>
+        </p:nvSpPr>
+        <p:spPr>
+          <a:xfrm>
+            <a:off x="8412480" y="4288536"/>
+            <a:ext cx="2743200" cy="292608"/>
+          </a:xfrm>
+          <a:prstGeom prst="rect">
+            <a:avLst/>
+          </a:prstGeom>
+          <a:noFill/>
+          <a:ln/>
+        </p:spPr>
+        <p:txBody>
+          <a:bodyPr wrap="square" lIns="0" tIns="0" rIns="0" bIns="0" rtlCol="0" anchor="ctr"/>
+          <a:lstStyle/>
+          <a:p>
+            <a:pPr indent="0" marL="0">
+              <a:buNone/>
+            </a:pPr>
+            <a:r>
+              <a:rPr lang="en-US" sz="1500" b="1" dirty="0">
                 <a:solidFill>
                   <a:srgbClr val="16202A"/>
                 </a:solidFill>
@@ -4286,46 +4439,46 @@
                 <a:ea typeface="Cambria" pitchFamily="34" charset="-122"/>
                 <a:cs typeface="Cambria" pitchFamily="34" charset="-120"/>
               </a:rPr>
-              <a:t>Witness 2</a:t>
-            </a:r>
-            <a:endParaRPr lang="en-US" sz="1600" dirty="0"/>
-          </a:p>
-        </p:txBody>
-      </p:sp>
-      <p:sp>
-        <p:nvSpPr>
-          <p:cNvPr id="12" name="Text 10"/>
-          <p:cNvSpPr/>
-          <p:nvPr/>
-        </p:nvSpPr>
-        <p:spPr>
-          <a:xfrm>
-            <a:off x="8823960" y="3154680"/>
-            <a:ext cx="2011680" cy="274320"/>
-          </a:xfrm>
-          <a:prstGeom prst="rect">
-            <a:avLst/>
-          </a:prstGeom>
-          <a:noFill/>
-          <a:ln/>
-        </p:spPr>
-        <p:txBody>
-          <a:bodyPr wrap="square" lIns="0" tIns="0" rIns="0" bIns="0" rtlCol="0" anchor="ctr"/>
-          <a:lstStyle/>
-          <a:p>
-            <a:pPr algn="ctr" indent="0" marL="0">
+              <a:t>Friend C</a:t>
+            </a:r>
+            <a:endParaRPr lang="en-US" sz="1500" dirty="0"/>
+          </a:p>
+        </p:txBody>
+      </p:sp>
+      <p:sp>
+        <p:nvSpPr>
+          <p:cNvPr id="17" name="Text 15"/>
+          <p:cNvSpPr/>
+          <p:nvPr/>
+        </p:nvSpPr>
+        <p:spPr>
+          <a:xfrm>
+            <a:off x="8412480" y="4599432"/>
+            <a:ext cx="2743200" cy="274320"/>
+          </a:xfrm>
+          <a:prstGeom prst="rect">
+            <a:avLst/>
+          </a:prstGeom>
+          <a:noFill/>
+          <a:ln/>
+        </p:spPr>
+        <p:txBody>
+          <a:bodyPr wrap="square" lIns="0" tIns="0" rIns="0" bIns="0" rtlCol="0" anchor="ctr"/>
+          <a:lstStyle/>
+          <a:p>
+            <a:pPr indent="0" marL="0">
               <a:buNone/>
             </a:pPr>
             <a:r>
               <a:rPr lang="en-US" sz="1150" dirty="0">
                 <a:solidFill>
-                  <a:srgbClr val="6E7F8B"/>
+                  <a:srgbClr val="C25E28"/>
                 </a:solidFill>
                 <a:latin typeface="Calibri" pitchFamily="34" charset="0"/>
                 <a:ea typeface="Calibri" pitchFamily="34" charset="-122"/>
                 <a:cs typeface="Calibri" pitchFamily="34" charset="-120"/>
               </a:rPr>
-              <a:t>not contacted</a:t>
+              <a:t>never contacted</a:t>
             </a:r>
             <a:endParaRPr lang="en-US" sz="1150" dirty="0"/>
           </a:p>
@@ -4333,169 +4486,20 @@
       </p:sp>
       <p:sp>
         <p:nvSpPr>
-          <p:cNvPr id="13" name="Shape 11"/>
-          <p:cNvSpPr/>
-          <p:nvPr/>
-        </p:nvSpPr>
-        <p:spPr>
-          <a:xfrm>
-            <a:off x="3337560" y="3108960"/>
-            <a:ext cx="1463040" cy="0"/>
+          <p:cNvPr id="18" name="Shape 16"/>
+          <p:cNvSpPr/>
+          <p:nvPr/>
+        </p:nvSpPr>
+        <p:spPr>
+          <a:xfrm>
+            <a:off x="3337560" y="3383280"/>
+            <a:ext cx="4937760" cy="1211580"/>
           </a:xfrm>
           <a:prstGeom prst="line">
             <a:avLst/>
           </a:prstGeom>
           <a:noFill/>
-          <a:ln w="19050">
-            <a:solidFill>
-              <a:srgbClr val="0E7C86"/>
-            </a:solidFill>
-            <a:prstDash val="solid"/>
-            <a:tailEnd type="triangle"/>
-          </a:ln>
-        </p:spPr>
-      </p:sp>
-      <p:sp>
-        <p:nvSpPr>
-          <p:cNvPr id="14" name="Text 12"/>
-          <p:cNvSpPr/>
-          <p:nvPr/>
-        </p:nvSpPr>
-        <p:spPr>
-          <a:xfrm>
-            <a:off x="3337560" y="2706624"/>
-            <a:ext cx="1463040" cy="274320"/>
-          </a:xfrm>
-          <a:prstGeom prst="rect">
-            <a:avLst/>
-          </a:prstGeom>
-          <a:noFill/>
-          <a:ln/>
-        </p:spPr>
-        <p:txBody>
-          <a:bodyPr wrap="square" lIns="0" tIns="0" rIns="0" bIns="0" rtlCol="0" anchor="ctr"/>
-          <a:lstStyle/>
-          <a:p>
-            <a:pPr algn="ctr" indent="0" marL="0">
-              <a:buNone/>
-            </a:pPr>
-            <a:r>
-              <a:rPr lang="en-US" sz="1150" dirty="0">
-                <a:solidFill>
-                  <a:srgbClr val="0E7C86"/>
-                </a:solidFill>
-                <a:latin typeface="Calibri" pitchFamily="34" charset="0"/>
-                <a:ea typeface="Calibri" pitchFamily="34" charset="-122"/>
-                <a:cs typeface="Calibri" pitchFamily="34" charset="-120"/>
-              </a:rPr>
-              <a:t>nonce</a:t>
-            </a:r>
-            <a:endParaRPr lang="en-US" sz="1150" dirty="0"/>
-          </a:p>
-        </p:txBody>
-      </p:sp>
-      <p:sp>
-        <p:nvSpPr>
-          <p:cNvPr id="15" name="Shape 13"/>
-          <p:cNvSpPr/>
-          <p:nvPr/>
-        </p:nvSpPr>
-        <p:spPr>
-          <a:xfrm>
-            <a:off x="7178040" y="3108960"/>
-            <a:ext cx="1463040" cy="0"/>
-          </a:xfrm>
-          <a:prstGeom prst="line">
-            <a:avLst/>
-          </a:prstGeom>
-          <a:noFill/>
-          <a:ln w="19050">
-            <a:solidFill>
-              <a:srgbClr val="0E7C86"/>
-            </a:solidFill>
-            <a:prstDash val="solid"/>
-            <a:tailEnd type="triangle"/>
-          </a:ln>
-        </p:spPr>
-      </p:sp>
-      <p:sp>
-        <p:nvSpPr>
-          <p:cNvPr id="16" name="Text 14"/>
-          <p:cNvSpPr/>
-          <p:nvPr/>
-        </p:nvSpPr>
-        <p:spPr>
-          <a:xfrm>
-            <a:off x="7178040" y="2706624"/>
-            <a:ext cx="1463040" cy="274320"/>
-          </a:xfrm>
-          <a:prstGeom prst="rect">
-            <a:avLst/>
-          </a:prstGeom>
-          <a:noFill/>
-          <a:ln/>
-        </p:spPr>
-        <p:txBody>
-          <a:bodyPr wrap="square" lIns="0" tIns="0" rIns="0" bIns="0" rtlCol="0" anchor="ctr"/>
-          <a:lstStyle/>
-          <a:p>
-            <a:pPr algn="ctr" indent="0" marL="0">
-              <a:buNone/>
-            </a:pPr>
-            <a:r>
-              <a:rPr lang="en-US" sz="1150" dirty="0">
-                <a:solidFill>
-                  <a:srgbClr val="0E7C86"/>
-                </a:solidFill>
-                <a:latin typeface="Calibri" pitchFamily="34" charset="0"/>
-                <a:ea typeface="Calibri" pitchFamily="34" charset="-122"/>
-                <a:cs typeface="Calibri" pitchFamily="34" charset="-120"/>
-              </a:rPr>
-              <a:t>relay</a:t>
-            </a:r>
-            <a:endParaRPr lang="en-US" sz="1150" dirty="0"/>
-          </a:p>
-        </p:txBody>
-      </p:sp>
-      <p:sp>
-        <p:nvSpPr>
-          <p:cNvPr id="17" name="Shape 15"/>
-          <p:cNvSpPr/>
-          <p:nvPr/>
-        </p:nvSpPr>
-        <p:spPr>
-          <a:xfrm>
-            <a:off x="2148840" y="3566160"/>
-            <a:ext cx="0" cy="548640"/>
-          </a:xfrm>
-          <a:prstGeom prst="line">
-            <a:avLst/>
-          </a:prstGeom>
-          <a:noFill/>
-          <a:ln w="19050">
-            <a:solidFill>
-              <a:srgbClr val="C25E28"/>
-            </a:solidFill>
-            <a:prstDash val="solid"/>
-          </a:ln>
-        </p:spPr>
-      </p:sp>
-      <p:sp>
-        <p:nvSpPr>
-          <p:cNvPr id="18" name="Shape 16"/>
-          <p:cNvSpPr/>
-          <p:nvPr/>
-        </p:nvSpPr>
-        <p:spPr>
-          <a:xfrm>
-            <a:off x="2148840" y="4114800"/>
-            <a:ext cx="7680960" cy="0"/>
-          </a:xfrm>
-          <a:prstGeom prst="line">
-            <a:avLst/>
-          </a:prstGeom>
-          <a:noFill/>
-          <a:ln w="19050">
+          <a:ln w="17780">
             <a:solidFill>
               <a:srgbClr val="C25E28"/>
             </a:solidFill>
@@ -4506,37 +4510,14 @@
       </p:sp>
       <p:sp>
         <p:nvSpPr>
-          <p:cNvPr id="19" name="Shape 17"/>
-          <p:cNvSpPr/>
-          <p:nvPr/>
-        </p:nvSpPr>
-        <p:spPr>
-          <a:xfrm>
-            <a:off x="9829800" y="3566160"/>
-            <a:ext cx="0" cy="548640"/>
-          </a:xfrm>
-          <a:prstGeom prst="line">
-            <a:avLst/>
-          </a:prstGeom>
-          <a:noFill/>
-          <a:ln w="19050">
-            <a:solidFill>
-              <a:srgbClr val="C25E28"/>
-            </a:solidFill>
-            <a:prstDash val="solid"/>
-          </a:ln>
-        </p:spPr>
-      </p:sp>
-      <p:sp>
-        <p:nvSpPr>
-          <p:cNvPr id="20" name="Text 18"/>
-          <p:cNvSpPr/>
-          <p:nvPr/>
-        </p:nvSpPr>
-        <p:spPr>
-          <a:xfrm>
-            <a:off x="2148840" y="4160520"/>
-            <a:ext cx="7680960" cy="274320"/>
+          <p:cNvPr id="19" name="Text 17"/>
+          <p:cNvSpPr/>
+          <p:nvPr/>
+        </p:nvSpPr>
+        <p:spPr>
+          <a:xfrm>
+            <a:off x="1051560" y="4069080"/>
+            <a:ext cx="2286000" cy="274320"/>
           </a:xfrm>
           <a:prstGeom prst="rect">
             <a:avLst/>
@@ -4552,29 +4533,29 @@
               <a:buNone/>
             </a:pPr>
             <a:r>
-              <a:rPr lang="en-US" sz="1200" dirty="0">
-                <a:solidFill>
-                  <a:srgbClr val="C25E28"/>
+              <a:rPr lang="en-US" sz="1150" dirty="0">
+                <a:solidFill>
+                  <a:srgbClr val="6E7F8B"/>
                 </a:solidFill>
                 <a:latin typeface="Calibri" pitchFamily="34" charset="0"/>
                 <a:ea typeface="Calibri" pitchFamily="34" charset="-122"/>
                 <a:cs typeface="Calibri" pitchFamily="34" charset="-120"/>
               </a:rPr>
-              <a:t>dial-back carrying the nonce</a:t>
-            </a:r>
-            <a:endParaRPr lang="en-US" sz="1200" dirty="0"/>
-          </a:p>
-        </p:txBody>
-      </p:sp>
-      <p:sp>
-        <p:nvSpPr>
-          <p:cNvPr id="21" name="Shape 19"/>
-          <p:cNvSpPr/>
-          <p:nvPr/>
-        </p:nvSpPr>
-        <p:spPr>
-          <a:xfrm>
-            <a:off x="685800" y="5239512"/>
+              <a:t>each dial-back carries the nonce</a:t>
+            </a:r>
+            <a:endParaRPr lang="en-US" sz="1150" dirty="0"/>
+          </a:p>
+        </p:txBody>
+      </p:sp>
+      <p:sp>
+        <p:nvSpPr>
+          <p:cNvPr id="20" name="Shape 18"/>
+          <p:cNvSpPr/>
+          <p:nvPr/>
+        </p:nvSpPr>
+        <p:spPr>
+          <a:xfrm>
+            <a:off x="685800" y="5376672"/>
             <a:ext cx="118872" cy="118872"/>
           </a:xfrm>
           <a:prstGeom prst="ellipse">
@@ -4593,13 +4574,13 @@
       </p:sp>
       <p:sp>
         <p:nvSpPr>
-          <p:cNvPr id="22" name="Text 20"/>
-          <p:cNvSpPr/>
-          <p:nvPr/>
-        </p:nvSpPr>
-        <p:spPr>
-          <a:xfrm>
-            <a:off x="1005840" y="5120640"/>
+          <p:cNvPr id="21" name="Text 19"/>
+          <p:cNvSpPr/>
+          <p:nvPr/>
+        </p:nvSpPr>
+        <p:spPr>
+          <a:xfrm>
+            <a:off x="1005840" y="5257800"/>
             <a:ext cx="10469880" cy="384048"/>
           </a:xfrm>
           <a:prstGeom prst="rect">
@@ -4616,7 +4597,7 @@
               <a:buNone/>
             </a:pPr>
             <a:r>
-              <a:rPr lang="en-US" sz="1700" dirty="0">
+              <a:rPr lang="en-US" sz="1650" dirty="0">
                 <a:solidFill>
                   <a:srgbClr val="3E4C57"/>
                 </a:solidFill>
@@ -4624,21 +4605,21 @@
                 <a:ea typeface="Calibri" pitchFamily="34" charset="-122"/>
                 <a:cs typeface="Calibri" pitchFamily="34" charset="-120"/>
               </a:rPr>
-              <a:t>Friends act as witnesses, in place of designated dial-back servers.</a:t>
-            </a:r>
-            <a:endParaRPr lang="en-US" sz="1700" dirty="0"/>
-          </a:p>
-        </p:txBody>
-      </p:sp>
-      <p:sp>
-        <p:nvSpPr>
-          <p:cNvPr id="23" name="Shape 21"/>
-          <p:cNvSpPr/>
-          <p:nvPr/>
-        </p:nvSpPr>
-        <p:spPr>
-          <a:xfrm>
-            <a:off x="685800" y="5678424"/>
+              <a:t>Only friends. The probe asks each of them directly.</a:t>
+            </a:r>
+            <a:endParaRPr lang="en-US" sz="1650" dirty="0"/>
+          </a:p>
+        </p:txBody>
+      </p:sp>
+      <p:sp>
+        <p:nvSpPr>
+          <p:cNvPr id="22" name="Shape 20"/>
+          <p:cNvSpPr/>
+          <p:nvPr/>
+        </p:nvSpPr>
+        <p:spPr>
+          <a:xfrm>
+            <a:off x="685800" y="5779008"/>
             <a:ext cx="118872" cy="118872"/>
           </a:xfrm>
           <a:prstGeom prst="ellipse">
@@ -4657,13 +4638,13 @@
       </p:sp>
       <p:sp>
         <p:nvSpPr>
-          <p:cNvPr id="24" name="Text 22"/>
-          <p:cNvSpPr/>
-          <p:nvPr/>
-        </p:nvSpPr>
-        <p:spPr>
-          <a:xfrm>
-            <a:off x="1005840" y="5559552"/>
+          <p:cNvPr id="23" name="Text 21"/>
+          <p:cNvSpPr/>
+          <p:nvPr/>
+        </p:nvSpPr>
+        <p:spPr>
+          <a:xfrm>
+            <a:off x="1005840" y="5660136"/>
             <a:ext cx="10469880" cy="384048"/>
           </a:xfrm>
           <a:prstGeom prst="rect">
@@ -4680,7 +4661,7 @@
               <a:buNone/>
             </a:pPr>
             <a:r>
-              <a:rPr lang="en-US" sz="1700" dirty="0">
+              <a:rPr lang="en-US" sz="1650" dirty="0">
                 <a:solidFill>
                   <a:srgbClr val="3E4C57"/>
                 </a:solidFill>
@@ -4688,9 +4669,73 @@
                 <a:ea typeface="Calibri" pitchFamily="34" charset="-122"/>
                 <a:cs typeface="Calibri" pitchFamily="34" charset="-120"/>
               </a:rPr>
-              <a:t>W2 was never contacted, so filtering behavior is genuinely tested.</a:t>
-            </a:r>
-            <a:endParaRPr lang="en-US" sz="1700" dirty="0"/>
+              <a:t>They dial back from different addresses and ports.</a:t>
+            </a:r>
+            <a:endParaRPr lang="en-US" sz="1650" dirty="0"/>
+          </a:p>
+        </p:txBody>
+      </p:sp>
+      <p:sp>
+        <p:nvSpPr>
+          <p:cNvPr id="24" name="Shape 22"/>
+          <p:cNvSpPr/>
+          <p:nvPr/>
+        </p:nvSpPr>
+        <p:spPr>
+          <a:xfrm>
+            <a:off x="685800" y="6181344"/>
+            <a:ext cx="118872" cy="118872"/>
+          </a:xfrm>
+          <a:prstGeom prst="ellipse">
+            <a:avLst/>
+          </a:prstGeom>
+          <a:solidFill>
+            <a:srgbClr val="0E7C86"/>
+          </a:solidFill>
+          <a:ln w="12700">
+            <a:solidFill>
+              <a:srgbClr val="0E7C86"/>
+            </a:solidFill>
+            <a:prstDash val="solid"/>
+          </a:ln>
+        </p:spPr>
+      </p:sp>
+      <p:sp>
+        <p:nvSpPr>
+          <p:cNvPr id="25" name="Text 23"/>
+          <p:cNvSpPr/>
+          <p:nvPr/>
+        </p:nvSpPr>
+        <p:spPr>
+          <a:xfrm>
+            <a:off x="1005840" y="6062472"/>
+            <a:ext cx="10469880" cy="384048"/>
+          </a:xfrm>
+          <a:prstGeom prst="rect">
+            <a:avLst/>
+          </a:prstGeom>
+          <a:noFill/>
+          <a:ln/>
+        </p:spPr>
+        <p:txBody>
+          <a:bodyPr wrap="square" lIns="0" tIns="0" rIns="0" bIns="0" rtlCol="0" anchor="ctr"/>
+          <a:lstStyle/>
+          <a:p>
+            <a:pPr indent="0" marL="0">
+              <a:buNone/>
+            </a:pPr>
+            <a:r>
+              <a:rPr lang="en-US" sz="1650" dirty="0">
+                <a:solidFill>
+                  <a:srgbClr val="3E4C57"/>
+                </a:solidFill>
+                <a:latin typeface="Calibri" pitchFamily="34" charset="0"/>
+                <a:ea typeface="Calibri" pitchFamily="34" charset="-122"/>
+                <a:cs typeface="Calibri" pitchFamily="34" charset="-120"/>
+              </a:rPr>
+              <a:t>A nonce in each reply makes a fabricated dial-back impossible.</a:t>
+            </a:r>
+            <a:endParaRPr lang="en-US" sz="1650" dirty="0"/>
           </a:p>
         </p:txBody>
       </p:sp>

--- a/docs/student-projects/grassroots-nat-project.pptx
+++ b/docs/student-projects/grassroots-nat-project.pptx
@@ -775,7 +775,7 @@
           <a:p>
             <a:r>
               <a:rPr lang="en-US" dirty="0"/>
-              <a:t>Confirmed in source at grassroots_network.dart:3369. This is the clearest motivation for the project: the system cannot distinguish a public address from a reachable one, and every consequence follows from that.</a:t>
+              <a:t>Filtering is the second axis: which inbound traffic is admitted on an existing mapping, endpoint-independent through address-and-port-dependent. Mapping decides whether a port can be predicted at all; filtering decides whether the arriving packet is let through. Port preservation is why the current code sometimes works by accident, and mapping lifetime sets the keepalive interval.</a:t>
             </a:r>
             <a:endParaRPr lang="en-US" dirty="0"/>
           </a:p>
@@ -863,7 +863,7 @@
           <a:p>
             <a:r>
               <a:rPr lang="en-US" dirty="0"/>
-              <a:t>Reflections from friends at distinct addresses give mapping behavior. Filtering follows from where the dial-backs come from, classified against our own send history: a friend we have a session with, the same friend on a fresh source port, and a friend we have never transmitted to. No friend is ever asked to dial anyone but us, so there is no amplification vector and no relaying for non-friends, which the signaling design forbids anyway.</a:t>
+              <a:t>Confirmed in source at grassroots_network.dart:3369. This is the clearest motivation for the project: the system cannot distinguish a public address from a reachable one, and every consequence follows from that.</a:t>
             </a:r>
             <a:endParaRPr lang="en-US" dirty="0"/>
           </a:p>
@@ -951,7 +951,7 @@
           <a:p>
             <a:r>
               <a:rPr lang="en-US" dirty="0"/>
-              <a:t>Contamination is the one that would quietly invalidate a field campaign: it biases in the direction that looks like good news. We publish the label difference between contaminated and clean runs as a result in its own right. The aggregation asymmetry follows from the nonce being unforgeable while a claimed failure is free.</a:t>
+              <a:t>Reflections from friends at distinct addresses give mapping behavior. Filtering follows from where the dial-backs come from, classified against our own send history: a friend we have a session with, the same friend on a fresh source port, and a friend we have never transmitted to. No friend is ever asked to dial anyone but us, so there is no amplification vector and no relaying for non-friends, which the signaling design forbids anyway.</a:t>
             </a:r>
             <a:endParaRPr lang="en-US" dirty="0"/>
           </a:p>
@@ -1039,7 +1039,7 @@
           <a:p>
             <a:r>
               <a:rPr lang="en-US" dirty="0"/>
-              <a:t>On a 464XLAT path the thing characterized is the carrier translator, which RFC 4787 describes only partially; on native IPv6 there is no mapping at all and only filtering, so mapping and port preservation are N/A rather than absent. CGNAT status and IPv6 availability are recorded alongside.</a:t>
+              <a:t>Contamination is the one that would quietly invalidate a field campaign: it biases in the direction that looks like good news. We publish the label difference between contaminated and clean runs as a result in its own right. The aggregation asymmetry follows from the nonce being unforgeable while a claimed failure is free.</a:t>
             </a:r>
             <a:endParaRPr lang="en-US" dirty="0"/>
           </a:p>
@@ -3412,6 +3412,787 @@
 <file path=ppt/slides/slide3.xml><?xml version="1.0" encoding="utf-8"?>
 <p:sld xmlns:a="http://schemas.openxmlformats.org/drawingml/2006/main" xmlns:r="http://schemas.openxmlformats.org/officeDocument/2006/relationships" xmlns:p="http://schemas.openxmlformats.org/presentationml/2006/main">
   <p:cSld name="Slide 3">
+    <p:spTree>
+      <p:nvGrpSpPr>
+        <p:cNvPr id="1" name=""/>
+        <p:cNvGrpSpPr/>
+        <p:nvPr/>
+      </p:nvGrpSpPr>
+      <p:grpSpPr>
+        <a:xfrm>
+          <a:off x="0" y="0"/>
+          <a:ext cx="0" cy="0"/>
+          <a:chOff x="0" y="0"/>
+          <a:chExt cx="0" cy="0"/>
+        </a:xfrm>
+      </p:grpSpPr>
+      <p:sp>
+        <p:nvSpPr>
+          <p:cNvPr id="2" name="Text 0"/>
+          <p:cNvSpPr/>
+          <p:nvPr/>
+        </p:nvSpPr>
+        <p:spPr>
+          <a:xfrm>
+            <a:off x="685800" y="502920"/>
+            <a:ext cx="10789920" cy="274320"/>
+          </a:xfrm>
+          <a:prstGeom prst="rect">
+            <a:avLst/>
+          </a:prstGeom>
+          <a:noFill/>
+          <a:ln/>
+        </p:spPr>
+        <p:txBody>
+          <a:bodyPr wrap="square" lIns="0" tIns="0" rIns="0" bIns="0" rtlCol="0" anchor="ctr"/>
+          <a:lstStyle/>
+          <a:p>
+            <a:pPr indent="0" marL="0">
+              <a:buNone/>
+            </a:pPr>
+            <a:r>
+              <a:rPr lang="en-US" sz="1100" b="1" spc="200" kern="0" dirty="0">
+                <a:solidFill>
+                  <a:srgbClr val="0E7C86"/>
+                </a:solidFill>
+                <a:latin typeface="Calibri" pitchFamily="34" charset="0"/>
+                <a:ea typeface="Calibri" pitchFamily="34" charset="-122"/>
+                <a:cs typeface="Calibri" pitchFamily="34" charset="-120"/>
+              </a:rPr>
+              <a:t>WHAT WE MUST DISTINGUISH</a:t>
+            </a:r>
+            <a:endParaRPr lang="en-US" sz="1100" dirty="0"/>
+          </a:p>
+        </p:txBody>
+      </p:sp>
+      <p:sp>
+        <p:nvSpPr>
+          <p:cNvPr id="3" name="Text 1"/>
+          <p:cNvSpPr/>
+          <p:nvPr/>
+        </p:nvSpPr>
+        <p:spPr>
+          <a:xfrm>
+            <a:off x="685800" y="804672"/>
+            <a:ext cx="10789920" cy="822960"/>
+          </a:xfrm>
+          <a:prstGeom prst="rect">
+            <a:avLst/>
+          </a:prstGeom>
+          <a:noFill/>
+          <a:ln/>
+        </p:spPr>
+        <p:txBody>
+          <a:bodyPr wrap="square" lIns="0" tIns="0" rIns="0" bIns="0" rtlCol="0" anchor="ctr"/>
+          <a:lstStyle/>
+          <a:p>
+            <a:pPr indent="0" marL="0">
+              <a:buNone/>
+            </a:pPr>
+            <a:r>
+              <a:rPr lang="en-US" sz="3600" b="1" dirty="0">
+                <a:solidFill>
+                  <a:srgbClr val="16202A"/>
+                </a:solidFill>
+                <a:latin typeface="Cambria" pitchFamily="34" charset="0"/>
+                <a:ea typeface="Cambria" pitchFamily="34" charset="-122"/>
+                <a:cs typeface="Cambria" pitchFamily="34" charset="-120"/>
+              </a:rPr>
+              <a:t>NAT behavior</a:t>
+            </a:r>
+            <a:endParaRPr lang="en-US" sz="3600" dirty="0"/>
+          </a:p>
+        </p:txBody>
+      </p:sp>
+      <p:sp>
+        <p:nvSpPr>
+          <p:cNvPr id="4" name="Text 2"/>
+          <p:cNvSpPr/>
+          <p:nvPr/>
+        </p:nvSpPr>
+        <p:spPr>
+          <a:xfrm>
+            <a:off x="685800" y="1965960"/>
+            <a:ext cx="3474720" cy="274320"/>
+          </a:xfrm>
+          <a:prstGeom prst="rect">
+            <a:avLst/>
+          </a:prstGeom>
+          <a:noFill/>
+          <a:ln/>
+        </p:spPr>
+        <p:txBody>
+          <a:bodyPr wrap="square" lIns="0" tIns="0" rIns="0" bIns="0" rtlCol="0" anchor="ctr"/>
+          <a:lstStyle/>
+          <a:p>
+            <a:pPr indent="0" marL="0">
+              <a:buNone/>
+            </a:pPr>
+            <a:r>
+              <a:rPr lang="en-US" sz="1000" b="1" spc="150" kern="0" dirty="0">
+                <a:solidFill>
+                  <a:srgbClr val="6E7F8B"/>
+                </a:solidFill>
+                <a:latin typeface="Calibri" pitchFamily="34" charset="0"/>
+                <a:ea typeface="Calibri" pitchFamily="34" charset="-122"/>
+                <a:cs typeface="Calibri" pitchFamily="34" charset="-120"/>
+              </a:rPr>
+              <a:t>BEHAVIOR</a:t>
+            </a:r>
+            <a:endParaRPr lang="en-US" sz="1000" dirty="0"/>
+          </a:p>
+        </p:txBody>
+      </p:sp>
+      <p:sp>
+        <p:nvSpPr>
+          <p:cNvPr id="5" name="Text 3"/>
+          <p:cNvSpPr/>
+          <p:nvPr/>
+        </p:nvSpPr>
+        <p:spPr>
+          <a:xfrm>
+            <a:off x="4343400" y="1965960"/>
+            <a:ext cx="2468880" cy="274320"/>
+          </a:xfrm>
+          <a:prstGeom prst="rect">
+            <a:avLst/>
+          </a:prstGeom>
+          <a:noFill/>
+          <a:ln/>
+        </p:spPr>
+        <p:txBody>
+          <a:bodyPr wrap="square" lIns="0" tIns="0" rIns="0" bIns="0" rtlCol="0" anchor="ctr"/>
+          <a:lstStyle/>
+          <a:p>
+            <a:pPr indent="0" marL="0">
+              <a:buNone/>
+            </a:pPr>
+            <a:r>
+              <a:rPr lang="en-US" sz="1000" b="1" spc="150" kern="0" dirty="0">
+                <a:solidFill>
+                  <a:srgbClr val="6E7F8B"/>
+                </a:solidFill>
+                <a:latin typeface="Calibri" pitchFamily="34" charset="0"/>
+                <a:ea typeface="Calibri" pitchFamily="34" charset="-122"/>
+                <a:cs typeface="Calibri" pitchFamily="34" charset="-120"/>
+              </a:rPr>
+              <a:t>EXAMPLE</a:t>
+            </a:r>
+            <a:endParaRPr lang="en-US" sz="1000" dirty="0"/>
+          </a:p>
+        </p:txBody>
+      </p:sp>
+      <p:sp>
+        <p:nvSpPr>
+          <p:cNvPr id="6" name="Text 4"/>
+          <p:cNvSpPr/>
+          <p:nvPr/>
+        </p:nvSpPr>
+        <p:spPr>
+          <a:xfrm>
+            <a:off x="6995160" y="1965960"/>
+            <a:ext cx="4480560" cy="274320"/>
+          </a:xfrm>
+          <a:prstGeom prst="rect">
+            <a:avLst/>
+          </a:prstGeom>
+          <a:noFill/>
+          <a:ln/>
+        </p:spPr>
+        <p:txBody>
+          <a:bodyPr wrap="square" lIns="0" tIns="0" rIns="0" bIns="0" rtlCol="0" anchor="ctr"/>
+          <a:lstStyle/>
+          <a:p>
+            <a:pPr indent="0" marL="0">
+              <a:buNone/>
+            </a:pPr>
+            <a:r>
+              <a:rPr lang="en-US" sz="1000" b="1" spc="150" kern="0" dirty="0">
+                <a:solidFill>
+                  <a:srgbClr val="6E7F8B"/>
+                </a:solidFill>
+                <a:latin typeface="Calibri" pitchFamily="34" charset="0"/>
+                <a:ea typeface="Calibri" pitchFamily="34" charset="-122"/>
+                <a:cs typeface="Calibri" pitchFamily="34" charset="-120"/>
+              </a:rPr>
+              <a:t>EFFECT ON HOLE PUNCHING</a:t>
+            </a:r>
+            <a:endParaRPr lang="en-US" sz="1000" dirty="0"/>
+          </a:p>
+        </p:txBody>
+      </p:sp>
+      <p:sp>
+        <p:nvSpPr>
+          <p:cNvPr id="7" name="Shape 5"/>
+          <p:cNvSpPr/>
+          <p:nvPr/>
+        </p:nvSpPr>
+        <p:spPr>
+          <a:xfrm>
+            <a:off x="548640" y="2276856"/>
+            <a:ext cx="11064240" cy="768096"/>
+          </a:xfrm>
+          <a:prstGeom prst="roundRect">
+            <a:avLst>
+              <a:gd name="adj" fmla="val 7143"/>
+            </a:avLst>
+          </a:prstGeom>
+          <a:solidFill>
+            <a:srgbClr val="F6F9F9"/>
+          </a:solidFill>
+          <a:ln w="6350">
+            <a:solidFill>
+              <a:srgbClr val="F6F9F9"/>
+            </a:solidFill>
+            <a:prstDash val="solid"/>
+          </a:ln>
+        </p:spPr>
+      </p:sp>
+      <p:sp>
+        <p:nvSpPr>
+          <p:cNvPr id="8" name="Text 6"/>
+          <p:cNvSpPr/>
+          <p:nvPr/>
+        </p:nvSpPr>
+        <p:spPr>
+          <a:xfrm>
+            <a:off x="685800" y="2331720"/>
+            <a:ext cx="3474720" cy="658368"/>
+          </a:xfrm>
+          <a:prstGeom prst="rect">
+            <a:avLst/>
+          </a:prstGeom>
+          <a:noFill/>
+          <a:ln/>
+        </p:spPr>
+        <p:txBody>
+          <a:bodyPr wrap="square" lIns="0" tIns="0" rIns="0" bIns="0" rtlCol="0" anchor="ctr"/>
+          <a:lstStyle/>
+          <a:p>
+            <a:pPr indent="0" marL="0">
+              <a:buNone/>
+            </a:pPr>
+            <a:r>
+              <a:rPr lang="en-US" sz="1500" b="1" dirty="0">
+                <a:solidFill>
+                  <a:srgbClr val="0E7C86"/>
+                </a:solidFill>
+                <a:latin typeface="Cambria" pitchFamily="34" charset="0"/>
+                <a:ea typeface="Cambria" pitchFamily="34" charset="-122"/>
+                <a:cs typeface="Cambria" pitchFamily="34" charset="-120"/>
+              </a:rPr>
+              <a:t>Endpoint-independent</a:t>
+            </a:r>
+            <a:endParaRPr lang="en-US" sz="1500" dirty="0"/>
+          </a:p>
+        </p:txBody>
+      </p:sp>
+      <p:sp>
+        <p:nvSpPr>
+          <p:cNvPr id="9" name="Text 7"/>
+          <p:cNvSpPr/>
+          <p:nvPr/>
+        </p:nvSpPr>
+        <p:spPr>
+          <a:xfrm>
+            <a:off x="4343400" y="2331720"/>
+            <a:ext cx="2468880" cy="658368"/>
+          </a:xfrm>
+          <a:prstGeom prst="rect">
+            <a:avLst/>
+          </a:prstGeom>
+          <a:noFill/>
+          <a:ln/>
+        </p:spPr>
+        <p:txBody>
+          <a:bodyPr wrap="square" lIns="0" tIns="0" rIns="0" bIns="0" rtlCol="0" anchor="ctr"/>
+          <a:lstStyle/>
+          <a:p>
+            <a:pPr indent="0" marL="0">
+              <a:buNone/>
+            </a:pPr>
+            <a:r>
+              <a:rPr lang="en-US" sz="1300" i="1" dirty="0">
+                <a:solidFill>
+                  <a:srgbClr val="6E7F8B"/>
+                </a:solidFill>
+                <a:latin typeface="Calibri" pitchFamily="34" charset="0"/>
+                <a:ea typeface="Calibri" pitchFamily="34" charset="-122"/>
+                <a:cs typeface="Calibri" pitchFamily="34" charset="-120"/>
+              </a:rPr>
+              <a:t>most home routers</a:t>
+            </a:r>
+            <a:endParaRPr lang="en-US" sz="1300" dirty="0"/>
+          </a:p>
+        </p:txBody>
+      </p:sp>
+      <p:sp>
+        <p:nvSpPr>
+          <p:cNvPr id="10" name="Text 8"/>
+          <p:cNvSpPr/>
+          <p:nvPr/>
+        </p:nvSpPr>
+        <p:spPr>
+          <a:xfrm>
+            <a:off x="6995160" y="2331720"/>
+            <a:ext cx="4480560" cy="658368"/>
+          </a:xfrm>
+          <a:prstGeom prst="rect">
+            <a:avLst/>
+          </a:prstGeom>
+          <a:noFill/>
+          <a:ln/>
+        </p:spPr>
+        <p:txBody>
+          <a:bodyPr wrap="square" lIns="0" tIns="0" rIns="0" bIns="0" rtlCol="0" anchor="ctr"/>
+          <a:lstStyle/>
+          <a:p>
+            <a:pPr indent="0" marL="0">
+              <a:buNone/>
+            </a:pPr>
+            <a:r>
+              <a:rPr lang="en-US" sz="1450" dirty="0">
+                <a:solidFill>
+                  <a:srgbClr val="3E4C57"/>
+                </a:solidFill>
+                <a:latin typeface="Calibri" pitchFamily="34" charset="0"/>
+                <a:ea typeface="Calibri" pitchFamily="34" charset="-122"/>
+                <a:cs typeface="Calibri" pitchFamily="34" charset="-120"/>
+              </a:rPr>
+              <a:t>One external port for every destination. Punching works.</a:t>
+            </a:r>
+            <a:endParaRPr lang="en-US" sz="1450" dirty="0"/>
+          </a:p>
+        </p:txBody>
+      </p:sp>
+      <p:sp>
+        <p:nvSpPr>
+          <p:cNvPr id="11" name="Text 9"/>
+          <p:cNvSpPr/>
+          <p:nvPr/>
+        </p:nvSpPr>
+        <p:spPr>
+          <a:xfrm>
+            <a:off x="685800" y="3172968"/>
+            <a:ext cx="3474720" cy="658368"/>
+          </a:xfrm>
+          <a:prstGeom prst="rect">
+            <a:avLst/>
+          </a:prstGeom>
+          <a:noFill/>
+          <a:ln/>
+        </p:spPr>
+        <p:txBody>
+          <a:bodyPr wrap="square" lIns="0" tIns="0" rIns="0" bIns="0" rtlCol="0" anchor="ctr"/>
+          <a:lstStyle/>
+          <a:p>
+            <a:pPr indent="0" marL="0">
+              <a:buNone/>
+            </a:pPr>
+            <a:r>
+              <a:rPr lang="en-US" sz="1500" b="1" dirty="0">
+                <a:solidFill>
+                  <a:srgbClr val="0E7C86"/>
+                </a:solidFill>
+                <a:latin typeface="Cambria" pitchFamily="34" charset="0"/>
+                <a:ea typeface="Cambria" pitchFamily="34" charset="-122"/>
+                <a:cs typeface="Cambria" pitchFamily="34" charset="-120"/>
+              </a:rPr>
+              <a:t>Address-dependent</a:t>
+            </a:r>
+            <a:endParaRPr lang="en-US" sz="1500" dirty="0"/>
+          </a:p>
+        </p:txBody>
+      </p:sp>
+      <p:sp>
+        <p:nvSpPr>
+          <p:cNvPr id="12" name="Text 10"/>
+          <p:cNvSpPr/>
+          <p:nvPr/>
+        </p:nvSpPr>
+        <p:spPr>
+          <a:xfrm>
+            <a:off x="4343400" y="3172968"/>
+            <a:ext cx="2468880" cy="658368"/>
+          </a:xfrm>
+          <a:prstGeom prst="rect">
+            <a:avLst/>
+          </a:prstGeom>
+          <a:noFill/>
+          <a:ln/>
+        </p:spPr>
+        <p:txBody>
+          <a:bodyPr wrap="square" lIns="0" tIns="0" rIns="0" bIns="0" rtlCol="0" anchor="ctr"/>
+          <a:lstStyle/>
+          <a:p>
+            <a:pPr indent="0" marL="0">
+              <a:buNone/>
+            </a:pPr>
+            <a:r>
+              <a:rPr lang="en-US" sz="1300" i="1" dirty="0">
+                <a:solidFill>
+                  <a:srgbClr val="6E7F8B"/>
+                </a:solidFill>
+                <a:latin typeface="Calibri" pitchFamily="34" charset="0"/>
+                <a:ea typeface="Calibri" pitchFamily="34" charset="-122"/>
+                <a:cs typeface="Calibri" pitchFamily="34" charset="-120"/>
+              </a:rPr>
+              <a:t>some enterprise NATs</a:t>
+            </a:r>
+            <a:endParaRPr lang="en-US" sz="1300" dirty="0"/>
+          </a:p>
+        </p:txBody>
+      </p:sp>
+      <p:sp>
+        <p:nvSpPr>
+          <p:cNvPr id="13" name="Text 11"/>
+          <p:cNvSpPr/>
+          <p:nvPr/>
+        </p:nvSpPr>
+        <p:spPr>
+          <a:xfrm>
+            <a:off x="6995160" y="3172968"/>
+            <a:ext cx="4480560" cy="658368"/>
+          </a:xfrm>
+          <a:prstGeom prst="rect">
+            <a:avLst/>
+          </a:prstGeom>
+          <a:noFill/>
+          <a:ln/>
+        </p:spPr>
+        <p:txBody>
+          <a:bodyPr wrap="square" lIns="0" tIns="0" rIns="0" bIns="0" rtlCol="0" anchor="ctr"/>
+          <a:lstStyle/>
+          <a:p>
+            <a:pPr indent="0" marL="0">
+              <a:buNone/>
+            </a:pPr>
+            <a:r>
+              <a:rPr lang="en-US" sz="1450" dirty="0">
+                <a:solidFill>
+                  <a:srgbClr val="3E4C57"/>
+                </a:solidFill>
+                <a:latin typeface="Calibri" pitchFamily="34" charset="0"/>
+                <a:ea typeface="Calibri" pitchFamily="34" charset="-122"/>
+                <a:cs typeface="Calibri" pitchFamily="34" charset="-120"/>
+              </a:rPr>
+              <a:t>A new port per destination address. Both sides must punch.</a:t>
+            </a:r>
+            <a:endParaRPr lang="en-US" sz="1450" dirty="0"/>
+          </a:p>
+        </p:txBody>
+      </p:sp>
+      <p:sp>
+        <p:nvSpPr>
+          <p:cNvPr id="14" name="Shape 12"/>
+          <p:cNvSpPr/>
+          <p:nvPr/>
+        </p:nvSpPr>
+        <p:spPr>
+          <a:xfrm>
+            <a:off x="548640" y="3959352"/>
+            <a:ext cx="11064240" cy="768096"/>
+          </a:xfrm>
+          <a:prstGeom prst="roundRect">
+            <a:avLst>
+              <a:gd name="adj" fmla="val 7143"/>
+            </a:avLst>
+          </a:prstGeom>
+          <a:solidFill>
+            <a:srgbClr val="F6F9F9"/>
+          </a:solidFill>
+          <a:ln w="6350">
+            <a:solidFill>
+              <a:srgbClr val="F6F9F9"/>
+            </a:solidFill>
+            <a:prstDash val="solid"/>
+          </a:ln>
+        </p:spPr>
+      </p:sp>
+      <p:sp>
+        <p:nvSpPr>
+          <p:cNvPr id="15" name="Text 13"/>
+          <p:cNvSpPr/>
+          <p:nvPr/>
+        </p:nvSpPr>
+        <p:spPr>
+          <a:xfrm>
+            <a:off x="685800" y="4014216"/>
+            <a:ext cx="3474720" cy="658368"/>
+          </a:xfrm>
+          <a:prstGeom prst="rect">
+            <a:avLst/>
+          </a:prstGeom>
+          <a:noFill/>
+          <a:ln/>
+        </p:spPr>
+        <p:txBody>
+          <a:bodyPr wrap="square" lIns="0" tIns="0" rIns="0" bIns="0" rtlCol="0" anchor="ctr"/>
+          <a:lstStyle/>
+          <a:p>
+            <a:pPr indent="0" marL="0">
+              <a:buNone/>
+            </a:pPr>
+            <a:r>
+              <a:rPr lang="en-US" sz="1500" b="1" dirty="0">
+                <a:solidFill>
+                  <a:srgbClr val="C25E28"/>
+                </a:solidFill>
+                <a:latin typeface="Cambria" pitchFamily="34" charset="0"/>
+                <a:ea typeface="Cambria" pitchFamily="34" charset="-122"/>
+                <a:cs typeface="Cambria" pitchFamily="34" charset="-120"/>
+              </a:rPr>
+              <a:t>Address-and-port-dependent</a:t>
+            </a:r>
+            <a:endParaRPr lang="en-US" sz="1500" dirty="0"/>
+          </a:p>
+        </p:txBody>
+      </p:sp>
+      <p:sp>
+        <p:nvSpPr>
+          <p:cNvPr id="16" name="Text 14"/>
+          <p:cNvSpPr/>
+          <p:nvPr/>
+        </p:nvSpPr>
+        <p:spPr>
+          <a:xfrm>
+            <a:off x="4343400" y="4014216"/>
+            <a:ext cx="2468880" cy="658368"/>
+          </a:xfrm>
+          <a:prstGeom prst="rect">
+            <a:avLst/>
+          </a:prstGeom>
+          <a:noFill/>
+          <a:ln/>
+        </p:spPr>
+        <p:txBody>
+          <a:bodyPr wrap="square" lIns="0" tIns="0" rIns="0" bIns="0" rtlCol="0" anchor="ctr"/>
+          <a:lstStyle/>
+          <a:p>
+            <a:pPr indent="0" marL="0">
+              <a:buNone/>
+            </a:pPr>
+            <a:r>
+              <a:rPr lang="en-US" sz="1300" i="1" dirty="0">
+                <a:solidFill>
+                  <a:srgbClr val="6E7F8B"/>
+                </a:solidFill>
+                <a:latin typeface="Calibri" pitchFamily="34" charset="0"/>
+                <a:ea typeface="Calibri" pitchFamily="34" charset="-122"/>
+                <a:cs typeface="Calibri" pitchFamily="34" charset="-120"/>
+              </a:rPr>
+              <a:t>many mobile carriers</a:t>
+            </a:r>
+            <a:endParaRPr lang="en-US" sz="1300" dirty="0"/>
+          </a:p>
+        </p:txBody>
+      </p:sp>
+      <p:sp>
+        <p:nvSpPr>
+          <p:cNvPr id="17" name="Text 15"/>
+          <p:cNvSpPr/>
+          <p:nvPr/>
+        </p:nvSpPr>
+        <p:spPr>
+          <a:xfrm>
+            <a:off x="6995160" y="4014216"/>
+            <a:ext cx="4480560" cy="658368"/>
+          </a:xfrm>
+          <a:prstGeom prst="rect">
+            <a:avLst/>
+          </a:prstGeom>
+          <a:noFill/>
+          <a:ln/>
+        </p:spPr>
+        <p:txBody>
+          <a:bodyPr wrap="square" lIns="0" tIns="0" rIns="0" bIns="0" rtlCol="0" anchor="ctr"/>
+          <a:lstStyle/>
+          <a:p>
+            <a:pPr indent="0" marL="0">
+              <a:buNone/>
+            </a:pPr>
+            <a:r>
+              <a:rPr lang="en-US" sz="1450" dirty="0">
+                <a:solidFill>
+                  <a:srgbClr val="3E4C57"/>
+                </a:solidFill>
+                <a:latin typeface="Calibri" pitchFamily="34" charset="0"/>
+                <a:ea typeface="Calibri" pitchFamily="34" charset="-122"/>
+                <a:cs typeface="Calibri" pitchFamily="34" charset="-120"/>
+              </a:rPr>
+              <a:t>A new port per endpoint. Punching fails without prediction.</a:t>
+            </a:r>
+            <a:endParaRPr lang="en-US" sz="1450" dirty="0"/>
+          </a:p>
+        </p:txBody>
+      </p:sp>
+      <p:sp>
+        <p:nvSpPr>
+          <p:cNvPr id="18" name="Text 16"/>
+          <p:cNvSpPr/>
+          <p:nvPr/>
+        </p:nvSpPr>
+        <p:spPr>
+          <a:xfrm>
+            <a:off x="685800" y="4855464"/>
+            <a:ext cx="3474720" cy="658368"/>
+          </a:xfrm>
+          <a:prstGeom prst="rect">
+            <a:avLst/>
+          </a:prstGeom>
+          <a:noFill/>
+          <a:ln/>
+        </p:spPr>
+        <p:txBody>
+          <a:bodyPr wrap="square" lIns="0" tIns="0" rIns="0" bIns="0" rtlCol="0" anchor="ctr"/>
+          <a:lstStyle/>
+          <a:p>
+            <a:pPr indent="0" marL="0">
+              <a:buNone/>
+            </a:pPr>
+            <a:r>
+              <a:rPr lang="en-US" sz="1500" b="1" dirty="0">
+                <a:solidFill>
+                  <a:srgbClr val="C25E28"/>
+                </a:solidFill>
+                <a:latin typeface="Cambria" pitchFamily="34" charset="0"/>
+                <a:ea typeface="Cambria" pitchFamily="34" charset="-122"/>
+                <a:cs typeface="Cambria" pitchFamily="34" charset="-120"/>
+              </a:rPr>
+              <a:t>Carrier-grade NAT</a:t>
+            </a:r>
+            <a:endParaRPr lang="en-US" sz="1500" dirty="0"/>
+          </a:p>
+        </p:txBody>
+      </p:sp>
+      <p:sp>
+        <p:nvSpPr>
+          <p:cNvPr id="19" name="Text 17"/>
+          <p:cNvSpPr/>
+          <p:nvPr/>
+        </p:nvSpPr>
+        <p:spPr>
+          <a:xfrm>
+            <a:off x="4343400" y="4855464"/>
+            <a:ext cx="2468880" cy="658368"/>
+          </a:xfrm>
+          <a:prstGeom prst="rect">
+            <a:avLst/>
+          </a:prstGeom>
+          <a:noFill/>
+          <a:ln/>
+        </p:spPr>
+        <p:txBody>
+          <a:bodyPr wrap="square" lIns="0" tIns="0" rIns="0" bIns="0" rtlCol="0" anchor="ctr"/>
+          <a:lstStyle/>
+          <a:p>
+            <a:pPr indent="0" marL="0">
+              <a:buNone/>
+            </a:pPr>
+            <a:r>
+              <a:rPr lang="en-US" sz="1300" i="1" dirty="0">
+                <a:solidFill>
+                  <a:srgbClr val="6E7F8B"/>
+                </a:solidFill>
+                <a:latin typeface="Calibri" pitchFamily="34" charset="0"/>
+                <a:ea typeface="Calibri" pitchFamily="34" charset="-122"/>
+                <a:cs typeface="Calibri" pitchFamily="34" charset="-120"/>
+              </a:rPr>
+              <a:t>prepaid mobile data</a:t>
+            </a:r>
+            <a:endParaRPr lang="en-US" sz="1300" dirty="0"/>
+          </a:p>
+        </p:txBody>
+      </p:sp>
+      <p:sp>
+        <p:nvSpPr>
+          <p:cNvPr id="20" name="Text 18"/>
+          <p:cNvSpPr/>
+          <p:nvPr/>
+        </p:nvSpPr>
+        <p:spPr>
+          <a:xfrm>
+            <a:off x="6995160" y="4855464"/>
+            <a:ext cx="4480560" cy="658368"/>
+          </a:xfrm>
+          <a:prstGeom prst="rect">
+            <a:avLst/>
+          </a:prstGeom>
+          <a:noFill/>
+          <a:ln/>
+        </p:spPr>
+        <p:txBody>
+          <a:bodyPr wrap="square" lIns="0" tIns="0" rIns="0" bIns="0" rtlCol="0" anchor="ctr"/>
+          <a:lstStyle/>
+          <a:p>
+            <a:pPr indent="0" marL="0">
+              <a:buNone/>
+            </a:pPr>
+            <a:r>
+              <a:rPr lang="en-US" sz="1450" dirty="0">
+                <a:solidFill>
+                  <a:srgbClr val="3E4C57"/>
+                </a:solidFill>
+                <a:latin typeface="Calibri" pitchFamily="34" charset="0"/>
+                <a:ea typeface="Calibri" pitchFamily="34" charset="-122"/>
+                <a:cs typeface="Calibri" pitchFamily="34" charset="-120"/>
+              </a:rPr>
+              <a:t>Stacked above all of it. No unsolicited inbound at all.</a:t>
+            </a:r>
+            <a:endParaRPr lang="en-US" sz="1450" dirty="0"/>
+          </a:p>
+        </p:txBody>
+      </p:sp>
+      <p:sp>
+        <p:nvSpPr>
+          <p:cNvPr id="21" name="Text 19"/>
+          <p:cNvSpPr/>
+          <p:nvPr/>
+        </p:nvSpPr>
+        <p:spPr>
+          <a:xfrm>
+            <a:off x="685800" y="5806440"/>
+            <a:ext cx="10789920" cy="365760"/>
+          </a:xfrm>
+          <a:prstGeom prst="rect">
+            <a:avLst/>
+          </a:prstGeom>
+          <a:noFill/>
+          <a:ln/>
+        </p:spPr>
+        <p:txBody>
+          <a:bodyPr wrap="square" lIns="0" tIns="0" rIns="0" bIns="0" rtlCol="0" anchor="ctr"/>
+          <a:lstStyle/>
+          <a:p>
+            <a:pPr indent="0" marL="0">
+              <a:buNone/>
+            </a:pPr>
+            <a:r>
+              <a:rPr lang="en-US" sz="1500" i="1" dirty="0">
+                <a:solidFill>
+                  <a:srgbClr val="0A5A62"/>
+                </a:solidFill>
+                <a:latin typeface="Calibri" pitchFamily="34" charset="0"/>
+                <a:ea typeface="Calibri" pitchFamily="34" charset="-122"/>
+                <a:cs typeface="Calibri" pitchFamily="34" charset="-120"/>
+              </a:rPr>
+              <a:t>We measure the tuple — mapping, filtering, port preservation, lifetime — never a single type.</a:t>
+            </a:r>
+            <a:endParaRPr lang="en-US" sz="1500" dirty="0"/>
+          </a:p>
+        </p:txBody>
+      </p:sp>
+    </p:spTree>
+  </p:cSld>
+  <p:clrMapOvr>
+    <a:masterClrMapping/>
+  </p:clrMapOvr>
+</p:sld>
+</file>
+
+<file path=ppt/slides/slide4.xml><?xml version="1.0" encoding="utf-8"?>
+<p:sld xmlns:a="http://schemas.openxmlformats.org/drawingml/2006/main" xmlns:r="http://schemas.openxmlformats.org/officeDocument/2006/relationships" xmlns:p="http://schemas.openxmlformats.org/presentationml/2006/main">
+  <p:cSld name="Slide 4">
     <p:bg>
       <p:bgPr>
         <a:solidFill>
@@ -3910,832 +4691,6 @@
               <a:t>Having a public address is not being reachable at it.</a:t>
             </a:r>
             <a:endParaRPr lang="en-US" sz="1700" dirty="0"/>
-          </a:p>
-        </p:txBody>
-      </p:sp>
-    </p:spTree>
-  </p:cSld>
-  <p:clrMapOvr>
-    <a:masterClrMapping/>
-  </p:clrMapOvr>
-</p:sld>
-</file>
-
-<file path=ppt/slides/slide4.xml><?xml version="1.0" encoding="utf-8"?>
-<p:sld xmlns:a="http://schemas.openxmlformats.org/drawingml/2006/main" xmlns:r="http://schemas.openxmlformats.org/officeDocument/2006/relationships" xmlns:p="http://schemas.openxmlformats.org/presentationml/2006/main">
-  <p:cSld name="Slide 4">
-    <p:spTree>
-      <p:nvGrpSpPr>
-        <p:cNvPr id="1" name=""/>
-        <p:cNvGrpSpPr/>
-        <p:nvPr/>
-      </p:nvGrpSpPr>
-      <p:grpSpPr>
-        <a:xfrm>
-          <a:off x="0" y="0"/>
-          <a:ext cx="0" cy="0"/>
-          <a:chOff x="0" y="0"/>
-          <a:chExt cx="0" cy="0"/>
-        </a:xfrm>
-      </p:grpSpPr>
-      <p:sp>
-        <p:nvSpPr>
-          <p:cNvPr id="2" name="Text 0"/>
-          <p:cNvSpPr/>
-          <p:nvPr/>
-        </p:nvSpPr>
-        <p:spPr>
-          <a:xfrm>
-            <a:off x="685800" y="502920"/>
-            <a:ext cx="10789920" cy="274320"/>
-          </a:xfrm>
-          <a:prstGeom prst="rect">
-            <a:avLst/>
-          </a:prstGeom>
-          <a:noFill/>
-          <a:ln/>
-        </p:spPr>
-        <p:txBody>
-          <a:bodyPr wrap="square" lIns="0" tIns="0" rIns="0" bIns="0" rtlCol="0" anchor="ctr"/>
-          <a:lstStyle/>
-          <a:p>
-            <a:pPr indent="0" marL="0">
-              <a:buNone/>
-            </a:pPr>
-            <a:r>
-              <a:rPr lang="en-US" sz="1100" b="1" spc="200" kern="0" dirty="0">
-                <a:solidFill>
-                  <a:srgbClr val="0E7C86"/>
-                </a:solidFill>
-                <a:latin typeface="Calibri" pitchFamily="34" charset="0"/>
-                <a:ea typeface="Calibri" pitchFamily="34" charset="-122"/>
-                <a:cs typeface="Calibri" pitchFamily="34" charset="-120"/>
-              </a:rPr>
-              <a:t>THE IDEA</a:t>
-            </a:r>
-            <a:endParaRPr lang="en-US" sz="1100" dirty="0"/>
-          </a:p>
-        </p:txBody>
-      </p:sp>
-      <p:sp>
-        <p:nvSpPr>
-          <p:cNvPr id="3" name="Text 1"/>
-          <p:cNvSpPr/>
-          <p:nvPr/>
-        </p:nvSpPr>
-        <p:spPr>
-          <a:xfrm>
-            <a:off x="685800" y="804672"/>
-            <a:ext cx="10789920" cy="822960"/>
-          </a:xfrm>
-          <a:prstGeom prst="rect">
-            <a:avLst/>
-          </a:prstGeom>
-          <a:noFill/>
-          <a:ln/>
-        </p:spPr>
-        <p:txBody>
-          <a:bodyPr wrap="square" lIns="0" tIns="0" rIns="0" bIns="0" rtlCol="0" anchor="ctr"/>
-          <a:lstStyle/>
-          <a:p>
-            <a:pPr indent="0" marL="0">
-              <a:buNone/>
-            </a:pPr>
-            <a:r>
-              <a:rPr lang="en-US" sz="3600" b="1" dirty="0">
-                <a:solidFill>
-                  <a:srgbClr val="16202A"/>
-                </a:solidFill>
-                <a:latin typeface="Cambria" pitchFamily="34" charset="0"/>
-                <a:ea typeface="Cambria" pitchFamily="34" charset="-122"/>
-                <a:cs typeface="Cambria" pitchFamily="34" charset="-120"/>
-              </a:rPr>
-              <a:t>Witness-based detection</a:t>
-            </a:r>
-            <a:endParaRPr lang="en-US" sz="3600" dirty="0"/>
-          </a:p>
-        </p:txBody>
-      </p:sp>
-      <p:sp>
-        <p:nvSpPr>
-          <p:cNvPr id="4" name="Shape 2"/>
-          <p:cNvSpPr/>
-          <p:nvPr/>
-        </p:nvSpPr>
-        <p:spPr>
-          <a:xfrm>
-            <a:off x="1051560" y="2880360"/>
-            <a:ext cx="2286000" cy="1005840"/>
-          </a:xfrm>
-          <a:prstGeom prst="roundRect">
-            <a:avLst>
-              <a:gd name="adj" fmla="val 5455"/>
-            </a:avLst>
-          </a:prstGeom>
-          <a:solidFill>
-            <a:srgbClr val="EEF3F4"/>
-          </a:solidFill>
-          <a:ln w="17780">
-            <a:solidFill>
-              <a:srgbClr val="0E7C86"/>
-            </a:solidFill>
-            <a:prstDash val="solid"/>
-          </a:ln>
-        </p:spPr>
-      </p:sp>
-      <p:sp>
-        <p:nvSpPr>
-          <p:cNvPr id="5" name="Text 3"/>
-          <p:cNvSpPr/>
-          <p:nvPr/>
-        </p:nvSpPr>
-        <p:spPr>
-          <a:xfrm>
-            <a:off x="1051560" y="3063240"/>
-            <a:ext cx="2286000" cy="329184"/>
-          </a:xfrm>
-          <a:prstGeom prst="rect">
-            <a:avLst/>
-          </a:prstGeom>
-          <a:noFill/>
-          <a:ln/>
-        </p:spPr>
-        <p:txBody>
-          <a:bodyPr wrap="square" lIns="0" tIns="0" rIns="0" bIns="0" rtlCol="0" anchor="ctr"/>
-          <a:lstStyle/>
-          <a:p>
-            <a:pPr algn="ctr" indent="0" marL="0">
-              <a:buNone/>
-            </a:pPr>
-            <a:r>
-              <a:rPr lang="en-US" sz="1700" b="1" dirty="0">
-                <a:solidFill>
-                  <a:srgbClr val="16202A"/>
-                </a:solidFill>
-                <a:latin typeface="Cambria" pitchFamily="34" charset="0"/>
-                <a:ea typeface="Cambria" pitchFamily="34" charset="-122"/>
-                <a:cs typeface="Cambria" pitchFamily="34" charset="-120"/>
-              </a:rPr>
-              <a:t>Probe</a:t>
-            </a:r>
-            <a:endParaRPr lang="en-US" sz="1700" dirty="0"/>
-          </a:p>
-        </p:txBody>
-      </p:sp>
-      <p:sp>
-        <p:nvSpPr>
-          <p:cNvPr id="6" name="Text 4"/>
-          <p:cNvSpPr/>
-          <p:nvPr/>
-        </p:nvSpPr>
-        <p:spPr>
-          <a:xfrm>
-            <a:off x="1051560" y="3410712"/>
-            <a:ext cx="2286000" cy="274320"/>
-          </a:xfrm>
-          <a:prstGeom prst="rect">
-            <a:avLst/>
-          </a:prstGeom>
-          <a:noFill/>
-          <a:ln/>
-        </p:spPr>
-        <p:txBody>
-          <a:bodyPr wrap="square" lIns="0" tIns="0" rIns="0" bIns="0" rtlCol="0" anchor="ctr"/>
-          <a:lstStyle/>
-          <a:p>
-            <a:pPr algn="ctr" indent="0" marL="0">
-              <a:buNone/>
-            </a:pPr>
-            <a:r>
-              <a:rPr lang="en-US" sz="1200" dirty="0">
-                <a:solidFill>
-                  <a:srgbClr val="6E7F8B"/>
-                </a:solidFill>
-                <a:latin typeface="Calibri" pitchFamily="34" charset="0"/>
-                <a:ea typeface="Calibri" pitchFamily="34" charset="-122"/>
-                <a:cs typeface="Calibri" pitchFamily="34" charset="-120"/>
-              </a:rPr>
-              <a:t>the device</a:t>
-            </a:r>
-            <a:endParaRPr lang="en-US" sz="1200" dirty="0"/>
-          </a:p>
-        </p:txBody>
-      </p:sp>
-      <p:sp>
-        <p:nvSpPr>
-          <p:cNvPr id="7" name="Shape 5"/>
-          <p:cNvSpPr/>
-          <p:nvPr/>
-        </p:nvSpPr>
-        <p:spPr>
-          <a:xfrm>
-            <a:off x="8275320" y="1965960"/>
-            <a:ext cx="3017520" cy="868680"/>
-          </a:xfrm>
-          <a:prstGeom prst="roundRect">
-            <a:avLst>
-              <a:gd name="adj" fmla="val 6316"/>
-            </a:avLst>
-          </a:prstGeom>
-          <a:solidFill>
-            <a:srgbClr val="EEF3F4"/>
-          </a:solidFill>
-          <a:ln w="16510">
-            <a:solidFill>
-              <a:srgbClr val="0E7C86"/>
-            </a:solidFill>
-            <a:prstDash val="solid"/>
-          </a:ln>
-        </p:spPr>
-      </p:sp>
-      <p:sp>
-        <p:nvSpPr>
-          <p:cNvPr id="8" name="Text 6"/>
-          <p:cNvSpPr/>
-          <p:nvPr/>
-        </p:nvSpPr>
-        <p:spPr>
-          <a:xfrm>
-            <a:off x="8412480" y="2093976"/>
-            <a:ext cx="2743200" cy="292608"/>
-          </a:xfrm>
-          <a:prstGeom prst="rect">
-            <a:avLst/>
-          </a:prstGeom>
-          <a:noFill/>
-          <a:ln/>
-        </p:spPr>
-        <p:txBody>
-          <a:bodyPr wrap="square" lIns="0" tIns="0" rIns="0" bIns="0" rtlCol="0" anchor="ctr"/>
-          <a:lstStyle/>
-          <a:p>
-            <a:pPr indent="0" marL="0">
-              <a:buNone/>
-            </a:pPr>
-            <a:r>
-              <a:rPr lang="en-US" sz="1500" b="1" dirty="0">
-                <a:solidFill>
-                  <a:srgbClr val="16202A"/>
-                </a:solidFill>
-                <a:latin typeface="Cambria" pitchFamily="34" charset="0"/>
-                <a:ea typeface="Cambria" pitchFamily="34" charset="-122"/>
-                <a:cs typeface="Cambria" pitchFamily="34" charset="-120"/>
-              </a:rPr>
-              <a:t>Friend A</a:t>
-            </a:r>
-            <a:endParaRPr lang="en-US" sz="1500" dirty="0"/>
-          </a:p>
-        </p:txBody>
-      </p:sp>
-      <p:sp>
-        <p:nvSpPr>
-          <p:cNvPr id="9" name="Text 7"/>
-          <p:cNvSpPr/>
-          <p:nvPr/>
-        </p:nvSpPr>
-        <p:spPr>
-          <a:xfrm>
-            <a:off x="8412480" y="2404872"/>
-            <a:ext cx="2743200" cy="274320"/>
-          </a:xfrm>
-          <a:prstGeom prst="rect">
-            <a:avLst/>
-          </a:prstGeom>
-          <a:noFill/>
-          <a:ln/>
-        </p:spPr>
-        <p:txBody>
-          <a:bodyPr wrap="square" lIns="0" tIns="0" rIns="0" bIns="0" rtlCol="0" anchor="ctr"/>
-          <a:lstStyle/>
-          <a:p>
-            <a:pPr indent="0" marL="0">
-              <a:buNone/>
-            </a:pPr>
-            <a:r>
-              <a:rPr lang="en-US" sz="1150" dirty="0">
-                <a:solidFill>
-                  <a:srgbClr val="0E7C86"/>
-                </a:solidFill>
-                <a:latin typeface="Calibri" pitchFamily="34" charset="0"/>
-                <a:ea typeface="Calibri" pitchFamily="34" charset="-122"/>
-                <a:cs typeface="Calibri" pitchFamily="34" charset="-120"/>
-              </a:rPr>
-              <a:t>session open</a:t>
-            </a:r>
-            <a:endParaRPr lang="en-US" sz="1150" dirty="0"/>
-          </a:p>
-        </p:txBody>
-      </p:sp>
-      <p:sp>
-        <p:nvSpPr>
-          <p:cNvPr id="10" name="Shape 8"/>
-          <p:cNvSpPr/>
-          <p:nvPr/>
-        </p:nvSpPr>
-        <p:spPr>
-          <a:xfrm flipV="1">
-            <a:off x="3337560" y="2400300"/>
-            <a:ext cx="4937760" cy="982980"/>
-          </a:xfrm>
-          <a:prstGeom prst="line">
-            <a:avLst/>
-          </a:prstGeom>
-          <a:noFill/>
-          <a:ln w="17780">
-            <a:solidFill>
-              <a:srgbClr val="0E7C86"/>
-            </a:solidFill>
-            <a:prstDash val="solid"/>
-            <a:headEnd type="triangle"/>
-          </a:ln>
-        </p:spPr>
-      </p:sp>
-      <p:sp>
-        <p:nvSpPr>
-          <p:cNvPr id="11" name="Shape 9"/>
-          <p:cNvSpPr/>
-          <p:nvPr/>
-        </p:nvSpPr>
-        <p:spPr>
-          <a:xfrm>
-            <a:off x="8275320" y="3063240"/>
-            <a:ext cx="3017520" cy="868680"/>
-          </a:xfrm>
-          <a:prstGeom prst="roundRect">
-            <a:avLst>
-              <a:gd name="adj" fmla="val 6316"/>
-            </a:avLst>
-          </a:prstGeom>
-          <a:solidFill>
-            <a:srgbClr val="EEF3F4"/>
-          </a:solidFill>
-          <a:ln w="16510">
-            <a:solidFill>
-              <a:srgbClr val="0E7C86"/>
-            </a:solidFill>
-            <a:prstDash val="solid"/>
-          </a:ln>
-        </p:spPr>
-      </p:sp>
-      <p:sp>
-        <p:nvSpPr>
-          <p:cNvPr id="12" name="Text 10"/>
-          <p:cNvSpPr/>
-          <p:nvPr/>
-        </p:nvSpPr>
-        <p:spPr>
-          <a:xfrm>
-            <a:off x="8412480" y="3191256"/>
-            <a:ext cx="2743200" cy="292608"/>
-          </a:xfrm>
-          <a:prstGeom prst="rect">
-            <a:avLst/>
-          </a:prstGeom>
-          <a:noFill/>
-          <a:ln/>
-        </p:spPr>
-        <p:txBody>
-          <a:bodyPr wrap="square" lIns="0" tIns="0" rIns="0" bIns="0" rtlCol="0" anchor="ctr"/>
-          <a:lstStyle/>
-          <a:p>
-            <a:pPr indent="0" marL="0">
-              <a:buNone/>
-            </a:pPr>
-            <a:r>
-              <a:rPr lang="en-US" sz="1500" b="1" dirty="0">
-                <a:solidFill>
-                  <a:srgbClr val="16202A"/>
-                </a:solidFill>
-                <a:latin typeface="Cambria" pitchFamily="34" charset="0"/>
-                <a:ea typeface="Cambria" pitchFamily="34" charset="-122"/>
-                <a:cs typeface="Cambria" pitchFamily="34" charset="-120"/>
-              </a:rPr>
-              <a:t>Friend B</a:t>
-            </a:r>
-            <a:endParaRPr lang="en-US" sz="1500" dirty="0"/>
-          </a:p>
-        </p:txBody>
-      </p:sp>
-      <p:sp>
-        <p:nvSpPr>
-          <p:cNvPr id="13" name="Text 11"/>
-          <p:cNvSpPr/>
-          <p:nvPr/>
-        </p:nvSpPr>
-        <p:spPr>
-          <a:xfrm>
-            <a:off x="8412480" y="3502152"/>
-            <a:ext cx="2743200" cy="274320"/>
-          </a:xfrm>
-          <a:prstGeom prst="rect">
-            <a:avLst/>
-          </a:prstGeom>
-          <a:noFill/>
-          <a:ln/>
-        </p:spPr>
-        <p:txBody>
-          <a:bodyPr wrap="square" lIns="0" tIns="0" rIns="0" bIns="0" rtlCol="0" anchor="ctr"/>
-          <a:lstStyle/>
-          <a:p>
-            <a:pPr indent="0" marL="0">
-              <a:buNone/>
-            </a:pPr>
-            <a:r>
-              <a:rPr lang="en-US" sz="1150" dirty="0">
-                <a:solidFill>
-                  <a:srgbClr val="0E7C86"/>
-                </a:solidFill>
-                <a:latin typeface="Calibri" pitchFamily="34" charset="0"/>
-                <a:ea typeface="Calibri" pitchFamily="34" charset="-122"/>
-                <a:cs typeface="Calibri" pitchFamily="34" charset="-120"/>
-              </a:rPr>
-              <a:t>new source port</a:t>
-            </a:r>
-            <a:endParaRPr lang="en-US" sz="1150" dirty="0"/>
-          </a:p>
-        </p:txBody>
-      </p:sp>
-      <p:sp>
-        <p:nvSpPr>
-          <p:cNvPr id="14" name="Shape 12"/>
-          <p:cNvSpPr/>
-          <p:nvPr/>
-        </p:nvSpPr>
-        <p:spPr>
-          <a:xfrm>
-            <a:off x="3337560" y="3383280"/>
-            <a:ext cx="4937760" cy="114300"/>
-          </a:xfrm>
-          <a:prstGeom prst="line">
-            <a:avLst/>
-          </a:prstGeom>
-          <a:noFill/>
-          <a:ln w="17780">
-            <a:solidFill>
-              <a:srgbClr val="0E7C86"/>
-            </a:solidFill>
-            <a:prstDash val="solid"/>
-            <a:headEnd type="triangle"/>
-          </a:ln>
-        </p:spPr>
-      </p:sp>
-      <p:sp>
-        <p:nvSpPr>
-          <p:cNvPr id="15" name="Shape 13"/>
-          <p:cNvSpPr/>
-          <p:nvPr/>
-        </p:nvSpPr>
-        <p:spPr>
-          <a:xfrm>
-            <a:off x="8275320" y="4160520"/>
-            <a:ext cx="3017520" cy="868680"/>
-          </a:xfrm>
-          <a:prstGeom prst="roundRect">
-            <a:avLst>
-              <a:gd name="adj" fmla="val 6316"/>
-            </a:avLst>
-          </a:prstGeom>
-          <a:solidFill>
-            <a:srgbClr val="EEF3F4"/>
-          </a:solidFill>
-          <a:ln w="16510">
-            <a:solidFill>
-              <a:srgbClr val="C25E28"/>
-            </a:solidFill>
-            <a:prstDash val="solid"/>
-          </a:ln>
-        </p:spPr>
-      </p:sp>
-      <p:sp>
-        <p:nvSpPr>
-          <p:cNvPr id="16" name="Text 14"/>
-          <p:cNvSpPr/>
-          <p:nvPr/>
-        </p:nvSpPr>
-        <p:spPr>
-          <a:xfrm>
-            <a:off x="8412480" y="4288536"/>
-            <a:ext cx="2743200" cy="292608"/>
-          </a:xfrm>
-          <a:prstGeom prst="rect">
-            <a:avLst/>
-          </a:prstGeom>
-          <a:noFill/>
-          <a:ln/>
-        </p:spPr>
-        <p:txBody>
-          <a:bodyPr wrap="square" lIns="0" tIns="0" rIns="0" bIns="0" rtlCol="0" anchor="ctr"/>
-          <a:lstStyle/>
-          <a:p>
-            <a:pPr indent="0" marL="0">
-              <a:buNone/>
-            </a:pPr>
-            <a:r>
-              <a:rPr lang="en-US" sz="1500" b="1" dirty="0">
-                <a:solidFill>
-                  <a:srgbClr val="16202A"/>
-                </a:solidFill>
-                <a:latin typeface="Cambria" pitchFamily="34" charset="0"/>
-                <a:ea typeface="Cambria" pitchFamily="34" charset="-122"/>
-                <a:cs typeface="Cambria" pitchFamily="34" charset="-120"/>
-              </a:rPr>
-              <a:t>Friend C</a:t>
-            </a:r>
-            <a:endParaRPr lang="en-US" sz="1500" dirty="0"/>
-          </a:p>
-        </p:txBody>
-      </p:sp>
-      <p:sp>
-        <p:nvSpPr>
-          <p:cNvPr id="17" name="Text 15"/>
-          <p:cNvSpPr/>
-          <p:nvPr/>
-        </p:nvSpPr>
-        <p:spPr>
-          <a:xfrm>
-            <a:off x="8412480" y="4599432"/>
-            <a:ext cx="2743200" cy="274320"/>
-          </a:xfrm>
-          <a:prstGeom prst="rect">
-            <a:avLst/>
-          </a:prstGeom>
-          <a:noFill/>
-          <a:ln/>
-        </p:spPr>
-        <p:txBody>
-          <a:bodyPr wrap="square" lIns="0" tIns="0" rIns="0" bIns="0" rtlCol="0" anchor="ctr"/>
-          <a:lstStyle/>
-          <a:p>
-            <a:pPr indent="0" marL="0">
-              <a:buNone/>
-            </a:pPr>
-            <a:r>
-              <a:rPr lang="en-US" sz="1150" dirty="0">
-                <a:solidFill>
-                  <a:srgbClr val="C25E28"/>
-                </a:solidFill>
-                <a:latin typeface="Calibri" pitchFamily="34" charset="0"/>
-                <a:ea typeface="Calibri" pitchFamily="34" charset="-122"/>
-                <a:cs typeface="Calibri" pitchFamily="34" charset="-120"/>
-              </a:rPr>
-              <a:t>never contacted</a:t>
-            </a:r>
-            <a:endParaRPr lang="en-US" sz="1150" dirty="0"/>
-          </a:p>
-        </p:txBody>
-      </p:sp>
-      <p:sp>
-        <p:nvSpPr>
-          <p:cNvPr id="18" name="Shape 16"/>
-          <p:cNvSpPr/>
-          <p:nvPr/>
-        </p:nvSpPr>
-        <p:spPr>
-          <a:xfrm>
-            <a:off x="3337560" y="3383280"/>
-            <a:ext cx="4937760" cy="1211580"/>
-          </a:xfrm>
-          <a:prstGeom prst="line">
-            <a:avLst/>
-          </a:prstGeom>
-          <a:noFill/>
-          <a:ln w="17780">
-            <a:solidFill>
-              <a:srgbClr val="C25E28"/>
-            </a:solidFill>
-            <a:prstDash val="solid"/>
-            <a:headEnd type="triangle"/>
-          </a:ln>
-        </p:spPr>
-      </p:sp>
-      <p:sp>
-        <p:nvSpPr>
-          <p:cNvPr id="19" name="Text 17"/>
-          <p:cNvSpPr/>
-          <p:nvPr/>
-        </p:nvSpPr>
-        <p:spPr>
-          <a:xfrm>
-            <a:off x="1051560" y="4069080"/>
-            <a:ext cx="2286000" cy="274320"/>
-          </a:xfrm>
-          <a:prstGeom prst="rect">
-            <a:avLst/>
-          </a:prstGeom>
-          <a:noFill/>
-          <a:ln/>
-        </p:spPr>
-        <p:txBody>
-          <a:bodyPr wrap="square" lIns="0" tIns="0" rIns="0" bIns="0" rtlCol="0" anchor="ctr"/>
-          <a:lstStyle/>
-          <a:p>
-            <a:pPr algn="ctr" indent="0" marL="0">
-              <a:buNone/>
-            </a:pPr>
-            <a:r>
-              <a:rPr lang="en-US" sz="1150" dirty="0">
-                <a:solidFill>
-                  <a:srgbClr val="6E7F8B"/>
-                </a:solidFill>
-                <a:latin typeface="Calibri" pitchFamily="34" charset="0"/>
-                <a:ea typeface="Calibri" pitchFamily="34" charset="-122"/>
-                <a:cs typeface="Calibri" pitchFamily="34" charset="-120"/>
-              </a:rPr>
-              <a:t>each dial-back carries the nonce</a:t>
-            </a:r>
-            <a:endParaRPr lang="en-US" sz="1150" dirty="0"/>
-          </a:p>
-        </p:txBody>
-      </p:sp>
-      <p:sp>
-        <p:nvSpPr>
-          <p:cNvPr id="20" name="Shape 18"/>
-          <p:cNvSpPr/>
-          <p:nvPr/>
-        </p:nvSpPr>
-        <p:spPr>
-          <a:xfrm>
-            <a:off x="685800" y="5376672"/>
-            <a:ext cx="118872" cy="118872"/>
-          </a:xfrm>
-          <a:prstGeom prst="ellipse">
-            <a:avLst/>
-          </a:prstGeom>
-          <a:solidFill>
-            <a:srgbClr val="0E7C86"/>
-          </a:solidFill>
-          <a:ln w="12700">
-            <a:solidFill>
-              <a:srgbClr val="0E7C86"/>
-            </a:solidFill>
-            <a:prstDash val="solid"/>
-          </a:ln>
-        </p:spPr>
-      </p:sp>
-      <p:sp>
-        <p:nvSpPr>
-          <p:cNvPr id="21" name="Text 19"/>
-          <p:cNvSpPr/>
-          <p:nvPr/>
-        </p:nvSpPr>
-        <p:spPr>
-          <a:xfrm>
-            <a:off x="1005840" y="5257800"/>
-            <a:ext cx="10469880" cy="384048"/>
-          </a:xfrm>
-          <a:prstGeom prst="rect">
-            <a:avLst/>
-          </a:prstGeom>
-          <a:noFill/>
-          <a:ln/>
-        </p:spPr>
-        <p:txBody>
-          <a:bodyPr wrap="square" lIns="0" tIns="0" rIns="0" bIns="0" rtlCol="0" anchor="ctr"/>
-          <a:lstStyle/>
-          <a:p>
-            <a:pPr indent="0" marL="0">
-              <a:buNone/>
-            </a:pPr>
-            <a:r>
-              <a:rPr lang="en-US" sz="1650" dirty="0">
-                <a:solidFill>
-                  <a:srgbClr val="3E4C57"/>
-                </a:solidFill>
-                <a:latin typeface="Calibri" pitchFamily="34" charset="0"/>
-                <a:ea typeface="Calibri" pitchFamily="34" charset="-122"/>
-                <a:cs typeface="Calibri" pitchFamily="34" charset="-120"/>
-              </a:rPr>
-              <a:t>Only friends. The probe asks each of them directly.</a:t>
-            </a:r>
-            <a:endParaRPr lang="en-US" sz="1650" dirty="0"/>
-          </a:p>
-        </p:txBody>
-      </p:sp>
-      <p:sp>
-        <p:nvSpPr>
-          <p:cNvPr id="22" name="Shape 20"/>
-          <p:cNvSpPr/>
-          <p:nvPr/>
-        </p:nvSpPr>
-        <p:spPr>
-          <a:xfrm>
-            <a:off x="685800" y="5779008"/>
-            <a:ext cx="118872" cy="118872"/>
-          </a:xfrm>
-          <a:prstGeom prst="ellipse">
-            <a:avLst/>
-          </a:prstGeom>
-          <a:solidFill>
-            <a:srgbClr val="0E7C86"/>
-          </a:solidFill>
-          <a:ln w="12700">
-            <a:solidFill>
-              <a:srgbClr val="0E7C86"/>
-            </a:solidFill>
-            <a:prstDash val="solid"/>
-          </a:ln>
-        </p:spPr>
-      </p:sp>
-      <p:sp>
-        <p:nvSpPr>
-          <p:cNvPr id="23" name="Text 21"/>
-          <p:cNvSpPr/>
-          <p:nvPr/>
-        </p:nvSpPr>
-        <p:spPr>
-          <a:xfrm>
-            <a:off x="1005840" y="5660136"/>
-            <a:ext cx="10469880" cy="384048"/>
-          </a:xfrm>
-          <a:prstGeom prst="rect">
-            <a:avLst/>
-          </a:prstGeom>
-          <a:noFill/>
-          <a:ln/>
-        </p:spPr>
-        <p:txBody>
-          <a:bodyPr wrap="square" lIns="0" tIns="0" rIns="0" bIns="0" rtlCol="0" anchor="ctr"/>
-          <a:lstStyle/>
-          <a:p>
-            <a:pPr indent="0" marL="0">
-              <a:buNone/>
-            </a:pPr>
-            <a:r>
-              <a:rPr lang="en-US" sz="1650" dirty="0">
-                <a:solidFill>
-                  <a:srgbClr val="3E4C57"/>
-                </a:solidFill>
-                <a:latin typeface="Calibri" pitchFamily="34" charset="0"/>
-                <a:ea typeface="Calibri" pitchFamily="34" charset="-122"/>
-                <a:cs typeface="Calibri" pitchFamily="34" charset="-120"/>
-              </a:rPr>
-              <a:t>They dial back from different addresses and ports.</a:t>
-            </a:r>
-            <a:endParaRPr lang="en-US" sz="1650" dirty="0"/>
-          </a:p>
-        </p:txBody>
-      </p:sp>
-      <p:sp>
-        <p:nvSpPr>
-          <p:cNvPr id="24" name="Shape 22"/>
-          <p:cNvSpPr/>
-          <p:nvPr/>
-        </p:nvSpPr>
-        <p:spPr>
-          <a:xfrm>
-            <a:off x="685800" y="6181344"/>
-            <a:ext cx="118872" cy="118872"/>
-          </a:xfrm>
-          <a:prstGeom prst="ellipse">
-            <a:avLst/>
-          </a:prstGeom>
-          <a:solidFill>
-            <a:srgbClr val="0E7C86"/>
-          </a:solidFill>
-          <a:ln w="12700">
-            <a:solidFill>
-              <a:srgbClr val="0E7C86"/>
-            </a:solidFill>
-            <a:prstDash val="solid"/>
-          </a:ln>
-        </p:spPr>
-      </p:sp>
-      <p:sp>
-        <p:nvSpPr>
-          <p:cNvPr id="25" name="Text 23"/>
-          <p:cNvSpPr/>
-          <p:nvPr/>
-        </p:nvSpPr>
-        <p:spPr>
-          <a:xfrm>
-            <a:off x="1005840" y="6062472"/>
-            <a:ext cx="10469880" cy="384048"/>
-          </a:xfrm>
-          <a:prstGeom prst="rect">
-            <a:avLst/>
-          </a:prstGeom>
-          <a:noFill/>
-          <a:ln/>
-        </p:spPr>
-        <p:txBody>
-          <a:bodyPr wrap="square" lIns="0" tIns="0" rIns="0" bIns="0" rtlCol="0" anchor="ctr"/>
-          <a:lstStyle/>
-          <a:p>
-            <a:pPr indent="0" marL="0">
-              <a:buNone/>
-            </a:pPr>
-            <a:r>
-              <a:rPr lang="en-US" sz="1650" dirty="0">
-                <a:solidFill>
-                  <a:srgbClr val="3E4C57"/>
-                </a:solidFill>
-                <a:latin typeface="Calibri" pitchFamily="34" charset="0"/>
-                <a:ea typeface="Calibri" pitchFamily="34" charset="-122"/>
-                <a:cs typeface="Calibri" pitchFamily="34" charset="-120"/>
-              </a:rPr>
-              <a:t>A nonce in each reply makes a fabricated dial-back impossible.</a:t>
-            </a:r>
-            <a:endParaRPr lang="en-US" sz="1650" dirty="0"/>
           </a:p>
         </p:txBody>
       </p:sp>
@@ -4797,7 +4752,7 @@
                 <a:ea typeface="Calibri" pitchFamily="34" charset="-122"/>
                 <a:cs typeface="Calibri" pitchFamily="34" charset="-120"/>
               </a:rPr>
-              <a:t>WHAT COULD INVALIDATE THE RESULT</a:t>
+              <a:t>THE IDEA</a:t>
             </a:r>
             <a:endParaRPr lang="en-US" sz="1100" dirty="0"/>
           </a:p>
@@ -4836,7 +4791,7 @@
                 <a:ea typeface="Cambria" pitchFamily="34" charset="-122"/>
                 <a:cs typeface="Cambria" pitchFamily="34" charset="-120"/>
               </a:rPr>
-              <a:t>Two validity threats</a:t>
+              <a:t>Witness-based detection</a:t>
             </a:r>
             <a:endParaRPr lang="en-US" sz="3600" dirty="0"/>
           </a:p>
@@ -4850,20 +4805,20 @@
         </p:nvSpPr>
         <p:spPr>
           <a:xfrm>
-            <a:off x="685800" y="2103120"/>
-            <a:ext cx="5212080" cy="2651760"/>
+            <a:off x="1051560" y="2880360"/>
+            <a:ext cx="2286000" cy="1005840"/>
           </a:xfrm>
           <a:prstGeom prst="roundRect">
             <a:avLst>
-              <a:gd name="adj" fmla="val 2069"/>
+              <a:gd name="adj" fmla="val 5455"/>
             </a:avLst>
           </a:prstGeom>
           <a:solidFill>
             <a:srgbClr val="EEF3F4"/>
           </a:solidFill>
-          <a:ln w="6350">
+          <a:ln w="17780">
             <a:solidFill>
-              <a:srgbClr val="EEF3F4"/>
+              <a:srgbClr val="0E7C86"/>
             </a:solidFill>
             <a:prstDash val="solid"/>
           </a:ln>
@@ -4871,22 +4826,360 @@
       </p:sp>
       <p:sp>
         <p:nvSpPr>
-          <p:cNvPr id="5" name="Shape 3"/>
-          <p:cNvSpPr/>
-          <p:nvPr/>
-        </p:nvSpPr>
-        <p:spPr>
-          <a:xfrm>
-            <a:off x="1051560" y="2377440"/>
-            <a:ext cx="365760" cy="365760"/>
-          </a:xfrm>
-          <a:prstGeom prst="ellipse">
-            <a:avLst/>
+          <p:cNvPr id="5" name="Text 3"/>
+          <p:cNvSpPr/>
+          <p:nvPr/>
+        </p:nvSpPr>
+        <p:spPr>
+          <a:xfrm>
+            <a:off x="1051560" y="3063240"/>
+            <a:ext cx="2286000" cy="329184"/>
+          </a:xfrm>
+          <a:prstGeom prst="rect">
+            <a:avLst/>
+          </a:prstGeom>
+          <a:noFill/>
+          <a:ln/>
+        </p:spPr>
+        <p:txBody>
+          <a:bodyPr wrap="square" lIns="0" tIns="0" rIns="0" bIns="0" rtlCol="0" anchor="ctr"/>
+          <a:lstStyle/>
+          <a:p>
+            <a:pPr algn="ctr" indent="0" marL="0">
+              <a:buNone/>
+            </a:pPr>
+            <a:r>
+              <a:rPr lang="en-US" sz="1700" b="1" dirty="0">
+                <a:solidFill>
+                  <a:srgbClr val="16202A"/>
+                </a:solidFill>
+                <a:latin typeface="Cambria" pitchFamily="34" charset="0"/>
+                <a:ea typeface="Cambria" pitchFamily="34" charset="-122"/>
+                <a:cs typeface="Cambria" pitchFamily="34" charset="-120"/>
+              </a:rPr>
+              <a:t>Probe</a:t>
+            </a:r>
+            <a:endParaRPr lang="en-US" sz="1700" dirty="0"/>
+          </a:p>
+        </p:txBody>
+      </p:sp>
+      <p:sp>
+        <p:nvSpPr>
+          <p:cNvPr id="6" name="Text 4"/>
+          <p:cNvSpPr/>
+          <p:nvPr/>
+        </p:nvSpPr>
+        <p:spPr>
+          <a:xfrm>
+            <a:off x="1051560" y="3410712"/>
+            <a:ext cx="2286000" cy="274320"/>
+          </a:xfrm>
+          <a:prstGeom prst="rect">
+            <a:avLst/>
+          </a:prstGeom>
+          <a:noFill/>
+          <a:ln/>
+        </p:spPr>
+        <p:txBody>
+          <a:bodyPr wrap="square" lIns="0" tIns="0" rIns="0" bIns="0" rtlCol="0" anchor="ctr"/>
+          <a:lstStyle/>
+          <a:p>
+            <a:pPr algn="ctr" indent="0" marL="0">
+              <a:buNone/>
+            </a:pPr>
+            <a:r>
+              <a:rPr lang="en-US" sz="1200" dirty="0">
+                <a:solidFill>
+                  <a:srgbClr val="6E7F8B"/>
+                </a:solidFill>
+                <a:latin typeface="Calibri" pitchFamily="34" charset="0"/>
+                <a:ea typeface="Calibri" pitchFamily="34" charset="-122"/>
+                <a:cs typeface="Calibri" pitchFamily="34" charset="-120"/>
+              </a:rPr>
+              <a:t>the device</a:t>
+            </a:r>
+            <a:endParaRPr lang="en-US" sz="1200" dirty="0"/>
+          </a:p>
+        </p:txBody>
+      </p:sp>
+      <p:sp>
+        <p:nvSpPr>
+          <p:cNvPr id="7" name="Shape 5"/>
+          <p:cNvSpPr/>
+          <p:nvPr/>
+        </p:nvSpPr>
+        <p:spPr>
+          <a:xfrm>
+            <a:off x="8275320" y="1965960"/>
+            <a:ext cx="3017520" cy="868680"/>
+          </a:xfrm>
+          <a:prstGeom prst="roundRect">
+            <a:avLst>
+              <a:gd name="adj" fmla="val 6316"/>
+            </a:avLst>
           </a:prstGeom>
           <a:solidFill>
-            <a:srgbClr val="C25E28"/>
+            <a:srgbClr val="EEF3F4"/>
           </a:solidFill>
-          <a:ln w="12700">
+          <a:ln w="16510">
+            <a:solidFill>
+              <a:srgbClr val="0E7C86"/>
+            </a:solidFill>
+            <a:prstDash val="solid"/>
+          </a:ln>
+        </p:spPr>
+      </p:sp>
+      <p:sp>
+        <p:nvSpPr>
+          <p:cNvPr id="8" name="Text 6"/>
+          <p:cNvSpPr/>
+          <p:nvPr/>
+        </p:nvSpPr>
+        <p:spPr>
+          <a:xfrm>
+            <a:off x="8412480" y="2093976"/>
+            <a:ext cx="2743200" cy="292608"/>
+          </a:xfrm>
+          <a:prstGeom prst="rect">
+            <a:avLst/>
+          </a:prstGeom>
+          <a:noFill/>
+          <a:ln/>
+        </p:spPr>
+        <p:txBody>
+          <a:bodyPr wrap="square" lIns="0" tIns="0" rIns="0" bIns="0" rtlCol="0" anchor="ctr"/>
+          <a:lstStyle/>
+          <a:p>
+            <a:pPr indent="0" marL="0">
+              <a:buNone/>
+            </a:pPr>
+            <a:r>
+              <a:rPr lang="en-US" sz="1500" b="1" dirty="0">
+                <a:solidFill>
+                  <a:srgbClr val="16202A"/>
+                </a:solidFill>
+                <a:latin typeface="Cambria" pitchFamily="34" charset="0"/>
+                <a:ea typeface="Cambria" pitchFamily="34" charset="-122"/>
+                <a:cs typeface="Cambria" pitchFamily="34" charset="-120"/>
+              </a:rPr>
+              <a:t>Friend A</a:t>
+            </a:r>
+            <a:endParaRPr lang="en-US" sz="1500" dirty="0"/>
+          </a:p>
+        </p:txBody>
+      </p:sp>
+      <p:sp>
+        <p:nvSpPr>
+          <p:cNvPr id="9" name="Text 7"/>
+          <p:cNvSpPr/>
+          <p:nvPr/>
+        </p:nvSpPr>
+        <p:spPr>
+          <a:xfrm>
+            <a:off x="8412480" y="2404872"/>
+            <a:ext cx="2743200" cy="274320"/>
+          </a:xfrm>
+          <a:prstGeom prst="rect">
+            <a:avLst/>
+          </a:prstGeom>
+          <a:noFill/>
+          <a:ln/>
+        </p:spPr>
+        <p:txBody>
+          <a:bodyPr wrap="square" lIns="0" tIns="0" rIns="0" bIns="0" rtlCol="0" anchor="ctr"/>
+          <a:lstStyle/>
+          <a:p>
+            <a:pPr indent="0" marL="0">
+              <a:buNone/>
+            </a:pPr>
+            <a:r>
+              <a:rPr lang="en-US" sz="1150" dirty="0">
+                <a:solidFill>
+                  <a:srgbClr val="0E7C86"/>
+                </a:solidFill>
+                <a:latin typeface="Calibri" pitchFamily="34" charset="0"/>
+                <a:ea typeface="Calibri" pitchFamily="34" charset="-122"/>
+                <a:cs typeface="Calibri" pitchFamily="34" charset="-120"/>
+              </a:rPr>
+              <a:t>session open</a:t>
+            </a:r>
+            <a:endParaRPr lang="en-US" sz="1150" dirty="0"/>
+          </a:p>
+        </p:txBody>
+      </p:sp>
+      <p:sp>
+        <p:nvSpPr>
+          <p:cNvPr id="10" name="Shape 8"/>
+          <p:cNvSpPr/>
+          <p:nvPr/>
+        </p:nvSpPr>
+        <p:spPr>
+          <a:xfrm flipV="1">
+            <a:off x="3337560" y="2400300"/>
+            <a:ext cx="4937760" cy="982980"/>
+          </a:xfrm>
+          <a:prstGeom prst="line">
+            <a:avLst/>
+          </a:prstGeom>
+          <a:noFill/>
+          <a:ln w="17780">
+            <a:solidFill>
+              <a:srgbClr val="0E7C86"/>
+            </a:solidFill>
+            <a:prstDash val="solid"/>
+            <a:headEnd type="triangle"/>
+          </a:ln>
+        </p:spPr>
+      </p:sp>
+      <p:sp>
+        <p:nvSpPr>
+          <p:cNvPr id="11" name="Shape 9"/>
+          <p:cNvSpPr/>
+          <p:nvPr/>
+        </p:nvSpPr>
+        <p:spPr>
+          <a:xfrm>
+            <a:off x="8275320" y="3063240"/>
+            <a:ext cx="3017520" cy="868680"/>
+          </a:xfrm>
+          <a:prstGeom prst="roundRect">
+            <a:avLst>
+              <a:gd name="adj" fmla="val 6316"/>
+            </a:avLst>
+          </a:prstGeom>
+          <a:solidFill>
+            <a:srgbClr val="EEF3F4"/>
+          </a:solidFill>
+          <a:ln w="16510">
+            <a:solidFill>
+              <a:srgbClr val="0E7C86"/>
+            </a:solidFill>
+            <a:prstDash val="solid"/>
+          </a:ln>
+        </p:spPr>
+      </p:sp>
+      <p:sp>
+        <p:nvSpPr>
+          <p:cNvPr id="12" name="Text 10"/>
+          <p:cNvSpPr/>
+          <p:nvPr/>
+        </p:nvSpPr>
+        <p:spPr>
+          <a:xfrm>
+            <a:off x="8412480" y="3191256"/>
+            <a:ext cx="2743200" cy="292608"/>
+          </a:xfrm>
+          <a:prstGeom prst="rect">
+            <a:avLst/>
+          </a:prstGeom>
+          <a:noFill/>
+          <a:ln/>
+        </p:spPr>
+        <p:txBody>
+          <a:bodyPr wrap="square" lIns="0" tIns="0" rIns="0" bIns="0" rtlCol="0" anchor="ctr"/>
+          <a:lstStyle/>
+          <a:p>
+            <a:pPr indent="0" marL="0">
+              <a:buNone/>
+            </a:pPr>
+            <a:r>
+              <a:rPr lang="en-US" sz="1500" b="1" dirty="0">
+                <a:solidFill>
+                  <a:srgbClr val="16202A"/>
+                </a:solidFill>
+                <a:latin typeface="Cambria" pitchFamily="34" charset="0"/>
+                <a:ea typeface="Cambria" pitchFamily="34" charset="-122"/>
+                <a:cs typeface="Cambria" pitchFamily="34" charset="-120"/>
+              </a:rPr>
+              <a:t>Friend B</a:t>
+            </a:r>
+            <a:endParaRPr lang="en-US" sz="1500" dirty="0"/>
+          </a:p>
+        </p:txBody>
+      </p:sp>
+      <p:sp>
+        <p:nvSpPr>
+          <p:cNvPr id="13" name="Text 11"/>
+          <p:cNvSpPr/>
+          <p:nvPr/>
+        </p:nvSpPr>
+        <p:spPr>
+          <a:xfrm>
+            <a:off x="8412480" y="3502152"/>
+            <a:ext cx="2743200" cy="274320"/>
+          </a:xfrm>
+          <a:prstGeom prst="rect">
+            <a:avLst/>
+          </a:prstGeom>
+          <a:noFill/>
+          <a:ln/>
+        </p:spPr>
+        <p:txBody>
+          <a:bodyPr wrap="square" lIns="0" tIns="0" rIns="0" bIns="0" rtlCol="0" anchor="ctr"/>
+          <a:lstStyle/>
+          <a:p>
+            <a:pPr indent="0" marL="0">
+              <a:buNone/>
+            </a:pPr>
+            <a:r>
+              <a:rPr lang="en-US" sz="1150" dirty="0">
+                <a:solidFill>
+                  <a:srgbClr val="0E7C86"/>
+                </a:solidFill>
+                <a:latin typeface="Calibri" pitchFamily="34" charset="0"/>
+                <a:ea typeface="Calibri" pitchFamily="34" charset="-122"/>
+                <a:cs typeface="Calibri" pitchFamily="34" charset="-120"/>
+              </a:rPr>
+              <a:t>new source port</a:t>
+            </a:r>
+            <a:endParaRPr lang="en-US" sz="1150" dirty="0"/>
+          </a:p>
+        </p:txBody>
+      </p:sp>
+      <p:sp>
+        <p:nvSpPr>
+          <p:cNvPr id="14" name="Shape 12"/>
+          <p:cNvSpPr/>
+          <p:nvPr/>
+        </p:nvSpPr>
+        <p:spPr>
+          <a:xfrm>
+            <a:off x="3337560" y="3383280"/>
+            <a:ext cx="4937760" cy="114300"/>
+          </a:xfrm>
+          <a:prstGeom prst="line">
+            <a:avLst/>
+          </a:prstGeom>
+          <a:noFill/>
+          <a:ln w="17780">
+            <a:solidFill>
+              <a:srgbClr val="0E7C86"/>
+            </a:solidFill>
+            <a:prstDash val="solid"/>
+            <a:headEnd type="triangle"/>
+          </a:ln>
+        </p:spPr>
+      </p:sp>
+      <p:sp>
+        <p:nvSpPr>
+          <p:cNvPr id="15" name="Shape 13"/>
+          <p:cNvSpPr/>
+          <p:nvPr/>
+        </p:nvSpPr>
+        <p:spPr>
+          <a:xfrm>
+            <a:off x="8275320" y="4160520"/>
+            <a:ext cx="3017520" cy="868680"/>
+          </a:xfrm>
+          <a:prstGeom prst="roundRect">
+            <a:avLst>
+              <a:gd name="adj" fmla="val 6316"/>
+            </a:avLst>
+          </a:prstGeom>
+          <a:solidFill>
+            <a:srgbClr val="EEF3F4"/>
+          </a:solidFill>
+          <a:ln w="16510">
             <a:solidFill>
               <a:srgbClr val="C25E28"/>
             </a:solidFill>
@@ -4896,30 +5189,30 @@
       </p:sp>
       <p:sp>
         <p:nvSpPr>
-          <p:cNvPr id="6" name="Text 4"/>
-          <p:cNvSpPr/>
-          <p:nvPr/>
-        </p:nvSpPr>
-        <p:spPr>
-          <a:xfrm>
-            <a:off x="1051560" y="2880360"/>
-            <a:ext cx="4480560" cy="365760"/>
-          </a:xfrm>
-          <a:prstGeom prst="rect">
-            <a:avLst/>
-          </a:prstGeom>
-          <a:noFill/>
-          <a:ln/>
-        </p:spPr>
-        <p:txBody>
-          <a:bodyPr wrap="square" lIns="0" tIns="0" rIns="0" bIns="0" rtlCol="0" anchor="ctr"/>
-          <a:lstStyle/>
-          <a:p>
-            <a:pPr indent="0" marL="0">
-              <a:buNone/>
-            </a:pPr>
-            <a:r>
-              <a:rPr lang="en-US" sz="2000" b="1" dirty="0">
+          <p:cNvPr id="16" name="Text 14"/>
+          <p:cNvSpPr/>
+          <p:nvPr/>
+        </p:nvSpPr>
+        <p:spPr>
+          <a:xfrm>
+            <a:off x="8412480" y="4288536"/>
+            <a:ext cx="2743200" cy="292608"/>
+          </a:xfrm>
+          <a:prstGeom prst="rect">
+            <a:avLst/>
+          </a:prstGeom>
+          <a:noFill/>
+          <a:ln/>
+        </p:spPr>
+        <p:txBody>
+          <a:bodyPr wrap="square" lIns="0" tIns="0" rIns="0" bIns="0" rtlCol="0" anchor="ctr"/>
+          <a:lstStyle/>
+          <a:p>
+            <a:pPr indent="0" marL="0">
+              <a:buNone/>
+            </a:pPr>
+            <a:r>
+              <a:rPr lang="en-US" sz="1500" b="1" dirty="0">
                 <a:solidFill>
                   <a:srgbClr val="16202A"/>
                 </a:solidFill>
@@ -4927,241 +5220,124 @@
                 <a:ea typeface="Cambria" pitchFamily="34" charset="-122"/>
                 <a:cs typeface="Cambria" pitchFamily="34" charset="-120"/>
               </a:rPr>
-              <a:t>Contamination</a:t>
-            </a:r>
-            <a:endParaRPr lang="en-US" sz="2000" dirty="0"/>
-          </a:p>
-        </p:txBody>
-      </p:sp>
-      <p:sp>
-        <p:nvSpPr>
-          <p:cNvPr id="7" name="Shape 5"/>
-          <p:cNvSpPr/>
-          <p:nvPr/>
-        </p:nvSpPr>
-        <p:spPr>
-          <a:xfrm>
-            <a:off x="1051560" y="3456432"/>
-            <a:ext cx="118872" cy="118872"/>
-          </a:xfrm>
-          <a:prstGeom prst="ellipse">
-            <a:avLst/>
-          </a:prstGeom>
-          <a:solidFill>
-            <a:srgbClr val="C25E28"/>
-          </a:solidFill>
-          <a:ln w="12700">
+              <a:t>Friend C</a:t>
+            </a:r>
+            <a:endParaRPr lang="en-US" sz="1500" dirty="0"/>
+          </a:p>
+        </p:txBody>
+      </p:sp>
+      <p:sp>
+        <p:nvSpPr>
+          <p:cNvPr id="17" name="Text 15"/>
+          <p:cNvSpPr/>
+          <p:nvPr/>
+        </p:nvSpPr>
+        <p:spPr>
+          <a:xfrm>
+            <a:off x="8412480" y="4599432"/>
+            <a:ext cx="2743200" cy="274320"/>
+          </a:xfrm>
+          <a:prstGeom prst="rect">
+            <a:avLst/>
+          </a:prstGeom>
+          <a:noFill/>
+          <a:ln/>
+        </p:spPr>
+        <p:txBody>
+          <a:bodyPr wrap="square" lIns="0" tIns="0" rIns="0" bIns="0" rtlCol="0" anchor="ctr"/>
+          <a:lstStyle/>
+          <a:p>
+            <a:pPr indent="0" marL="0">
+              <a:buNone/>
+            </a:pPr>
+            <a:r>
+              <a:rPr lang="en-US" sz="1150" dirty="0">
+                <a:solidFill>
+                  <a:srgbClr val="C25E28"/>
+                </a:solidFill>
+                <a:latin typeface="Calibri" pitchFamily="34" charset="0"/>
+                <a:ea typeface="Calibri" pitchFamily="34" charset="-122"/>
+                <a:cs typeface="Calibri" pitchFamily="34" charset="-120"/>
+              </a:rPr>
+              <a:t>never contacted</a:t>
+            </a:r>
+            <a:endParaRPr lang="en-US" sz="1150" dirty="0"/>
+          </a:p>
+        </p:txBody>
+      </p:sp>
+      <p:sp>
+        <p:nvSpPr>
+          <p:cNvPr id="18" name="Shape 16"/>
+          <p:cNvSpPr/>
+          <p:nvPr/>
+        </p:nvSpPr>
+        <p:spPr>
+          <a:xfrm>
+            <a:off x="3337560" y="3383280"/>
+            <a:ext cx="4937760" cy="1211580"/>
+          </a:xfrm>
+          <a:prstGeom prst="line">
+            <a:avLst/>
+          </a:prstGeom>
+          <a:noFill/>
+          <a:ln w="17780">
             <a:solidFill>
               <a:srgbClr val="C25E28"/>
             </a:solidFill>
             <a:prstDash val="solid"/>
+            <a:headEnd type="triangle"/>
           </a:ln>
         </p:spPr>
       </p:sp>
       <p:sp>
         <p:nvSpPr>
-          <p:cNvPr id="8" name="Text 6"/>
-          <p:cNvSpPr/>
-          <p:nvPr/>
-        </p:nvSpPr>
-        <p:spPr>
-          <a:xfrm>
-            <a:off x="1371600" y="3337560"/>
-            <a:ext cx="4160520" cy="384048"/>
-          </a:xfrm>
-          <a:prstGeom prst="rect">
-            <a:avLst/>
-          </a:prstGeom>
-          <a:noFill/>
-          <a:ln/>
-        </p:spPr>
-        <p:txBody>
-          <a:bodyPr wrap="square" lIns="0" tIns="0" rIns="0" bIns="0" rtlCol="0" anchor="ctr"/>
-          <a:lstStyle/>
-          <a:p>
-            <a:pPr indent="0" marL="0">
-              <a:buNone/>
-            </a:pPr>
-            <a:r>
-              <a:rPr lang="en-US" sz="1350" dirty="0">
-                <a:solidFill>
-                  <a:srgbClr val="3E4C57"/>
+          <p:cNvPr id="19" name="Text 17"/>
+          <p:cNvSpPr/>
+          <p:nvPr/>
+        </p:nvSpPr>
+        <p:spPr>
+          <a:xfrm>
+            <a:off x="1051560" y="4069080"/>
+            <a:ext cx="2286000" cy="274320"/>
+          </a:xfrm>
+          <a:prstGeom prst="rect">
+            <a:avLst/>
+          </a:prstGeom>
+          <a:noFill/>
+          <a:ln/>
+        </p:spPr>
+        <p:txBody>
+          <a:bodyPr wrap="square" lIns="0" tIns="0" rIns="0" bIns="0" rtlCol="0" anchor="ctr"/>
+          <a:lstStyle/>
+          <a:p>
+            <a:pPr algn="ctr" indent="0" marL="0">
+              <a:buNone/>
+            </a:pPr>
+            <a:r>
+              <a:rPr lang="en-US" sz="1150" dirty="0">
+                <a:solidFill>
+                  <a:srgbClr val="6E7F8B"/>
                 </a:solidFill>
                 <a:latin typeface="Calibri" pitchFamily="34" charset="0"/>
                 <a:ea typeface="Calibri" pitchFamily="34" charset="-122"/>
                 <a:cs typeface="Calibri" pitchFamily="34" charset="-120"/>
               </a:rPr>
-              <a:t>Witnesses are the peers we already transmit to.</a:t>
-            </a:r>
-            <a:endParaRPr lang="en-US" sz="1350" dirty="0"/>
-          </a:p>
-        </p:txBody>
-      </p:sp>
-      <p:sp>
-        <p:nvSpPr>
-          <p:cNvPr id="9" name="Shape 7"/>
-          <p:cNvSpPr/>
-          <p:nvPr/>
-        </p:nvSpPr>
-        <p:spPr>
-          <a:xfrm>
-            <a:off x="1051560" y="3840480"/>
+              <a:t>each dial-back carries the nonce</a:t>
+            </a:r>
+            <a:endParaRPr lang="en-US" sz="1150" dirty="0"/>
+          </a:p>
+        </p:txBody>
+      </p:sp>
+      <p:sp>
+        <p:nvSpPr>
+          <p:cNvPr id="20" name="Shape 18"/>
+          <p:cNvSpPr/>
+          <p:nvPr/>
+        </p:nvSpPr>
+        <p:spPr>
+          <a:xfrm>
+            <a:off x="685800" y="5376672"/>
             <a:ext cx="118872" cy="118872"/>
-          </a:xfrm>
-          <a:prstGeom prst="ellipse">
-            <a:avLst/>
-          </a:prstGeom>
-          <a:solidFill>
-            <a:srgbClr val="C25E28"/>
-          </a:solidFill>
-          <a:ln w="12700">
-            <a:solidFill>
-              <a:srgbClr val="C25E28"/>
-            </a:solidFill>
-            <a:prstDash val="solid"/>
-          </a:ln>
-        </p:spPr>
-      </p:sp>
-      <p:sp>
-        <p:nvSpPr>
-          <p:cNvPr id="10" name="Text 8"/>
-          <p:cNvSpPr/>
-          <p:nvPr/>
-        </p:nvSpPr>
-        <p:spPr>
-          <a:xfrm>
-            <a:off x="1371600" y="3721608"/>
-            <a:ext cx="4160520" cy="384048"/>
-          </a:xfrm>
-          <a:prstGeom prst="rect">
-            <a:avLst/>
-          </a:prstGeom>
-          <a:noFill/>
-          <a:ln/>
-        </p:spPr>
-        <p:txBody>
-          <a:bodyPr wrap="square" lIns="0" tIns="0" rIns="0" bIns="0" rtlCol="0" anchor="ctr"/>
-          <a:lstStyle/>
-          <a:p>
-            <a:pPr indent="0" marL="0">
-              <a:buNone/>
-            </a:pPr>
-            <a:r>
-              <a:rPr lang="en-US" sz="1350" dirty="0">
-                <a:solidFill>
-                  <a:srgbClr val="3E4C57"/>
-                </a:solidFill>
-                <a:latin typeface="Calibri" pitchFamily="34" charset="0"/>
-                <a:ea typeface="Calibri" pitchFamily="34" charset="-122"/>
-                <a:cs typeface="Calibri" pitchFamily="34" charset="-120"/>
-              </a:rPr>
-              <a:t>It measures our own mapping, not the NAT rule.</a:t>
-            </a:r>
-            <a:endParaRPr lang="en-US" sz="1350" dirty="0"/>
-          </a:p>
-        </p:txBody>
-      </p:sp>
-      <p:sp>
-        <p:nvSpPr>
-          <p:cNvPr id="11" name="Shape 9"/>
-          <p:cNvSpPr/>
-          <p:nvPr/>
-        </p:nvSpPr>
-        <p:spPr>
-          <a:xfrm>
-            <a:off x="1051560" y="4224528"/>
-            <a:ext cx="118872" cy="118872"/>
-          </a:xfrm>
-          <a:prstGeom prst="ellipse">
-            <a:avLst/>
-          </a:prstGeom>
-          <a:solidFill>
-            <a:srgbClr val="C25E28"/>
-          </a:solidFill>
-          <a:ln w="12700">
-            <a:solidFill>
-              <a:srgbClr val="C25E28"/>
-            </a:solidFill>
-            <a:prstDash val="solid"/>
-          </a:ln>
-        </p:spPr>
-      </p:sp>
-      <p:sp>
-        <p:nvSpPr>
-          <p:cNvPr id="12" name="Text 10"/>
-          <p:cNvSpPr/>
-          <p:nvPr/>
-        </p:nvSpPr>
-        <p:spPr>
-          <a:xfrm>
-            <a:off x="1371600" y="4105656"/>
-            <a:ext cx="4160520" cy="384048"/>
-          </a:xfrm>
-          <a:prstGeom prst="rect">
-            <a:avLst/>
-          </a:prstGeom>
-          <a:noFill/>
-          <a:ln/>
-        </p:spPr>
-        <p:txBody>
-          <a:bodyPr wrap="square" lIns="0" tIns="0" rIns="0" bIns="0" rtlCol="0" anchor="ctr"/>
-          <a:lstStyle/>
-          <a:p>
-            <a:pPr indent="0" marL="0">
-              <a:buNone/>
-            </a:pPr>
-            <a:r>
-              <a:rPr lang="en-US" sz="1350" dirty="0">
-                <a:solidFill>
-                  <a:srgbClr val="3E4C57"/>
-                </a:solidFill>
-                <a:latin typeface="Calibri" pitchFamily="34" charset="0"/>
-                <a:ea typeface="Calibri" pitchFamily="34" charset="-122"/>
-                <a:cs typeface="Calibri" pitchFamily="34" charset="-120"/>
-              </a:rPr>
-              <a:t>Guard: a per-test send history discards contacted sources.</a:t>
-            </a:r>
-            <a:endParaRPr lang="en-US" sz="1350" dirty="0"/>
-          </a:p>
-        </p:txBody>
-      </p:sp>
-      <p:sp>
-        <p:nvSpPr>
-          <p:cNvPr id="13" name="Shape 11"/>
-          <p:cNvSpPr/>
-          <p:nvPr/>
-        </p:nvSpPr>
-        <p:spPr>
-          <a:xfrm>
-            <a:off x="6263640" y="2103120"/>
-            <a:ext cx="5212080" cy="2651760"/>
-          </a:xfrm>
-          <a:prstGeom prst="roundRect">
-            <a:avLst>
-              <a:gd name="adj" fmla="val 2069"/>
-            </a:avLst>
-          </a:prstGeom>
-          <a:solidFill>
-            <a:srgbClr val="EEF3F4"/>
-          </a:solidFill>
-          <a:ln w="6350">
-            <a:solidFill>
-              <a:srgbClr val="EEF3F4"/>
-            </a:solidFill>
-            <a:prstDash val="solid"/>
-          </a:ln>
-        </p:spPr>
-      </p:sp>
-      <p:sp>
-        <p:nvSpPr>
-          <p:cNvPr id="14" name="Shape 12"/>
-          <p:cNvSpPr/>
-          <p:nvPr/>
-        </p:nvSpPr>
-        <p:spPr>
-          <a:xfrm>
-            <a:off x="6629400" y="2377440"/>
-            <a:ext cx="365760" cy="365760"/>
           </a:xfrm>
           <a:prstGeom prst="ellipse">
             <a:avLst/>
@@ -5179,52 +5355,52 @@
       </p:sp>
       <p:sp>
         <p:nvSpPr>
-          <p:cNvPr id="15" name="Text 13"/>
-          <p:cNvSpPr/>
-          <p:nvPr/>
-        </p:nvSpPr>
-        <p:spPr>
-          <a:xfrm>
-            <a:off x="6629400" y="2880360"/>
-            <a:ext cx="4480560" cy="365760"/>
-          </a:xfrm>
-          <a:prstGeom prst="rect">
-            <a:avLst/>
-          </a:prstGeom>
-          <a:noFill/>
-          <a:ln/>
-        </p:spPr>
-        <p:txBody>
-          <a:bodyPr wrap="square" lIns="0" tIns="0" rIns="0" bIns="0" rtlCol="0" anchor="ctr"/>
-          <a:lstStyle/>
-          <a:p>
-            <a:pPr indent="0" marL="0">
-              <a:buNone/>
-            </a:pPr>
-            <a:r>
-              <a:rPr lang="en-US" sz="2000" b="1" dirty="0">
-                <a:solidFill>
-                  <a:srgbClr val="16202A"/>
-                </a:solidFill>
-                <a:latin typeface="Cambria" pitchFamily="34" charset="0"/>
-                <a:ea typeface="Cambria" pitchFamily="34" charset="-122"/>
-                <a:cs typeface="Cambria" pitchFamily="34" charset="-120"/>
-              </a:rPr>
-              <a:t>Dishonest witnesses</a:t>
-            </a:r>
-            <a:endParaRPr lang="en-US" sz="2000" dirty="0"/>
-          </a:p>
-        </p:txBody>
-      </p:sp>
-      <p:sp>
-        <p:nvSpPr>
-          <p:cNvPr id="16" name="Shape 14"/>
-          <p:cNvSpPr/>
-          <p:nvPr/>
-        </p:nvSpPr>
-        <p:spPr>
-          <a:xfrm>
-            <a:off x="6629400" y="3456432"/>
+          <p:cNvPr id="21" name="Text 19"/>
+          <p:cNvSpPr/>
+          <p:nvPr/>
+        </p:nvSpPr>
+        <p:spPr>
+          <a:xfrm>
+            <a:off x="1005840" y="5257800"/>
+            <a:ext cx="10469880" cy="384048"/>
+          </a:xfrm>
+          <a:prstGeom prst="rect">
+            <a:avLst/>
+          </a:prstGeom>
+          <a:noFill/>
+          <a:ln/>
+        </p:spPr>
+        <p:txBody>
+          <a:bodyPr wrap="square" lIns="0" tIns="0" rIns="0" bIns="0" rtlCol="0" anchor="ctr"/>
+          <a:lstStyle/>
+          <a:p>
+            <a:pPr indent="0" marL="0">
+              <a:buNone/>
+            </a:pPr>
+            <a:r>
+              <a:rPr lang="en-US" sz="1650" dirty="0">
+                <a:solidFill>
+                  <a:srgbClr val="3E4C57"/>
+                </a:solidFill>
+                <a:latin typeface="Calibri" pitchFamily="34" charset="0"/>
+                <a:ea typeface="Calibri" pitchFamily="34" charset="-122"/>
+                <a:cs typeface="Calibri" pitchFamily="34" charset="-120"/>
+              </a:rPr>
+              <a:t>Only friends. The probe asks each of them directly.</a:t>
+            </a:r>
+            <a:endParaRPr lang="en-US" sz="1650" dirty="0"/>
+          </a:p>
+        </p:txBody>
+      </p:sp>
+      <p:sp>
+        <p:nvSpPr>
+          <p:cNvPr id="22" name="Shape 20"/>
+          <p:cNvSpPr/>
+          <p:nvPr/>
+        </p:nvSpPr>
+        <p:spPr>
+          <a:xfrm>
+            <a:off x="685800" y="5779008"/>
             <a:ext cx="118872" cy="118872"/>
           </a:xfrm>
           <a:prstGeom prst="ellipse">
@@ -5243,30 +5419,30 @@
       </p:sp>
       <p:sp>
         <p:nvSpPr>
-          <p:cNvPr id="17" name="Text 15"/>
-          <p:cNvSpPr/>
-          <p:nvPr/>
-        </p:nvSpPr>
-        <p:spPr>
-          <a:xfrm>
-            <a:off x="6949440" y="3337560"/>
-            <a:ext cx="4160520" cy="384048"/>
-          </a:xfrm>
-          <a:prstGeom prst="rect">
-            <a:avLst/>
-          </a:prstGeom>
-          <a:noFill/>
-          <a:ln/>
-        </p:spPr>
-        <p:txBody>
-          <a:bodyPr wrap="square" lIns="0" tIns="0" rIns="0" bIns="0" rtlCol="0" anchor="ctr"/>
-          <a:lstStyle/>
-          <a:p>
-            <a:pPr indent="0" marL="0">
-              <a:buNone/>
-            </a:pPr>
-            <a:r>
-              <a:rPr lang="en-US" sz="1350" dirty="0">
+          <p:cNvPr id="23" name="Text 21"/>
+          <p:cNvSpPr/>
+          <p:nvPr/>
+        </p:nvSpPr>
+        <p:spPr>
+          <a:xfrm>
+            <a:off x="1005840" y="5660136"/>
+            <a:ext cx="10469880" cy="384048"/>
+          </a:xfrm>
+          <a:prstGeom prst="rect">
+            <a:avLst/>
+          </a:prstGeom>
+          <a:noFill/>
+          <a:ln/>
+        </p:spPr>
+        <p:txBody>
+          <a:bodyPr wrap="square" lIns="0" tIns="0" rIns="0" bIns="0" rtlCol="0" anchor="ctr"/>
+          <a:lstStyle/>
+          <a:p>
+            <a:pPr indent="0" marL="0">
+              <a:buNone/>
+            </a:pPr>
+            <a:r>
+              <a:rPr lang="en-US" sz="1650" dirty="0">
                 <a:solidFill>
                   <a:srgbClr val="3E4C57"/>
                 </a:solidFill>
@@ -5274,21 +5450,21 @@
                 <a:ea typeface="Calibri" pitchFamily="34" charset="-122"/>
                 <a:cs typeface="Calibri" pitchFamily="34" charset="-120"/>
               </a:rPr>
-              <a:t>A nonce cannot be forged, but a failure can be fabricated.</a:t>
-            </a:r>
-            <a:endParaRPr lang="en-US" sz="1350" dirty="0"/>
-          </a:p>
-        </p:txBody>
-      </p:sp>
-      <p:sp>
-        <p:nvSpPr>
-          <p:cNvPr id="18" name="Shape 16"/>
-          <p:cNvSpPr/>
-          <p:nvPr/>
-        </p:nvSpPr>
-        <p:spPr>
-          <a:xfrm>
-            <a:off x="6629400" y="3840480"/>
+              <a:t>They dial back from different addresses and ports.</a:t>
+            </a:r>
+            <a:endParaRPr lang="en-US" sz="1650" dirty="0"/>
+          </a:p>
+        </p:txBody>
+      </p:sp>
+      <p:sp>
+        <p:nvSpPr>
+          <p:cNvPr id="24" name="Shape 22"/>
+          <p:cNvSpPr/>
+          <p:nvPr/>
+        </p:nvSpPr>
+        <p:spPr>
+          <a:xfrm>
+            <a:off x="685800" y="6181344"/>
             <a:ext cx="118872" cy="118872"/>
           </a:xfrm>
           <a:prstGeom prst="ellipse">
@@ -5307,30 +5483,30 @@
       </p:sp>
       <p:sp>
         <p:nvSpPr>
-          <p:cNvPr id="19" name="Text 17"/>
-          <p:cNvSpPr/>
-          <p:nvPr/>
-        </p:nvSpPr>
-        <p:spPr>
-          <a:xfrm>
-            <a:off x="6949440" y="3721608"/>
-            <a:ext cx="4160520" cy="384048"/>
-          </a:xfrm>
-          <a:prstGeom prst="rect">
-            <a:avLst/>
-          </a:prstGeom>
-          <a:noFill/>
-          <a:ln/>
-        </p:spPr>
-        <p:txBody>
-          <a:bodyPr wrap="square" lIns="0" tIns="0" rIns="0" bIns="0" rtlCol="0" anchor="ctr"/>
-          <a:lstStyle/>
-          <a:p>
-            <a:pPr indent="0" marL="0">
-              <a:buNone/>
-            </a:pPr>
-            <a:r>
-              <a:rPr lang="en-US" sz="1350" dirty="0">
+          <p:cNvPr id="25" name="Text 23"/>
+          <p:cNvSpPr/>
+          <p:nvPr/>
+        </p:nvSpPr>
+        <p:spPr>
+          <a:xfrm>
+            <a:off x="1005840" y="6062472"/>
+            <a:ext cx="10469880" cy="384048"/>
+          </a:xfrm>
+          <a:prstGeom prst="rect">
+            <a:avLst/>
+          </a:prstGeom>
+          <a:noFill/>
+          <a:ln/>
+        </p:spPr>
+        <p:txBody>
+          <a:bodyPr wrap="square" lIns="0" tIns="0" rIns="0" bIns="0" rtlCol="0" anchor="ctr"/>
+          <a:lstStyle/>
+          <a:p>
+            <a:pPr indent="0" marL="0">
+              <a:buNone/>
+            </a:pPr>
+            <a:r>
+              <a:rPr lang="en-US" sz="1650" dirty="0">
                 <a:solidFill>
                   <a:srgbClr val="3E4C57"/>
                 </a:solidFill>
@@ -5338,112 +5514,9 @@
                 <a:ea typeface="Calibri" pitchFamily="34" charset="-122"/>
                 <a:cs typeface="Calibri" pitchFamily="34" charset="-120"/>
               </a:rPr>
-              <a:t>One verified success proves reachability.</a:t>
-            </a:r>
-            <a:endParaRPr lang="en-US" sz="1350" dirty="0"/>
-          </a:p>
-        </p:txBody>
-      </p:sp>
-      <p:sp>
-        <p:nvSpPr>
-          <p:cNvPr id="20" name="Shape 18"/>
-          <p:cNvSpPr/>
-          <p:nvPr/>
-        </p:nvSpPr>
-        <p:spPr>
-          <a:xfrm>
-            <a:off x="6629400" y="4224528"/>
-            <a:ext cx="118872" cy="118872"/>
-          </a:xfrm>
-          <a:prstGeom prst="ellipse">
-            <a:avLst/>
-          </a:prstGeom>
-          <a:solidFill>
-            <a:srgbClr val="0E7C86"/>
-          </a:solidFill>
-          <a:ln w="12700">
-            <a:solidFill>
-              <a:srgbClr val="0E7C86"/>
-            </a:solidFill>
-            <a:prstDash val="solid"/>
-          </a:ln>
-        </p:spPr>
-      </p:sp>
-      <p:sp>
-        <p:nvSpPr>
-          <p:cNvPr id="21" name="Text 19"/>
-          <p:cNvSpPr/>
-          <p:nvPr/>
-        </p:nvSpPr>
-        <p:spPr>
-          <a:xfrm>
-            <a:off x="6949440" y="4105656"/>
-            <a:ext cx="4160520" cy="384048"/>
-          </a:xfrm>
-          <a:prstGeom prst="rect">
-            <a:avLst/>
-          </a:prstGeom>
-          <a:noFill/>
-          <a:ln/>
-        </p:spPr>
-        <p:txBody>
-          <a:bodyPr wrap="square" lIns="0" tIns="0" rIns="0" bIns="0" rtlCol="0" anchor="ctr"/>
-          <a:lstStyle/>
-          <a:p>
-            <a:pPr indent="0" marL="0">
-              <a:buNone/>
-            </a:pPr>
-            <a:r>
-              <a:rPr lang="en-US" sz="1350" dirty="0">
-                <a:solidFill>
-                  <a:srgbClr val="3E4C57"/>
-                </a:solidFill>
-                <a:latin typeface="Calibri" pitchFamily="34" charset="0"/>
-                <a:ea typeface="Calibri" pitchFamily="34" charset="-122"/>
-                <a:cs typeface="Calibri" pitchFamily="34" charset="-120"/>
-              </a:rPr>
-              <a:t>Unreachability needs k independent failures.</a:t>
-            </a:r>
-            <a:endParaRPr lang="en-US" sz="1350" dirty="0"/>
-          </a:p>
-        </p:txBody>
-      </p:sp>
-      <p:sp>
-        <p:nvSpPr>
-          <p:cNvPr id="22" name="Text 20"/>
-          <p:cNvSpPr/>
-          <p:nvPr/>
-        </p:nvSpPr>
-        <p:spPr>
-          <a:xfrm>
-            <a:off x="685800" y="5120640"/>
-            <a:ext cx="10789920" cy="365760"/>
-          </a:xfrm>
-          <a:prstGeom prst="rect">
-            <a:avLst/>
-          </a:prstGeom>
-          <a:noFill/>
-          <a:ln/>
-        </p:spPr>
-        <p:txBody>
-          <a:bodyPr wrap="square" lIns="0" tIns="0" rIns="0" bIns="0" rtlCol="0" anchor="ctr"/>
-          <a:lstStyle/>
-          <a:p>
-            <a:pPr indent="0" marL="0">
-              <a:buNone/>
-            </a:pPr>
-            <a:r>
-              <a:rPr lang="en-US" sz="1500" i="1" dirty="0">
-                <a:solidFill>
-                  <a:srgbClr val="0A5A62"/>
-                </a:solidFill>
-                <a:latin typeface="Calibri" pitchFamily="34" charset="0"/>
-                <a:ea typeface="Calibri" pitchFamily="34" charset="-122"/>
-                <a:cs typeface="Calibri" pitchFamily="34" charset="-120"/>
-              </a:rPr>
-              <a:t>Both are studied on the bench, where we operate every witness and know who lied.</a:t>
-            </a:r>
-            <a:endParaRPr lang="en-US" sz="1500" dirty="0"/>
+              <a:t>A nonce in each reply makes a fabricated dial-back impossible.</a:t>
+            </a:r>
+            <a:endParaRPr lang="en-US" sz="1650" dirty="0"/>
           </a:p>
         </p:txBody>
       </p:sp>
@@ -5505,7 +5578,7 @@
                 <a:ea typeface="Calibri" pitchFamily="34" charset="-122"/>
                 <a:cs typeface="Calibri" pitchFamily="34" charset="-120"/>
               </a:rPr>
-              <a:t>WHAT IS RECORDED</a:t>
+              <a:t>WHAT COULD INVALIDATE THE RESULT</a:t>
             </a:r>
             <a:endParaRPr lang="en-US" sz="1100" dirty="0"/>
           </a:p>
@@ -5544,7 +5617,7 @@
                 <a:ea typeface="Cambria" pitchFamily="34" charset="-122"/>
                 <a:cs typeface="Cambria" pitchFamily="34" charset="-120"/>
               </a:rPr>
-              <a:t>The measurand</a:t>
+              <a:t>Two validity threats</a:t>
             </a:r>
             <a:endParaRPr lang="en-US" sz="3600" dirty="0"/>
           </a:p>
@@ -5558,12 +5631,12 @@
         </p:nvSpPr>
         <p:spPr>
           <a:xfrm>
-            <a:off x="685800" y="2194560"/>
-            <a:ext cx="2468880" cy="1371600"/>
+            <a:off x="685800" y="2103120"/>
+            <a:ext cx="5212080" cy="2651760"/>
           </a:xfrm>
           <a:prstGeom prst="roundRect">
             <a:avLst>
-              <a:gd name="adj" fmla="val 4000"/>
+              <a:gd name="adj" fmla="val 2069"/>
             </a:avLst>
           </a:prstGeom>
           <a:solidFill>
@@ -5579,74 +5652,274 @@
       </p:sp>
       <p:sp>
         <p:nvSpPr>
-          <p:cNvPr id="5" name="Text 3"/>
-          <p:cNvSpPr/>
-          <p:nvPr/>
-        </p:nvSpPr>
-        <p:spPr>
-          <a:xfrm>
-            <a:off x="777240" y="2194560"/>
-            <a:ext cx="2286000" cy="1371600"/>
-          </a:xfrm>
-          <a:prstGeom prst="rect">
-            <a:avLst/>
-          </a:prstGeom>
-          <a:noFill/>
-          <a:ln/>
-        </p:spPr>
-        <p:txBody>
-          <a:bodyPr wrap="square" lIns="0" tIns="0" rIns="0" bIns="0" rtlCol="0" anchor="ctr"/>
-          <a:lstStyle/>
-          <a:p>
-            <a:pPr algn="ctr" indent="0" marL="0">
-              <a:buNone/>
-            </a:pPr>
-            <a:r>
-              <a:rPr lang="en-US" sz="1700" b="1" dirty="0">
-                <a:solidFill>
-                  <a:srgbClr val="0A5A62"/>
+          <p:cNvPr id="5" name="Shape 3"/>
+          <p:cNvSpPr/>
+          <p:nvPr/>
+        </p:nvSpPr>
+        <p:spPr>
+          <a:xfrm>
+            <a:off x="1051560" y="2377440"/>
+            <a:ext cx="365760" cy="365760"/>
+          </a:xfrm>
+          <a:prstGeom prst="ellipse">
+            <a:avLst/>
+          </a:prstGeom>
+          <a:solidFill>
+            <a:srgbClr val="C25E28"/>
+          </a:solidFill>
+          <a:ln w="12700">
+            <a:solidFill>
+              <a:srgbClr val="C25E28"/>
+            </a:solidFill>
+            <a:prstDash val="solid"/>
+          </a:ln>
+        </p:spPr>
+      </p:sp>
+      <p:sp>
+        <p:nvSpPr>
+          <p:cNvPr id="6" name="Text 4"/>
+          <p:cNvSpPr/>
+          <p:nvPr/>
+        </p:nvSpPr>
+        <p:spPr>
+          <a:xfrm>
+            <a:off x="1051560" y="2880360"/>
+            <a:ext cx="4480560" cy="365760"/>
+          </a:xfrm>
+          <a:prstGeom prst="rect">
+            <a:avLst/>
+          </a:prstGeom>
+          <a:noFill/>
+          <a:ln/>
+        </p:spPr>
+        <p:txBody>
+          <a:bodyPr wrap="square" lIns="0" tIns="0" rIns="0" bIns="0" rtlCol="0" anchor="ctr"/>
+          <a:lstStyle/>
+          <a:p>
+            <a:pPr indent="0" marL="0">
+              <a:buNone/>
+            </a:pPr>
+            <a:r>
+              <a:rPr lang="en-US" sz="2000" b="1" dirty="0">
+                <a:solidFill>
+                  <a:srgbClr val="16202A"/>
                 </a:solidFill>
                 <a:latin typeface="Cambria" pitchFamily="34" charset="0"/>
                 <a:ea typeface="Cambria" pitchFamily="34" charset="-122"/>
                 <a:cs typeface="Cambria" pitchFamily="34" charset="-120"/>
               </a:rPr>
-              <a:t>Mapping</a:t>
-            </a:r>
-            <a:endParaRPr lang="en-US" sz="1700" dirty="0"/>
-          </a:p>
-          <a:p>
-            <a:pPr algn="ctr" indent="0" marL="0">
-              <a:buNone/>
-            </a:pPr>
-            <a:r>
-              <a:rPr lang="en-US" sz="1700" b="1" dirty="0">
-                <a:solidFill>
-                  <a:srgbClr val="0A5A62"/>
-                </a:solidFill>
-                <a:latin typeface="Cambria" pitchFamily="34" charset="0"/>
-                <a:ea typeface="Cambria" pitchFamily="34" charset="-122"/>
-                <a:cs typeface="Cambria" pitchFamily="34" charset="-120"/>
-              </a:rPr>
-              <a:t>behavior</a:t>
-            </a:r>
-            <a:endParaRPr lang="en-US" sz="1700" dirty="0"/>
-          </a:p>
-        </p:txBody>
-      </p:sp>
-      <p:sp>
-        <p:nvSpPr>
-          <p:cNvPr id="6" name="Shape 4"/>
-          <p:cNvSpPr/>
-          <p:nvPr/>
-        </p:nvSpPr>
-        <p:spPr>
-          <a:xfrm>
-            <a:off x="3474720" y="2194560"/>
-            <a:ext cx="2468880" cy="1371600"/>
+              <a:t>Contamination</a:t>
+            </a:r>
+            <a:endParaRPr lang="en-US" sz="2000" dirty="0"/>
+          </a:p>
+        </p:txBody>
+      </p:sp>
+      <p:sp>
+        <p:nvSpPr>
+          <p:cNvPr id="7" name="Shape 5"/>
+          <p:cNvSpPr/>
+          <p:nvPr/>
+        </p:nvSpPr>
+        <p:spPr>
+          <a:xfrm>
+            <a:off x="1051560" y="3456432"/>
+            <a:ext cx="118872" cy="118872"/>
+          </a:xfrm>
+          <a:prstGeom prst="ellipse">
+            <a:avLst/>
+          </a:prstGeom>
+          <a:solidFill>
+            <a:srgbClr val="C25E28"/>
+          </a:solidFill>
+          <a:ln w="12700">
+            <a:solidFill>
+              <a:srgbClr val="C25E28"/>
+            </a:solidFill>
+            <a:prstDash val="solid"/>
+          </a:ln>
+        </p:spPr>
+      </p:sp>
+      <p:sp>
+        <p:nvSpPr>
+          <p:cNvPr id="8" name="Text 6"/>
+          <p:cNvSpPr/>
+          <p:nvPr/>
+        </p:nvSpPr>
+        <p:spPr>
+          <a:xfrm>
+            <a:off x="1371600" y="3337560"/>
+            <a:ext cx="4160520" cy="384048"/>
+          </a:xfrm>
+          <a:prstGeom prst="rect">
+            <a:avLst/>
+          </a:prstGeom>
+          <a:noFill/>
+          <a:ln/>
+        </p:spPr>
+        <p:txBody>
+          <a:bodyPr wrap="square" lIns="0" tIns="0" rIns="0" bIns="0" rtlCol="0" anchor="ctr"/>
+          <a:lstStyle/>
+          <a:p>
+            <a:pPr indent="0" marL="0">
+              <a:buNone/>
+            </a:pPr>
+            <a:r>
+              <a:rPr lang="en-US" sz="1350" dirty="0">
+                <a:solidFill>
+                  <a:srgbClr val="3E4C57"/>
+                </a:solidFill>
+                <a:latin typeface="Calibri" pitchFamily="34" charset="0"/>
+                <a:ea typeface="Calibri" pitchFamily="34" charset="-122"/>
+                <a:cs typeface="Calibri" pitchFamily="34" charset="-120"/>
+              </a:rPr>
+              <a:t>Witnesses are the peers we already transmit to.</a:t>
+            </a:r>
+            <a:endParaRPr lang="en-US" sz="1350" dirty="0"/>
+          </a:p>
+        </p:txBody>
+      </p:sp>
+      <p:sp>
+        <p:nvSpPr>
+          <p:cNvPr id="9" name="Shape 7"/>
+          <p:cNvSpPr/>
+          <p:nvPr/>
+        </p:nvSpPr>
+        <p:spPr>
+          <a:xfrm>
+            <a:off x="1051560" y="3840480"/>
+            <a:ext cx="118872" cy="118872"/>
+          </a:xfrm>
+          <a:prstGeom prst="ellipse">
+            <a:avLst/>
+          </a:prstGeom>
+          <a:solidFill>
+            <a:srgbClr val="C25E28"/>
+          </a:solidFill>
+          <a:ln w="12700">
+            <a:solidFill>
+              <a:srgbClr val="C25E28"/>
+            </a:solidFill>
+            <a:prstDash val="solid"/>
+          </a:ln>
+        </p:spPr>
+      </p:sp>
+      <p:sp>
+        <p:nvSpPr>
+          <p:cNvPr id="10" name="Text 8"/>
+          <p:cNvSpPr/>
+          <p:nvPr/>
+        </p:nvSpPr>
+        <p:spPr>
+          <a:xfrm>
+            <a:off x="1371600" y="3721608"/>
+            <a:ext cx="4160520" cy="384048"/>
+          </a:xfrm>
+          <a:prstGeom prst="rect">
+            <a:avLst/>
+          </a:prstGeom>
+          <a:noFill/>
+          <a:ln/>
+        </p:spPr>
+        <p:txBody>
+          <a:bodyPr wrap="square" lIns="0" tIns="0" rIns="0" bIns="0" rtlCol="0" anchor="ctr"/>
+          <a:lstStyle/>
+          <a:p>
+            <a:pPr indent="0" marL="0">
+              <a:buNone/>
+            </a:pPr>
+            <a:r>
+              <a:rPr lang="en-US" sz="1350" dirty="0">
+                <a:solidFill>
+                  <a:srgbClr val="3E4C57"/>
+                </a:solidFill>
+                <a:latin typeface="Calibri" pitchFamily="34" charset="0"/>
+                <a:ea typeface="Calibri" pitchFamily="34" charset="-122"/>
+                <a:cs typeface="Calibri" pitchFamily="34" charset="-120"/>
+              </a:rPr>
+              <a:t>It measures our own mapping, not the NAT rule.</a:t>
+            </a:r>
+            <a:endParaRPr lang="en-US" sz="1350" dirty="0"/>
+          </a:p>
+        </p:txBody>
+      </p:sp>
+      <p:sp>
+        <p:nvSpPr>
+          <p:cNvPr id="11" name="Shape 9"/>
+          <p:cNvSpPr/>
+          <p:nvPr/>
+        </p:nvSpPr>
+        <p:spPr>
+          <a:xfrm>
+            <a:off x="1051560" y="4224528"/>
+            <a:ext cx="118872" cy="118872"/>
+          </a:xfrm>
+          <a:prstGeom prst="ellipse">
+            <a:avLst/>
+          </a:prstGeom>
+          <a:solidFill>
+            <a:srgbClr val="C25E28"/>
+          </a:solidFill>
+          <a:ln w="12700">
+            <a:solidFill>
+              <a:srgbClr val="C25E28"/>
+            </a:solidFill>
+            <a:prstDash val="solid"/>
+          </a:ln>
+        </p:spPr>
+      </p:sp>
+      <p:sp>
+        <p:nvSpPr>
+          <p:cNvPr id="12" name="Text 10"/>
+          <p:cNvSpPr/>
+          <p:nvPr/>
+        </p:nvSpPr>
+        <p:spPr>
+          <a:xfrm>
+            <a:off x="1371600" y="4105656"/>
+            <a:ext cx="4160520" cy="384048"/>
+          </a:xfrm>
+          <a:prstGeom prst="rect">
+            <a:avLst/>
+          </a:prstGeom>
+          <a:noFill/>
+          <a:ln/>
+        </p:spPr>
+        <p:txBody>
+          <a:bodyPr wrap="square" lIns="0" tIns="0" rIns="0" bIns="0" rtlCol="0" anchor="ctr"/>
+          <a:lstStyle/>
+          <a:p>
+            <a:pPr indent="0" marL="0">
+              <a:buNone/>
+            </a:pPr>
+            <a:r>
+              <a:rPr lang="en-US" sz="1350" dirty="0">
+                <a:solidFill>
+                  <a:srgbClr val="3E4C57"/>
+                </a:solidFill>
+                <a:latin typeface="Calibri" pitchFamily="34" charset="0"/>
+                <a:ea typeface="Calibri" pitchFamily="34" charset="-122"/>
+                <a:cs typeface="Calibri" pitchFamily="34" charset="-120"/>
+              </a:rPr>
+              <a:t>Guard: a per-test send history discards contacted sources.</a:t>
+            </a:r>
+            <a:endParaRPr lang="en-US" sz="1350" dirty="0"/>
+          </a:p>
+        </p:txBody>
+      </p:sp>
+      <p:sp>
+        <p:nvSpPr>
+          <p:cNvPr id="13" name="Shape 11"/>
+          <p:cNvSpPr/>
+          <p:nvPr/>
+        </p:nvSpPr>
+        <p:spPr>
+          <a:xfrm>
+            <a:off x="6263640" y="2103120"/>
+            <a:ext cx="5212080" cy="2651760"/>
           </a:xfrm>
           <a:prstGeom prst="roundRect">
             <a:avLst>
-              <a:gd name="adj" fmla="val 4000"/>
+              <a:gd name="adj" fmla="val 2069"/>
             </a:avLst>
           </a:prstGeom>
           <a:solidFill>
@@ -5662,236 +5935,14 @@
       </p:sp>
       <p:sp>
         <p:nvSpPr>
-          <p:cNvPr id="7" name="Text 5"/>
-          <p:cNvSpPr/>
-          <p:nvPr/>
-        </p:nvSpPr>
-        <p:spPr>
-          <a:xfrm>
-            <a:off x="3566160" y="2194560"/>
-            <a:ext cx="2286000" cy="1371600"/>
-          </a:xfrm>
-          <a:prstGeom prst="rect">
-            <a:avLst/>
-          </a:prstGeom>
-          <a:noFill/>
-          <a:ln/>
-        </p:spPr>
-        <p:txBody>
-          <a:bodyPr wrap="square" lIns="0" tIns="0" rIns="0" bIns="0" rtlCol="0" anchor="ctr"/>
-          <a:lstStyle/>
-          <a:p>
-            <a:pPr algn="ctr" indent="0" marL="0">
-              <a:buNone/>
-            </a:pPr>
-            <a:r>
-              <a:rPr lang="en-US" sz="1700" b="1" dirty="0">
-                <a:solidFill>
-                  <a:srgbClr val="0A5A62"/>
-                </a:solidFill>
-                <a:latin typeface="Cambria" pitchFamily="34" charset="0"/>
-                <a:ea typeface="Cambria" pitchFamily="34" charset="-122"/>
-                <a:cs typeface="Cambria" pitchFamily="34" charset="-120"/>
-              </a:rPr>
-              <a:t>Filtering</a:t>
-            </a:r>
-            <a:endParaRPr lang="en-US" sz="1700" dirty="0"/>
-          </a:p>
-          <a:p>
-            <a:pPr algn="ctr" indent="0" marL="0">
-              <a:buNone/>
-            </a:pPr>
-            <a:r>
-              <a:rPr lang="en-US" sz="1700" b="1" dirty="0">
-                <a:solidFill>
-                  <a:srgbClr val="0A5A62"/>
-                </a:solidFill>
-                <a:latin typeface="Cambria" pitchFamily="34" charset="0"/>
-                <a:ea typeface="Cambria" pitchFamily="34" charset="-122"/>
-                <a:cs typeface="Cambria" pitchFamily="34" charset="-120"/>
-              </a:rPr>
-              <a:t>behavior</a:t>
-            </a:r>
-            <a:endParaRPr lang="en-US" sz="1700" dirty="0"/>
-          </a:p>
-        </p:txBody>
-      </p:sp>
-      <p:sp>
-        <p:nvSpPr>
-          <p:cNvPr id="8" name="Shape 6"/>
-          <p:cNvSpPr/>
-          <p:nvPr/>
-        </p:nvSpPr>
-        <p:spPr>
-          <a:xfrm>
-            <a:off x="6263640" y="2194560"/>
-            <a:ext cx="2468880" cy="1371600"/>
-          </a:xfrm>
-          <a:prstGeom prst="roundRect">
-            <a:avLst>
-              <a:gd name="adj" fmla="val 4000"/>
-            </a:avLst>
-          </a:prstGeom>
-          <a:solidFill>
-            <a:srgbClr val="EEF3F4"/>
-          </a:solidFill>
-          <a:ln w="6350">
-            <a:solidFill>
-              <a:srgbClr val="EEF3F4"/>
-            </a:solidFill>
-            <a:prstDash val="solid"/>
-          </a:ln>
-        </p:spPr>
-      </p:sp>
-      <p:sp>
-        <p:nvSpPr>
-          <p:cNvPr id="9" name="Text 7"/>
-          <p:cNvSpPr/>
-          <p:nvPr/>
-        </p:nvSpPr>
-        <p:spPr>
-          <a:xfrm>
-            <a:off x="6355080" y="2194560"/>
-            <a:ext cx="2286000" cy="1371600"/>
-          </a:xfrm>
-          <a:prstGeom prst="rect">
-            <a:avLst/>
-          </a:prstGeom>
-          <a:noFill/>
-          <a:ln/>
-        </p:spPr>
-        <p:txBody>
-          <a:bodyPr wrap="square" lIns="0" tIns="0" rIns="0" bIns="0" rtlCol="0" anchor="ctr"/>
-          <a:lstStyle/>
-          <a:p>
-            <a:pPr algn="ctr" indent="0" marL="0">
-              <a:buNone/>
-            </a:pPr>
-            <a:r>
-              <a:rPr lang="en-US" sz="1700" b="1" dirty="0">
-                <a:solidFill>
-                  <a:srgbClr val="0A5A62"/>
-                </a:solidFill>
-                <a:latin typeface="Cambria" pitchFamily="34" charset="0"/>
-                <a:ea typeface="Cambria" pitchFamily="34" charset="-122"/>
-                <a:cs typeface="Cambria" pitchFamily="34" charset="-120"/>
-              </a:rPr>
-              <a:t>Port</a:t>
-            </a:r>
-            <a:endParaRPr lang="en-US" sz="1700" dirty="0"/>
-          </a:p>
-          <a:p>
-            <a:pPr algn="ctr" indent="0" marL="0">
-              <a:buNone/>
-            </a:pPr>
-            <a:r>
-              <a:rPr lang="en-US" sz="1700" b="1" dirty="0">
-                <a:solidFill>
-                  <a:srgbClr val="0A5A62"/>
-                </a:solidFill>
-                <a:latin typeface="Cambria" pitchFamily="34" charset="0"/>
-                <a:ea typeface="Cambria" pitchFamily="34" charset="-122"/>
-                <a:cs typeface="Cambria" pitchFamily="34" charset="-120"/>
-              </a:rPr>
-              <a:t>preservation</a:t>
-            </a:r>
-            <a:endParaRPr lang="en-US" sz="1700" dirty="0"/>
-          </a:p>
-        </p:txBody>
-      </p:sp>
-      <p:sp>
-        <p:nvSpPr>
-          <p:cNvPr id="10" name="Shape 8"/>
-          <p:cNvSpPr/>
-          <p:nvPr/>
-        </p:nvSpPr>
-        <p:spPr>
-          <a:xfrm>
-            <a:off x="9052560" y="2194560"/>
-            <a:ext cx="2468880" cy="1371600"/>
-          </a:xfrm>
-          <a:prstGeom prst="roundRect">
-            <a:avLst>
-              <a:gd name="adj" fmla="val 4000"/>
-            </a:avLst>
-          </a:prstGeom>
-          <a:solidFill>
-            <a:srgbClr val="EEF3F4"/>
-          </a:solidFill>
-          <a:ln w="6350">
-            <a:solidFill>
-              <a:srgbClr val="EEF3F4"/>
-            </a:solidFill>
-            <a:prstDash val="solid"/>
-          </a:ln>
-        </p:spPr>
-      </p:sp>
-      <p:sp>
-        <p:nvSpPr>
-          <p:cNvPr id="11" name="Text 9"/>
-          <p:cNvSpPr/>
-          <p:nvPr/>
-        </p:nvSpPr>
-        <p:spPr>
-          <a:xfrm>
-            <a:off x="9144000" y="2194560"/>
-            <a:ext cx="2286000" cy="1371600"/>
-          </a:xfrm>
-          <a:prstGeom prst="rect">
-            <a:avLst/>
-          </a:prstGeom>
-          <a:noFill/>
-          <a:ln/>
-        </p:spPr>
-        <p:txBody>
-          <a:bodyPr wrap="square" lIns="0" tIns="0" rIns="0" bIns="0" rtlCol="0" anchor="ctr"/>
-          <a:lstStyle/>
-          <a:p>
-            <a:pPr algn="ctr" indent="0" marL="0">
-              <a:buNone/>
-            </a:pPr>
-            <a:r>
-              <a:rPr lang="en-US" sz="1700" b="1" dirty="0">
-                <a:solidFill>
-                  <a:srgbClr val="0A5A62"/>
-                </a:solidFill>
-                <a:latin typeface="Cambria" pitchFamily="34" charset="0"/>
-                <a:ea typeface="Cambria" pitchFamily="34" charset="-122"/>
-                <a:cs typeface="Cambria" pitchFamily="34" charset="-120"/>
-              </a:rPr>
-              <a:t>Mapping</a:t>
-            </a:r>
-            <a:endParaRPr lang="en-US" sz="1700" dirty="0"/>
-          </a:p>
-          <a:p>
-            <a:pPr algn="ctr" indent="0" marL="0">
-              <a:buNone/>
-            </a:pPr>
-            <a:r>
-              <a:rPr lang="en-US" sz="1700" b="1" dirty="0">
-                <a:solidFill>
-                  <a:srgbClr val="0A5A62"/>
-                </a:solidFill>
-                <a:latin typeface="Cambria" pitchFamily="34" charset="0"/>
-                <a:ea typeface="Cambria" pitchFamily="34" charset="-122"/>
-                <a:cs typeface="Cambria" pitchFamily="34" charset="-120"/>
-              </a:rPr>
-              <a:t>lifetime</a:t>
-            </a:r>
-            <a:endParaRPr lang="en-US" sz="1700" dirty="0"/>
-          </a:p>
-        </p:txBody>
-      </p:sp>
-      <p:sp>
-        <p:nvSpPr>
-          <p:cNvPr id="12" name="Shape 10"/>
-          <p:cNvSpPr/>
-          <p:nvPr/>
-        </p:nvSpPr>
-        <p:spPr>
-          <a:xfrm>
-            <a:off x="685800" y="4142232"/>
-            <a:ext cx="118872" cy="118872"/>
+          <p:cNvPr id="14" name="Shape 12"/>
+          <p:cNvSpPr/>
+          <p:nvPr/>
+        </p:nvSpPr>
+        <p:spPr>
+          <a:xfrm>
+            <a:off x="6629400" y="2377440"/>
+            <a:ext cx="365760" cy="365760"/>
           </a:xfrm>
           <a:prstGeom prst="ellipse">
             <a:avLst/>
@@ -5909,52 +5960,52 @@
       </p:sp>
       <p:sp>
         <p:nvSpPr>
-          <p:cNvPr id="13" name="Text 11"/>
-          <p:cNvSpPr/>
-          <p:nvPr/>
-        </p:nvSpPr>
-        <p:spPr>
-          <a:xfrm>
-            <a:off x="1005840" y="4023360"/>
-            <a:ext cx="10469880" cy="384048"/>
-          </a:xfrm>
-          <a:prstGeom prst="rect">
-            <a:avLst/>
-          </a:prstGeom>
-          <a:noFill/>
-          <a:ln/>
-        </p:spPr>
-        <p:txBody>
-          <a:bodyPr wrap="square" lIns="0" tIns="0" rIns="0" bIns="0" rtlCol="0" anchor="ctr"/>
-          <a:lstStyle/>
-          <a:p>
-            <a:pPr indent="0" marL="0">
-              <a:buNone/>
-            </a:pPr>
-            <a:r>
-              <a:rPr lang="en-US" sz="1650" dirty="0">
-                <a:solidFill>
-                  <a:srgbClr val="3E4C57"/>
-                </a:solidFill>
-                <a:latin typeface="Calibri" pitchFamily="34" charset="0"/>
-                <a:ea typeface="Calibri" pitchFamily="34" charset="-122"/>
-                <a:cs typeface="Calibri" pitchFamily="34" charset="-120"/>
-              </a:rPr>
-              <a:t>A tuple, not a NAT type; a single label is derived, never measured.</a:t>
-            </a:r>
-            <a:endParaRPr lang="en-US" sz="1650" dirty="0"/>
-          </a:p>
-        </p:txBody>
-      </p:sp>
-      <p:sp>
-        <p:nvSpPr>
-          <p:cNvPr id="14" name="Shape 12"/>
-          <p:cNvSpPr/>
-          <p:nvPr/>
-        </p:nvSpPr>
-        <p:spPr>
-          <a:xfrm>
-            <a:off x="685800" y="4581144"/>
+          <p:cNvPr id="15" name="Text 13"/>
+          <p:cNvSpPr/>
+          <p:nvPr/>
+        </p:nvSpPr>
+        <p:spPr>
+          <a:xfrm>
+            <a:off x="6629400" y="2880360"/>
+            <a:ext cx="4480560" cy="365760"/>
+          </a:xfrm>
+          <a:prstGeom prst="rect">
+            <a:avLst/>
+          </a:prstGeom>
+          <a:noFill/>
+          <a:ln/>
+        </p:spPr>
+        <p:txBody>
+          <a:bodyPr wrap="square" lIns="0" tIns="0" rIns="0" bIns="0" rtlCol="0" anchor="ctr"/>
+          <a:lstStyle/>
+          <a:p>
+            <a:pPr indent="0" marL="0">
+              <a:buNone/>
+            </a:pPr>
+            <a:r>
+              <a:rPr lang="en-US" sz="2000" b="1" dirty="0">
+                <a:solidFill>
+                  <a:srgbClr val="16202A"/>
+                </a:solidFill>
+                <a:latin typeface="Cambria" pitchFamily="34" charset="0"/>
+                <a:ea typeface="Cambria" pitchFamily="34" charset="-122"/>
+                <a:cs typeface="Cambria" pitchFamily="34" charset="-120"/>
+              </a:rPr>
+              <a:t>Dishonest witnesses</a:t>
+            </a:r>
+            <a:endParaRPr lang="en-US" sz="2000" dirty="0"/>
+          </a:p>
+        </p:txBody>
+      </p:sp>
+      <p:sp>
+        <p:nvSpPr>
+          <p:cNvPr id="16" name="Shape 14"/>
+          <p:cNvSpPr/>
+          <p:nvPr/>
+        </p:nvSpPr>
+        <p:spPr>
+          <a:xfrm>
+            <a:off x="6629400" y="3456432"/>
             <a:ext cx="118872" cy="118872"/>
           </a:xfrm>
           <a:prstGeom prst="ellipse">
@@ -5973,30 +6024,30 @@
       </p:sp>
       <p:sp>
         <p:nvSpPr>
-          <p:cNvPr id="15" name="Text 13"/>
-          <p:cNvSpPr/>
-          <p:nvPr/>
-        </p:nvSpPr>
-        <p:spPr>
-          <a:xfrm>
-            <a:off x="1005840" y="4462272"/>
-            <a:ext cx="10469880" cy="384048"/>
-          </a:xfrm>
-          <a:prstGeom prst="rect">
-            <a:avLst/>
-          </a:prstGeom>
-          <a:noFill/>
-          <a:ln/>
-        </p:spPr>
-        <p:txBody>
-          <a:bodyPr wrap="square" lIns="0" tIns="0" rIns="0" bIns="0" rtlCol="0" anchor="ctr"/>
-          <a:lstStyle/>
-          <a:p>
-            <a:pPr indent="0" marL="0">
-              <a:buNone/>
-            </a:pPr>
-            <a:r>
-              <a:rPr lang="en-US" sz="1650" dirty="0">
+          <p:cNvPr id="17" name="Text 15"/>
+          <p:cNvSpPr/>
+          <p:nvPr/>
+        </p:nvSpPr>
+        <p:spPr>
+          <a:xfrm>
+            <a:off x="6949440" y="3337560"/>
+            <a:ext cx="4160520" cy="384048"/>
+          </a:xfrm>
+          <a:prstGeom prst="rect">
+            <a:avLst/>
+          </a:prstGeom>
+          <a:noFill/>
+          <a:ln/>
+        </p:spPr>
+        <p:txBody>
+          <a:bodyPr wrap="square" lIns="0" tIns="0" rIns="0" bIns="0" rtlCol="0" anchor="ctr"/>
+          <a:lstStyle/>
+          <a:p>
+            <a:pPr indent="0" marL="0">
+              <a:buNone/>
+            </a:pPr>
+            <a:r>
+              <a:rPr lang="en-US" sz="1350" dirty="0">
                 <a:solidFill>
                   <a:srgbClr val="3E4C57"/>
                 </a:solidFill>
@@ -6004,21 +6055,21 @@
                 <a:ea typeface="Calibri" pitchFamily="34" charset="-122"/>
                 <a:cs typeface="Calibri" pitchFamily="34" charset="-120"/>
               </a:rPr>
-              <a:t>Reported per address family and per translation path.</a:t>
-            </a:r>
-            <a:endParaRPr lang="en-US" sz="1650" dirty="0"/>
-          </a:p>
-        </p:txBody>
-      </p:sp>
-      <p:sp>
-        <p:nvSpPr>
-          <p:cNvPr id="16" name="Shape 14"/>
-          <p:cNvSpPr/>
-          <p:nvPr/>
-        </p:nvSpPr>
-        <p:spPr>
-          <a:xfrm>
-            <a:off x="685800" y="5020056"/>
+              <a:t>A nonce cannot be forged, but a failure can be fabricated.</a:t>
+            </a:r>
+            <a:endParaRPr lang="en-US" sz="1350" dirty="0"/>
+          </a:p>
+        </p:txBody>
+      </p:sp>
+      <p:sp>
+        <p:nvSpPr>
+          <p:cNvPr id="18" name="Shape 16"/>
+          <p:cNvSpPr/>
+          <p:nvPr/>
+        </p:nvSpPr>
+        <p:spPr>
+          <a:xfrm>
+            <a:off x="6629400" y="3840480"/>
             <a:ext cx="118872" cy="118872"/>
           </a:xfrm>
           <a:prstGeom prst="ellipse">
@@ -6037,30 +6088,30 @@
       </p:sp>
       <p:sp>
         <p:nvSpPr>
-          <p:cNvPr id="17" name="Text 15"/>
-          <p:cNvSpPr/>
-          <p:nvPr/>
-        </p:nvSpPr>
-        <p:spPr>
-          <a:xfrm>
-            <a:off x="1005840" y="4901184"/>
-            <a:ext cx="10469880" cy="384048"/>
-          </a:xfrm>
-          <a:prstGeom prst="rect">
-            <a:avLst/>
-          </a:prstGeom>
-          <a:noFill/>
-          <a:ln/>
-        </p:spPr>
-        <p:txBody>
-          <a:bodyPr wrap="square" lIns="0" tIns="0" rIns="0" bIns="0" rtlCol="0" anchor="ctr"/>
-          <a:lstStyle/>
-          <a:p>
-            <a:pPr indent="0" marL="0">
-              <a:buNone/>
-            </a:pPr>
-            <a:r>
-              <a:rPr lang="en-US" sz="1650" dirty="0">
+          <p:cNvPr id="19" name="Text 17"/>
+          <p:cNvSpPr/>
+          <p:nvPr/>
+        </p:nvSpPr>
+        <p:spPr>
+          <a:xfrm>
+            <a:off x="6949440" y="3721608"/>
+            <a:ext cx="4160520" cy="384048"/>
+          </a:xfrm>
+          <a:prstGeom prst="rect">
+            <a:avLst/>
+          </a:prstGeom>
+          <a:noFill/>
+          <a:ln/>
+        </p:spPr>
+        <p:txBody>
+          <a:bodyPr wrap="square" lIns="0" tIns="0" rIns="0" bIns="0" rtlCol="0" anchor="ctr"/>
+          <a:lstStyle/>
+          <a:p>
+            <a:pPr indent="0" marL="0">
+              <a:buNone/>
+            </a:pPr>
+            <a:r>
+              <a:rPr lang="en-US" sz="1350" dirty="0">
                 <a:solidFill>
                   <a:srgbClr val="3E4C57"/>
                 </a:solidFill>
@@ -6068,21 +6119,21 @@
                 <a:ea typeface="Calibri" pitchFamily="34" charset="-122"/>
                 <a:cs typeface="Calibri" pitchFamily="34" charset="-120"/>
               </a:rPr>
-              <a:t>autoNAT reports reachability only, so it cannot be the ground truth.</a:t>
-            </a:r>
-            <a:endParaRPr lang="en-US" sz="1650" dirty="0"/>
-          </a:p>
-        </p:txBody>
-      </p:sp>
-      <p:sp>
-        <p:nvSpPr>
-          <p:cNvPr id="18" name="Shape 16"/>
-          <p:cNvSpPr/>
-          <p:nvPr/>
-        </p:nvSpPr>
-        <p:spPr>
-          <a:xfrm>
-            <a:off x="685800" y="5458968"/>
+              <a:t>One verified success proves reachability.</a:t>
+            </a:r>
+            <a:endParaRPr lang="en-US" sz="1350" dirty="0"/>
+          </a:p>
+        </p:txBody>
+      </p:sp>
+      <p:sp>
+        <p:nvSpPr>
+          <p:cNvPr id="20" name="Shape 18"/>
+          <p:cNvSpPr/>
+          <p:nvPr/>
+        </p:nvSpPr>
+        <p:spPr>
+          <a:xfrm>
+            <a:off x="6629400" y="4224528"/>
             <a:ext cx="118872" cy="118872"/>
           </a:xfrm>
           <a:prstGeom prst="ellipse">
@@ -6101,30 +6152,30 @@
       </p:sp>
       <p:sp>
         <p:nvSpPr>
-          <p:cNvPr id="19" name="Text 17"/>
-          <p:cNvSpPr/>
-          <p:nvPr/>
-        </p:nvSpPr>
-        <p:spPr>
-          <a:xfrm>
-            <a:off x="1005840" y="5340096"/>
-            <a:ext cx="10469880" cy="384048"/>
-          </a:xfrm>
-          <a:prstGeom prst="rect">
-            <a:avLst/>
-          </a:prstGeom>
-          <a:noFill/>
-          <a:ln/>
-        </p:spPr>
-        <p:txBody>
-          <a:bodyPr wrap="square" lIns="0" tIns="0" rIns="0" bIns="0" rtlCol="0" anchor="ctr"/>
-          <a:lstStyle/>
-          <a:p>
-            <a:pPr indent="0" marL="0">
-              <a:buNone/>
-            </a:pPr>
-            <a:r>
-              <a:rPr lang="en-US" sz="1650" dirty="0">
+          <p:cNvPr id="21" name="Text 19"/>
+          <p:cNvSpPr/>
+          <p:nvPr/>
+        </p:nvSpPr>
+        <p:spPr>
+          <a:xfrm>
+            <a:off x="6949440" y="4105656"/>
+            <a:ext cx="4160520" cy="384048"/>
+          </a:xfrm>
+          <a:prstGeom prst="rect">
+            <a:avLst/>
+          </a:prstGeom>
+          <a:noFill/>
+          <a:ln/>
+        </p:spPr>
+        <p:txBody>
+          <a:bodyPr wrap="square" lIns="0" tIns="0" rIns="0" bIns="0" rtlCol="0" anchor="ctr"/>
+          <a:lstStyle/>
+          <a:p>
+            <a:pPr indent="0" marL="0">
+              <a:buNone/>
+            </a:pPr>
+            <a:r>
+              <a:rPr lang="en-US" sz="1350" dirty="0">
                 <a:solidFill>
                   <a:srgbClr val="3E4C57"/>
                 </a:solidFill>
@@ -6132,9 +6183,48 @@
                 <a:ea typeface="Calibri" pitchFamily="34" charset="-122"/>
                 <a:cs typeface="Calibri" pitchFamily="34" charset="-120"/>
               </a:rPr>
-              <a:t>Classification is validated against an RFC 5780 server we operate.</a:t>
-            </a:r>
-            <a:endParaRPr lang="en-US" sz="1650" dirty="0"/>
+              <a:t>Unreachability needs k independent failures.</a:t>
+            </a:r>
+            <a:endParaRPr lang="en-US" sz="1350" dirty="0"/>
+          </a:p>
+        </p:txBody>
+      </p:sp>
+      <p:sp>
+        <p:nvSpPr>
+          <p:cNvPr id="22" name="Text 20"/>
+          <p:cNvSpPr/>
+          <p:nvPr/>
+        </p:nvSpPr>
+        <p:spPr>
+          <a:xfrm>
+            <a:off x="685800" y="5120640"/>
+            <a:ext cx="10789920" cy="365760"/>
+          </a:xfrm>
+          <a:prstGeom prst="rect">
+            <a:avLst/>
+          </a:prstGeom>
+          <a:noFill/>
+          <a:ln/>
+        </p:spPr>
+        <p:txBody>
+          <a:bodyPr wrap="square" lIns="0" tIns="0" rIns="0" bIns="0" rtlCol="0" anchor="ctr"/>
+          <a:lstStyle/>
+          <a:p>
+            <a:pPr indent="0" marL="0">
+              <a:buNone/>
+            </a:pPr>
+            <a:r>
+              <a:rPr lang="en-US" sz="1500" i="1" dirty="0">
+                <a:solidFill>
+                  <a:srgbClr val="0A5A62"/>
+                </a:solidFill>
+                <a:latin typeface="Calibri" pitchFamily="34" charset="0"/>
+                <a:ea typeface="Calibri" pitchFamily="34" charset="-122"/>
+                <a:cs typeface="Calibri" pitchFamily="34" charset="-120"/>
+              </a:rPr>
+              <a:t>Both are studied on the bench, where we operate every witness and know who lied.</a:t>
+            </a:r>
+            <a:endParaRPr lang="en-US" sz="1500" dirty="0"/>
           </a:p>
         </p:txBody>
       </p:sp>
@@ -6762,8 +6852,8 @@
         </p:nvSpPr>
         <p:spPr>
           <a:xfrm>
-            <a:off x="685800" y="5760720"/>
-            <a:ext cx="10789920" cy="365760"/>
+            <a:off x="685800" y="5623560"/>
+            <a:ext cx="10789920" cy="320040"/>
           </a:xfrm>
           <a:prstGeom prst="rect">
             <a:avLst/>
@@ -6788,6 +6878,45 @@
                 <a:cs typeface="Calibri" pitchFamily="34" charset="-120"/>
               </a:rPr>
               <a:t>Address-dependent mapping is built deliberately; no netfilter flag produces it.</a:t>
+            </a:r>
+            <a:endParaRPr lang="en-US" sz="1500" dirty="0"/>
+          </a:p>
+        </p:txBody>
+      </p:sp>
+      <p:sp>
+        <p:nvSpPr>
+          <p:cNvPr id="20" name="Text 18"/>
+          <p:cNvSpPr/>
+          <p:nvPr/>
+        </p:nvSpPr>
+        <p:spPr>
+          <a:xfrm>
+            <a:off x="685800" y="5989320"/>
+            <a:ext cx="10789920" cy="320040"/>
+          </a:xfrm>
+          <a:prstGeom prst="rect">
+            <a:avLst/>
+          </a:prstGeom>
+          <a:noFill/>
+          <a:ln/>
+        </p:spPr>
+        <p:txBody>
+          <a:bodyPr wrap="square" lIns="0" tIns="0" rIns="0" bIns="0" rtlCol="0" anchor="ctr"/>
+          <a:lstStyle/>
+          <a:p>
+            <a:pPr indent="0" marL="0">
+              <a:buNone/>
+            </a:pPr>
+            <a:r>
+              <a:rPr lang="en-US" sz="1500" i="1" dirty="0">
+                <a:solidFill>
+                  <a:srgbClr val="0A5A62"/>
+                </a:solidFill>
+                <a:latin typeface="Calibri" pitchFamily="34" charset="0"/>
+                <a:ea typeface="Calibri" pitchFamily="34" charset="-122"/>
+                <a:cs typeface="Calibri" pitchFamily="34" charset="-120"/>
+              </a:rPr>
+              <a:t>autoNAT reports reachability only, so classification is validated against the RFC 5780 server.</a:t>
             </a:r>
             <a:endParaRPr lang="en-US" sz="1500" dirty="0"/>
           </a:p>

--- a/docs/student-projects/grassroots-nat-project.pptx
+++ b/docs/student-projects/grassroots-nat-project.pptx
@@ -1039,7 +1039,7 @@
           <a:p>
             <a:r>
               <a:rPr lang="en-US" dirty="0"/>
-              <a:t>Contamination is the one that would quietly invalidate a field campaign: it biases in the direction that looks like good news. We publish the label difference between contaminated and clean runs as a result in its own right. The aggregation asymmetry follows from the nonce being unforgeable while a claimed failure is free.</a:t>
+              <a:t>Contamination is the one that would quietly invalidate a field campaign: it biases in the direction that looks like good news. We publish the label difference between contaminated and clean runs as a result in its own right. The nonce survives the honesty assumption for a different reason: the peers are honest but the network is not, and an off-path party could otherwise inject something resembling a dial-back. Disagreement between witnesses is diagnostic here, not malicious: it usually means the behavior genuinely depends on the source address or port.</a:t>
             </a:r>
             <a:endParaRPr lang="en-US" dirty="0"/>
           </a:p>
@@ -5578,7 +5578,7 @@
                 <a:ea typeface="Calibri" pitchFamily="34" charset="-122"/>
                 <a:cs typeface="Calibri" pitchFamily="34" charset="-120"/>
               </a:rPr>
-              <a:t>WHAT COULD INVALIDATE THE RESULT</a:t>
+              <a:t>UNDER HONEST PEERS</a:t>
             </a:r>
             <a:endParaRPr lang="en-US" sz="1100" dirty="0"/>
           </a:p>
@@ -5617,7 +5617,7 @@
                 <a:ea typeface="Cambria" pitchFamily="34" charset="-122"/>
                 <a:cs typeface="Cambria" pitchFamily="34" charset="-120"/>
               </a:rPr>
-              <a:t>Two validity threats</a:t>
+              <a:t>Two things that mislead</a:t>
             </a:r>
             <a:endParaRPr lang="en-US" sz="3600" dirty="0"/>
           </a:p>
@@ -5991,7 +5991,7 @@
                 <a:ea typeface="Cambria" pitchFamily="34" charset="-122"/>
                 <a:cs typeface="Cambria" pitchFamily="34" charset="-120"/>
               </a:rPr>
-              <a:t>Dishonest witnesses</a:t>
+              <a:t>Absent dial-backs</a:t>
             </a:r>
             <a:endParaRPr lang="en-US" sz="2000" dirty="0"/>
           </a:p>
@@ -6055,7 +6055,7 @@
                 <a:ea typeface="Calibri" pitchFamily="34" charset="-122"/>
                 <a:cs typeface="Calibri" pitchFamily="34" charset="-120"/>
               </a:rPr>
-              <a:t>A nonce cannot be forged, but a failure can be fabricated.</a:t>
+              <a:t>An arriving dial-back is definitive: the path exists.</a:t>
             </a:r>
             <a:endParaRPr lang="en-US" sz="1350" dirty="0"/>
           </a:p>
@@ -6119,7 +6119,7 @@
                 <a:ea typeface="Calibri" pitchFamily="34" charset="-122"/>
                 <a:cs typeface="Calibri" pitchFamily="34" charset="-120"/>
               </a:rPr>
-              <a:t>One verified success proves reachability.</a:t>
+              <a:t>An absent one is filtering, or simply loss.</a:t>
             </a:r>
             <a:endParaRPr lang="en-US" sz="1350" dirty="0"/>
           </a:p>
@@ -6183,7 +6183,7 @@
                 <a:ea typeface="Calibri" pitchFamily="34" charset="-122"/>
                 <a:cs typeface="Calibri" pitchFamily="34" charset="-120"/>
               </a:rPr>
-              <a:t>Unreachability needs k independent failures.</a:t>
+              <a:t>Negative verdicts need retries and k witnesses.</a:t>
             </a:r>
             <a:endParaRPr lang="en-US" sz="1350" dirty="0"/>
           </a:p>
@@ -6222,7 +6222,7 @@
                 <a:ea typeface="Calibri" pitchFamily="34" charset="-122"/>
                 <a:cs typeface="Calibri" pitchFamily="34" charset="-120"/>
               </a:rPr>
-              <a:t>Both are studied on the bench, where we operate every witness and know who lied.</a:t>
+              <a:t>We assume peers are honest. Relaxing that assumption is follow-on work.</a:t>
             </a:r>
             <a:endParaRPr lang="en-US" sz="1500" dirty="0"/>
           </a:p>

--- a/docs/student-projects/grassroots-nat-project.pptx
+++ b/docs/student-projects/grassroots-nat-project.pptx
@@ -1303,7 +1303,7 @@
           <a:p>
             <a:r>
               <a:rPr lang="en-US" dirty="0"/>
-              <a:t>Every milestone carries an exit criterion in the written brief: ninety-five percent agreement with construction labels on the bench, ninety percent for the witness algorithm, and three adversarial properties proven in tests before the campaign begins.</a:t>
+              <a:t>Every phase carries an exit criterion in the written brief. The week-3 checkpoint is code rather than a document: a reflexive address obtained over the transport’s own socket, which forces the demultiplexer change early and tells us whether the socket can be shared at all. Excluded by design and named as such: the autoNAT sidecar, the byzantine analysis, the weighted prevalence estimate and the decision-rule fit.</a:t>
             </a:r>
             <a:endParaRPr lang="en-US" dirty="0"/>
           </a:p>
@@ -2380,7 +2380,7 @@
                 <a:ea typeface="Cambria" pitchFamily="34" charset="-122"/>
                 <a:cs typeface="Cambria" pitchFamily="34" charset="-120"/>
               </a:rPr>
-              <a:t>autoNAT baseline</a:t>
+              <a:t>UDX fork</a:t>
             </a:r>
             <a:endParaRPr lang="en-US" sz="1900" dirty="0"/>
           </a:p>
@@ -2419,7 +2419,7 @@
                 <a:ea typeface="Calibri" pitchFamily="34" charset="-122"/>
                 <a:cs typeface="Calibri" pitchFamily="34" charset="-120"/>
               </a:rPr>
-              <a:t>An Android-only sidecar, or our own reimplementation.</a:t>
+              <a:t>The guard cannot see UDX’s own sends. Patch the fork, or report the residual.</a:t>
             </a:r>
             <a:endParaRPr lang="en-US" sz="1500" dirty="0"/>
           </a:p>
@@ -7464,7 +7464,7 @@
                 <a:ea typeface="Cambria" pitchFamily="34" charset="-122"/>
                 <a:cs typeface="Cambria" pitchFamily="34" charset="-120"/>
               </a:rPr>
-              <a:t>The six-month plan</a:t>
+              <a:t>One semester</a:t>
             </a:r>
             <a:endParaRPr lang="en-US" sz="3600" dirty="0"/>
           </a:p>
@@ -7530,7 +7530,7 @@
                 <a:ea typeface="Cambria" pitchFamily="34" charset="-122"/>
                 <a:cs typeface="Cambria" pitchFamily="34" charset="-120"/>
               </a:rPr>
-              <a:t>Months 1–2</a:t>
+              <a:t>Weeks 1–3</a:t>
             </a:r>
             <a:endParaRPr lang="en-US" sz="1600" dirty="0"/>
           </a:p>
@@ -7569,7 +7569,7 @@
                 <a:ea typeface="Calibri" pitchFamily="34" charset="-122"/>
                 <a:cs typeface="Calibri" pitchFamily="34" charset="-120"/>
               </a:rPr>
-              <a:t>Measurand and adversary model; reference server; labeled bench</a:t>
+              <a:t>Onboarding; a STUN client on the transport’s own socket. Go/no-go.</a:t>
             </a:r>
             <a:endParaRPr lang="en-US" sz="1650" dirty="0"/>
           </a:p>
@@ -7635,7 +7635,7 @@
                 <a:ea typeface="Cambria" pitchFamily="34" charset="-122"/>
                 <a:cs typeface="Cambria" pitchFamily="34" charset="-120"/>
               </a:rPr>
-              <a:t>Months 3–4</a:t>
+              <a:t>Weeks 4–10</a:t>
             </a:r>
             <a:endParaRPr lang="en-US" sz="1600" dirty="0"/>
           </a:p>
@@ -7674,7 +7674,7 @@
                 <a:ea typeface="Calibri" pitchFamily="34" charset="-122"/>
                 <a:cs typeface="Calibri" pitchFamily="34" charset="-120"/>
               </a:rPr>
-              <a:t>Detection algorithm; autoNAT baseline; the k against f sweep</a:t>
+              <a:t>The oracle and labeled bench; then the witness protocol and its classifier.</a:t>
             </a:r>
             <a:endParaRPr lang="en-US" sz="1650" dirty="0"/>
           </a:p>
@@ -7740,7 +7740,7 @@
                 <a:ea typeface="Cambria" pitchFamily="34" charset="-122"/>
                 <a:cs typeface="Cambria" pitchFamily="34" charset="-120"/>
               </a:rPr>
-              <a:t>Months 5–6</a:t>
+              <a:t>Weeks 11–15</a:t>
             </a:r>
             <a:endParaRPr lang="en-US" sz="1600" dirty="0"/>
           </a:p>
@@ -7779,7 +7779,7 @@
                 <a:ea typeface="Calibri" pitchFamily="34" charset="-122"/>
                 <a:cs typeface="Calibri" pitchFamily="34" charset="-120"/>
               </a:rPr>
-              <a:t>Strata campaign; prevalence; decision rule; submission</a:t>
+              <a:t>Measurement on our own devices across reachable networks; write-up.</a:t>
             </a:r>
             <a:endParaRPr lang="en-US" sz="1650" dirty="0"/>
           </a:p>
@@ -7818,7 +7818,7 @@
                 <a:ea typeface="Calibri" pitchFamily="34" charset="-122"/>
                 <a:cs typeface="Calibri" pitchFamily="34" charset="-120"/>
               </a:rPr>
-              <a:t>Week one: two public addresses, firewall rules, SIMs and handsets. They gate month two.</a:t>
+              <a:t>Week one: two public addresses, firewall rules, SIMs and handsets. They gate week four.</a:t>
             </a:r>
             <a:endParaRPr lang="en-US" sz="1500" dirty="0"/>
           </a:p>

--- a/docs/student-projects/grassroots-nat-project.pptx
+++ b/docs/student-projects/grassroots-nat-project.pptx
@@ -1127,7 +1127,7 @@
           <a:p>
             <a:r>
               <a:rPr lang="en-US" dirty="0"/>
-              <a:t>The correctness claim rests on the bench, where labels are known by construction. The reference server needs two public addresses and two ports per family. Default masquerade reads endpoint-independent and --random-fully reads address-and-port-dependent, so the middle class comes from per-destination SNAT via nftables maps.</a:t>
+              <a:t>The correctness claim rests on the bench, where labels are known by construction. The reference server needs two public addresses and two ports per family. Default masquerade reads endpoint-independent and --random-fully reads address-and-port-dependent, so the middle class comes from per-destination SNAT via nftables maps. The autoNAT cross-check runs as a standalone client on the same network, so it characterizes the network rather than our socket, and it is Wi-Fi only: on cellular it would need tethering, which adds another translation layer.</a:t>
             </a:r>
             <a:endParaRPr lang="en-US" dirty="0"/>
           </a:p>
@@ -6916,7 +6916,7 @@
                 <a:ea typeface="Calibri" pitchFamily="34" charset="-122"/>
                 <a:cs typeface="Calibri" pitchFamily="34" charset="-120"/>
               </a:rPr>
-              <a:t>autoNAT reports reachability only, so classification is validated against the RFC 5780 server.</a:t>
+              <a:t>Friends carry the method; public autoNAT nodes are a spot check on reachability only.</a:t>
             </a:r>
             <a:endParaRPr lang="en-US" sz="1500" dirty="0"/>
           </a:p>

--- a/docs/student-projects/grassroots-nat-project.pptx
+++ b/docs/student-projects/grassroots-nat-project.pptx
@@ -15,9 +15,10 @@
     <p:sldId id="263" r:id="rId9"/>
     <p:sldId id="264" r:id="rId10"/>
     <p:sldId id="265" r:id="rId11"/>
+    <p:sldId id="266" r:id="rId12"/>
   </p:sldIdLst>
   <p:notesMasterIdLst>
-    <p:notesMasterId r:id="rId12"/>
+    <p:notesMasterId r:id="rId13"/>
   </p:notesMasterIdLst>
   <p:sldSz cx="12192000" cy="6858000"/>
   <p:notesSz cx="6858000" cy="12192000"/>
@@ -599,7 +600,7 @@
           <a:p>
             <a:r>
               <a:rPr lang="en-US" dirty="0"/>
-              <a:t>The anchor is IPv6-only in its data plane, which excludes the IPv4-only CGNAT population the study targets; that is a fifth decision and it also affects the product. Three unrelated defects found while surveying the transport are listed in the brief.</a:t>
+              <a:t>Every phase carries an exit criterion in the written brief. The week-3 checkpoint is code rather than a document: a reflexive address obtained over the transport’s own socket, which forces the demultiplexer change early and tells us whether the socket can be shared at all. Excluded by design and named as such: the autoNAT sidecar, the byzantine analysis, the weighted prevalence estimate and the decision-rule fit.</a:t>
             </a:r>
             <a:endParaRPr lang="en-US" dirty="0"/>
           </a:p>
@@ -623,6 +624,94 @@
             <a:fld id="{F7021451-1387-4CA6-816F-3879F97B5CBC}" type="slidenum">
               <a:rPr lang="en-US"/>
               <a:t>10</a:t>
+            </a:fld>
+            <a:endParaRPr lang="en-US"/>
+          </a:p>
+        </p:txBody>
+      </p:sp>
+    </p:spTree>
+    <p:extLst>
+      <p:ext uri="{BB962C8B-B14F-4D97-AF65-F5344CB8AC3E}">
+        <p14:creationId xmlns:p14="http://schemas.microsoft.com/office/powerpoint/2010/main" val="1024086991"/>
+      </p:ext>
+    </p:extLst>
+  </p:cSld>
+  <p:clrMapOvr>
+    <a:masterClrMapping/>
+  </p:clrMapOvr>
+</p:notes>
+</file>
+
+<file path=ppt/notesSlides/notesSlide11.xml><?xml version="1.0" encoding="utf-8"?>
+<p:notes xmlns:a="http://schemas.openxmlformats.org/drawingml/2006/main" xmlns:r="http://schemas.openxmlformats.org/officeDocument/2006/relationships" xmlns:p="http://schemas.openxmlformats.org/presentationml/2006/main">
+  <p:cSld>
+    <p:spTree>
+      <p:nvGrpSpPr>
+        <p:cNvPr id="1" name=""/>
+        <p:cNvGrpSpPr/>
+        <p:nvPr/>
+      </p:nvGrpSpPr>
+      <p:grpSpPr>
+        <a:xfrm>
+          <a:off x="0" y="0"/>
+          <a:ext cx="0" cy="0"/>
+          <a:chOff x="0" y="0"/>
+          <a:chExt cx="0" cy="0"/>
+        </a:xfrm>
+      </p:grpSpPr>
+      <p:sp>
+        <p:nvSpPr>
+          <p:cNvPr id="2" name="Slide Image Placeholder 1"/>
+          <p:cNvSpPr>
+            <a:spLocks noGrp="1" noRot="1" noChangeAspect="1"/>
+          </p:cNvSpPr>
+          <p:nvPr>
+            <p:ph type="sldImg"/>
+          </p:nvPr>
+        </p:nvSpPr>
+        <p:spPr/>
+      </p:sp>
+      <p:sp>
+        <p:nvSpPr>
+          <p:cNvPr id="3" name="Notes Placeholder 2"/>
+          <p:cNvSpPr>
+            <a:spLocks noGrp="1"/>
+          </p:cNvSpPr>
+          <p:nvPr>
+            <p:ph type="body" idx="1"/>
+          </p:nvPr>
+        </p:nvSpPr>
+        <p:spPr/>
+        <p:txBody>
+          <a:bodyPr/>
+          <a:lstStyle/>
+          <a:p>
+            <a:r>
+              <a:rPr lang="en-US" dirty="0"/>
+              <a:t>The anchor is IPv6-only in its data plane, which excludes the IPv4-only CGNAT population the study targets; that is a fifth decision and it also affects the product. Three unrelated defects found while surveying the transport are listed in the brief.</a:t>
+            </a:r>
+            <a:endParaRPr lang="en-US" dirty="0"/>
+          </a:p>
+        </p:txBody>
+      </p:sp>
+      <p:sp>
+        <p:nvSpPr>
+          <p:cNvPr id="4" name="Slide Number Placeholder 3"/>
+          <p:cNvSpPr>
+            <a:spLocks noGrp="1"/>
+          </p:cNvSpPr>
+          <p:nvPr>
+            <p:ph type="sldNum" sz="quarter" idx="10"/>
+          </p:nvPr>
+        </p:nvSpPr>
+        <p:spPr/>
+        <p:txBody>
+          <a:bodyPr/>
+          <a:lstStyle/>
+          <a:p>
+            <a:fld id="{F7021451-1387-4CA6-816F-3879F97B5CBC}" type="slidenum">
+              <a:rPr lang="en-US"/>
+              <a:t>11</a:t>
             </a:fld>
             <a:endParaRPr lang="en-US"/>
           </a:p>
@@ -1039,7 +1128,7 @@
           <a:p>
             <a:r>
               <a:rPr lang="en-US" dirty="0"/>
-              <a:t>Contamination is the one that would quietly invalidate a field campaign: it biases in the direction that looks like good news. We publish the label difference between contaminated and clean runs as a result in its own right. The nonce survives the honesty assumption for a different reason: the peers are honest but the network is not, and an off-path party could otherwise inject something resembling a dial-back. Disagreement between witnesses is diagnostic here, not malicious: it usually means the behavior genuinely depends on the source address or port.</a:t>
+              <a:t>Left column is mapping, right is filtering. An arrival is definitive and ends that arm; an absence is retried before it is recorded, because under honest peers an absent dial-back is equally consistent with filtering and with loss. The minimum witness set is combinatorial: two friends at distinct addresses separate endpoint-independent from address-dependent mapping, one friend reachable on two ports separates address-and-port-dependent, and one friend never transmitted to gives the endpoint-independent filtering test. The measurand and the procedure are RFC 4787 and 5780; the dial-back is from autoNAT, which is a libp2p spec and not an RFC; the friends are ours.</a:t>
             </a:r>
             <a:endParaRPr lang="en-US" dirty="0"/>
           </a:p>
@@ -1127,7 +1216,7 @@
           <a:p>
             <a:r>
               <a:rPr lang="en-US" dirty="0"/>
-              <a:t>The correctness claim rests on the bench, where labels are known by construction. The reference server needs two public addresses and two ports per family. Default masquerade reads endpoint-independent and --random-fully reads address-and-port-dependent, so the middle class comes from per-destination SNAT via nftables maps. The autoNAT cross-check runs as a standalone client on the same network, so it characterizes the network rather than our socket, and it is Wi-Fi only: on cellular it would need tethering, which adds another translation layer.</a:t>
+              <a:t>Contamination is the one that would quietly invalidate a field campaign: it biases in the direction that looks like good news. We publish the label difference between contaminated and clean runs as a result in its own right. The nonce survives the honesty assumption for a different reason: the peers are honest but the network is not, and an off-path party could otherwise inject something resembling a dial-back. Disagreement between witnesses is diagnostic here, not malicious: it usually means the behavior genuinely depends on the source address or port.</a:t>
             </a:r>
             <a:endParaRPr lang="en-US" dirty="0"/>
           </a:p>
@@ -1215,7 +1304,7 @@
           <a:p>
             <a:r>
               <a:rPr lang="en-US" dirty="0"/>
-              <a:t>Each SIM buys one carrier-APN-plan cell, not a whole carrier, so budget roughly double the naive count. A residual stratum — tethering, VPN and private relay, fixed wireless, enterprise — is carried unmeasured at its best available weight, which is what lets the weight table sum to the denominator.</a:t>
+              <a:t>The correctness claim rests on the bench, where labels are known by construction. The reference server needs two public addresses and two ports per family. Default masquerade reads endpoint-independent and --random-fully reads address-and-port-dependent, so the middle class comes from per-destination SNAT via nftables maps. The autoNAT cross-check runs as a standalone client on the same network, so it characterizes the network rather than our socket, and it is Wi-Fi only: on cellular it would need tethering, which adds another translation layer.</a:t>
             </a:r>
             <a:endParaRPr lang="en-US" dirty="0"/>
           </a:p>
@@ -1303,7 +1392,7 @@
           <a:p>
             <a:r>
               <a:rPr lang="en-US" dirty="0"/>
-              <a:t>Every phase carries an exit criterion in the written brief. The week-3 checkpoint is code rather than a document: a reflexive address obtained over the transport’s own socket, which forces the demultiplexer change early and tells us whether the socket can be shared at all. Excluded by design and named as such: the autoNAT sidecar, the byzantine analysis, the weighted prevalence estimate and the decision-rule fit.</a:t>
+              <a:t>Each SIM buys one carrier-APN-plan cell, not a whole carrier, so budget roughly double the naive count. A residual stratum — tethering, VPN and private relay, fixed wireless, enterprise — is carried unmeasured at its best available weight, which is what lets the weight table sum to the denominator.</a:t>
             </a:r>
             <a:endParaRPr lang="en-US" dirty="0"/>
           </a:p>
@@ -2170,6 +2259,463 @@
 <file path=ppt/slides/slide10.xml><?xml version="1.0" encoding="utf-8"?>
 <p:sld xmlns:a="http://schemas.openxmlformats.org/drawingml/2006/main" xmlns:r="http://schemas.openxmlformats.org/officeDocument/2006/relationships" xmlns:p="http://schemas.openxmlformats.org/presentationml/2006/main">
   <p:cSld name="Slide 10">
+    <p:spTree>
+      <p:nvGrpSpPr>
+        <p:cNvPr id="1" name=""/>
+        <p:cNvGrpSpPr/>
+        <p:nvPr/>
+      </p:nvGrpSpPr>
+      <p:grpSpPr>
+        <a:xfrm>
+          <a:off x="0" y="0"/>
+          <a:ext cx="0" cy="0"/>
+          <a:chOff x="0" y="0"/>
+          <a:chExt cx="0" cy="0"/>
+        </a:xfrm>
+      </p:grpSpPr>
+      <p:sp>
+        <p:nvSpPr>
+          <p:cNvPr id="2" name="Text 0"/>
+          <p:cNvSpPr/>
+          <p:nvPr/>
+        </p:nvSpPr>
+        <p:spPr>
+          <a:xfrm>
+            <a:off x="685800" y="502920"/>
+            <a:ext cx="10789920" cy="274320"/>
+          </a:xfrm>
+          <a:prstGeom prst="rect">
+            <a:avLst/>
+          </a:prstGeom>
+          <a:noFill/>
+          <a:ln/>
+        </p:spPr>
+        <p:txBody>
+          <a:bodyPr wrap="square" lIns="0" tIns="0" rIns="0" bIns="0" rtlCol="0" anchor="ctr"/>
+          <a:lstStyle/>
+          <a:p>
+            <a:pPr indent="0" marL="0">
+              <a:buNone/>
+            </a:pPr>
+            <a:r>
+              <a:rPr lang="en-US" sz="1100" b="1" spc="200" kern="0" dirty="0">
+                <a:solidFill>
+                  <a:srgbClr val="0E7C86"/>
+                </a:solidFill>
+                <a:latin typeface="Calibri" pitchFamily="34" charset="0"/>
+                <a:ea typeface="Calibri" pitchFamily="34" charset="-122"/>
+                <a:cs typeface="Calibri" pitchFamily="34" charset="-120"/>
+              </a:rPr>
+              <a:t>SEQUENCE</a:t>
+            </a:r>
+            <a:endParaRPr lang="en-US" sz="1100" dirty="0"/>
+          </a:p>
+        </p:txBody>
+      </p:sp>
+      <p:sp>
+        <p:nvSpPr>
+          <p:cNvPr id="3" name="Text 1"/>
+          <p:cNvSpPr/>
+          <p:nvPr/>
+        </p:nvSpPr>
+        <p:spPr>
+          <a:xfrm>
+            <a:off x="685800" y="804672"/>
+            <a:ext cx="10789920" cy="822960"/>
+          </a:xfrm>
+          <a:prstGeom prst="rect">
+            <a:avLst/>
+          </a:prstGeom>
+          <a:noFill/>
+          <a:ln/>
+        </p:spPr>
+        <p:txBody>
+          <a:bodyPr wrap="square" lIns="0" tIns="0" rIns="0" bIns="0" rtlCol="0" anchor="ctr"/>
+          <a:lstStyle/>
+          <a:p>
+            <a:pPr indent="0" marL="0">
+              <a:buNone/>
+            </a:pPr>
+            <a:r>
+              <a:rPr lang="en-US" sz="3600" b="1" dirty="0">
+                <a:solidFill>
+                  <a:srgbClr val="16202A"/>
+                </a:solidFill>
+                <a:latin typeface="Cambria" pitchFamily="34" charset="0"/>
+                <a:ea typeface="Cambria" pitchFamily="34" charset="-122"/>
+                <a:cs typeface="Cambria" pitchFamily="34" charset="-120"/>
+              </a:rPr>
+              <a:t>One semester</a:t>
+            </a:r>
+            <a:endParaRPr lang="en-US" sz="3600" dirty="0"/>
+          </a:p>
+        </p:txBody>
+      </p:sp>
+      <p:sp>
+        <p:nvSpPr>
+          <p:cNvPr id="4" name="Shape 2"/>
+          <p:cNvSpPr/>
+          <p:nvPr/>
+        </p:nvSpPr>
+        <p:spPr>
+          <a:xfrm>
+            <a:off x="685800" y="2377440"/>
+            <a:ext cx="2286000" cy="914400"/>
+          </a:xfrm>
+          <a:prstGeom prst="roundRect">
+            <a:avLst>
+              <a:gd name="adj" fmla="val 6000"/>
+            </a:avLst>
+          </a:prstGeom>
+          <a:solidFill>
+            <a:srgbClr val="0E7C86"/>
+          </a:solidFill>
+          <a:ln w="12700">
+            <a:solidFill>
+              <a:srgbClr val="0E7C86"/>
+            </a:solidFill>
+            <a:prstDash val="solid"/>
+          </a:ln>
+        </p:spPr>
+      </p:sp>
+      <p:sp>
+        <p:nvSpPr>
+          <p:cNvPr id="5" name="Text 3"/>
+          <p:cNvSpPr/>
+          <p:nvPr/>
+        </p:nvSpPr>
+        <p:spPr>
+          <a:xfrm>
+            <a:off x="685800" y="2377440"/>
+            <a:ext cx="2286000" cy="914400"/>
+          </a:xfrm>
+          <a:prstGeom prst="rect">
+            <a:avLst/>
+          </a:prstGeom>
+          <a:noFill/>
+          <a:ln/>
+        </p:spPr>
+        <p:txBody>
+          <a:bodyPr wrap="square" lIns="0" tIns="0" rIns="0" bIns="0" rtlCol="0" anchor="ctr"/>
+          <a:lstStyle/>
+          <a:p>
+            <a:pPr algn="ctr" indent="0" marL="0">
+              <a:buNone/>
+            </a:pPr>
+            <a:r>
+              <a:rPr lang="en-US" sz="1600" b="1" dirty="0">
+                <a:solidFill>
+                  <a:srgbClr val="FFFFFF"/>
+                </a:solidFill>
+                <a:latin typeface="Cambria" pitchFamily="34" charset="0"/>
+                <a:ea typeface="Cambria" pitchFamily="34" charset="-122"/>
+                <a:cs typeface="Cambria" pitchFamily="34" charset="-120"/>
+              </a:rPr>
+              <a:t>Weeks 1–3</a:t>
+            </a:r>
+            <a:endParaRPr lang="en-US" sz="1600" dirty="0"/>
+          </a:p>
+        </p:txBody>
+      </p:sp>
+      <p:sp>
+        <p:nvSpPr>
+          <p:cNvPr id="6" name="Text 4"/>
+          <p:cNvSpPr/>
+          <p:nvPr/>
+        </p:nvSpPr>
+        <p:spPr>
+          <a:xfrm>
+            <a:off x="3337560" y="2377440"/>
+            <a:ext cx="8138160" cy="914400"/>
+          </a:xfrm>
+          <a:prstGeom prst="rect">
+            <a:avLst/>
+          </a:prstGeom>
+          <a:noFill/>
+          <a:ln/>
+        </p:spPr>
+        <p:txBody>
+          <a:bodyPr wrap="square" lIns="0" tIns="0" rIns="0" bIns="0" rtlCol="0" anchor="ctr"/>
+          <a:lstStyle/>
+          <a:p>
+            <a:pPr indent="0" marL="0">
+              <a:buNone/>
+            </a:pPr>
+            <a:r>
+              <a:rPr lang="en-US" sz="1650" dirty="0">
+                <a:solidFill>
+                  <a:srgbClr val="3E4C57"/>
+                </a:solidFill>
+                <a:latin typeface="Calibri" pitchFamily="34" charset="0"/>
+                <a:ea typeface="Calibri" pitchFamily="34" charset="-122"/>
+                <a:cs typeface="Calibri" pitchFamily="34" charset="-120"/>
+              </a:rPr>
+              <a:t>Onboarding; a STUN client on the transport’s own socket. Go/no-go.</a:t>
+            </a:r>
+            <a:endParaRPr lang="en-US" sz="1650" dirty="0"/>
+          </a:p>
+        </p:txBody>
+      </p:sp>
+      <p:sp>
+        <p:nvSpPr>
+          <p:cNvPr id="7" name="Shape 5"/>
+          <p:cNvSpPr/>
+          <p:nvPr/>
+        </p:nvSpPr>
+        <p:spPr>
+          <a:xfrm>
+            <a:off x="685800" y="3566160"/>
+            <a:ext cx="2286000" cy="914400"/>
+          </a:xfrm>
+          <a:prstGeom prst="roundRect">
+            <a:avLst>
+              <a:gd name="adj" fmla="val 6000"/>
+            </a:avLst>
+          </a:prstGeom>
+          <a:solidFill>
+            <a:srgbClr val="0E7C86"/>
+          </a:solidFill>
+          <a:ln w="12700">
+            <a:solidFill>
+              <a:srgbClr val="0E7C86"/>
+            </a:solidFill>
+            <a:prstDash val="solid"/>
+          </a:ln>
+        </p:spPr>
+      </p:sp>
+      <p:sp>
+        <p:nvSpPr>
+          <p:cNvPr id="8" name="Text 6"/>
+          <p:cNvSpPr/>
+          <p:nvPr/>
+        </p:nvSpPr>
+        <p:spPr>
+          <a:xfrm>
+            <a:off x="685800" y="3566160"/>
+            <a:ext cx="2286000" cy="914400"/>
+          </a:xfrm>
+          <a:prstGeom prst="rect">
+            <a:avLst/>
+          </a:prstGeom>
+          <a:noFill/>
+          <a:ln/>
+        </p:spPr>
+        <p:txBody>
+          <a:bodyPr wrap="square" lIns="0" tIns="0" rIns="0" bIns="0" rtlCol="0" anchor="ctr"/>
+          <a:lstStyle/>
+          <a:p>
+            <a:pPr algn="ctr" indent="0" marL="0">
+              <a:buNone/>
+            </a:pPr>
+            <a:r>
+              <a:rPr lang="en-US" sz="1600" b="1" dirty="0">
+                <a:solidFill>
+                  <a:srgbClr val="FFFFFF"/>
+                </a:solidFill>
+                <a:latin typeface="Cambria" pitchFamily="34" charset="0"/>
+                <a:ea typeface="Cambria" pitchFamily="34" charset="-122"/>
+                <a:cs typeface="Cambria" pitchFamily="34" charset="-120"/>
+              </a:rPr>
+              <a:t>Weeks 4–10</a:t>
+            </a:r>
+            <a:endParaRPr lang="en-US" sz="1600" dirty="0"/>
+          </a:p>
+        </p:txBody>
+      </p:sp>
+      <p:sp>
+        <p:nvSpPr>
+          <p:cNvPr id="9" name="Text 7"/>
+          <p:cNvSpPr/>
+          <p:nvPr/>
+        </p:nvSpPr>
+        <p:spPr>
+          <a:xfrm>
+            <a:off x="3337560" y="3566160"/>
+            <a:ext cx="8138160" cy="914400"/>
+          </a:xfrm>
+          <a:prstGeom prst="rect">
+            <a:avLst/>
+          </a:prstGeom>
+          <a:noFill/>
+          <a:ln/>
+        </p:spPr>
+        <p:txBody>
+          <a:bodyPr wrap="square" lIns="0" tIns="0" rIns="0" bIns="0" rtlCol="0" anchor="ctr"/>
+          <a:lstStyle/>
+          <a:p>
+            <a:pPr indent="0" marL="0">
+              <a:buNone/>
+            </a:pPr>
+            <a:r>
+              <a:rPr lang="en-US" sz="1650" dirty="0">
+                <a:solidFill>
+                  <a:srgbClr val="3E4C57"/>
+                </a:solidFill>
+                <a:latin typeface="Calibri" pitchFamily="34" charset="0"/>
+                <a:ea typeface="Calibri" pitchFamily="34" charset="-122"/>
+                <a:cs typeface="Calibri" pitchFamily="34" charset="-120"/>
+              </a:rPr>
+              <a:t>The oracle and labeled bench; then the witness protocol and its classifier.</a:t>
+            </a:r>
+            <a:endParaRPr lang="en-US" sz="1650" dirty="0"/>
+          </a:p>
+        </p:txBody>
+      </p:sp>
+      <p:sp>
+        <p:nvSpPr>
+          <p:cNvPr id="10" name="Shape 8"/>
+          <p:cNvSpPr/>
+          <p:nvPr/>
+        </p:nvSpPr>
+        <p:spPr>
+          <a:xfrm>
+            <a:off x="685800" y="4754880"/>
+            <a:ext cx="2286000" cy="914400"/>
+          </a:xfrm>
+          <a:prstGeom prst="roundRect">
+            <a:avLst>
+              <a:gd name="adj" fmla="val 6000"/>
+            </a:avLst>
+          </a:prstGeom>
+          <a:solidFill>
+            <a:srgbClr val="C25E28"/>
+          </a:solidFill>
+          <a:ln w="12700">
+            <a:solidFill>
+              <a:srgbClr val="C25E28"/>
+            </a:solidFill>
+            <a:prstDash val="solid"/>
+          </a:ln>
+        </p:spPr>
+      </p:sp>
+      <p:sp>
+        <p:nvSpPr>
+          <p:cNvPr id="11" name="Text 9"/>
+          <p:cNvSpPr/>
+          <p:nvPr/>
+        </p:nvSpPr>
+        <p:spPr>
+          <a:xfrm>
+            <a:off x="685800" y="4754880"/>
+            <a:ext cx="2286000" cy="914400"/>
+          </a:xfrm>
+          <a:prstGeom prst="rect">
+            <a:avLst/>
+          </a:prstGeom>
+          <a:noFill/>
+          <a:ln/>
+        </p:spPr>
+        <p:txBody>
+          <a:bodyPr wrap="square" lIns="0" tIns="0" rIns="0" bIns="0" rtlCol="0" anchor="ctr"/>
+          <a:lstStyle/>
+          <a:p>
+            <a:pPr algn="ctr" indent="0" marL="0">
+              <a:buNone/>
+            </a:pPr>
+            <a:r>
+              <a:rPr lang="en-US" sz="1600" b="1" dirty="0">
+                <a:solidFill>
+                  <a:srgbClr val="FFFFFF"/>
+                </a:solidFill>
+                <a:latin typeface="Cambria" pitchFamily="34" charset="0"/>
+                <a:ea typeface="Cambria" pitchFamily="34" charset="-122"/>
+                <a:cs typeface="Cambria" pitchFamily="34" charset="-120"/>
+              </a:rPr>
+              <a:t>Weeks 11–15</a:t>
+            </a:r>
+            <a:endParaRPr lang="en-US" sz="1600" dirty="0"/>
+          </a:p>
+        </p:txBody>
+      </p:sp>
+      <p:sp>
+        <p:nvSpPr>
+          <p:cNvPr id="12" name="Text 10"/>
+          <p:cNvSpPr/>
+          <p:nvPr/>
+        </p:nvSpPr>
+        <p:spPr>
+          <a:xfrm>
+            <a:off x="3337560" y="4754880"/>
+            <a:ext cx="8138160" cy="914400"/>
+          </a:xfrm>
+          <a:prstGeom prst="rect">
+            <a:avLst/>
+          </a:prstGeom>
+          <a:noFill/>
+          <a:ln/>
+        </p:spPr>
+        <p:txBody>
+          <a:bodyPr wrap="square" lIns="0" tIns="0" rIns="0" bIns="0" rtlCol="0" anchor="ctr"/>
+          <a:lstStyle/>
+          <a:p>
+            <a:pPr indent="0" marL="0">
+              <a:buNone/>
+            </a:pPr>
+            <a:r>
+              <a:rPr lang="en-US" sz="1650" dirty="0">
+                <a:solidFill>
+                  <a:srgbClr val="3E4C57"/>
+                </a:solidFill>
+                <a:latin typeface="Calibri" pitchFamily="34" charset="0"/>
+                <a:ea typeface="Calibri" pitchFamily="34" charset="-122"/>
+                <a:cs typeface="Calibri" pitchFamily="34" charset="-120"/>
+              </a:rPr>
+              <a:t>Measurement on our own devices across reachable networks; write-up.</a:t>
+            </a:r>
+            <a:endParaRPr lang="en-US" sz="1650" dirty="0"/>
+          </a:p>
+        </p:txBody>
+      </p:sp>
+      <p:sp>
+        <p:nvSpPr>
+          <p:cNvPr id="13" name="Text 11"/>
+          <p:cNvSpPr/>
+          <p:nvPr/>
+        </p:nvSpPr>
+        <p:spPr>
+          <a:xfrm>
+            <a:off x="685800" y="5806440"/>
+            <a:ext cx="10789920" cy="365760"/>
+          </a:xfrm>
+          <a:prstGeom prst="rect">
+            <a:avLst/>
+          </a:prstGeom>
+          <a:noFill/>
+          <a:ln/>
+        </p:spPr>
+        <p:txBody>
+          <a:bodyPr wrap="square" lIns="0" tIns="0" rIns="0" bIns="0" rtlCol="0" anchor="ctr"/>
+          <a:lstStyle/>
+          <a:p>
+            <a:pPr indent="0" marL="0">
+              <a:buNone/>
+            </a:pPr>
+            <a:r>
+              <a:rPr lang="en-US" sz="1500" i="1" dirty="0">
+                <a:solidFill>
+                  <a:srgbClr val="C25E28"/>
+                </a:solidFill>
+                <a:latin typeface="Calibri" pitchFamily="34" charset="0"/>
+                <a:ea typeface="Calibri" pitchFamily="34" charset="-122"/>
+                <a:cs typeface="Calibri" pitchFamily="34" charset="-120"/>
+              </a:rPr>
+              <a:t>Week one: two public addresses, firewall rules, SIMs and handsets. They gate week four.</a:t>
+            </a:r>
+            <a:endParaRPr lang="en-US" sz="1500" dirty="0"/>
+          </a:p>
+        </p:txBody>
+      </p:sp>
+    </p:spTree>
+  </p:cSld>
+  <p:clrMapOvr>
+    <a:masterClrMapping/>
+  </p:clrMapOvr>
+</p:sld>
+</file>
+
+<file path=ppt/slides/slide11.xml><?xml version="1.0" encoding="utf-8"?>
+<p:sld xmlns:a="http://schemas.openxmlformats.org/drawingml/2006/main" xmlns:r="http://schemas.openxmlformats.org/officeDocument/2006/relationships" xmlns:p="http://schemas.openxmlformats.org/presentationml/2006/main">
+  <p:cSld name="Slide 11">
     <p:bg>
       <p:bgPr>
         <a:solidFill>
@@ -5578,7 +6124,7 @@
                 <a:ea typeface="Calibri" pitchFamily="34" charset="-122"/>
                 <a:cs typeface="Calibri" pitchFamily="34" charset="-120"/>
               </a:rPr>
-              <a:t>UNDER HONEST PEERS</a:t>
+              <a:t>TWO ROUNDS</a:t>
             </a:r>
             <a:endParaRPr lang="en-US" sz="1100" dirty="0"/>
           </a:p>
@@ -5617,7 +6163,7 @@
                 <a:ea typeface="Cambria" pitchFamily="34" charset="-122"/>
                 <a:cs typeface="Cambria" pitchFamily="34" charset="-120"/>
               </a:rPr>
-              <a:t>Two things that mislead</a:t>
+              <a:t>The procedure</a:t>
             </a:r>
             <a:endParaRPr lang="en-US" sz="3600" dirty="0"/>
           </a:p>
@@ -5625,26 +6171,104 @@
       </p:sp>
       <p:sp>
         <p:nvSpPr>
-          <p:cNvPr id="4" name="Shape 2"/>
-          <p:cNvSpPr/>
-          <p:nvPr/>
-        </p:nvSpPr>
-        <p:spPr>
-          <a:xfrm>
-            <a:off x="685800" y="2103120"/>
-            <a:ext cx="5212080" cy="2651760"/>
+          <p:cNvPr id="4" name="Text 2"/>
+          <p:cNvSpPr/>
+          <p:nvPr/>
+        </p:nvSpPr>
+        <p:spPr>
+          <a:xfrm>
+            <a:off x="685800" y="1965960"/>
+            <a:ext cx="5029200" cy="320040"/>
+          </a:xfrm>
+          <a:prstGeom prst="rect">
+            <a:avLst/>
+          </a:prstGeom>
+          <a:noFill/>
+          <a:ln/>
+        </p:spPr>
+        <p:txBody>
+          <a:bodyPr wrap="square" lIns="0" tIns="0" rIns="0" bIns="0" rtlCol="0" anchor="ctr"/>
+          <a:lstStyle/>
+          <a:p>
+            <a:pPr indent="0" marL="0">
+              <a:buNone/>
+            </a:pPr>
+            <a:r>
+              <a:rPr lang="en-US" sz="1900" b="1" dirty="0">
+                <a:solidFill>
+                  <a:srgbClr val="16202A"/>
+                </a:solidFill>
+                <a:latin typeface="Cambria" pitchFamily="34" charset="0"/>
+                <a:ea typeface="Cambria" pitchFamily="34" charset="-122"/>
+                <a:cs typeface="Cambria" pitchFamily="34" charset="-120"/>
+              </a:rPr>
+              <a:t>Reflect</a:t>
+            </a:r>
+            <a:endParaRPr lang="en-US" sz="1900" dirty="0"/>
+          </a:p>
+        </p:txBody>
+      </p:sp>
+      <p:sp>
+        <p:nvSpPr>
+          <p:cNvPr id="5" name="Text 3"/>
+          <p:cNvSpPr/>
+          <p:nvPr/>
+        </p:nvSpPr>
+        <p:spPr>
+          <a:xfrm>
+            <a:off x="685800" y="2304288"/>
+            <a:ext cx="5029200" cy="274320"/>
+          </a:xfrm>
+          <a:prstGeom prst="rect">
+            <a:avLst/>
+          </a:prstGeom>
+          <a:noFill/>
+          <a:ln/>
+        </p:spPr>
+        <p:txBody>
+          <a:bodyPr wrap="square" lIns="0" tIns="0" rIns="0" bIns="0" rtlCol="0" anchor="ctr"/>
+          <a:lstStyle/>
+          <a:p>
+            <a:pPr indent="0" marL="0">
+              <a:buNone/>
+            </a:pPr>
+            <a:r>
+              <a:rPr lang="en-US" sz="1250" i="1" dirty="0">
+                <a:solidFill>
+                  <a:srgbClr val="6E7F8B"/>
+                </a:solidFill>
+                <a:latin typeface="Calibri" pitchFamily="34" charset="0"/>
+                <a:ea typeface="Calibri" pitchFamily="34" charset="-122"/>
+                <a:cs typeface="Calibri" pitchFamily="34" charset="-120"/>
+              </a:rPr>
+              <a:t>each friend reports the source it observed</a:t>
+            </a:r>
+            <a:endParaRPr lang="en-US" sz="1250" dirty="0"/>
+          </a:p>
+        </p:txBody>
+      </p:sp>
+      <p:sp>
+        <p:nvSpPr>
+          <p:cNvPr id="6" name="Shape 4"/>
+          <p:cNvSpPr/>
+          <p:nvPr/>
+        </p:nvSpPr>
+        <p:spPr>
+          <a:xfrm>
+            <a:off x="548640" y="2715768"/>
+            <a:ext cx="5303520" cy="786384"/>
           </a:xfrm>
           <a:prstGeom prst="roundRect">
             <a:avLst>
-              <a:gd name="adj" fmla="val 2069"/>
+              <a:gd name="adj" fmla="val 6977"/>
             </a:avLst>
           </a:prstGeom>
           <a:solidFill>
-            <a:srgbClr val="EEF3F4"/>
+            <a:srgbClr val="F6F9F9"/>
           </a:solidFill>
           <a:ln w="6350">
             <a:solidFill>
-              <a:srgbClr val="EEF3F4"/>
+              <a:srgbClr val="F6F9F9"/>
             </a:solidFill>
             <a:prstDash val="solid"/>
           </a:ln>
@@ -5652,24 +6276,182 @@
       </p:sp>
       <p:sp>
         <p:nvSpPr>
-          <p:cNvPr id="5" name="Shape 3"/>
-          <p:cNvSpPr/>
-          <p:nvPr/>
-        </p:nvSpPr>
-        <p:spPr>
-          <a:xfrm>
-            <a:off x="1051560" y="2377440"/>
-            <a:ext cx="365760" cy="365760"/>
-          </a:xfrm>
-          <a:prstGeom prst="ellipse">
-            <a:avLst/>
+          <p:cNvPr id="7" name="Text 5"/>
+          <p:cNvSpPr/>
+          <p:nvPr/>
+        </p:nvSpPr>
+        <p:spPr>
+          <a:xfrm>
+            <a:off x="685800" y="2788920"/>
+            <a:ext cx="2816352" cy="640080"/>
+          </a:xfrm>
+          <a:prstGeom prst="rect">
+            <a:avLst/>
+          </a:prstGeom>
+          <a:noFill/>
+          <a:ln/>
+        </p:spPr>
+        <p:txBody>
+          <a:bodyPr wrap="square" lIns="0" tIns="0" rIns="0" bIns="0" rtlCol="0" anchor="ctr"/>
+          <a:lstStyle/>
+          <a:p>
+            <a:pPr indent="0" marL="0">
+              <a:buNone/>
+            </a:pPr>
+            <a:r>
+              <a:rPr lang="en-US" sz="1300" dirty="0">
+                <a:solidFill>
+                  <a:srgbClr val="3E4C57"/>
+                </a:solidFill>
+                <a:latin typeface="Calibri" pitchFamily="34" charset="0"/>
+                <a:ea typeface="Calibri" pitchFamily="34" charset="-122"/>
+                <a:cs typeface="Calibri" pitchFamily="34" charset="-120"/>
+              </a:rPr>
+              <a:t>Same tuple from every friend</a:t>
+            </a:r>
+            <a:endParaRPr lang="en-US" sz="1300" dirty="0"/>
+          </a:p>
+        </p:txBody>
+      </p:sp>
+      <p:sp>
+        <p:nvSpPr>
+          <p:cNvPr id="8" name="Text 6"/>
+          <p:cNvSpPr/>
+          <p:nvPr/>
+        </p:nvSpPr>
+        <p:spPr>
+          <a:xfrm>
+            <a:off x="3602736" y="2788920"/>
+            <a:ext cx="2112264" cy="640080"/>
+          </a:xfrm>
+          <a:prstGeom prst="rect">
+            <a:avLst/>
+          </a:prstGeom>
+          <a:noFill/>
+          <a:ln/>
+        </p:spPr>
+        <p:txBody>
+          <a:bodyPr wrap="square" lIns="0" tIns="0" rIns="0" bIns="0" rtlCol="0" anchor="ctr"/>
+          <a:lstStyle/>
+          <a:p>
+            <a:pPr indent="0" marL="0">
+              <a:buNone/>
+            </a:pPr>
+            <a:r>
+              <a:rPr lang="en-US" sz="1300" b="1" dirty="0">
+                <a:solidFill>
+                  <a:srgbClr val="0E7C86"/>
+                </a:solidFill>
+                <a:latin typeface="Cambria" pitchFamily="34" charset="0"/>
+                <a:ea typeface="Cambria" pitchFamily="34" charset="-122"/>
+                <a:cs typeface="Cambria" pitchFamily="34" charset="-120"/>
+              </a:rPr>
+              <a:t>endpoint-independent</a:t>
+            </a:r>
+            <a:endParaRPr lang="en-US" sz="1300" dirty="0"/>
+          </a:p>
+        </p:txBody>
+      </p:sp>
+      <p:sp>
+        <p:nvSpPr>
+          <p:cNvPr id="9" name="Text 7"/>
+          <p:cNvSpPr/>
+          <p:nvPr/>
+        </p:nvSpPr>
+        <p:spPr>
+          <a:xfrm>
+            <a:off x="685800" y="3630168"/>
+            <a:ext cx="2816352" cy="640080"/>
+          </a:xfrm>
+          <a:prstGeom prst="rect">
+            <a:avLst/>
+          </a:prstGeom>
+          <a:noFill/>
+          <a:ln/>
+        </p:spPr>
+        <p:txBody>
+          <a:bodyPr wrap="square" lIns="0" tIns="0" rIns="0" bIns="0" rtlCol="0" anchor="ctr"/>
+          <a:lstStyle/>
+          <a:p>
+            <a:pPr indent="0" marL="0">
+              <a:buNone/>
+            </a:pPr>
+            <a:r>
+              <a:rPr lang="en-US" sz="1300" dirty="0">
+                <a:solidFill>
+                  <a:srgbClr val="3E4C57"/>
+                </a:solidFill>
+                <a:latin typeface="Calibri" pitchFamily="34" charset="0"/>
+                <a:ea typeface="Calibri" pitchFamily="34" charset="-122"/>
+                <a:cs typeface="Calibri" pitchFamily="34" charset="-120"/>
+              </a:rPr>
+              <a:t>Differs by friend address</a:t>
+            </a:r>
+            <a:endParaRPr lang="en-US" sz="1300" dirty="0"/>
+          </a:p>
+        </p:txBody>
+      </p:sp>
+      <p:sp>
+        <p:nvSpPr>
+          <p:cNvPr id="10" name="Text 8"/>
+          <p:cNvSpPr/>
+          <p:nvPr/>
+        </p:nvSpPr>
+        <p:spPr>
+          <a:xfrm>
+            <a:off x="3602736" y="3630168"/>
+            <a:ext cx="2112264" cy="640080"/>
+          </a:xfrm>
+          <a:prstGeom prst="rect">
+            <a:avLst/>
+          </a:prstGeom>
+          <a:noFill/>
+          <a:ln/>
+        </p:spPr>
+        <p:txBody>
+          <a:bodyPr wrap="square" lIns="0" tIns="0" rIns="0" bIns="0" rtlCol="0" anchor="ctr"/>
+          <a:lstStyle/>
+          <a:p>
+            <a:pPr indent="0" marL="0">
+              <a:buNone/>
+            </a:pPr>
+            <a:r>
+              <a:rPr lang="en-US" sz="1300" b="1" dirty="0">
+                <a:solidFill>
+                  <a:srgbClr val="0E7C86"/>
+                </a:solidFill>
+                <a:latin typeface="Cambria" pitchFamily="34" charset="0"/>
+                <a:ea typeface="Cambria" pitchFamily="34" charset="-122"/>
+                <a:cs typeface="Cambria" pitchFamily="34" charset="-120"/>
+              </a:rPr>
+              <a:t>address-dependent</a:t>
+            </a:r>
+            <a:endParaRPr lang="en-US" sz="1300" dirty="0"/>
+          </a:p>
+        </p:txBody>
+      </p:sp>
+      <p:sp>
+        <p:nvSpPr>
+          <p:cNvPr id="11" name="Shape 9"/>
+          <p:cNvSpPr/>
+          <p:nvPr/>
+        </p:nvSpPr>
+        <p:spPr>
+          <a:xfrm>
+            <a:off x="548640" y="4398264"/>
+            <a:ext cx="5303520" cy="786384"/>
+          </a:xfrm>
+          <a:prstGeom prst="roundRect">
+            <a:avLst>
+              <a:gd name="adj" fmla="val 6977"/>
+            </a:avLst>
           </a:prstGeom>
           <a:solidFill>
-            <a:srgbClr val="C25E28"/>
+            <a:srgbClr val="F6F9F9"/>
           </a:solidFill>
-          <a:ln w="12700">
+          <a:ln w="6350">
             <a:solidFill>
-              <a:srgbClr val="C25E28"/>
+              <a:srgbClr val="F6F9F9"/>
             </a:solidFill>
             <a:prstDash val="solid"/>
           </a:ln>
@@ -5677,63 +6459,182 @@
       </p:sp>
       <p:sp>
         <p:nvSpPr>
-          <p:cNvPr id="6" name="Text 4"/>
-          <p:cNvSpPr/>
-          <p:nvPr/>
-        </p:nvSpPr>
-        <p:spPr>
-          <a:xfrm>
-            <a:off x="1051560" y="2880360"/>
-            <a:ext cx="4480560" cy="365760"/>
-          </a:xfrm>
-          <a:prstGeom prst="rect">
-            <a:avLst/>
-          </a:prstGeom>
-          <a:noFill/>
-          <a:ln/>
-        </p:spPr>
-        <p:txBody>
-          <a:bodyPr wrap="square" lIns="0" tIns="0" rIns="0" bIns="0" rtlCol="0" anchor="ctr"/>
-          <a:lstStyle/>
-          <a:p>
-            <a:pPr indent="0" marL="0">
-              <a:buNone/>
-            </a:pPr>
-            <a:r>
-              <a:rPr lang="en-US" sz="2000" b="1" dirty="0">
-                <a:solidFill>
-                  <a:srgbClr val="16202A"/>
+          <p:cNvPr id="12" name="Text 10"/>
+          <p:cNvSpPr/>
+          <p:nvPr/>
+        </p:nvSpPr>
+        <p:spPr>
+          <a:xfrm>
+            <a:off x="685800" y="4471416"/>
+            <a:ext cx="2816352" cy="640080"/>
+          </a:xfrm>
+          <a:prstGeom prst="rect">
+            <a:avLst/>
+          </a:prstGeom>
+          <a:noFill/>
+          <a:ln/>
+        </p:spPr>
+        <p:txBody>
+          <a:bodyPr wrap="square" lIns="0" tIns="0" rIns="0" bIns="0" rtlCol="0" anchor="ctr"/>
+          <a:lstStyle/>
+          <a:p>
+            <a:pPr indent="0" marL="0">
+              <a:buNone/>
+            </a:pPr>
+            <a:r>
+              <a:rPr lang="en-US" sz="1300" dirty="0">
+                <a:solidFill>
+                  <a:srgbClr val="3E4C57"/>
+                </a:solidFill>
+                <a:latin typeface="Calibri" pitchFamily="34" charset="0"/>
+                <a:ea typeface="Calibri" pitchFamily="34" charset="-122"/>
+                <a:cs typeface="Calibri" pitchFamily="34" charset="-120"/>
+              </a:rPr>
+              <a:t>Differs across two ports of one friend</a:t>
+            </a:r>
+            <a:endParaRPr lang="en-US" sz="1300" dirty="0"/>
+          </a:p>
+        </p:txBody>
+      </p:sp>
+      <p:sp>
+        <p:nvSpPr>
+          <p:cNvPr id="13" name="Text 11"/>
+          <p:cNvSpPr/>
+          <p:nvPr/>
+        </p:nvSpPr>
+        <p:spPr>
+          <a:xfrm>
+            <a:off x="3602736" y="4471416"/>
+            <a:ext cx="2112264" cy="640080"/>
+          </a:xfrm>
+          <a:prstGeom prst="rect">
+            <a:avLst/>
+          </a:prstGeom>
+          <a:noFill/>
+          <a:ln/>
+        </p:spPr>
+        <p:txBody>
+          <a:bodyPr wrap="square" lIns="0" tIns="0" rIns="0" bIns="0" rtlCol="0" anchor="ctr"/>
+          <a:lstStyle/>
+          <a:p>
+            <a:pPr indent="0" marL="0">
+              <a:buNone/>
+            </a:pPr>
+            <a:r>
+              <a:rPr lang="en-US" sz="1300" b="1" dirty="0">
+                <a:solidFill>
+                  <a:srgbClr val="0E7C86"/>
                 </a:solidFill>
                 <a:latin typeface="Cambria" pitchFamily="34" charset="0"/>
                 <a:ea typeface="Cambria" pitchFamily="34" charset="-122"/>
                 <a:cs typeface="Cambria" pitchFamily="34" charset="-120"/>
               </a:rPr>
-              <a:t>Contamination</a:t>
-            </a:r>
-            <a:endParaRPr lang="en-US" sz="2000" dirty="0"/>
-          </a:p>
-        </p:txBody>
-      </p:sp>
-      <p:sp>
-        <p:nvSpPr>
-          <p:cNvPr id="7" name="Shape 5"/>
-          <p:cNvSpPr/>
-          <p:nvPr/>
-        </p:nvSpPr>
-        <p:spPr>
-          <a:xfrm>
-            <a:off x="1051560" y="3456432"/>
-            <a:ext cx="118872" cy="118872"/>
-          </a:xfrm>
-          <a:prstGeom prst="ellipse">
-            <a:avLst/>
+              <a:t>address-and-port-dependent</a:t>
+            </a:r>
+            <a:endParaRPr lang="en-US" sz="1300" dirty="0"/>
+          </a:p>
+        </p:txBody>
+      </p:sp>
+      <p:sp>
+        <p:nvSpPr>
+          <p:cNvPr id="14" name="Text 12"/>
+          <p:cNvSpPr/>
+          <p:nvPr/>
+        </p:nvSpPr>
+        <p:spPr>
+          <a:xfrm>
+            <a:off x="6446520" y="1965960"/>
+            <a:ext cx="5029200" cy="320040"/>
+          </a:xfrm>
+          <a:prstGeom prst="rect">
+            <a:avLst/>
+          </a:prstGeom>
+          <a:noFill/>
+          <a:ln/>
+        </p:spPr>
+        <p:txBody>
+          <a:bodyPr wrap="square" lIns="0" tIns="0" rIns="0" bIns="0" rtlCol="0" anchor="ctr"/>
+          <a:lstStyle/>
+          <a:p>
+            <a:pPr indent="0" marL="0">
+              <a:buNone/>
+            </a:pPr>
+            <a:r>
+              <a:rPr lang="en-US" sz="1900" b="1" dirty="0">
+                <a:solidFill>
+                  <a:srgbClr val="16202A"/>
+                </a:solidFill>
+                <a:latin typeface="Cambria" pitchFamily="34" charset="0"/>
+                <a:ea typeface="Cambria" pitchFamily="34" charset="-122"/>
+                <a:cs typeface="Cambria" pitchFamily="34" charset="-120"/>
+              </a:rPr>
+              <a:t>Dial back</a:t>
+            </a:r>
+            <a:endParaRPr lang="en-US" sz="1900" dirty="0"/>
+          </a:p>
+        </p:txBody>
+      </p:sp>
+      <p:sp>
+        <p:nvSpPr>
+          <p:cNvPr id="15" name="Text 13"/>
+          <p:cNvSpPr/>
+          <p:nvPr/>
+        </p:nvSpPr>
+        <p:spPr>
+          <a:xfrm>
+            <a:off x="6446520" y="2304288"/>
+            <a:ext cx="5029200" cy="274320"/>
+          </a:xfrm>
+          <a:prstGeom prst="rect">
+            <a:avLst/>
+          </a:prstGeom>
+          <a:noFill/>
+          <a:ln/>
+        </p:spPr>
+        <p:txBody>
+          <a:bodyPr wrap="square" lIns="0" tIns="0" rIns="0" bIns="0" rtlCol="0" anchor="ctr"/>
+          <a:lstStyle/>
+          <a:p>
+            <a:pPr indent="0" marL="0">
+              <a:buNone/>
+            </a:pPr>
+            <a:r>
+              <a:rPr lang="en-US" sz="1250" i="1" dirty="0">
+                <a:solidFill>
+                  <a:srgbClr val="6E7F8B"/>
+                </a:solidFill>
+                <a:latin typeface="Calibri" pitchFamily="34" charset="0"/>
+                <a:ea typeface="Calibri" pitchFamily="34" charset="-122"/>
+                <a:cs typeface="Calibri" pitchFamily="34" charset="-120"/>
+              </a:rPr>
+              <a:t>three sources, each carrying the nonce</a:t>
+            </a:r>
+            <a:endParaRPr lang="en-US" sz="1250" dirty="0"/>
+          </a:p>
+        </p:txBody>
+      </p:sp>
+      <p:sp>
+        <p:nvSpPr>
+          <p:cNvPr id="16" name="Shape 14"/>
+          <p:cNvSpPr/>
+          <p:nvPr/>
+        </p:nvSpPr>
+        <p:spPr>
+          <a:xfrm>
+            <a:off x="6309360" y="2715768"/>
+            <a:ext cx="5303520" cy="786384"/>
+          </a:xfrm>
+          <a:prstGeom prst="roundRect">
+            <a:avLst>
+              <a:gd name="adj" fmla="val 6977"/>
+            </a:avLst>
           </a:prstGeom>
           <a:solidFill>
-            <a:srgbClr val="C25E28"/>
+            <a:srgbClr val="F6F9F9"/>
           </a:solidFill>
-          <a:ln w="12700">
+          <a:ln w="6350">
             <a:solidFill>
-              <a:srgbClr val="C25E28"/>
+              <a:srgbClr val="F6F9F9"/>
             </a:solidFill>
             <a:prstDash val="solid"/>
           </a:ln>
@@ -5741,30 +6642,30 @@
       </p:sp>
       <p:sp>
         <p:nvSpPr>
-          <p:cNvPr id="8" name="Text 6"/>
-          <p:cNvSpPr/>
-          <p:nvPr/>
-        </p:nvSpPr>
-        <p:spPr>
-          <a:xfrm>
-            <a:off x="1371600" y="3337560"/>
-            <a:ext cx="4160520" cy="384048"/>
-          </a:xfrm>
-          <a:prstGeom prst="rect">
-            <a:avLst/>
-          </a:prstGeom>
-          <a:noFill/>
-          <a:ln/>
-        </p:spPr>
-        <p:txBody>
-          <a:bodyPr wrap="square" lIns="0" tIns="0" rIns="0" bIns="0" rtlCol="0" anchor="ctr"/>
-          <a:lstStyle/>
-          <a:p>
-            <a:pPr indent="0" marL="0">
-              <a:buNone/>
-            </a:pPr>
-            <a:r>
-              <a:rPr lang="en-US" sz="1350" dirty="0">
+          <p:cNvPr id="17" name="Text 15"/>
+          <p:cNvSpPr/>
+          <p:nvPr/>
+        </p:nvSpPr>
+        <p:spPr>
+          <a:xfrm>
+            <a:off x="6446520" y="2788920"/>
+            <a:ext cx="2816352" cy="640080"/>
+          </a:xfrm>
+          <a:prstGeom prst="rect">
+            <a:avLst/>
+          </a:prstGeom>
+          <a:noFill/>
+          <a:ln/>
+        </p:spPr>
+        <p:txBody>
+          <a:bodyPr wrap="square" lIns="0" tIns="0" rIns="0" bIns="0" rtlCol="0" anchor="ctr"/>
+          <a:lstStyle/>
+          <a:p>
+            <a:pPr indent="0" marL="0">
+              <a:buNone/>
+            </a:pPr>
+            <a:r>
+              <a:rPr lang="en-US" sz="1300" dirty="0">
                 <a:solidFill>
                   <a:srgbClr val="3E4C57"/>
                 </a:solidFill>
@@ -5772,32 +6673,151 @@
                 <a:ea typeface="Calibri" pitchFamily="34" charset="-122"/>
                 <a:cs typeface="Calibri" pitchFamily="34" charset="-120"/>
               </a:rPr>
-              <a:t>Witnesses are the peers we already transmit to.</a:t>
-            </a:r>
-            <a:endParaRPr lang="en-US" sz="1350" dirty="0"/>
-          </a:p>
-        </p:txBody>
-      </p:sp>
-      <p:sp>
-        <p:nvSpPr>
-          <p:cNvPr id="9" name="Shape 7"/>
-          <p:cNvSpPr/>
-          <p:nvPr/>
-        </p:nvSpPr>
-        <p:spPr>
-          <a:xfrm>
-            <a:off x="1051560" y="3840480"/>
-            <a:ext cx="118872" cy="118872"/>
-          </a:xfrm>
-          <a:prstGeom prst="ellipse">
-            <a:avLst/>
+              <a:t>Arrives from an uncontacted address</a:t>
+            </a:r>
+            <a:endParaRPr lang="en-US" sz="1300" dirty="0"/>
+          </a:p>
+        </p:txBody>
+      </p:sp>
+      <p:sp>
+        <p:nvSpPr>
+          <p:cNvPr id="18" name="Text 16"/>
+          <p:cNvSpPr/>
+          <p:nvPr/>
+        </p:nvSpPr>
+        <p:spPr>
+          <a:xfrm>
+            <a:off x="9363456" y="2788920"/>
+            <a:ext cx="2112264" cy="640080"/>
+          </a:xfrm>
+          <a:prstGeom prst="rect">
+            <a:avLst/>
+          </a:prstGeom>
+          <a:noFill/>
+          <a:ln/>
+        </p:spPr>
+        <p:txBody>
+          <a:bodyPr wrap="square" lIns="0" tIns="0" rIns="0" bIns="0" rtlCol="0" anchor="ctr"/>
+          <a:lstStyle/>
+          <a:p>
+            <a:pPr indent="0" marL="0">
+              <a:buNone/>
+            </a:pPr>
+            <a:r>
+              <a:rPr lang="en-US" sz="1300" b="1" dirty="0">
+                <a:solidFill>
+                  <a:srgbClr val="C25E28"/>
+                </a:solidFill>
+                <a:latin typeface="Cambria" pitchFamily="34" charset="0"/>
+                <a:ea typeface="Cambria" pitchFamily="34" charset="-122"/>
+                <a:cs typeface="Cambria" pitchFamily="34" charset="-120"/>
+              </a:rPr>
+              <a:t>endpoint-independent</a:t>
+            </a:r>
+            <a:endParaRPr lang="en-US" sz="1300" dirty="0"/>
+          </a:p>
+        </p:txBody>
+      </p:sp>
+      <p:sp>
+        <p:nvSpPr>
+          <p:cNvPr id="19" name="Text 17"/>
+          <p:cNvSpPr/>
+          <p:nvPr/>
+        </p:nvSpPr>
+        <p:spPr>
+          <a:xfrm>
+            <a:off x="6446520" y="3630168"/>
+            <a:ext cx="2816352" cy="640080"/>
+          </a:xfrm>
+          <a:prstGeom prst="rect">
+            <a:avLst/>
+          </a:prstGeom>
+          <a:noFill/>
+          <a:ln/>
+        </p:spPr>
+        <p:txBody>
+          <a:bodyPr wrap="square" lIns="0" tIns="0" rIns="0" bIns="0" rtlCol="0" anchor="ctr"/>
+          <a:lstStyle/>
+          <a:p>
+            <a:pPr indent="0" marL="0">
+              <a:buNone/>
+            </a:pPr>
+            <a:r>
+              <a:rPr lang="en-US" sz="1300" dirty="0">
+                <a:solidFill>
+                  <a:srgbClr val="3E4C57"/>
+                </a:solidFill>
+                <a:latin typeface="Calibri" pitchFamily="34" charset="0"/>
+                <a:ea typeface="Calibri" pitchFamily="34" charset="-122"/>
+                <a:cs typeface="Calibri" pitchFamily="34" charset="-120"/>
+              </a:rPr>
+              <a:t>Only from a contacted address, new port</a:t>
+            </a:r>
+            <a:endParaRPr lang="en-US" sz="1300" dirty="0"/>
+          </a:p>
+        </p:txBody>
+      </p:sp>
+      <p:sp>
+        <p:nvSpPr>
+          <p:cNvPr id="20" name="Text 18"/>
+          <p:cNvSpPr/>
+          <p:nvPr/>
+        </p:nvSpPr>
+        <p:spPr>
+          <a:xfrm>
+            <a:off x="9363456" y="3630168"/>
+            <a:ext cx="2112264" cy="640080"/>
+          </a:xfrm>
+          <a:prstGeom prst="rect">
+            <a:avLst/>
+          </a:prstGeom>
+          <a:noFill/>
+          <a:ln/>
+        </p:spPr>
+        <p:txBody>
+          <a:bodyPr wrap="square" lIns="0" tIns="0" rIns="0" bIns="0" rtlCol="0" anchor="ctr"/>
+          <a:lstStyle/>
+          <a:p>
+            <a:pPr indent="0" marL="0">
+              <a:buNone/>
+            </a:pPr>
+            <a:r>
+              <a:rPr lang="en-US" sz="1300" b="1" dirty="0">
+                <a:solidFill>
+                  <a:srgbClr val="C25E28"/>
+                </a:solidFill>
+                <a:latin typeface="Cambria" pitchFamily="34" charset="0"/>
+                <a:ea typeface="Cambria" pitchFamily="34" charset="-122"/>
+                <a:cs typeface="Cambria" pitchFamily="34" charset="-120"/>
+              </a:rPr>
+              <a:t>address-dependent</a:t>
+            </a:r>
+            <a:endParaRPr lang="en-US" sz="1300" dirty="0"/>
+          </a:p>
+        </p:txBody>
+      </p:sp>
+      <p:sp>
+        <p:nvSpPr>
+          <p:cNvPr id="21" name="Shape 19"/>
+          <p:cNvSpPr/>
+          <p:nvPr/>
+        </p:nvSpPr>
+        <p:spPr>
+          <a:xfrm>
+            <a:off x="6309360" y="4398264"/>
+            <a:ext cx="5303520" cy="786384"/>
+          </a:xfrm>
+          <a:prstGeom prst="roundRect">
+            <a:avLst>
+              <a:gd name="adj" fmla="val 6977"/>
+            </a:avLst>
           </a:prstGeom>
           <a:solidFill>
-            <a:srgbClr val="C25E28"/>
+            <a:srgbClr val="F6F9F9"/>
           </a:solidFill>
-          <a:ln w="12700">
+          <a:ln w="6350">
             <a:solidFill>
-              <a:srgbClr val="C25E28"/>
+              <a:srgbClr val="F6F9F9"/>
             </a:solidFill>
             <a:prstDash val="solid"/>
           </a:ln>
@@ -5805,30 +6825,30 @@
       </p:sp>
       <p:sp>
         <p:nvSpPr>
-          <p:cNvPr id="10" name="Text 8"/>
-          <p:cNvSpPr/>
-          <p:nvPr/>
-        </p:nvSpPr>
-        <p:spPr>
-          <a:xfrm>
-            <a:off x="1371600" y="3721608"/>
-            <a:ext cx="4160520" cy="384048"/>
-          </a:xfrm>
-          <a:prstGeom prst="rect">
-            <a:avLst/>
-          </a:prstGeom>
-          <a:noFill/>
-          <a:ln/>
-        </p:spPr>
-        <p:txBody>
-          <a:bodyPr wrap="square" lIns="0" tIns="0" rIns="0" bIns="0" rtlCol="0" anchor="ctr"/>
-          <a:lstStyle/>
-          <a:p>
-            <a:pPr indent="0" marL="0">
-              <a:buNone/>
-            </a:pPr>
-            <a:r>
-              <a:rPr lang="en-US" sz="1350" dirty="0">
+          <p:cNvPr id="22" name="Text 20"/>
+          <p:cNvSpPr/>
+          <p:nvPr/>
+        </p:nvSpPr>
+        <p:spPr>
+          <a:xfrm>
+            <a:off x="6446520" y="4471416"/>
+            <a:ext cx="2816352" cy="640080"/>
+          </a:xfrm>
+          <a:prstGeom prst="rect">
+            <a:avLst/>
+          </a:prstGeom>
+          <a:noFill/>
+          <a:ln/>
+        </p:spPr>
+        <p:txBody>
+          <a:bodyPr wrap="square" lIns="0" tIns="0" rIns="0" bIns="0" rtlCol="0" anchor="ctr"/>
+          <a:lstStyle/>
+          <a:p>
+            <a:pPr indent="0" marL="0">
+              <a:buNone/>
+            </a:pPr>
+            <a:r>
+              <a:rPr lang="en-US" sz="1300" dirty="0">
                 <a:solidFill>
                   <a:srgbClr val="3E4C57"/>
                 </a:solidFill>
@@ -5836,395 +6856,87 @@
                 <a:ea typeface="Calibri" pitchFamily="34" charset="-122"/>
                 <a:cs typeface="Calibri" pitchFamily="34" charset="-120"/>
               </a:rPr>
-              <a:t>It measures our own mapping, not the NAT rule.</a:t>
-            </a:r>
-            <a:endParaRPr lang="en-US" sz="1350" dirty="0"/>
-          </a:p>
-        </p:txBody>
-      </p:sp>
-      <p:sp>
-        <p:nvSpPr>
-          <p:cNvPr id="11" name="Shape 9"/>
-          <p:cNvSpPr/>
-          <p:nvPr/>
-        </p:nvSpPr>
-        <p:spPr>
-          <a:xfrm>
-            <a:off x="1051560" y="4224528"/>
-            <a:ext cx="118872" cy="118872"/>
-          </a:xfrm>
-          <a:prstGeom prst="ellipse">
-            <a:avLst/>
-          </a:prstGeom>
-          <a:solidFill>
-            <a:srgbClr val="C25E28"/>
-          </a:solidFill>
-          <a:ln w="12700">
-            <a:solidFill>
-              <a:srgbClr val="C25E28"/>
-            </a:solidFill>
-            <a:prstDash val="solid"/>
-          </a:ln>
-        </p:spPr>
-      </p:sp>
-      <p:sp>
-        <p:nvSpPr>
-          <p:cNvPr id="12" name="Text 10"/>
-          <p:cNvSpPr/>
-          <p:nvPr/>
-        </p:nvSpPr>
-        <p:spPr>
-          <a:xfrm>
-            <a:off x="1371600" y="4105656"/>
-            <a:ext cx="4160520" cy="384048"/>
-          </a:xfrm>
-          <a:prstGeom prst="rect">
-            <a:avLst/>
-          </a:prstGeom>
-          <a:noFill/>
-          <a:ln/>
-        </p:spPr>
-        <p:txBody>
-          <a:bodyPr wrap="square" lIns="0" tIns="0" rIns="0" bIns="0" rtlCol="0" anchor="ctr"/>
-          <a:lstStyle/>
-          <a:p>
-            <a:pPr indent="0" marL="0">
-              <a:buNone/>
-            </a:pPr>
-            <a:r>
-              <a:rPr lang="en-US" sz="1350" dirty="0">
-                <a:solidFill>
-                  <a:srgbClr val="3E4C57"/>
+              <a:t>Only from the contacted endpoint</a:t>
+            </a:r>
+            <a:endParaRPr lang="en-US" sz="1300" dirty="0"/>
+          </a:p>
+        </p:txBody>
+      </p:sp>
+      <p:sp>
+        <p:nvSpPr>
+          <p:cNvPr id="23" name="Text 21"/>
+          <p:cNvSpPr/>
+          <p:nvPr/>
+        </p:nvSpPr>
+        <p:spPr>
+          <a:xfrm>
+            <a:off x="9363456" y="4471416"/>
+            <a:ext cx="2112264" cy="640080"/>
+          </a:xfrm>
+          <a:prstGeom prst="rect">
+            <a:avLst/>
+          </a:prstGeom>
+          <a:noFill/>
+          <a:ln/>
+        </p:spPr>
+        <p:txBody>
+          <a:bodyPr wrap="square" lIns="0" tIns="0" rIns="0" bIns="0" rtlCol="0" anchor="ctr"/>
+          <a:lstStyle/>
+          <a:p>
+            <a:pPr indent="0" marL="0">
+              <a:buNone/>
+            </a:pPr>
+            <a:r>
+              <a:rPr lang="en-US" sz="1300" b="1" dirty="0">
+                <a:solidFill>
+                  <a:srgbClr val="C25E28"/>
+                </a:solidFill>
+                <a:latin typeface="Cambria" pitchFamily="34" charset="0"/>
+                <a:ea typeface="Cambria" pitchFamily="34" charset="-122"/>
+                <a:cs typeface="Cambria" pitchFamily="34" charset="-120"/>
+              </a:rPr>
+              <a:t>address-and-port-dependent</a:t>
+            </a:r>
+            <a:endParaRPr lang="en-US" sz="1300" dirty="0"/>
+          </a:p>
+        </p:txBody>
+      </p:sp>
+      <p:sp>
+        <p:nvSpPr>
+          <p:cNvPr id="24" name="Text 22"/>
+          <p:cNvSpPr/>
+          <p:nvPr/>
+        </p:nvSpPr>
+        <p:spPr>
+          <a:xfrm>
+            <a:off x="685800" y="5669280"/>
+            <a:ext cx="10789920" cy="365760"/>
+          </a:xfrm>
+          <a:prstGeom prst="rect">
+            <a:avLst/>
+          </a:prstGeom>
+          <a:noFill/>
+          <a:ln/>
+        </p:spPr>
+        <p:txBody>
+          <a:bodyPr wrap="square" lIns="0" tIns="0" rIns="0" bIns="0" rtlCol="0" anchor="ctr"/>
+          <a:lstStyle/>
+          <a:p>
+            <a:pPr indent="0" marL="0">
+              <a:buNone/>
+            </a:pPr>
+            <a:r>
+              <a:rPr lang="en-US" sz="1450" i="1" dirty="0">
+                <a:solidFill>
+                  <a:srgbClr val="0A5A62"/>
                 </a:solidFill>
                 <a:latin typeface="Calibri" pitchFamily="34" charset="0"/>
                 <a:ea typeface="Calibri" pitchFamily="34" charset="-122"/>
                 <a:cs typeface="Calibri" pitchFamily="34" charset="-120"/>
               </a:rPr>
-              <a:t>Guard: a per-test send history discards contacted sources.</a:t>
-            </a:r>
-            <a:endParaRPr lang="en-US" sz="1350" dirty="0"/>
-          </a:p>
-        </p:txBody>
-      </p:sp>
-      <p:sp>
-        <p:nvSpPr>
-          <p:cNvPr id="13" name="Shape 11"/>
-          <p:cNvSpPr/>
-          <p:nvPr/>
-        </p:nvSpPr>
-        <p:spPr>
-          <a:xfrm>
-            <a:off x="6263640" y="2103120"/>
-            <a:ext cx="5212080" cy="2651760"/>
-          </a:xfrm>
-          <a:prstGeom prst="roundRect">
-            <a:avLst>
-              <a:gd name="adj" fmla="val 2069"/>
-            </a:avLst>
-          </a:prstGeom>
-          <a:solidFill>
-            <a:srgbClr val="EEF3F4"/>
-          </a:solidFill>
-          <a:ln w="6350">
-            <a:solidFill>
-              <a:srgbClr val="EEF3F4"/>
-            </a:solidFill>
-            <a:prstDash val="solid"/>
-          </a:ln>
-        </p:spPr>
-      </p:sp>
-      <p:sp>
-        <p:nvSpPr>
-          <p:cNvPr id="14" name="Shape 12"/>
-          <p:cNvSpPr/>
-          <p:nvPr/>
-        </p:nvSpPr>
-        <p:spPr>
-          <a:xfrm>
-            <a:off x="6629400" y="2377440"/>
-            <a:ext cx="365760" cy="365760"/>
-          </a:xfrm>
-          <a:prstGeom prst="ellipse">
-            <a:avLst/>
-          </a:prstGeom>
-          <a:solidFill>
-            <a:srgbClr val="0E7C86"/>
-          </a:solidFill>
-          <a:ln w="12700">
-            <a:solidFill>
-              <a:srgbClr val="0E7C86"/>
-            </a:solidFill>
-            <a:prstDash val="solid"/>
-          </a:ln>
-        </p:spPr>
-      </p:sp>
-      <p:sp>
-        <p:nvSpPr>
-          <p:cNvPr id="15" name="Text 13"/>
-          <p:cNvSpPr/>
-          <p:nvPr/>
-        </p:nvSpPr>
-        <p:spPr>
-          <a:xfrm>
-            <a:off x="6629400" y="2880360"/>
-            <a:ext cx="4480560" cy="365760"/>
-          </a:xfrm>
-          <a:prstGeom prst="rect">
-            <a:avLst/>
-          </a:prstGeom>
-          <a:noFill/>
-          <a:ln/>
-        </p:spPr>
-        <p:txBody>
-          <a:bodyPr wrap="square" lIns="0" tIns="0" rIns="0" bIns="0" rtlCol="0" anchor="ctr"/>
-          <a:lstStyle/>
-          <a:p>
-            <a:pPr indent="0" marL="0">
-              <a:buNone/>
-            </a:pPr>
-            <a:r>
-              <a:rPr lang="en-US" sz="2000" b="1" dirty="0">
-                <a:solidFill>
-                  <a:srgbClr val="16202A"/>
-                </a:solidFill>
-                <a:latin typeface="Cambria" pitchFamily="34" charset="0"/>
-                <a:ea typeface="Cambria" pitchFamily="34" charset="-122"/>
-                <a:cs typeface="Cambria" pitchFamily="34" charset="-120"/>
-              </a:rPr>
-              <a:t>Absent dial-backs</a:t>
-            </a:r>
-            <a:endParaRPr lang="en-US" sz="2000" dirty="0"/>
-          </a:p>
-        </p:txBody>
-      </p:sp>
-      <p:sp>
-        <p:nvSpPr>
-          <p:cNvPr id="16" name="Shape 14"/>
-          <p:cNvSpPr/>
-          <p:nvPr/>
-        </p:nvSpPr>
-        <p:spPr>
-          <a:xfrm>
-            <a:off x="6629400" y="3456432"/>
-            <a:ext cx="118872" cy="118872"/>
-          </a:xfrm>
-          <a:prstGeom prst="ellipse">
-            <a:avLst/>
-          </a:prstGeom>
-          <a:solidFill>
-            <a:srgbClr val="0E7C86"/>
-          </a:solidFill>
-          <a:ln w="12700">
-            <a:solidFill>
-              <a:srgbClr val="0E7C86"/>
-            </a:solidFill>
-            <a:prstDash val="solid"/>
-          </a:ln>
-        </p:spPr>
-      </p:sp>
-      <p:sp>
-        <p:nvSpPr>
-          <p:cNvPr id="17" name="Text 15"/>
-          <p:cNvSpPr/>
-          <p:nvPr/>
-        </p:nvSpPr>
-        <p:spPr>
-          <a:xfrm>
-            <a:off x="6949440" y="3337560"/>
-            <a:ext cx="4160520" cy="384048"/>
-          </a:xfrm>
-          <a:prstGeom prst="rect">
-            <a:avLst/>
-          </a:prstGeom>
-          <a:noFill/>
-          <a:ln/>
-        </p:spPr>
-        <p:txBody>
-          <a:bodyPr wrap="square" lIns="0" tIns="0" rIns="0" bIns="0" rtlCol="0" anchor="ctr"/>
-          <a:lstStyle/>
-          <a:p>
-            <a:pPr indent="0" marL="0">
-              <a:buNone/>
-            </a:pPr>
-            <a:r>
-              <a:rPr lang="en-US" sz="1350" dirty="0">
-                <a:solidFill>
-                  <a:srgbClr val="3E4C57"/>
-                </a:solidFill>
-                <a:latin typeface="Calibri" pitchFamily="34" charset="0"/>
-                <a:ea typeface="Calibri" pitchFamily="34" charset="-122"/>
-                <a:cs typeface="Calibri" pitchFamily="34" charset="-120"/>
-              </a:rPr>
-              <a:t>An arriving dial-back is definitive: the path exists.</a:t>
-            </a:r>
-            <a:endParaRPr lang="en-US" sz="1350" dirty="0"/>
-          </a:p>
-        </p:txBody>
-      </p:sp>
-      <p:sp>
-        <p:nvSpPr>
-          <p:cNvPr id="18" name="Shape 16"/>
-          <p:cNvSpPr/>
-          <p:nvPr/>
-        </p:nvSpPr>
-        <p:spPr>
-          <a:xfrm>
-            <a:off x="6629400" y="3840480"/>
-            <a:ext cx="118872" cy="118872"/>
-          </a:xfrm>
-          <a:prstGeom prst="ellipse">
-            <a:avLst/>
-          </a:prstGeom>
-          <a:solidFill>
-            <a:srgbClr val="0E7C86"/>
-          </a:solidFill>
-          <a:ln w="12700">
-            <a:solidFill>
-              <a:srgbClr val="0E7C86"/>
-            </a:solidFill>
-            <a:prstDash val="solid"/>
-          </a:ln>
-        </p:spPr>
-      </p:sp>
-      <p:sp>
-        <p:nvSpPr>
-          <p:cNvPr id="19" name="Text 17"/>
-          <p:cNvSpPr/>
-          <p:nvPr/>
-        </p:nvSpPr>
-        <p:spPr>
-          <a:xfrm>
-            <a:off x="6949440" y="3721608"/>
-            <a:ext cx="4160520" cy="384048"/>
-          </a:xfrm>
-          <a:prstGeom prst="rect">
-            <a:avLst/>
-          </a:prstGeom>
-          <a:noFill/>
-          <a:ln/>
-        </p:spPr>
-        <p:txBody>
-          <a:bodyPr wrap="square" lIns="0" tIns="0" rIns="0" bIns="0" rtlCol="0" anchor="ctr"/>
-          <a:lstStyle/>
-          <a:p>
-            <a:pPr indent="0" marL="0">
-              <a:buNone/>
-            </a:pPr>
-            <a:r>
-              <a:rPr lang="en-US" sz="1350" dirty="0">
-                <a:solidFill>
-                  <a:srgbClr val="3E4C57"/>
-                </a:solidFill>
-                <a:latin typeface="Calibri" pitchFamily="34" charset="0"/>
-                <a:ea typeface="Calibri" pitchFamily="34" charset="-122"/>
-                <a:cs typeface="Calibri" pitchFamily="34" charset="-120"/>
-              </a:rPr>
-              <a:t>An absent one is filtering, or simply loss.</a:t>
-            </a:r>
-            <a:endParaRPr lang="en-US" sz="1350" dirty="0"/>
-          </a:p>
-        </p:txBody>
-      </p:sp>
-      <p:sp>
-        <p:nvSpPr>
-          <p:cNvPr id="20" name="Shape 18"/>
-          <p:cNvSpPr/>
-          <p:nvPr/>
-        </p:nvSpPr>
-        <p:spPr>
-          <a:xfrm>
-            <a:off x="6629400" y="4224528"/>
-            <a:ext cx="118872" cy="118872"/>
-          </a:xfrm>
-          <a:prstGeom prst="ellipse">
-            <a:avLst/>
-          </a:prstGeom>
-          <a:solidFill>
-            <a:srgbClr val="0E7C86"/>
-          </a:solidFill>
-          <a:ln w="12700">
-            <a:solidFill>
-              <a:srgbClr val="0E7C86"/>
-            </a:solidFill>
-            <a:prstDash val="solid"/>
-          </a:ln>
-        </p:spPr>
-      </p:sp>
-      <p:sp>
-        <p:nvSpPr>
-          <p:cNvPr id="21" name="Text 19"/>
-          <p:cNvSpPr/>
-          <p:nvPr/>
-        </p:nvSpPr>
-        <p:spPr>
-          <a:xfrm>
-            <a:off x="6949440" y="4105656"/>
-            <a:ext cx="4160520" cy="384048"/>
-          </a:xfrm>
-          <a:prstGeom prst="rect">
-            <a:avLst/>
-          </a:prstGeom>
-          <a:noFill/>
-          <a:ln/>
-        </p:spPr>
-        <p:txBody>
-          <a:bodyPr wrap="square" lIns="0" tIns="0" rIns="0" bIns="0" rtlCol="0" anchor="ctr"/>
-          <a:lstStyle/>
-          <a:p>
-            <a:pPr indent="0" marL="0">
-              <a:buNone/>
-            </a:pPr>
-            <a:r>
-              <a:rPr lang="en-US" sz="1350" dirty="0">
-                <a:solidFill>
-                  <a:srgbClr val="3E4C57"/>
-                </a:solidFill>
-                <a:latin typeface="Calibri" pitchFamily="34" charset="0"/>
-                <a:ea typeface="Calibri" pitchFamily="34" charset="-122"/>
-                <a:cs typeface="Calibri" pitchFamily="34" charset="-120"/>
-              </a:rPr>
-              <a:t>Negative verdicts need retries and k witnesses.</a:t>
-            </a:r>
-            <a:endParaRPr lang="en-US" sz="1350" dirty="0"/>
-          </a:p>
-        </p:txBody>
-      </p:sp>
-      <p:sp>
-        <p:nvSpPr>
-          <p:cNvPr id="22" name="Text 20"/>
-          <p:cNvSpPr/>
-          <p:nvPr/>
-        </p:nvSpPr>
-        <p:spPr>
-          <a:xfrm>
-            <a:off x="685800" y="5120640"/>
-            <a:ext cx="10789920" cy="365760"/>
-          </a:xfrm>
-          <a:prstGeom prst="rect">
-            <a:avLst/>
-          </a:prstGeom>
-          <a:noFill/>
-          <a:ln/>
-        </p:spPr>
-        <p:txBody>
-          <a:bodyPr wrap="square" lIns="0" tIns="0" rIns="0" bIns="0" rtlCol="0" anchor="ctr"/>
-          <a:lstStyle/>
-          <a:p>
-            <a:pPr indent="0" marL="0">
-              <a:buNone/>
-            </a:pPr>
-            <a:r>
-              <a:rPr lang="en-US" sz="1500" i="1" dirty="0">
-                <a:solidFill>
-                  <a:srgbClr val="0A5A62"/>
-                </a:solidFill>
-                <a:latin typeface="Calibri" pitchFamily="34" charset="0"/>
-                <a:ea typeface="Calibri" pitchFamily="34" charset="-122"/>
-                <a:cs typeface="Calibri" pitchFamily="34" charset="-120"/>
-              </a:rPr>
-              <a:t>We assume peers are honest. Relaxing that assumption is follow-on work.</a:t>
-            </a:r>
-            <a:endParaRPr lang="en-US" sz="1500" dirty="0"/>
+              <a:t>Three friends with the right vantage points separate every class. More buy confidence against loss, not resolution.</a:t>
+            </a:r>
+            <a:endParaRPr lang="en-US" sz="1450" dirty="0"/>
           </a:p>
         </p:txBody>
       </p:sp>
@@ -6286,7 +6998,7 @@
                 <a:ea typeface="Calibri" pitchFamily="34" charset="-122"/>
                 <a:cs typeface="Calibri" pitchFamily="34" charset="-120"/>
               </a:rPr>
-              <a:t>HOW THE CLAIM IS ESTABLISHED</a:t>
+              <a:t>UNDER HONEST PEERS</a:t>
             </a:r>
             <a:endParaRPr lang="en-US" sz="1100" dirty="0"/>
           </a:p>
@@ -6325,7 +7037,7 @@
                 <a:ea typeface="Cambria" pitchFamily="34" charset="-122"/>
                 <a:cs typeface="Cambria" pitchFamily="34" charset="-120"/>
               </a:rPr>
-              <a:t>Validation in two tiers</a:t>
+              <a:t>Two things that mislead</a:t>
             </a:r>
             <a:endParaRPr lang="en-US" sz="3600" dirty="0"/>
           </a:p>
@@ -6339,12 +7051,12 @@
         </p:nvSpPr>
         <p:spPr>
           <a:xfrm>
-            <a:off x="685800" y="2286000"/>
-            <a:ext cx="10789920" cy="960120"/>
+            <a:off x="685800" y="2103120"/>
+            <a:ext cx="5212080" cy="2651760"/>
           </a:xfrm>
           <a:prstGeom prst="roundRect">
             <a:avLst>
-              <a:gd name="adj" fmla="val 5714"/>
+              <a:gd name="adj" fmla="val 2069"/>
             </a:avLst>
           </a:prstGeom>
           <a:solidFill>
@@ -6366,13 +7078,294 @@
         </p:nvSpPr>
         <p:spPr>
           <a:xfrm>
-            <a:off x="960120" y="2514600"/>
-            <a:ext cx="1737360" cy="502920"/>
+            <a:off x="1051560" y="2377440"/>
+            <a:ext cx="365760" cy="365760"/>
+          </a:xfrm>
+          <a:prstGeom prst="ellipse">
+            <a:avLst/>
+          </a:prstGeom>
+          <a:solidFill>
+            <a:srgbClr val="C25E28"/>
+          </a:solidFill>
+          <a:ln w="12700">
+            <a:solidFill>
+              <a:srgbClr val="C25E28"/>
+            </a:solidFill>
+            <a:prstDash val="solid"/>
+          </a:ln>
+        </p:spPr>
+      </p:sp>
+      <p:sp>
+        <p:nvSpPr>
+          <p:cNvPr id="6" name="Text 4"/>
+          <p:cNvSpPr/>
+          <p:nvPr/>
+        </p:nvSpPr>
+        <p:spPr>
+          <a:xfrm>
+            <a:off x="1051560" y="2880360"/>
+            <a:ext cx="4480560" cy="365760"/>
+          </a:xfrm>
+          <a:prstGeom prst="rect">
+            <a:avLst/>
+          </a:prstGeom>
+          <a:noFill/>
+          <a:ln/>
+        </p:spPr>
+        <p:txBody>
+          <a:bodyPr wrap="square" lIns="0" tIns="0" rIns="0" bIns="0" rtlCol="0" anchor="ctr"/>
+          <a:lstStyle/>
+          <a:p>
+            <a:pPr indent="0" marL="0">
+              <a:buNone/>
+            </a:pPr>
+            <a:r>
+              <a:rPr lang="en-US" sz="2000" b="1" dirty="0">
+                <a:solidFill>
+                  <a:srgbClr val="16202A"/>
+                </a:solidFill>
+                <a:latin typeface="Cambria" pitchFamily="34" charset="0"/>
+                <a:ea typeface="Cambria" pitchFamily="34" charset="-122"/>
+                <a:cs typeface="Cambria" pitchFamily="34" charset="-120"/>
+              </a:rPr>
+              <a:t>Contamination</a:t>
+            </a:r>
+            <a:endParaRPr lang="en-US" sz="2000" dirty="0"/>
+          </a:p>
+        </p:txBody>
+      </p:sp>
+      <p:sp>
+        <p:nvSpPr>
+          <p:cNvPr id="7" name="Shape 5"/>
+          <p:cNvSpPr/>
+          <p:nvPr/>
+        </p:nvSpPr>
+        <p:spPr>
+          <a:xfrm>
+            <a:off x="1051560" y="3456432"/>
+            <a:ext cx="118872" cy="118872"/>
+          </a:xfrm>
+          <a:prstGeom prst="ellipse">
+            <a:avLst/>
+          </a:prstGeom>
+          <a:solidFill>
+            <a:srgbClr val="C25E28"/>
+          </a:solidFill>
+          <a:ln w="12700">
+            <a:solidFill>
+              <a:srgbClr val="C25E28"/>
+            </a:solidFill>
+            <a:prstDash val="solid"/>
+          </a:ln>
+        </p:spPr>
+      </p:sp>
+      <p:sp>
+        <p:nvSpPr>
+          <p:cNvPr id="8" name="Text 6"/>
+          <p:cNvSpPr/>
+          <p:nvPr/>
+        </p:nvSpPr>
+        <p:spPr>
+          <a:xfrm>
+            <a:off x="1371600" y="3337560"/>
+            <a:ext cx="4160520" cy="384048"/>
+          </a:xfrm>
+          <a:prstGeom prst="rect">
+            <a:avLst/>
+          </a:prstGeom>
+          <a:noFill/>
+          <a:ln/>
+        </p:spPr>
+        <p:txBody>
+          <a:bodyPr wrap="square" lIns="0" tIns="0" rIns="0" bIns="0" rtlCol="0" anchor="ctr"/>
+          <a:lstStyle/>
+          <a:p>
+            <a:pPr indent="0" marL="0">
+              <a:buNone/>
+            </a:pPr>
+            <a:r>
+              <a:rPr lang="en-US" sz="1350" dirty="0">
+                <a:solidFill>
+                  <a:srgbClr val="3E4C57"/>
+                </a:solidFill>
+                <a:latin typeface="Calibri" pitchFamily="34" charset="0"/>
+                <a:ea typeface="Calibri" pitchFamily="34" charset="-122"/>
+                <a:cs typeface="Calibri" pitchFamily="34" charset="-120"/>
+              </a:rPr>
+              <a:t>Witnesses are the peers we already transmit to.</a:t>
+            </a:r>
+            <a:endParaRPr lang="en-US" sz="1350" dirty="0"/>
+          </a:p>
+        </p:txBody>
+      </p:sp>
+      <p:sp>
+        <p:nvSpPr>
+          <p:cNvPr id="9" name="Shape 7"/>
+          <p:cNvSpPr/>
+          <p:nvPr/>
+        </p:nvSpPr>
+        <p:spPr>
+          <a:xfrm>
+            <a:off x="1051560" y="3840480"/>
+            <a:ext cx="118872" cy="118872"/>
+          </a:xfrm>
+          <a:prstGeom prst="ellipse">
+            <a:avLst/>
+          </a:prstGeom>
+          <a:solidFill>
+            <a:srgbClr val="C25E28"/>
+          </a:solidFill>
+          <a:ln w="12700">
+            <a:solidFill>
+              <a:srgbClr val="C25E28"/>
+            </a:solidFill>
+            <a:prstDash val="solid"/>
+          </a:ln>
+        </p:spPr>
+      </p:sp>
+      <p:sp>
+        <p:nvSpPr>
+          <p:cNvPr id="10" name="Text 8"/>
+          <p:cNvSpPr/>
+          <p:nvPr/>
+        </p:nvSpPr>
+        <p:spPr>
+          <a:xfrm>
+            <a:off x="1371600" y="3721608"/>
+            <a:ext cx="4160520" cy="384048"/>
+          </a:xfrm>
+          <a:prstGeom prst="rect">
+            <a:avLst/>
+          </a:prstGeom>
+          <a:noFill/>
+          <a:ln/>
+        </p:spPr>
+        <p:txBody>
+          <a:bodyPr wrap="square" lIns="0" tIns="0" rIns="0" bIns="0" rtlCol="0" anchor="ctr"/>
+          <a:lstStyle/>
+          <a:p>
+            <a:pPr indent="0" marL="0">
+              <a:buNone/>
+            </a:pPr>
+            <a:r>
+              <a:rPr lang="en-US" sz="1350" dirty="0">
+                <a:solidFill>
+                  <a:srgbClr val="3E4C57"/>
+                </a:solidFill>
+                <a:latin typeface="Calibri" pitchFamily="34" charset="0"/>
+                <a:ea typeface="Calibri" pitchFamily="34" charset="-122"/>
+                <a:cs typeface="Calibri" pitchFamily="34" charset="-120"/>
+              </a:rPr>
+              <a:t>It measures our own mapping, not the NAT rule.</a:t>
+            </a:r>
+            <a:endParaRPr lang="en-US" sz="1350" dirty="0"/>
+          </a:p>
+        </p:txBody>
+      </p:sp>
+      <p:sp>
+        <p:nvSpPr>
+          <p:cNvPr id="11" name="Shape 9"/>
+          <p:cNvSpPr/>
+          <p:nvPr/>
+        </p:nvSpPr>
+        <p:spPr>
+          <a:xfrm>
+            <a:off x="1051560" y="4224528"/>
+            <a:ext cx="118872" cy="118872"/>
+          </a:xfrm>
+          <a:prstGeom prst="ellipse">
+            <a:avLst/>
+          </a:prstGeom>
+          <a:solidFill>
+            <a:srgbClr val="C25E28"/>
+          </a:solidFill>
+          <a:ln w="12700">
+            <a:solidFill>
+              <a:srgbClr val="C25E28"/>
+            </a:solidFill>
+            <a:prstDash val="solid"/>
+          </a:ln>
+        </p:spPr>
+      </p:sp>
+      <p:sp>
+        <p:nvSpPr>
+          <p:cNvPr id="12" name="Text 10"/>
+          <p:cNvSpPr/>
+          <p:nvPr/>
+        </p:nvSpPr>
+        <p:spPr>
+          <a:xfrm>
+            <a:off x="1371600" y="4105656"/>
+            <a:ext cx="4160520" cy="384048"/>
+          </a:xfrm>
+          <a:prstGeom prst="rect">
+            <a:avLst/>
+          </a:prstGeom>
+          <a:noFill/>
+          <a:ln/>
+        </p:spPr>
+        <p:txBody>
+          <a:bodyPr wrap="square" lIns="0" tIns="0" rIns="0" bIns="0" rtlCol="0" anchor="ctr"/>
+          <a:lstStyle/>
+          <a:p>
+            <a:pPr indent="0" marL="0">
+              <a:buNone/>
+            </a:pPr>
+            <a:r>
+              <a:rPr lang="en-US" sz="1350" dirty="0">
+                <a:solidFill>
+                  <a:srgbClr val="3E4C57"/>
+                </a:solidFill>
+                <a:latin typeface="Calibri" pitchFamily="34" charset="0"/>
+                <a:ea typeface="Calibri" pitchFamily="34" charset="-122"/>
+                <a:cs typeface="Calibri" pitchFamily="34" charset="-120"/>
+              </a:rPr>
+              <a:t>Guard: a per-test send history discards contacted sources.</a:t>
+            </a:r>
+            <a:endParaRPr lang="en-US" sz="1350" dirty="0"/>
+          </a:p>
+        </p:txBody>
+      </p:sp>
+      <p:sp>
+        <p:nvSpPr>
+          <p:cNvPr id="13" name="Shape 11"/>
+          <p:cNvSpPr/>
+          <p:nvPr/>
+        </p:nvSpPr>
+        <p:spPr>
+          <a:xfrm>
+            <a:off x="6263640" y="2103120"/>
+            <a:ext cx="5212080" cy="2651760"/>
           </a:xfrm>
           <a:prstGeom prst="roundRect">
             <a:avLst>
-              <a:gd name="adj" fmla="val 9091"/>
+              <a:gd name="adj" fmla="val 2069"/>
             </a:avLst>
+          </a:prstGeom>
+          <a:solidFill>
+            <a:srgbClr val="EEF3F4"/>
+          </a:solidFill>
+          <a:ln w="6350">
+            <a:solidFill>
+              <a:srgbClr val="EEF3F4"/>
+            </a:solidFill>
+            <a:prstDash val="solid"/>
+          </a:ln>
+        </p:spPr>
+      </p:sp>
+      <p:sp>
+        <p:nvSpPr>
+          <p:cNvPr id="14" name="Shape 12"/>
+          <p:cNvSpPr/>
+          <p:nvPr/>
+        </p:nvSpPr>
+        <p:spPr>
+          <a:xfrm>
+            <a:off x="6629400" y="2377440"/>
+            <a:ext cx="365760" cy="365760"/>
+          </a:xfrm>
+          <a:prstGeom prst="ellipse">
+            <a:avLst/>
           </a:prstGeom>
           <a:solidFill>
             <a:srgbClr val="0E7C86"/>
@@ -6387,163 +7380,56 @@
       </p:sp>
       <p:sp>
         <p:nvSpPr>
-          <p:cNvPr id="6" name="Text 4"/>
-          <p:cNvSpPr/>
-          <p:nvPr/>
-        </p:nvSpPr>
-        <p:spPr>
-          <a:xfrm>
-            <a:off x="960120" y="2514600"/>
-            <a:ext cx="1737360" cy="502920"/>
-          </a:xfrm>
-          <a:prstGeom prst="rect">
-            <a:avLst/>
-          </a:prstGeom>
-          <a:noFill/>
-          <a:ln/>
-        </p:spPr>
-        <p:txBody>
-          <a:bodyPr wrap="square" lIns="0" tIns="0" rIns="0" bIns="0" rtlCol="0" anchor="ctr"/>
-          <a:lstStyle/>
-          <a:p>
-            <a:pPr algn="ctr" indent="0" marL="0">
-              <a:buNone/>
-            </a:pPr>
-            <a:r>
-              <a:rPr lang="en-US" sz="1500" b="1" dirty="0">
-                <a:solidFill>
-                  <a:srgbClr val="FFFFFF"/>
+          <p:cNvPr id="15" name="Text 13"/>
+          <p:cNvSpPr/>
+          <p:nvPr/>
+        </p:nvSpPr>
+        <p:spPr>
+          <a:xfrm>
+            <a:off x="6629400" y="2880360"/>
+            <a:ext cx="4480560" cy="365760"/>
+          </a:xfrm>
+          <a:prstGeom prst="rect">
+            <a:avLst/>
+          </a:prstGeom>
+          <a:noFill/>
+          <a:ln/>
+        </p:spPr>
+        <p:txBody>
+          <a:bodyPr wrap="square" lIns="0" tIns="0" rIns="0" bIns="0" rtlCol="0" anchor="ctr"/>
+          <a:lstStyle/>
+          <a:p>
+            <a:pPr indent="0" marL="0">
+              <a:buNone/>
+            </a:pPr>
+            <a:r>
+              <a:rPr lang="en-US" sz="2000" b="1" dirty="0">
+                <a:solidFill>
+                  <a:srgbClr val="16202A"/>
                 </a:solidFill>
                 <a:latin typeface="Cambria" pitchFamily="34" charset="0"/>
                 <a:ea typeface="Cambria" pitchFamily="34" charset="-122"/>
                 <a:cs typeface="Cambria" pitchFamily="34" charset="-120"/>
               </a:rPr>
-              <a:t>Bench</a:t>
-            </a:r>
-            <a:endParaRPr lang="en-US" sz="1500" dirty="0"/>
-          </a:p>
-        </p:txBody>
-      </p:sp>
-      <p:sp>
-        <p:nvSpPr>
-          <p:cNvPr id="7" name="Text 5"/>
-          <p:cNvSpPr/>
-          <p:nvPr/>
-        </p:nvSpPr>
-        <p:spPr>
-          <a:xfrm>
-            <a:off x="2971800" y="2286000"/>
-            <a:ext cx="5852160" cy="960120"/>
-          </a:xfrm>
-          <a:prstGeom prst="rect">
-            <a:avLst/>
-          </a:prstGeom>
-          <a:noFill/>
-          <a:ln/>
-        </p:spPr>
-        <p:txBody>
-          <a:bodyPr wrap="square" lIns="0" tIns="0" rIns="0" bIns="0" rtlCol="0" anchor="ctr"/>
-          <a:lstStyle/>
-          <a:p>
-            <a:pPr indent="0" marL="0">
-              <a:buNone/>
-            </a:pPr>
-            <a:r>
-              <a:rPr lang="en-US" sz="1600" dirty="0">
-                <a:solidFill>
-                  <a:srgbClr val="3E4C57"/>
-                </a:solidFill>
-                <a:latin typeface="Calibri" pitchFamily="34" charset="0"/>
-                <a:ea typeface="Calibri" pitchFamily="34" charset="-122"/>
-                <a:cs typeface="Calibri" pitchFamily="34" charset="-120"/>
-              </a:rPr>
-              <a:t>Eight-plus configurations, labeled by construction</a:t>
-            </a:r>
-            <a:endParaRPr lang="en-US" sz="1600" dirty="0"/>
-          </a:p>
-        </p:txBody>
-      </p:sp>
-      <p:sp>
-        <p:nvSpPr>
-          <p:cNvPr id="8" name="Text 6"/>
-          <p:cNvSpPr/>
-          <p:nvPr/>
-        </p:nvSpPr>
-        <p:spPr>
-          <a:xfrm>
-            <a:off x="8915400" y="2286000"/>
-            <a:ext cx="2377440" cy="960120"/>
-          </a:xfrm>
-          <a:prstGeom prst="rect">
-            <a:avLst/>
-          </a:prstGeom>
-          <a:noFill/>
-          <a:ln/>
-        </p:spPr>
-        <p:txBody>
-          <a:bodyPr wrap="square" lIns="0" tIns="0" rIns="0" bIns="0" rtlCol="0" anchor="ctr"/>
-          <a:lstStyle/>
-          <a:p>
-            <a:pPr algn="r" indent="0" marL="0">
-              <a:buNone/>
-            </a:pPr>
-            <a:r>
-              <a:rPr lang="en-US" sz="1300" i="1" dirty="0">
-                <a:solidFill>
-                  <a:srgbClr val="6E7F8B"/>
-                </a:solidFill>
-                <a:latin typeface="Calibri" pitchFamily="34" charset="0"/>
-                <a:ea typeface="Calibri" pitchFamily="34" charset="-122"/>
-                <a:cs typeface="Calibri" pitchFamily="34" charset="-120"/>
-              </a:rPr>
-              <a:t>accuracy is legitimate here</a:t>
-            </a:r>
-            <a:endParaRPr lang="en-US" sz="1300" dirty="0"/>
-          </a:p>
-        </p:txBody>
-      </p:sp>
-      <p:sp>
-        <p:nvSpPr>
-          <p:cNvPr id="9" name="Shape 7"/>
-          <p:cNvSpPr/>
-          <p:nvPr/>
-        </p:nvSpPr>
-        <p:spPr>
-          <a:xfrm>
-            <a:off x="685800" y="3429000"/>
-            <a:ext cx="10789920" cy="960120"/>
-          </a:xfrm>
-          <a:prstGeom prst="roundRect">
-            <a:avLst>
-              <a:gd name="adj" fmla="val 5714"/>
-            </a:avLst>
-          </a:prstGeom>
-          <a:solidFill>
-            <a:srgbClr val="EEF3F4"/>
-          </a:solidFill>
-          <a:ln w="6350">
-            <a:solidFill>
-              <a:srgbClr val="EEF3F4"/>
-            </a:solidFill>
-            <a:prstDash val="solid"/>
-          </a:ln>
-        </p:spPr>
-      </p:sp>
-      <p:sp>
-        <p:nvSpPr>
-          <p:cNvPr id="10" name="Shape 8"/>
-          <p:cNvSpPr/>
-          <p:nvPr/>
-        </p:nvSpPr>
-        <p:spPr>
-          <a:xfrm>
-            <a:off x="960120" y="3657600"/>
-            <a:ext cx="1737360" cy="502920"/>
-          </a:xfrm>
-          <a:prstGeom prst="roundRect">
-            <a:avLst>
-              <a:gd name="adj" fmla="val 9091"/>
-            </a:avLst>
+              <a:t>Absent dial-backs</a:t>
+            </a:r>
+            <a:endParaRPr lang="en-US" sz="2000" dirty="0"/>
+          </a:p>
+        </p:txBody>
+      </p:sp>
+      <p:sp>
+        <p:nvSpPr>
+          <p:cNvPr id="16" name="Shape 14"/>
+          <p:cNvSpPr/>
+          <p:nvPr/>
+        </p:nvSpPr>
+        <p:spPr>
+          <a:xfrm>
+            <a:off x="6629400" y="3456432"/>
+            <a:ext cx="118872" cy="118872"/>
+          </a:xfrm>
+          <a:prstGeom prst="ellipse">
+            <a:avLst/>
           </a:prstGeom>
           <a:solidFill>
             <a:srgbClr val="0E7C86"/>
@@ -6558,69 +7444,30 @@
       </p:sp>
       <p:sp>
         <p:nvSpPr>
-          <p:cNvPr id="11" name="Text 9"/>
-          <p:cNvSpPr/>
-          <p:nvPr/>
-        </p:nvSpPr>
-        <p:spPr>
-          <a:xfrm>
-            <a:off x="960120" y="3657600"/>
-            <a:ext cx="1737360" cy="502920"/>
-          </a:xfrm>
-          <a:prstGeom prst="rect">
-            <a:avLst/>
-          </a:prstGeom>
-          <a:noFill/>
-          <a:ln/>
-        </p:spPr>
-        <p:txBody>
-          <a:bodyPr wrap="square" lIns="0" tIns="0" rIns="0" bIns="0" rtlCol="0" anchor="ctr"/>
-          <a:lstStyle/>
-          <a:p>
-            <a:pPr algn="ctr" indent="0" marL="0">
-              <a:buNone/>
-            </a:pPr>
-            <a:r>
-              <a:rPr lang="en-US" sz="1500" b="1" dirty="0">
-                <a:solidFill>
-                  <a:srgbClr val="FFFFFF"/>
-                </a:solidFill>
-                <a:latin typeface="Cambria" pitchFamily="34" charset="0"/>
-                <a:ea typeface="Cambria" pitchFamily="34" charset="-122"/>
-                <a:cs typeface="Cambria" pitchFamily="34" charset="-120"/>
-              </a:rPr>
-              <a:t>Sweep</a:t>
-            </a:r>
-            <a:endParaRPr lang="en-US" sz="1500" dirty="0"/>
-          </a:p>
-        </p:txBody>
-      </p:sp>
-      <p:sp>
-        <p:nvSpPr>
-          <p:cNvPr id="12" name="Text 10"/>
-          <p:cNvSpPr/>
-          <p:nvPr/>
-        </p:nvSpPr>
-        <p:spPr>
-          <a:xfrm>
-            <a:off x="2971800" y="3429000"/>
-            <a:ext cx="5852160" cy="960120"/>
-          </a:xfrm>
-          <a:prstGeom prst="rect">
-            <a:avLst/>
-          </a:prstGeom>
-          <a:noFill/>
-          <a:ln/>
-        </p:spPr>
-        <p:txBody>
-          <a:bodyPr wrap="square" lIns="0" tIns="0" rIns="0" bIns="0" rtlCol="0" anchor="ctr"/>
-          <a:lstStyle/>
-          <a:p>
-            <a:pPr indent="0" marL="0">
-              <a:buNone/>
-            </a:pPr>
-            <a:r>
-              <a:rPr lang="en-US" sz="1600" dirty="0">
+          <p:cNvPr id="17" name="Text 15"/>
+          <p:cNvSpPr/>
+          <p:nvPr/>
+        </p:nvSpPr>
+        <p:spPr>
+          <a:xfrm>
+            <a:off x="6949440" y="3337560"/>
+            <a:ext cx="4160520" cy="384048"/>
+          </a:xfrm>
+          <a:prstGeom prst="rect">
+            <a:avLst/>
+          </a:prstGeom>
+          <a:noFill/>
+          <a:ln/>
+        </p:spPr>
+        <p:txBody>
+          <a:bodyPr wrap="square" lIns="0" tIns="0" rIns="0" bIns="0" rtlCol="0" anchor="ctr"/>
+          <a:lstStyle/>
+          <a:p>
+            <a:pPr indent="0" marL="0">
+              <a:buNone/>
+            </a:pPr>
+            <a:r>
+              <a:rPr lang="en-US" sz="1350" dirty="0">
                 <a:solidFill>
                   <a:srgbClr val="3E4C57"/>
                 </a:solidFill>
@@ -6628,73 +7475,96 @@
                 <a:ea typeface="Calibri" pitchFamily="34" charset="-122"/>
                 <a:cs typeface="Calibri" pitchFamily="34" charset="-120"/>
               </a:rPr>
-              <a:t>Witness count k against byzantine fraction f</a:t>
-            </a:r>
-            <a:endParaRPr lang="en-US" sz="1600" dirty="0"/>
-          </a:p>
-        </p:txBody>
-      </p:sp>
-      <p:sp>
-        <p:nvSpPr>
-          <p:cNvPr id="13" name="Text 11"/>
-          <p:cNvSpPr/>
-          <p:nvPr/>
-        </p:nvSpPr>
-        <p:spPr>
-          <a:xfrm>
-            <a:off x="8915400" y="3429000"/>
-            <a:ext cx="2377440" cy="960120"/>
-          </a:xfrm>
-          <a:prstGeom prst="rect">
-            <a:avLst/>
-          </a:prstGeom>
-          <a:noFill/>
-          <a:ln/>
-        </p:spPr>
-        <p:txBody>
-          <a:bodyPr wrap="square" lIns="0" tIns="0" rIns="0" bIns="0" rtlCol="0" anchor="ctr"/>
-          <a:lstStyle/>
-          <a:p>
-            <a:pPr algn="r" indent="0" marL="0">
-              <a:buNone/>
-            </a:pPr>
-            <a:r>
-              <a:rPr lang="en-US" sz="1300" i="1" dirty="0">
-                <a:solidFill>
-                  <a:srgbClr val="6E7F8B"/>
+              <a:t>An arriving dial-back is definitive: the path exists.</a:t>
+            </a:r>
+            <a:endParaRPr lang="en-US" sz="1350" dirty="0"/>
+          </a:p>
+        </p:txBody>
+      </p:sp>
+      <p:sp>
+        <p:nvSpPr>
+          <p:cNvPr id="18" name="Shape 16"/>
+          <p:cNvSpPr/>
+          <p:nvPr/>
+        </p:nvSpPr>
+        <p:spPr>
+          <a:xfrm>
+            <a:off x="6629400" y="3840480"/>
+            <a:ext cx="118872" cy="118872"/>
+          </a:xfrm>
+          <a:prstGeom prst="ellipse">
+            <a:avLst/>
+          </a:prstGeom>
+          <a:solidFill>
+            <a:srgbClr val="0E7C86"/>
+          </a:solidFill>
+          <a:ln w="12700">
+            <a:solidFill>
+              <a:srgbClr val="0E7C86"/>
+            </a:solidFill>
+            <a:prstDash val="solid"/>
+          </a:ln>
+        </p:spPr>
+      </p:sp>
+      <p:sp>
+        <p:nvSpPr>
+          <p:cNvPr id="19" name="Text 17"/>
+          <p:cNvSpPr/>
+          <p:nvPr/>
+        </p:nvSpPr>
+        <p:spPr>
+          <a:xfrm>
+            <a:off x="6949440" y="3721608"/>
+            <a:ext cx="4160520" cy="384048"/>
+          </a:xfrm>
+          <a:prstGeom prst="rect">
+            <a:avLst/>
+          </a:prstGeom>
+          <a:noFill/>
+          <a:ln/>
+        </p:spPr>
+        <p:txBody>
+          <a:bodyPr wrap="square" lIns="0" tIns="0" rIns="0" bIns="0" rtlCol="0" anchor="ctr"/>
+          <a:lstStyle/>
+          <a:p>
+            <a:pPr indent="0" marL="0">
+              <a:buNone/>
+            </a:pPr>
+            <a:r>
+              <a:rPr lang="en-US" sz="1350" dirty="0">
+                <a:solidFill>
+                  <a:srgbClr val="3E4C57"/>
                 </a:solidFill>
                 <a:latin typeface="Calibri" pitchFamily="34" charset="0"/>
                 <a:ea typeface="Calibri" pitchFamily="34" charset="-122"/>
                 <a:cs typeface="Calibri" pitchFamily="34" charset="-120"/>
               </a:rPr>
-              <a:t>we operate every witness</a:t>
-            </a:r>
-            <a:endParaRPr lang="en-US" sz="1300" dirty="0"/>
-          </a:p>
-        </p:txBody>
-      </p:sp>
-      <p:sp>
-        <p:nvSpPr>
-          <p:cNvPr id="14" name="Shape 12"/>
-          <p:cNvSpPr/>
-          <p:nvPr/>
-        </p:nvSpPr>
-        <p:spPr>
-          <a:xfrm>
-            <a:off x="685800" y="4572000"/>
-            <a:ext cx="10789920" cy="960120"/>
-          </a:xfrm>
-          <a:prstGeom prst="roundRect">
-            <a:avLst>
-              <a:gd name="adj" fmla="val 5714"/>
-            </a:avLst>
+              <a:t>An absent one is filtering, or simply loss.</a:t>
+            </a:r>
+            <a:endParaRPr lang="en-US" sz="1350" dirty="0"/>
+          </a:p>
+        </p:txBody>
+      </p:sp>
+      <p:sp>
+        <p:nvSpPr>
+          <p:cNvPr id="20" name="Shape 18"/>
+          <p:cNvSpPr/>
+          <p:nvPr/>
+        </p:nvSpPr>
+        <p:spPr>
+          <a:xfrm>
+            <a:off x="6629400" y="4224528"/>
+            <a:ext cx="118872" cy="118872"/>
+          </a:xfrm>
+          <a:prstGeom prst="ellipse">
+            <a:avLst/>
           </a:prstGeom>
           <a:solidFill>
-            <a:srgbClr val="EEF3F4"/>
+            <a:srgbClr val="0E7C86"/>
           </a:solidFill>
-          <a:ln w="6350">
+          <a:ln w="12700">
             <a:solidFill>
-              <a:srgbClr val="EEF3F4"/>
+              <a:srgbClr val="0E7C86"/>
             </a:solidFill>
             <a:prstDash val="solid"/>
           </a:ln>
@@ -6702,96 +7572,30 @@
       </p:sp>
       <p:sp>
         <p:nvSpPr>
-          <p:cNvPr id="15" name="Shape 13"/>
-          <p:cNvSpPr/>
-          <p:nvPr/>
-        </p:nvSpPr>
-        <p:spPr>
-          <a:xfrm>
-            <a:off x="960120" y="4800600"/>
-            <a:ext cx="1737360" cy="502920"/>
-          </a:xfrm>
-          <a:prstGeom prst="roundRect">
-            <a:avLst>
-              <a:gd name="adj" fmla="val 9091"/>
-            </a:avLst>
-          </a:prstGeom>
-          <a:solidFill>
-            <a:srgbClr val="C25E28"/>
-          </a:solidFill>
-          <a:ln w="12700">
-            <a:solidFill>
-              <a:srgbClr val="C25E28"/>
-            </a:solidFill>
-            <a:prstDash val="solid"/>
-          </a:ln>
-        </p:spPr>
-      </p:sp>
-      <p:sp>
-        <p:nvSpPr>
-          <p:cNvPr id="16" name="Text 14"/>
-          <p:cNvSpPr/>
-          <p:nvPr/>
-        </p:nvSpPr>
-        <p:spPr>
-          <a:xfrm>
-            <a:off x="960120" y="4800600"/>
-            <a:ext cx="1737360" cy="502920"/>
-          </a:xfrm>
-          <a:prstGeom prst="rect">
-            <a:avLst/>
-          </a:prstGeom>
-          <a:noFill/>
-          <a:ln/>
-        </p:spPr>
-        <p:txBody>
-          <a:bodyPr wrap="square" lIns="0" tIns="0" rIns="0" bIns="0" rtlCol="0" anchor="ctr"/>
-          <a:lstStyle/>
-          <a:p>
-            <a:pPr algn="ctr" indent="0" marL="0">
-              <a:buNone/>
-            </a:pPr>
-            <a:r>
-              <a:rPr lang="en-US" sz="1500" b="1" dirty="0">
-                <a:solidFill>
-                  <a:srgbClr val="FFFFFF"/>
-                </a:solidFill>
-                <a:latin typeface="Cambria" pitchFamily="34" charset="0"/>
-                <a:ea typeface="Cambria" pitchFamily="34" charset="-122"/>
-                <a:cs typeface="Cambria" pitchFamily="34" charset="-120"/>
-              </a:rPr>
-              <a:t>Campaign</a:t>
-            </a:r>
-            <a:endParaRPr lang="en-US" sz="1500" dirty="0"/>
-          </a:p>
-        </p:txBody>
-      </p:sp>
-      <p:sp>
-        <p:nvSpPr>
-          <p:cNvPr id="17" name="Text 15"/>
-          <p:cNvSpPr/>
-          <p:nvPr/>
-        </p:nvSpPr>
-        <p:spPr>
-          <a:xfrm>
-            <a:off x="2971800" y="4572000"/>
-            <a:ext cx="5852160" cy="960120"/>
-          </a:xfrm>
-          <a:prstGeom prst="rect">
-            <a:avLst/>
-          </a:prstGeom>
-          <a:noFill/>
-          <a:ln/>
-        </p:spPr>
-        <p:txBody>
-          <a:bodyPr wrap="square" lIns="0" tIns="0" rIns="0" bIns="0" rtlCol="0" anchor="ctr"/>
-          <a:lstStyle/>
-          <a:p>
-            <a:pPr indent="0" marL="0">
-              <a:buNone/>
-            </a:pPr>
-            <a:r>
-              <a:rPr lang="en-US" sz="1600" dirty="0">
+          <p:cNvPr id="21" name="Text 19"/>
+          <p:cNvSpPr/>
+          <p:nvPr/>
+        </p:nvSpPr>
+        <p:spPr>
+          <a:xfrm>
+            <a:off x="6949440" y="4105656"/>
+            <a:ext cx="4160520" cy="384048"/>
+          </a:xfrm>
+          <a:prstGeom prst="rect">
+            <a:avLst/>
+          </a:prstGeom>
+          <a:noFill/>
+          <a:ln/>
+        </p:spPr>
+        <p:txBody>
+          <a:bodyPr wrap="square" lIns="0" tIns="0" rIns="0" bIns="0" rtlCol="0" anchor="ctr"/>
+          <a:lstStyle/>
+          <a:p>
+            <a:pPr indent="0" marL="0">
+              <a:buNone/>
+            </a:pPr>
+            <a:r>
+              <a:rPr lang="en-US" sz="1350" dirty="0">
                 <a:solidFill>
                   <a:srgbClr val="3E4C57"/>
                 </a:solidFill>
@@ -6799,124 +7603,46 @@
                 <a:ea typeface="Calibri" pitchFamily="34" charset="-122"/>
                 <a:cs typeface="Calibri" pitchFamily="34" charset="-120"/>
               </a:rPr>
-              <a:t>Our own handsets and SIMs across every stratum</a:t>
-            </a:r>
-            <a:endParaRPr lang="en-US" sz="1600" dirty="0"/>
-          </a:p>
-        </p:txBody>
-      </p:sp>
-      <p:sp>
-        <p:nvSpPr>
-          <p:cNvPr id="18" name="Text 16"/>
-          <p:cNvSpPr/>
-          <p:nvPr/>
-        </p:nvSpPr>
-        <p:spPr>
-          <a:xfrm>
-            <a:off x="8915400" y="4572000"/>
-            <a:ext cx="2377440" cy="960120"/>
-          </a:xfrm>
-          <a:prstGeom prst="rect">
-            <a:avLst/>
-          </a:prstGeom>
-          <a:noFill/>
-          <a:ln/>
-        </p:spPr>
-        <p:txBody>
-          <a:bodyPr wrap="square" lIns="0" tIns="0" rIns="0" bIns="0" rtlCol="0" anchor="ctr"/>
-          <a:lstStyle/>
-          <a:p>
-            <a:pPr algn="r" indent="0" marL="0">
-              <a:buNone/>
-            </a:pPr>
-            <a:r>
-              <a:rPr lang="en-US" sz="1300" i="1" dirty="0">
-                <a:solidFill>
-                  <a:srgbClr val="6E7F8B"/>
+              <a:t>Negative verdicts need retries and k witnesses.</a:t>
+            </a:r>
+            <a:endParaRPr lang="en-US" sz="1350" dirty="0"/>
+          </a:p>
+        </p:txBody>
+      </p:sp>
+      <p:sp>
+        <p:nvSpPr>
+          <p:cNvPr id="22" name="Text 20"/>
+          <p:cNvSpPr/>
+          <p:nvPr/>
+        </p:nvSpPr>
+        <p:spPr>
+          <a:xfrm>
+            <a:off x="685800" y="5120640"/>
+            <a:ext cx="10789920" cy="365760"/>
+          </a:xfrm>
+          <a:prstGeom prst="rect">
+            <a:avLst/>
+          </a:prstGeom>
+          <a:noFill/>
+          <a:ln/>
+        </p:spPr>
+        <p:txBody>
+          <a:bodyPr wrap="square" lIns="0" tIns="0" rIns="0" bIns="0" rtlCol="0" anchor="ctr"/>
+          <a:lstStyle/>
+          <a:p>
+            <a:pPr indent="0" marL="0">
+              <a:buNone/>
+            </a:pPr>
+            <a:r>
+              <a:rPr lang="en-US" sz="1500" i="1" dirty="0">
+                <a:solidFill>
+                  <a:srgbClr val="0A5A62"/>
                 </a:solidFill>
                 <a:latin typeface="Calibri" pitchFamily="34" charset="0"/>
                 <a:ea typeface="Calibri" pitchFamily="34" charset="-122"/>
                 <a:cs typeface="Calibri" pitchFamily="34" charset="-120"/>
               </a:rPr>
-              <a:t>agreement, never accuracy</a:t>
-            </a:r>
-            <a:endParaRPr lang="en-US" sz="1300" dirty="0"/>
-          </a:p>
-        </p:txBody>
-      </p:sp>
-      <p:sp>
-        <p:nvSpPr>
-          <p:cNvPr id="19" name="Text 17"/>
-          <p:cNvSpPr/>
-          <p:nvPr/>
-        </p:nvSpPr>
-        <p:spPr>
-          <a:xfrm>
-            <a:off x="685800" y="5623560"/>
-            <a:ext cx="10789920" cy="320040"/>
-          </a:xfrm>
-          <a:prstGeom prst="rect">
-            <a:avLst/>
-          </a:prstGeom>
-          <a:noFill/>
-          <a:ln/>
-        </p:spPr>
-        <p:txBody>
-          <a:bodyPr wrap="square" lIns="0" tIns="0" rIns="0" bIns="0" rtlCol="0" anchor="ctr"/>
-          <a:lstStyle/>
-          <a:p>
-            <a:pPr indent="0" marL="0">
-              <a:buNone/>
-            </a:pPr>
-            <a:r>
-              <a:rPr lang="en-US" sz="1500" i="1" dirty="0">
-                <a:solidFill>
-                  <a:srgbClr val="0A5A62"/>
-                </a:solidFill>
-                <a:latin typeface="Calibri" pitchFamily="34" charset="0"/>
-                <a:ea typeface="Calibri" pitchFamily="34" charset="-122"/>
-                <a:cs typeface="Calibri" pitchFamily="34" charset="-120"/>
-              </a:rPr>
-              <a:t>Address-dependent mapping is built deliberately; no netfilter flag produces it.</a:t>
-            </a:r>
-            <a:endParaRPr lang="en-US" sz="1500" dirty="0"/>
-          </a:p>
-        </p:txBody>
-      </p:sp>
-      <p:sp>
-        <p:nvSpPr>
-          <p:cNvPr id="20" name="Text 18"/>
-          <p:cNvSpPr/>
-          <p:nvPr/>
-        </p:nvSpPr>
-        <p:spPr>
-          <a:xfrm>
-            <a:off x="685800" y="5989320"/>
-            <a:ext cx="10789920" cy="320040"/>
-          </a:xfrm>
-          <a:prstGeom prst="rect">
-            <a:avLst/>
-          </a:prstGeom>
-          <a:noFill/>
-          <a:ln/>
-        </p:spPr>
-        <p:txBody>
-          <a:bodyPr wrap="square" lIns="0" tIns="0" rIns="0" bIns="0" rtlCol="0" anchor="ctr"/>
-          <a:lstStyle/>
-          <a:p>
-            <a:pPr indent="0" marL="0">
-              <a:buNone/>
-            </a:pPr>
-            <a:r>
-              <a:rPr lang="en-US" sz="1500" i="1" dirty="0">
-                <a:solidFill>
-                  <a:srgbClr val="0A5A62"/>
-                </a:solidFill>
-                <a:latin typeface="Calibri" pitchFamily="34" charset="0"/>
-                <a:ea typeface="Calibri" pitchFamily="34" charset="-122"/>
-                <a:cs typeface="Calibri" pitchFamily="34" charset="-120"/>
-              </a:rPr>
-              <a:t>Friends carry the method; public autoNAT nodes are a spot check on reachability only.</a:t>
+              <a:t>We assume peers are honest. Relaxing that assumption is follow-on work.</a:t>
             </a:r>
             <a:endParaRPr lang="en-US" sz="1500" dirty="0"/>
           </a:p>
@@ -6980,7 +7706,7 @@
                 <a:ea typeface="Calibri" pitchFamily="34" charset="-122"/>
                 <a:cs typeface="Calibri" pitchFamily="34" charset="-120"/>
               </a:rPr>
-              <a:t>WHAT PREVALENCE COSTS</a:t>
+              <a:t>HOW THE CLAIM IS ESTABLISHED</a:t>
             </a:r>
             <a:endParaRPr lang="en-US" sz="1100" dirty="0"/>
           </a:p>
@@ -7019,7 +7745,7 @@
                 <a:ea typeface="Cambria" pitchFamily="34" charset="-122"/>
                 <a:cs typeface="Cambria" pitchFamily="34" charset="-120"/>
               </a:rPr>
-              <a:t>The testbed</a:t>
+              <a:t>Validation in two tiers</a:t>
             </a:r>
             <a:endParaRPr lang="en-US" sz="3600" dirty="0"/>
           </a:p>
@@ -7033,11 +7759,40 @@
         </p:nvSpPr>
         <p:spPr>
           <a:xfrm>
-            <a:off x="685800" y="2404872"/>
-            <a:ext cx="118872" cy="118872"/>
-          </a:xfrm>
-          <a:prstGeom prst="ellipse">
-            <a:avLst/>
+            <a:off x="685800" y="2286000"/>
+            <a:ext cx="10789920" cy="960120"/>
+          </a:xfrm>
+          <a:prstGeom prst="roundRect">
+            <a:avLst>
+              <a:gd name="adj" fmla="val 5714"/>
+            </a:avLst>
+          </a:prstGeom>
+          <a:solidFill>
+            <a:srgbClr val="EEF3F4"/>
+          </a:solidFill>
+          <a:ln w="6350">
+            <a:solidFill>
+              <a:srgbClr val="EEF3F4"/>
+            </a:solidFill>
+            <a:prstDash val="solid"/>
+          </a:ln>
+        </p:spPr>
+      </p:sp>
+      <p:sp>
+        <p:nvSpPr>
+          <p:cNvPr id="5" name="Shape 3"/>
+          <p:cNvSpPr/>
+          <p:nvPr/>
+        </p:nvSpPr>
+        <p:spPr>
+          <a:xfrm>
+            <a:off x="960120" y="2514600"/>
+            <a:ext cx="1737360" cy="502920"/>
+          </a:xfrm>
+          <a:prstGeom prst="roundRect">
+            <a:avLst>
+              <a:gd name="adj" fmla="val 9091"/>
+            </a:avLst>
           </a:prstGeom>
           <a:solidFill>
             <a:srgbClr val="0E7C86"/>
@@ -7052,30 +7807,69 @@
       </p:sp>
       <p:sp>
         <p:nvSpPr>
-          <p:cNvPr id="5" name="Text 3"/>
-          <p:cNvSpPr/>
-          <p:nvPr/>
-        </p:nvSpPr>
-        <p:spPr>
-          <a:xfrm>
-            <a:off x="1005840" y="2286000"/>
-            <a:ext cx="10469880" cy="384048"/>
-          </a:xfrm>
-          <a:prstGeom prst="rect">
-            <a:avLst/>
-          </a:prstGeom>
-          <a:noFill/>
-          <a:ln/>
-        </p:spPr>
-        <p:txBody>
-          <a:bodyPr wrap="square" lIns="0" tIns="0" rIns="0" bIns="0" rtlCol="0" anchor="ctr"/>
-          <a:lstStyle/>
-          <a:p>
-            <a:pPr indent="0" marL="0">
-              <a:buNone/>
-            </a:pPr>
-            <a:r>
-              <a:rPr lang="en-US" sz="1700" dirty="0">
+          <p:cNvPr id="6" name="Text 4"/>
+          <p:cNvSpPr/>
+          <p:nvPr/>
+        </p:nvSpPr>
+        <p:spPr>
+          <a:xfrm>
+            <a:off x="960120" y="2514600"/>
+            <a:ext cx="1737360" cy="502920"/>
+          </a:xfrm>
+          <a:prstGeom prst="rect">
+            <a:avLst/>
+          </a:prstGeom>
+          <a:noFill/>
+          <a:ln/>
+        </p:spPr>
+        <p:txBody>
+          <a:bodyPr wrap="square" lIns="0" tIns="0" rIns="0" bIns="0" rtlCol="0" anchor="ctr"/>
+          <a:lstStyle/>
+          <a:p>
+            <a:pPr algn="ctr" indent="0" marL="0">
+              <a:buNone/>
+            </a:pPr>
+            <a:r>
+              <a:rPr lang="en-US" sz="1500" b="1" dirty="0">
+                <a:solidFill>
+                  <a:srgbClr val="FFFFFF"/>
+                </a:solidFill>
+                <a:latin typeface="Cambria" pitchFamily="34" charset="0"/>
+                <a:ea typeface="Cambria" pitchFamily="34" charset="-122"/>
+                <a:cs typeface="Cambria" pitchFamily="34" charset="-120"/>
+              </a:rPr>
+              <a:t>Bench</a:t>
+            </a:r>
+            <a:endParaRPr lang="en-US" sz="1500" dirty="0"/>
+          </a:p>
+        </p:txBody>
+      </p:sp>
+      <p:sp>
+        <p:nvSpPr>
+          <p:cNvPr id="7" name="Text 5"/>
+          <p:cNvSpPr/>
+          <p:nvPr/>
+        </p:nvSpPr>
+        <p:spPr>
+          <a:xfrm>
+            <a:off x="2971800" y="2286000"/>
+            <a:ext cx="5852160" cy="960120"/>
+          </a:xfrm>
+          <a:prstGeom prst="rect">
+            <a:avLst/>
+          </a:prstGeom>
+          <a:noFill/>
+          <a:ln/>
+        </p:spPr>
+        <p:txBody>
+          <a:bodyPr wrap="square" lIns="0" tIns="0" rIns="0" bIns="0" rtlCol="0" anchor="ctr"/>
+          <a:lstStyle/>
+          <a:p>
+            <a:pPr indent="0" marL="0">
+              <a:buNone/>
+            </a:pPr>
+            <a:r>
+              <a:rPr lang="en-US" sz="1600" dirty="0">
                 <a:solidFill>
                   <a:srgbClr val="3E4C57"/>
                 </a:solidFill>
@@ -7083,25 +7877,93 @@
                 <a:ea typeface="Calibri" pitchFamily="34" charset="-122"/>
                 <a:cs typeface="Calibri" pitchFamily="34" charset="-120"/>
               </a:rPr>
-              <a:t>NAT behavior is a property of the path, not the subscriber.</a:t>
-            </a:r>
-            <a:endParaRPr lang="en-US" sz="1700" dirty="0"/>
-          </a:p>
-        </p:txBody>
-      </p:sp>
-      <p:sp>
-        <p:nvSpPr>
-          <p:cNvPr id="6" name="Shape 4"/>
-          <p:cNvSpPr/>
-          <p:nvPr/>
-        </p:nvSpPr>
-        <p:spPr>
-          <a:xfrm>
-            <a:off x="685800" y="2971800"/>
-            <a:ext cx="118872" cy="118872"/>
-          </a:xfrm>
-          <a:prstGeom prst="ellipse">
-            <a:avLst/>
+              <a:t>Eight-plus configurations, labeled by construction</a:t>
+            </a:r>
+            <a:endParaRPr lang="en-US" sz="1600" dirty="0"/>
+          </a:p>
+        </p:txBody>
+      </p:sp>
+      <p:sp>
+        <p:nvSpPr>
+          <p:cNvPr id="8" name="Text 6"/>
+          <p:cNvSpPr/>
+          <p:nvPr/>
+        </p:nvSpPr>
+        <p:spPr>
+          <a:xfrm>
+            <a:off x="8915400" y="2286000"/>
+            <a:ext cx="2377440" cy="960120"/>
+          </a:xfrm>
+          <a:prstGeom prst="rect">
+            <a:avLst/>
+          </a:prstGeom>
+          <a:noFill/>
+          <a:ln/>
+        </p:spPr>
+        <p:txBody>
+          <a:bodyPr wrap="square" lIns="0" tIns="0" rIns="0" bIns="0" rtlCol="0" anchor="ctr"/>
+          <a:lstStyle/>
+          <a:p>
+            <a:pPr algn="r" indent="0" marL="0">
+              <a:buNone/>
+            </a:pPr>
+            <a:r>
+              <a:rPr lang="en-US" sz="1300" i="1" dirty="0">
+                <a:solidFill>
+                  <a:srgbClr val="6E7F8B"/>
+                </a:solidFill>
+                <a:latin typeface="Calibri" pitchFamily="34" charset="0"/>
+                <a:ea typeface="Calibri" pitchFamily="34" charset="-122"/>
+                <a:cs typeface="Calibri" pitchFamily="34" charset="-120"/>
+              </a:rPr>
+              <a:t>accuracy is legitimate here</a:t>
+            </a:r>
+            <a:endParaRPr lang="en-US" sz="1300" dirty="0"/>
+          </a:p>
+        </p:txBody>
+      </p:sp>
+      <p:sp>
+        <p:nvSpPr>
+          <p:cNvPr id="9" name="Shape 7"/>
+          <p:cNvSpPr/>
+          <p:nvPr/>
+        </p:nvSpPr>
+        <p:spPr>
+          <a:xfrm>
+            <a:off x="685800" y="3429000"/>
+            <a:ext cx="10789920" cy="960120"/>
+          </a:xfrm>
+          <a:prstGeom prst="roundRect">
+            <a:avLst>
+              <a:gd name="adj" fmla="val 5714"/>
+            </a:avLst>
+          </a:prstGeom>
+          <a:solidFill>
+            <a:srgbClr val="EEF3F4"/>
+          </a:solidFill>
+          <a:ln w="6350">
+            <a:solidFill>
+              <a:srgbClr val="EEF3F4"/>
+            </a:solidFill>
+            <a:prstDash val="solid"/>
+          </a:ln>
+        </p:spPr>
+      </p:sp>
+      <p:sp>
+        <p:nvSpPr>
+          <p:cNvPr id="10" name="Shape 8"/>
+          <p:cNvSpPr/>
+          <p:nvPr/>
+        </p:nvSpPr>
+        <p:spPr>
+          <a:xfrm>
+            <a:off x="960120" y="3657600"/>
+            <a:ext cx="1737360" cy="502920"/>
+          </a:xfrm>
+          <a:prstGeom prst="roundRect">
+            <a:avLst>
+              <a:gd name="adj" fmla="val 9091"/>
+            </a:avLst>
           </a:prstGeom>
           <a:solidFill>
             <a:srgbClr val="0E7C86"/>
@@ -7116,30 +7978,69 @@
       </p:sp>
       <p:sp>
         <p:nvSpPr>
-          <p:cNvPr id="7" name="Text 5"/>
-          <p:cNvSpPr/>
-          <p:nvPr/>
-        </p:nvSpPr>
-        <p:spPr>
-          <a:xfrm>
-            <a:off x="1005840" y="2852928"/>
-            <a:ext cx="10469880" cy="384048"/>
-          </a:xfrm>
-          <a:prstGeom prst="rect">
-            <a:avLst/>
-          </a:prstGeom>
-          <a:noFill/>
-          <a:ln/>
-        </p:spPr>
-        <p:txBody>
-          <a:bodyPr wrap="square" lIns="0" tIns="0" rIns="0" bIns="0" rtlCol="0" anchor="ctr"/>
-          <a:lstStyle/>
-          <a:p>
-            <a:pPr indent="0" marL="0">
-              <a:buNone/>
-            </a:pPr>
-            <a:r>
-              <a:rPr lang="en-US" sz="1700" dirty="0">
+          <p:cNvPr id="11" name="Text 9"/>
+          <p:cNvSpPr/>
+          <p:nvPr/>
+        </p:nvSpPr>
+        <p:spPr>
+          <a:xfrm>
+            <a:off x="960120" y="3657600"/>
+            <a:ext cx="1737360" cy="502920"/>
+          </a:xfrm>
+          <a:prstGeom prst="rect">
+            <a:avLst/>
+          </a:prstGeom>
+          <a:noFill/>
+          <a:ln/>
+        </p:spPr>
+        <p:txBody>
+          <a:bodyPr wrap="square" lIns="0" tIns="0" rIns="0" bIns="0" rtlCol="0" anchor="ctr"/>
+          <a:lstStyle/>
+          <a:p>
+            <a:pPr algn="ctr" indent="0" marL="0">
+              <a:buNone/>
+            </a:pPr>
+            <a:r>
+              <a:rPr lang="en-US" sz="1500" b="1" dirty="0">
+                <a:solidFill>
+                  <a:srgbClr val="FFFFFF"/>
+                </a:solidFill>
+                <a:latin typeface="Cambria" pitchFamily="34" charset="0"/>
+                <a:ea typeface="Cambria" pitchFamily="34" charset="-122"/>
+                <a:cs typeface="Cambria" pitchFamily="34" charset="-120"/>
+              </a:rPr>
+              <a:t>Sweep</a:t>
+            </a:r>
+            <a:endParaRPr lang="en-US" sz="1500" dirty="0"/>
+          </a:p>
+        </p:txBody>
+      </p:sp>
+      <p:sp>
+        <p:nvSpPr>
+          <p:cNvPr id="12" name="Text 10"/>
+          <p:cNvSpPr/>
+          <p:nvPr/>
+        </p:nvSpPr>
+        <p:spPr>
+          <a:xfrm>
+            <a:off x="2971800" y="3429000"/>
+            <a:ext cx="5852160" cy="960120"/>
+          </a:xfrm>
+          <a:prstGeom prst="rect">
+            <a:avLst/>
+          </a:prstGeom>
+          <a:noFill/>
+          <a:ln/>
+        </p:spPr>
+        <p:txBody>
+          <a:bodyPr wrap="square" lIns="0" tIns="0" rIns="0" bIns="0" rtlCol="0" anchor="ctr"/>
+          <a:lstStyle/>
+          <a:p>
+            <a:pPr indent="0" marL="0">
+              <a:buNone/>
+            </a:pPr>
+            <a:r>
+              <a:rPr lang="en-US" sz="1600" dirty="0">
                 <a:solidFill>
                   <a:srgbClr val="3E4C57"/>
                 </a:solidFill>
@@ -7147,32 +8048,100 @@
                 <a:ea typeface="Calibri" pitchFamily="34" charset="-122"/>
                 <a:cs typeface="Calibri" pitchFamily="34" charset="-120"/>
               </a:rPr>
-              <a:t>A stratum is one carrier, APN and PDN type; or one ISP and CGNAT status.</a:t>
-            </a:r>
-            <a:endParaRPr lang="en-US" sz="1700" dirty="0"/>
-          </a:p>
-        </p:txBody>
-      </p:sp>
-      <p:sp>
-        <p:nvSpPr>
-          <p:cNvPr id="8" name="Shape 6"/>
-          <p:cNvSpPr/>
-          <p:nvPr/>
-        </p:nvSpPr>
-        <p:spPr>
-          <a:xfrm>
-            <a:off x="685800" y="3538728"/>
-            <a:ext cx="118872" cy="118872"/>
-          </a:xfrm>
-          <a:prstGeom prst="ellipse">
-            <a:avLst/>
+              <a:t>Witness count k against byzantine fraction f</a:t>
+            </a:r>
+            <a:endParaRPr lang="en-US" sz="1600" dirty="0"/>
+          </a:p>
+        </p:txBody>
+      </p:sp>
+      <p:sp>
+        <p:nvSpPr>
+          <p:cNvPr id="13" name="Text 11"/>
+          <p:cNvSpPr/>
+          <p:nvPr/>
+        </p:nvSpPr>
+        <p:spPr>
+          <a:xfrm>
+            <a:off x="8915400" y="3429000"/>
+            <a:ext cx="2377440" cy="960120"/>
+          </a:xfrm>
+          <a:prstGeom prst="rect">
+            <a:avLst/>
+          </a:prstGeom>
+          <a:noFill/>
+          <a:ln/>
+        </p:spPr>
+        <p:txBody>
+          <a:bodyPr wrap="square" lIns="0" tIns="0" rIns="0" bIns="0" rtlCol="0" anchor="ctr"/>
+          <a:lstStyle/>
+          <a:p>
+            <a:pPr algn="r" indent="0" marL="0">
+              <a:buNone/>
+            </a:pPr>
+            <a:r>
+              <a:rPr lang="en-US" sz="1300" i="1" dirty="0">
+                <a:solidFill>
+                  <a:srgbClr val="6E7F8B"/>
+                </a:solidFill>
+                <a:latin typeface="Calibri" pitchFamily="34" charset="0"/>
+                <a:ea typeface="Calibri" pitchFamily="34" charset="-122"/>
+                <a:cs typeface="Calibri" pitchFamily="34" charset="-120"/>
+              </a:rPr>
+              <a:t>we operate every witness</a:t>
+            </a:r>
+            <a:endParaRPr lang="en-US" sz="1300" dirty="0"/>
+          </a:p>
+        </p:txBody>
+      </p:sp>
+      <p:sp>
+        <p:nvSpPr>
+          <p:cNvPr id="14" name="Shape 12"/>
+          <p:cNvSpPr/>
+          <p:nvPr/>
+        </p:nvSpPr>
+        <p:spPr>
+          <a:xfrm>
+            <a:off x="685800" y="4572000"/>
+            <a:ext cx="10789920" cy="960120"/>
+          </a:xfrm>
+          <a:prstGeom prst="roundRect">
+            <a:avLst>
+              <a:gd name="adj" fmla="val 5714"/>
+            </a:avLst>
           </a:prstGeom>
           <a:solidFill>
-            <a:srgbClr val="0E7C86"/>
+            <a:srgbClr val="EEF3F4"/>
+          </a:solidFill>
+          <a:ln w="6350">
+            <a:solidFill>
+              <a:srgbClr val="EEF3F4"/>
+            </a:solidFill>
+            <a:prstDash val="solid"/>
+          </a:ln>
+        </p:spPr>
+      </p:sp>
+      <p:sp>
+        <p:nvSpPr>
+          <p:cNvPr id="15" name="Shape 13"/>
+          <p:cNvSpPr/>
+          <p:nvPr/>
+        </p:nvSpPr>
+        <p:spPr>
+          <a:xfrm>
+            <a:off x="960120" y="4800600"/>
+            <a:ext cx="1737360" cy="502920"/>
+          </a:xfrm>
+          <a:prstGeom prst="roundRect">
+            <a:avLst>
+              <a:gd name="adj" fmla="val 9091"/>
+            </a:avLst>
+          </a:prstGeom>
+          <a:solidFill>
+            <a:srgbClr val="C25E28"/>
           </a:solidFill>
           <a:ln w="12700">
             <a:solidFill>
-              <a:srgbClr val="0E7C86"/>
+              <a:srgbClr val="C25E28"/>
             </a:solidFill>
             <a:prstDash val="solid"/>
           </a:ln>
@@ -7180,30 +8149,69 @@
       </p:sp>
       <p:sp>
         <p:nvSpPr>
-          <p:cNvPr id="9" name="Text 7"/>
-          <p:cNvSpPr/>
-          <p:nvPr/>
-        </p:nvSpPr>
-        <p:spPr>
-          <a:xfrm>
-            <a:off x="1005840" y="3419856"/>
-            <a:ext cx="10469880" cy="384048"/>
-          </a:xfrm>
-          <a:prstGeom prst="rect">
-            <a:avLst/>
-          </a:prstGeom>
-          <a:noFill/>
-          <a:ln/>
-        </p:spPr>
-        <p:txBody>
-          <a:bodyPr wrap="square" lIns="0" tIns="0" rIns="0" bIns="0" rtlCol="0" anchor="ctr"/>
-          <a:lstStyle/>
-          <a:p>
-            <a:pPr indent="0" marL="0">
-              <a:buNone/>
-            </a:pPr>
-            <a:r>
-              <a:rPr lang="en-US" sz="1700" dirty="0">
+          <p:cNvPr id="16" name="Text 14"/>
+          <p:cNvSpPr/>
+          <p:nvPr/>
+        </p:nvSpPr>
+        <p:spPr>
+          <a:xfrm>
+            <a:off x="960120" y="4800600"/>
+            <a:ext cx="1737360" cy="502920"/>
+          </a:xfrm>
+          <a:prstGeom prst="rect">
+            <a:avLst/>
+          </a:prstGeom>
+          <a:noFill/>
+          <a:ln/>
+        </p:spPr>
+        <p:txBody>
+          <a:bodyPr wrap="square" lIns="0" tIns="0" rIns="0" bIns="0" rtlCol="0" anchor="ctr"/>
+          <a:lstStyle/>
+          <a:p>
+            <a:pPr algn="ctr" indent="0" marL="0">
+              <a:buNone/>
+            </a:pPr>
+            <a:r>
+              <a:rPr lang="en-US" sz="1500" b="1" dirty="0">
+                <a:solidFill>
+                  <a:srgbClr val="FFFFFF"/>
+                </a:solidFill>
+                <a:latin typeface="Cambria" pitchFamily="34" charset="0"/>
+                <a:ea typeface="Cambria" pitchFamily="34" charset="-122"/>
+                <a:cs typeface="Cambria" pitchFamily="34" charset="-120"/>
+              </a:rPr>
+              <a:t>Campaign</a:t>
+            </a:r>
+            <a:endParaRPr lang="en-US" sz="1500" dirty="0"/>
+          </a:p>
+        </p:txBody>
+      </p:sp>
+      <p:sp>
+        <p:nvSpPr>
+          <p:cNvPr id="17" name="Text 15"/>
+          <p:cNvSpPr/>
+          <p:nvPr/>
+        </p:nvSpPr>
+        <p:spPr>
+          <a:xfrm>
+            <a:off x="2971800" y="4572000"/>
+            <a:ext cx="5852160" cy="960120"/>
+          </a:xfrm>
+          <a:prstGeom prst="rect">
+            <a:avLst/>
+          </a:prstGeom>
+          <a:noFill/>
+          <a:ln/>
+        </p:spPr>
+        <p:txBody>
+          <a:bodyPr wrap="square" lIns="0" tIns="0" rIns="0" bIns="0" rtlCol="0" anchor="ctr"/>
+          <a:lstStyle/>
+          <a:p>
+            <a:pPr indent="0" marL="0">
+              <a:buNone/>
+            </a:pPr>
+            <a:r>
+              <a:rPr lang="en-US" sz="1600" dirty="0">
                 <a:solidFill>
                   <a:srgbClr val="3E4C57"/>
                 </a:solidFill>
@@ -7211,132 +8219,77 @@
                 <a:ea typeface="Calibri" pitchFamily="34" charset="-122"/>
                 <a:cs typeface="Calibri" pitchFamily="34" charset="-120"/>
               </a:rPr>
-              <a:t>Two SIMs and two handset stacks per carrier, before assuming homogeneity.</a:t>
-            </a:r>
-            <a:endParaRPr lang="en-US" sz="1700" dirty="0"/>
-          </a:p>
-        </p:txBody>
-      </p:sp>
-      <p:sp>
-        <p:nvSpPr>
-          <p:cNvPr id="10" name="Shape 8"/>
-          <p:cNvSpPr/>
-          <p:nvPr/>
-        </p:nvSpPr>
-        <p:spPr>
-          <a:xfrm>
-            <a:off x="685800" y="4105656"/>
-            <a:ext cx="118872" cy="118872"/>
-          </a:xfrm>
-          <a:prstGeom prst="ellipse">
-            <a:avLst/>
-          </a:prstGeom>
-          <a:solidFill>
-            <a:srgbClr val="0E7C86"/>
-          </a:solidFill>
-          <a:ln w="12700">
-            <a:solidFill>
-              <a:srgbClr val="0E7C86"/>
-            </a:solidFill>
-            <a:prstDash val="solid"/>
-          </a:ln>
-        </p:spPr>
-      </p:sp>
-      <p:sp>
-        <p:nvSpPr>
-          <p:cNvPr id="11" name="Text 9"/>
-          <p:cNvSpPr/>
-          <p:nvPr/>
-        </p:nvSpPr>
-        <p:spPr>
-          <a:xfrm>
-            <a:off x="1005840" y="3986784"/>
-            <a:ext cx="10469880" cy="384048"/>
-          </a:xfrm>
-          <a:prstGeom prst="rect">
-            <a:avLst/>
-          </a:prstGeom>
-          <a:noFill/>
-          <a:ln/>
-        </p:spPr>
-        <p:txBody>
-          <a:bodyPr wrap="square" lIns="0" tIns="0" rIns="0" bIns="0" rtlCol="0" anchor="ctr"/>
-          <a:lstStyle/>
-          <a:p>
-            <a:pPr indent="0" marL="0">
-              <a:buNone/>
-            </a:pPr>
-            <a:r>
-              <a:rPr lang="en-US" sz="1700" dirty="0">
-                <a:solidFill>
-                  <a:srgbClr val="3E4C57"/>
+              <a:t>Our own handsets and SIMs across every stratum</a:t>
+            </a:r>
+            <a:endParaRPr lang="en-US" sz="1600" dirty="0"/>
+          </a:p>
+        </p:txBody>
+      </p:sp>
+      <p:sp>
+        <p:nvSpPr>
+          <p:cNvPr id="18" name="Text 16"/>
+          <p:cNvSpPr/>
+          <p:nvPr/>
+        </p:nvSpPr>
+        <p:spPr>
+          <a:xfrm>
+            <a:off x="8915400" y="4572000"/>
+            <a:ext cx="2377440" cy="960120"/>
+          </a:xfrm>
+          <a:prstGeom prst="rect">
+            <a:avLst/>
+          </a:prstGeom>
+          <a:noFill/>
+          <a:ln/>
+        </p:spPr>
+        <p:txBody>
+          <a:bodyPr wrap="square" lIns="0" tIns="0" rIns="0" bIns="0" rtlCol="0" anchor="ctr"/>
+          <a:lstStyle/>
+          <a:p>
+            <a:pPr algn="r" indent="0" marL="0">
+              <a:buNone/>
+            </a:pPr>
+            <a:r>
+              <a:rPr lang="en-US" sz="1300" i="1" dirty="0">
+                <a:solidFill>
+                  <a:srgbClr val="6E7F8B"/>
                 </a:solidFill>
                 <a:latin typeface="Calibri" pitchFamily="34" charset="0"/>
                 <a:ea typeface="Calibri" pitchFamily="34" charset="-122"/>
                 <a:cs typeface="Calibri" pitchFamily="34" charset="-120"/>
               </a:rPr>
-              <a:t>Weights from published subscriber counts, never announced address space.</a:t>
-            </a:r>
-            <a:endParaRPr lang="en-US" sz="1700" dirty="0"/>
-          </a:p>
-        </p:txBody>
-      </p:sp>
-      <p:sp>
-        <p:nvSpPr>
-          <p:cNvPr id="12" name="Shape 10"/>
-          <p:cNvSpPr/>
-          <p:nvPr/>
-        </p:nvSpPr>
-        <p:spPr>
-          <a:xfrm>
-            <a:off x="685800" y="4892040"/>
-            <a:ext cx="10789920" cy="914400"/>
-          </a:xfrm>
-          <a:prstGeom prst="roundRect">
-            <a:avLst>
-              <a:gd name="adj" fmla="val 6000"/>
-            </a:avLst>
-          </a:prstGeom>
-          <a:solidFill>
-            <a:srgbClr val="E7F1F1"/>
-          </a:solidFill>
-          <a:ln w="6350">
-            <a:solidFill>
-              <a:srgbClr val="E7F1F1"/>
-            </a:solidFill>
-            <a:prstDash val="solid"/>
-          </a:ln>
-        </p:spPr>
-      </p:sp>
-      <p:sp>
-        <p:nvSpPr>
-          <p:cNvPr id="13" name="Text 11"/>
-          <p:cNvSpPr/>
-          <p:nvPr/>
-        </p:nvSpPr>
-        <p:spPr>
-          <a:xfrm>
-            <a:off x="1051560" y="5074920"/>
-            <a:ext cx="10058400" cy="548640"/>
-          </a:xfrm>
-          <a:prstGeom prst="rect">
-            <a:avLst/>
-          </a:prstGeom>
-          <a:noFill/>
-          <a:ln/>
-        </p:spPr>
-        <p:txBody>
-          <a:bodyPr wrap="square" lIns="0" tIns="0" rIns="0" bIns="0" rtlCol="0" anchor="ctr"/>
-          <a:lstStyle/>
-          <a:p>
-            <a:pPr indent="0" marL="0">
-              <a:lnSpc>
-                <a:spcPct val="105000"/>
-              </a:lnSpc>
-              <a:buNone/>
-            </a:pPr>
-            <a:r>
-              <a:rPr lang="en-US" sz="1450" b="1" dirty="0">
+              <a:t>agreement, never accuracy</a:t>
+            </a:r>
+            <a:endParaRPr lang="en-US" sz="1300" dirty="0"/>
+          </a:p>
+        </p:txBody>
+      </p:sp>
+      <p:sp>
+        <p:nvSpPr>
+          <p:cNvPr id="19" name="Text 17"/>
+          <p:cNvSpPr/>
+          <p:nvPr/>
+        </p:nvSpPr>
+        <p:spPr>
+          <a:xfrm>
+            <a:off x="685800" y="5623560"/>
+            <a:ext cx="10789920" cy="320040"/>
+          </a:xfrm>
+          <a:prstGeom prst="rect">
+            <a:avLst/>
+          </a:prstGeom>
+          <a:noFill/>
+          <a:ln/>
+        </p:spPr>
+        <p:txBody>
+          <a:bodyPr wrap="square" lIns="0" tIns="0" rIns="0" bIns="0" rtlCol="0" anchor="ctr"/>
+          <a:lstStyle/>
+          <a:p>
+            <a:pPr indent="0" marL="0">
+              <a:buNone/>
+            </a:pPr>
+            <a:r>
+              <a:rPr lang="en-US" sz="1500" i="1" dirty="0">
                 <a:solidFill>
                   <a:srgbClr val="0A5A62"/>
                 </a:solidFill>
@@ -7344,26 +8297,48 @@
                 <a:ea typeface="Calibri" pitchFamily="34" charset="-122"/>
                 <a:cs typeface="Calibri" pitchFamily="34" charset="-120"/>
               </a:rPr>
-              <a:t>A census of strata, not a sample:  </a:t>
-            </a:r>
-            <a:pPr indent="0" marL="0">
-              <a:lnSpc>
-                <a:spcPct val="105000"/>
-              </a:lnSpc>
-              <a:buNone/>
-            </a:pPr>
-            <a:r>
-              <a:rPr lang="en-US" sz="1450" dirty="0">
-                <a:solidFill>
-                  <a:srgbClr val="3E4C57"/>
+              <a:t>Address-dependent mapping is built deliberately; no netfilter flag produces it.</a:t>
+            </a:r>
+            <a:endParaRPr lang="en-US" sz="1500" dirty="0"/>
+          </a:p>
+        </p:txBody>
+      </p:sp>
+      <p:sp>
+        <p:nvSpPr>
+          <p:cNvPr id="20" name="Text 18"/>
+          <p:cNvSpPr/>
+          <p:nvPr/>
+        </p:nvSpPr>
+        <p:spPr>
+          <a:xfrm>
+            <a:off x="685800" y="5989320"/>
+            <a:ext cx="10789920" cy="320040"/>
+          </a:xfrm>
+          <a:prstGeom prst="rect">
+            <a:avLst/>
+          </a:prstGeom>
+          <a:noFill/>
+          <a:ln/>
+        </p:spPr>
+        <p:txBody>
+          <a:bodyPr wrap="square" lIns="0" tIns="0" rIns="0" bIns="0" rtlCol="0" anchor="ctr"/>
+          <a:lstStyle/>
+          <a:p>
+            <a:pPr indent="0" marL="0">
+              <a:buNone/>
+            </a:pPr>
+            <a:r>
+              <a:rPr lang="en-US" sz="1500" i="1" dirty="0">
+                <a:solidFill>
+                  <a:srgbClr val="0A5A62"/>
                 </a:solidFill>
                 <a:latin typeface="Calibri" pitchFamily="34" charset="0"/>
                 <a:ea typeface="Calibri" pitchFamily="34" charset="-122"/>
                 <a:cs typeface="Calibri" pitchFamily="34" charset="-120"/>
               </a:rPr>
-              <a:t>there is no probabilistic sampling within a stratum, so we report sensitivity ranges and never confidence intervals.</a:t>
-            </a:r>
-            <a:endParaRPr lang="en-US" sz="1450" dirty="0"/>
+              <a:t>Friends carry the method; public autoNAT nodes are a spot check on reachability only.</a:t>
+            </a:r>
+            <a:endParaRPr lang="en-US" sz="1500" dirty="0"/>
           </a:p>
         </p:txBody>
       </p:sp>
@@ -7425,7 +8400,7 @@
                 <a:ea typeface="Calibri" pitchFamily="34" charset="-122"/>
                 <a:cs typeface="Calibri" pitchFamily="34" charset="-120"/>
               </a:rPr>
-              <a:t>SEQUENCE</a:t>
+              <a:t>WHAT PREVALENCE COSTS</a:t>
             </a:r>
             <a:endParaRPr lang="en-US" sz="1100" dirty="0"/>
           </a:p>
@@ -7464,7 +8439,7 @@
                 <a:ea typeface="Cambria" pitchFamily="34" charset="-122"/>
                 <a:cs typeface="Cambria" pitchFamily="34" charset="-120"/>
               </a:rPr>
-              <a:t>One semester</a:t>
+              <a:t>The testbed</a:t>
             </a:r>
             <a:endParaRPr lang="en-US" sz="3600" dirty="0"/>
           </a:p>
@@ -7478,13 +8453,11 @@
         </p:nvSpPr>
         <p:spPr>
           <a:xfrm>
-            <a:off x="685800" y="2377440"/>
-            <a:ext cx="2286000" cy="914400"/>
-          </a:xfrm>
-          <a:prstGeom prst="roundRect">
-            <a:avLst>
-              <a:gd name="adj" fmla="val 6000"/>
-            </a:avLst>
+            <a:off x="685800" y="2404872"/>
+            <a:ext cx="118872" cy="118872"/>
+          </a:xfrm>
+          <a:prstGeom prst="ellipse">
+            <a:avLst/>
           </a:prstGeom>
           <a:solidFill>
             <a:srgbClr val="0E7C86"/>
@@ -7505,63 +8478,24 @@
         </p:nvSpPr>
         <p:spPr>
           <a:xfrm>
-            <a:off x="685800" y="2377440"/>
-            <a:ext cx="2286000" cy="914400"/>
-          </a:xfrm>
-          <a:prstGeom prst="rect">
-            <a:avLst/>
-          </a:prstGeom>
-          <a:noFill/>
-          <a:ln/>
-        </p:spPr>
-        <p:txBody>
-          <a:bodyPr wrap="square" lIns="0" tIns="0" rIns="0" bIns="0" rtlCol="0" anchor="ctr"/>
-          <a:lstStyle/>
-          <a:p>
-            <a:pPr algn="ctr" indent="0" marL="0">
-              <a:buNone/>
-            </a:pPr>
-            <a:r>
-              <a:rPr lang="en-US" sz="1600" b="1" dirty="0">
-                <a:solidFill>
-                  <a:srgbClr val="FFFFFF"/>
-                </a:solidFill>
-                <a:latin typeface="Cambria" pitchFamily="34" charset="0"/>
-                <a:ea typeface="Cambria" pitchFamily="34" charset="-122"/>
-                <a:cs typeface="Cambria" pitchFamily="34" charset="-120"/>
-              </a:rPr>
-              <a:t>Weeks 1–3</a:t>
-            </a:r>
-            <a:endParaRPr lang="en-US" sz="1600" dirty="0"/>
-          </a:p>
-        </p:txBody>
-      </p:sp>
-      <p:sp>
-        <p:nvSpPr>
-          <p:cNvPr id="6" name="Text 4"/>
-          <p:cNvSpPr/>
-          <p:nvPr/>
-        </p:nvSpPr>
-        <p:spPr>
-          <a:xfrm>
-            <a:off x="3337560" y="2377440"/>
-            <a:ext cx="8138160" cy="914400"/>
-          </a:xfrm>
-          <a:prstGeom prst="rect">
-            <a:avLst/>
-          </a:prstGeom>
-          <a:noFill/>
-          <a:ln/>
-        </p:spPr>
-        <p:txBody>
-          <a:bodyPr wrap="square" lIns="0" tIns="0" rIns="0" bIns="0" rtlCol="0" anchor="ctr"/>
-          <a:lstStyle/>
-          <a:p>
-            <a:pPr indent="0" marL="0">
-              <a:buNone/>
-            </a:pPr>
-            <a:r>
-              <a:rPr lang="en-US" sz="1650" dirty="0">
+            <a:off x="1005840" y="2286000"/>
+            <a:ext cx="10469880" cy="384048"/>
+          </a:xfrm>
+          <a:prstGeom prst="rect">
+            <a:avLst/>
+          </a:prstGeom>
+          <a:noFill/>
+          <a:ln/>
+        </p:spPr>
+        <p:txBody>
+          <a:bodyPr wrap="square" lIns="0" tIns="0" rIns="0" bIns="0" rtlCol="0" anchor="ctr"/>
+          <a:lstStyle/>
+          <a:p>
+            <a:pPr indent="0" marL="0">
+              <a:buNone/>
+            </a:pPr>
+            <a:r>
+              <a:rPr lang="en-US" sz="1700" dirty="0">
                 <a:solidFill>
                   <a:srgbClr val="3E4C57"/>
                 </a:solidFill>
@@ -7569,27 +8503,25 @@
                 <a:ea typeface="Calibri" pitchFamily="34" charset="-122"/>
                 <a:cs typeface="Calibri" pitchFamily="34" charset="-120"/>
               </a:rPr>
-              <a:t>Onboarding; a STUN client on the transport’s own socket. Go/no-go.</a:t>
-            </a:r>
-            <a:endParaRPr lang="en-US" sz="1650" dirty="0"/>
-          </a:p>
-        </p:txBody>
-      </p:sp>
-      <p:sp>
-        <p:nvSpPr>
-          <p:cNvPr id="7" name="Shape 5"/>
-          <p:cNvSpPr/>
-          <p:nvPr/>
-        </p:nvSpPr>
-        <p:spPr>
-          <a:xfrm>
-            <a:off x="685800" y="3566160"/>
-            <a:ext cx="2286000" cy="914400"/>
-          </a:xfrm>
-          <a:prstGeom prst="roundRect">
-            <a:avLst>
-              <a:gd name="adj" fmla="val 6000"/>
-            </a:avLst>
+              <a:t>NAT behavior is a property of the path, not the subscriber.</a:t>
+            </a:r>
+            <a:endParaRPr lang="en-US" sz="1700" dirty="0"/>
+          </a:p>
+        </p:txBody>
+      </p:sp>
+      <p:sp>
+        <p:nvSpPr>
+          <p:cNvPr id="6" name="Shape 4"/>
+          <p:cNvSpPr/>
+          <p:nvPr/>
+        </p:nvSpPr>
+        <p:spPr>
+          <a:xfrm>
+            <a:off x="685800" y="2971800"/>
+            <a:ext cx="118872" cy="118872"/>
+          </a:xfrm>
+          <a:prstGeom prst="ellipse">
+            <a:avLst/>
           </a:prstGeom>
           <a:solidFill>
             <a:srgbClr val="0E7C86"/>
@@ -7604,69 +8536,30 @@
       </p:sp>
       <p:sp>
         <p:nvSpPr>
-          <p:cNvPr id="8" name="Text 6"/>
-          <p:cNvSpPr/>
-          <p:nvPr/>
-        </p:nvSpPr>
-        <p:spPr>
-          <a:xfrm>
-            <a:off x="685800" y="3566160"/>
-            <a:ext cx="2286000" cy="914400"/>
-          </a:xfrm>
-          <a:prstGeom prst="rect">
-            <a:avLst/>
-          </a:prstGeom>
-          <a:noFill/>
-          <a:ln/>
-        </p:spPr>
-        <p:txBody>
-          <a:bodyPr wrap="square" lIns="0" tIns="0" rIns="0" bIns="0" rtlCol="0" anchor="ctr"/>
-          <a:lstStyle/>
-          <a:p>
-            <a:pPr algn="ctr" indent="0" marL="0">
-              <a:buNone/>
-            </a:pPr>
-            <a:r>
-              <a:rPr lang="en-US" sz="1600" b="1" dirty="0">
-                <a:solidFill>
-                  <a:srgbClr val="FFFFFF"/>
-                </a:solidFill>
-                <a:latin typeface="Cambria" pitchFamily="34" charset="0"/>
-                <a:ea typeface="Cambria" pitchFamily="34" charset="-122"/>
-                <a:cs typeface="Cambria" pitchFamily="34" charset="-120"/>
-              </a:rPr>
-              <a:t>Weeks 4–10</a:t>
-            </a:r>
-            <a:endParaRPr lang="en-US" sz="1600" dirty="0"/>
-          </a:p>
-        </p:txBody>
-      </p:sp>
-      <p:sp>
-        <p:nvSpPr>
-          <p:cNvPr id="9" name="Text 7"/>
-          <p:cNvSpPr/>
-          <p:nvPr/>
-        </p:nvSpPr>
-        <p:spPr>
-          <a:xfrm>
-            <a:off x="3337560" y="3566160"/>
-            <a:ext cx="8138160" cy="914400"/>
-          </a:xfrm>
-          <a:prstGeom prst="rect">
-            <a:avLst/>
-          </a:prstGeom>
-          <a:noFill/>
-          <a:ln/>
-        </p:spPr>
-        <p:txBody>
-          <a:bodyPr wrap="square" lIns="0" tIns="0" rIns="0" bIns="0" rtlCol="0" anchor="ctr"/>
-          <a:lstStyle/>
-          <a:p>
-            <a:pPr indent="0" marL="0">
-              <a:buNone/>
-            </a:pPr>
-            <a:r>
-              <a:rPr lang="en-US" sz="1650" dirty="0">
+          <p:cNvPr id="7" name="Text 5"/>
+          <p:cNvSpPr/>
+          <p:nvPr/>
+        </p:nvSpPr>
+        <p:spPr>
+          <a:xfrm>
+            <a:off x="1005840" y="2852928"/>
+            <a:ext cx="10469880" cy="384048"/>
+          </a:xfrm>
+          <a:prstGeom prst="rect">
+            <a:avLst/>
+          </a:prstGeom>
+          <a:noFill/>
+          <a:ln/>
+        </p:spPr>
+        <p:txBody>
+          <a:bodyPr wrap="square" lIns="0" tIns="0" rIns="0" bIns="0" rtlCol="0" anchor="ctr"/>
+          <a:lstStyle/>
+          <a:p>
+            <a:pPr indent="0" marL="0">
+              <a:buNone/>
+            </a:pPr>
+            <a:r>
+              <a:rPr lang="en-US" sz="1700" dirty="0">
                 <a:solidFill>
                   <a:srgbClr val="3E4C57"/>
                 </a:solidFill>
@@ -7674,9 +8567,73 @@
                 <a:ea typeface="Calibri" pitchFamily="34" charset="-122"/>
                 <a:cs typeface="Calibri" pitchFamily="34" charset="-120"/>
               </a:rPr>
-              <a:t>The oracle and labeled bench; then the witness protocol and its classifier.</a:t>
-            </a:r>
-            <a:endParaRPr lang="en-US" sz="1650" dirty="0"/>
+              <a:t>A stratum is one carrier, APN and PDN type; or one ISP and CGNAT status.</a:t>
+            </a:r>
+            <a:endParaRPr lang="en-US" sz="1700" dirty="0"/>
+          </a:p>
+        </p:txBody>
+      </p:sp>
+      <p:sp>
+        <p:nvSpPr>
+          <p:cNvPr id="8" name="Shape 6"/>
+          <p:cNvSpPr/>
+          <p:nvPr/>
+        </p:nvSpPr>
+        <p:spPr>
+          <a:xfrm>
+            <a:off x="685800" y="3538728"/>
+            <a:ext cx="118872" cy="118872"/>
+          </a:xfrm>
+          <a:prstGeom prst="ellipse">
+            <a:avLst/>
+          </a:prstGeom>
+          <a:solidFill>
+            <a:srgbClr val="0E7C86"/>
+          </a:solidFill>
+          <a:ln w="12700">
+            <a:solidFill>
+              <a:srgbClr val="0E7C86"/>
+            </a:solidFill>
+            <a:prstDash val="solid"/>
+          </a:ln>
+        </p:spPr>
+      </p:sp>
+      <p:sp>
+        <p:nvSpPr>
+          <p:cNvPr id="9" name="Text 7"/>
+          <p:cNvSpPr/>
+          <p:nvPr/>
+        </p:nvSpPr>
+        <p:spPr>
+          <a:xfrm>
+            <a:off x="1005840" y="3419856"/>
+            <a:ext cx="10469880" cy="384048"/>
+          </a:xfrm>
+          <a:prstGeom prst="rect">
+            <a:avLst/>
+          </a:prstGeom>
+          <a:noFill/>
+          <a:ln/>
+        </p:spPr>
+        <p:txBody>
+          <a:bodyPr wrap="square" lIns="0" tIns="0" rIns="0" bIns="0" rtlCol="0" anchor="ctr"/>
+          <a:lstStyle/>
+          <a:p>
+            <a:pPr indent="0" marL="0">
+              <a:buNone/>
+            </a:pPr>
+            <a:r>
+              <a:rPr lang="en-US" sz="1700" dirty="0">
+                <a:solidFill>
+                  <a:srgbClr val="3E4C57"/>
+                </a:solidFill>
+                <a:latin typeface="Calibri" pitchFamily="34" charset="0"/>
+                <a:ea typeface="Calibri" pitchFamily="34" charset="-122"/>
+                <a:cs typeface="Calibri" pitchFamily="34" charset="-120"/>
+              </a:rPr>
+              <a:t>Two SIMs and two handset stacks per carrier, before assuming homogeneity.</a:t>
+            </a:r>
+            <a:endParaRPr lang="en-US" sz="1700" dirty="0"/>
           </a:p>
         </p:txBody>
       </p:sp>
@@ -7688,8 +8645,72 @@
         </p:nvSpPr>
         <p:spPr>
           <a:xfrm>
-            <a:off x="685800" y="4754880"/>
-            <a:ext cx="2286000" cy="914400"/>
+            <a:off x="685800" y="4105656"/>
+            <a:ext cx="118872" cy="118872"/>
+          </a:xfrm>
+          <a:prstGeom prst="ellipse">
+            <a:avLst/>
+          </a:prstGeom>
+          <a:solidFill>
+            <a:srgbClr val="0E7C86"/>
+          </a:solidFill>
+          <a:ln w="12700">
+            <a:solidFill>
+              <a:srgbClr val="0E7C86"/>
+            </a:solidFill>
+            <a:prstDash val="solid"/>
+          </a:ln>
+        </p:spPr>
+      </p:sp>
+      <p:sp>
+        <p:nvSpPr>
+          <p:cNvPr id="11" name="Text 9"/>
+          <p:cNvSpPr/>
+          <p:nvPr/>
+        </p:nvSpPr>
+        <p:spPr>
+          <a:xfrm>
+            <a:off x="1005840" y="3986784"/>
+            <a:ext cx="10469880" cy="384048"/>
+          </a:xfrm>
+          <a:prstGeom prst="rect">
+            <a:avLst/>
+          </a:prstGeom>
+          <a:noFill/>
+          <a:ln/>
+        </p:spPr>
+        <p:txBody>
+          <a:bodyPr wrap="square" lIns="0" tIns="0" rIns="0" bIns="0" rtlCol="0" anchor="ctr"/>
+          <a:lstStyle/>
+          <a:p>
+            <a:pPr indent="0" marL="0">
+              <a:buNone/>
+            </a:pPr>
+            <a:r>
+              <a:rPr lang="en-US" sz="1700" dirty="0">
+                <a:solidFill>
+                  <a:srgbClr val="3E4C57"/>
+                </a:solidFill>
+                <a:latin typeface="Calibri" pitchFamily="34" charset="0"/>
+                <a:ea typeface="Calibri" pitchFamily="34" charset="-122"/>
+                <a:cs typeface="Calibri" pitchFamily="34" charset="-120"/>
+              </a:rPr>
+              <a:t>Weights from published subscriber counts, never announced address space.</a:t>
+            </a:r>
+            <a:endParaRPr lang="en-US" sz="1700" dirty="0"/>
+          </a:p>
+        </p:txBody>
+      </p:sp>
+      <p:sp>
+        <p:nvSpPr>
+          <p:cNvPr id="12" name="Shape 10"/>
+          <p:cNvSpPr/>
+          <p:nvPr/>
+        </p:nvSpPr>
+        <p:spPr>
+          <a:xfrm>
+            <a:off x="685800" y="4892040"/>
+            <a:ext cx="10789920" cy="914400"/>
           </a:xfrm>
           <a:prstGeom prst="roundRect">
             <a:avLst>
@@ -7697,11 +8718,11 @@
             </a:avLst>
           </a:prstGeom>
           <a:solidFill>
-            <a:srgbClr val="C25E28"/>
+            <a:srgbClr val="E7F1F1"/>
           </a:solidFill>
-          <a:ln w="12700">
+          <a:ln w="6350">
             <a:solidFill>
-              <a:srgbClr val="C25E28"/>
+              <a:srgbClr val="E7F1F1"/>
             </a:solidFill>
             <a:prstDash val="solid"/>
           </a:ln>
@@ -7709,118 +8730,60 @@
       </p:sp>
       <p:sp>
         <p:nvSpPr>
-          <p:cNvPr id="11" name="Text 9"/>
-          <p:cNvSpPr/>
-          <p:nvPr/>
-        </p:nvSpPr>
-        <p:spPr>
-          <a:xfrm>
-            <a:off x="685800" y="4754880"/>
-            <a:ext cx="2286000" cy="914400"/>
-          </a:xfrm>
-          <a:prstGeom prst="rect">
-            <a:avLst/>
-          </a:prstGeom>
-          <a:noFill/>
-          <a:ln/>
-        </p:spPr>
-        <p:txBody>
-          <a:bodyPr wrap="square" lIns="0" tIns="0" rIns="0" bIns="0" rtlCol="0" anchor="ctr"/>
-          <a:lstStyle/>
-          <a:p>
-            <a:pPr algn="ctr" indent="0" marL="0">
-              <a:buNone/>
-            </a:pPr>
-            <a:r>
-              <a:rPr lang="en-US" sz="1600" b="1" dirty="0">
-                <a:solidFill>
-                  <a:srgbClr val="FFFFFF"/>
-                </a:solidFill>
-                <a:latin typeface="Cambria" pitchFamily="34" charset="0"/>
-                <a:ea typeface="Cambria" pitchFamily="34" charset="-122"/>
-                <a:cs typeface="Cambria" pitchFamily="34" charset="-120"/>
-              </a:rPr>
-              <a:t>Weeks 11–15</a:t>
-            </a:r>
-            <a:endParaRPr lang="en-US" sz="1600" dirty="0"/>
-          </a:p>
-        </p:txBody>
-      </p:sp>
-      <p:sp>
-        <p:nvSpPr>
-          <p:cNvPr id="12" name="Text 10"/>
-          <p:cNvSpPr/>
-          <p:nvPr/>
-        </p:nvSpPr>
-        <p:spPr>
-          <a:xfrm>
-            <a:off x="3337560" y="4754880"/>
-            <a:ext cx="8138160" cy="914400"/>
-          </a:xfrm>
-          <a:prstGeom prst="rect">
-            <a:avLst/>
-          </a:prstGeom>
-          <a:noFill/>
-          <a:ln/>
-        </p:spPr>
-        <p:txBody>
-          <a:bodyPr wrap="square" lIns="0" tIns="0" rIns="0" bIns="0" rtlCol="0" anchor="ctr"/>
-          <a:lstStyle/>
-          <a:p>
-            <a:pPr indent="0" marL="0">
-              <a:buNone/>
-            </a:pPr>
-            <a:r>
-              <a:rPr lang="en-US" sz="1650" dirty="0">
-                <a:solidFill>
-                  <a:srgbClr val="3E4C57"/>
+          <p:cNvPr id="13" name="Text 11"/>
+          <p:cNvSpPr/>
+          <p:nvPr/>
+        </p:nvSpPr>
+        <p:spPr>
+          <a:xfrm>
+            <a:off x="1051560" y="5074920"/>
+            <a:ext cx="10058400" cy="548640"/>
+          </a:xfrm>
+          <a:prstGeom prst="rect">
+            <a:avLst/>
+          </a:prstGeom>
+          <a:noFill/>
+          <a:ln/>
+        </p:spPr>
+        <p:txBody>
+          <a:bodyPr wrap="square" lIns="0" tIns="0" rIns="0" bIns="0" rtlCol="0" anchor="ctr"/>
+          <a:lstStyle/>
+          <a:p>
+            <a:pPr indent="0" marL="0">
+              <a:lnSpc>
+                <a:spcPct val="105000"/>
+              </a:lnSpc>
+              <a:buNone/>
+            </a:pPr>
+            <a:r>
+              <a:rPr lang="en-US" sz="1450" b="1" dirty="0">
+                <a:solidFill>
+                  <a:srgbClr val="0A5A62"/>
                 </a:solidFill>
                 <a:latin typeface="Calibri" pitchFamily="34" charset="0"/>
                 <a:ea typeface="Calibri" pitchFamily="34" charset="-122"/>
                 <a:cs typeface="Calibri" pitchFamily="34" charset="-120"/>
               </a:rPr>
-              <a:t>Measurement on our own devices across reachable networks; write-up.</a:t>
-            </a:r>
-            <a:endParaRPr lang="en-US" sz="1650" dirty="0"/>
-          </a:p>
-        </p:txBody>
-      </p:sp>
-      <p:sp>
-        <p:nvSpPr>
-          <p:cNvPr id="13" name="Text 11"/>
-          <p:cNvSpPr/>
-          <p:nvPr/>
-        </p:nvSpPr>
-        <p:spPr>
-          <a:xfrm>
-            <a:off x="685800" y="5806440"/>
-            <a:ext cx="10789920" cy="365760"/>
-          </a:xfrm>
-          <a:prstGeom prst="rect">
-            <a:avLst/>
-          </a:prstGeom>
-          <a:noFill/>
-          <a:ln/>
-        </p:spPr>
-        <p:txBody>
-          <a:bodyPr wrap="square" lIns="0" tIns="0" rIns="0" bIns="0" rtlCol="0" anchor="ctr"/>
-          <a:lstStyle/>
-          <a:p>
-            <a:pPr indent="0" marL="0">
-              <a:buNone/>
-            </a:pPr>
-            <a:r>
-              <a:rPr lang="en-US" sz="1500" i="1" dirty="0">
-                <a:solidFill>
-                  <a:srgbClr val="C25E28"/>
+              <a:t>A census of strata, not a sample:  </a:t>
+            </a:r>
+            <a:pPr indent="0" marL="0">
+              <a:lnSpc>
+                <a:spcPct val="105000"/>
+              </a:lnSpc>
+              <a:buNone/>
+            </a:pPr>
+            <a:r>
+              <a:rPr lang="en-US" sz="1450" dirty="0">
+                <a:solidFill>
+                  <a:srgbClr val="3E4C57"/>
                 </a:solidFill>
                 <a:latin typeface="Calibri" pitchFamily="34" charset="0"/>
                 <a:ea typeface="Calibri" pitchFamily="34" charset="-122"/>
                 <a:cs typeface="Calibri" pitchFamily="34" charset="-120"/>
               </a:rPr>
-              <a:t>Week one: two public addresses, firewall rules, SIMs and handsets. They gate week four.</a:t>
-            </a:r>
-            <a:endParaRPr lang="en-US" sz="1500" dirty="0"/>
+              <a:t>there is no probabilistic sampling within a stratum, so we report sensitivity ranges and never confidence intervals.</a:t>
+            </a:r>
+            <a:endParaRPr lang="en-US" sz="1450" dirty="0"/>
           </a:p>
         </p:txBody>
       </p:sp>

--- a/docs/student-projects/grassroots-nat-project.pptx
+++ b/docs/student-projects/grassroots-nat-project.pptx
@@ -15,10 +15,9 @@
     <p:sldId id="263" r:id="rId9"/>
     <p:sldId id="264" r:id="rId10"/>
     <p:sldId id="265" r:id="rId11"/>
-    <p:sldId id="266" r:id="rId12"/>
   </p:sldIdLst>
   <p:notesMasterIdLst>
-    <p:notesMasterId r:id="rId13"/>
+    <p:notesMasterId r:id="rId12"/>
   </p:notesMasterIdLst>
   <p:sldSz cx="12192000" cy="6858000"/>
   <p:notesSz cx="6858000" cy="12192000"/>
@@ -600,7 +599,7 @@
           <a:p>
             <a:r>
               <a:rPr lang="en-US" dirty="0"/>
-              <a:t>Every phase carries an exit criterion in the written brief. The week-3 checkpoint is code rather than a document: a reflexive address obtained over the transport’s own socket, which forces the demultiplexer change early and tells us whether the socket can be shared at all. Excluded by design and named as such: the autoNAT sidecar, the byzantine analysis, the weighted prevalence estimate and the decision-rule fit.</a:t>
+              <a:t>The anchor is IPv6-only in its data plane, which excludes the IPv4-only CGNAT population the study targets; that is a fifth decision and it also affects the product. Three unrelated defects found while surveying the transport are listed in the brief.</a:t>
             </a:r>
             <a:endParaRPr lang="en-US" dirty="0"/>
           </a:p>
@@ -624,94 +623,6 @@
             <a:fld id="{F7021451-1387-4CA6-816F-3879F97B5CBC}" type="slidenum">
               <a:rPr lang="en-US"/>
               <a:t>10</a:t>
-            </a:fld>
-            <a:endParaRPr lang="en-US"/>
-          </a:p>
-        </p:txBody>
-      </p:sp>
-    </p:spTree>
-    <p:extLst>
-      <p:ext uri="{BB962C8B-B14F-4D97-AF65-F5344CB8AC3E}">
-        <p14:creationId xmlns:p14="http://schemas.microsoft.com/office/powerpoint/2010/main" val="1024086991"/>
-      </p:ext>
-    </p:extLst>
-  </p:cSld>
-  <p:clrMapOvr>
-    <a:masterClrMapping/>
-  </p:clrMapOvr>
-</p:notes>
-</file>
-
-<file path=ppt/notesSlides/notesSlide11.xml><?xml version="1.0" encoding="utf-8"?>
-<p:notes xmlns:a="http://schemas.openxmlformats.org/drawingml/2006/main" xmlns:r="http://schemas.openxmlformats.org/officeDocument/2006/relationships" xmlns:p="http://schemas.openxmlformats.org/presentationml/2006/main">
-  <p:cSld>
-    <p:spTree>
-      <p:nvGrpSpPr>
-        <p:cNvPr id="1" name=""/>
-        <p:cNvGrpSpPr/>
-        <p:nvPr/>
-      </p:nvGrpSpPr>
-      <p:grpSpPr>
-        <a:xfrm>
-          <a:off x="0" y="0"/>
-          <a:ext cx="0" cy="0"/>
-          <a:chOff x="0" y="0"/>
-          <a:chExt cx="0" cy="0"/>
-        </a:xfrm>
-      </p:grpSpPr>
-      <p:sp>
-        <p:nvSpPr>
-          <p:cNvPr id="2" name="Slide Image Placeholder 1"/>
-          <p:cNvSpPr>
-            <a:spLocks noGrp="1" noRot="1" noChangeAspect="1"/>
-          </p:cNvSpPr>
-          <p:nvPr>
-            <p:ph type="sldImg"/>
-          </p:nvPr>
-        </p:nvSpPr>
-        <p:spPr/>
-      </p:sp>
-      <p:sp>
-        <p:nvSpPr>
-          <p:cNvPr id="3" name="Notes Placeholder 2"/>
-          <p:cNvSpPr>
-            <a:spLocks noGrp="1"/>
-          </p:cNvSpPr>
-          <p:nvPr>
-            <p:ph type="body" idx="1"/>
-          </p:nvPr>
-        </p:nvSpPr>
-        <p:spPr/>
-        <p:txBody>
-          <a:bodyPr/>
-          <a:lstStyle/>
-          <a:p>
-            <a:r>
-              <a:rPr lang="en-US" dirty="0"/>
-              <a:t>The anchor is IPv6-only in its data plane, which excludes the IPv4-only CGNAT population the study targets; that is a fifth decision and it also affects the product. Three unrelated defects found while surveying the transport are listed in the brief.</a:t>
-            </a:r>
-            <a:endParaRPr lang="en-US" dirty="0"/>
-          </a:p>
-        </p:txBody>
-      </p:sp>
-      <p:sp>
-        <p:nvSpPr>
-          <p:cNvPr id="4" name="Slide Number Placeholder 3"/>
-          <p:cNvSpPr>
-            <a:spLocks noGrp="1"/>
-          </p:cNvSpPr>
-          <p:nvPr>
-            <p:ph type="sldNum" sz="quarter" idx="10"/>
-          </p:nvPr>
-        </p:nvSpPr>
-        <p:spPr/>
-        <p:txBody>
-          <a:bodyPr/>
-          <a:lstStyle/>
-          <a:p>
-            <a:fld id="{F7021451-1387-4CA6-816F-3879F97B5CBC}" type="slidenum">
-              <a:rPr lang="en-US"/>
-              <a:t>11</a:t>
             </a:fld>
             <a:endParaRPr lang="en-US"/>
           </a:p>
@@ -1304,7 +1215,7 @@
           <a:p>
             <a:r>
               <a:rPr lang="en-US" dirty="0"/>
-              <a:t>The correctness claim rests on the bench, where labels are known by construction. The reference server needs two public addresses and two ports per family. Default masquerade reads endpoint-independent and --random-fully reads address-and-port-dependent, so the middle class comes from per-destination SNAT via nftables maps. The autoNAT cross-check runs as a standalone client on the same network, so it characterizes the network rather than our socket, and it is Wi-Fi only: on cellular it would need tethering, which adds another translation layer.</a:t>
+              <a:t>The requirement that decides whether a host can serve is whether it may receive unsolicited inbound UDP on those ports; a border firewall that drops them makes the host unusable however many addresses it has, so it is a week-one question for IT. University wired hosts are usually publicly addressed rather than translated, which is why the campus supplies the vantage points while the handsets remain the subjects. Campus wireless, guest and VPN are separate access networks, worth characterizing on their own terms.</a:t>
             </a:r>
             <a:endParaRPr lang="en-US" dirty="0"/>
           </a:p>
@@ -1392,7 +1303,7 @@
           <a:p>
             <a:r>
               <a:rPr lang="en-US" dirty="0"/>
-              <a:t>Each SIM buys one carrier-APN-plan cell, not a whole carrier, so budget roughly double the naive count. A residual stratum — tethering, VPN and private relay, fixed wireless, enterprise — is carried unmeasured at its best available weight, which is what lets the weight table sum to the denominator.</a:t>
+              <a:t>Every phase carries an exit criterion in the written brief. The week-3 checkpoint is code rather than a document: a reflexive address obtained over the transport’s own socket, which forces the demultiplexer change early and tells us whether the socket can be shared at all. Excluded by design and named as such: the autoNAT sidecar, the byzantine analysis, the weighted prevalence estimate and the decision-rule fit.</a:t>
             </a:r>
             <a:endParaRPr lang="en-US" dirty="0"/>
           </a:p>
@@ -2259,463 +2170,6 @@
 <file path=ppt/slides/slide10.xml><?xml version="1.0" encoding="utf-8"?>
 <p:sld xmlns:a="http://schemas.openxmlformats.org/drawingml/2006/main" xmlns:r="http://schemas.openxmlformats.org/officeDocument/2006/relationships" xmlns:p="http://schemas.openxmlformats.org/presentationml/2006/main">
   <p:cSld name="Slide 10">
-    <p:spTree>
-      <p:nvGrpSpPr>
-        <p:cNvPr id="1" name=""/>
-        <p:cNvGrpSpPr/>
-        <p:nvPr/>
-      </p:nvGrpSpPr>
-      <p:grpSpPr>
-        <a:xfrm>
-          <a:off x="0" y="0"/>
-          <a:ext cx="0" cy="0"/>
-          <a:chOff x="0" y="0"/>
-          <a:chExt cx="0" cy="0"/>
-        </a:xfrm>
-      </p:grpSpPr>
-      <p:sp>
-        <p:nvSpPr>
-          <p:cNvPr id="2" name="Text 0"/>
-          <p:cNvSpPr/>
-          <p:nvPr/>
-        </p:nvSpPr>
-        <p:spPr>
-          <a:xfrm>
-            <a:off x="685800" y="502920"/>
-            <a:ext cx="10789920" cy="274320"/>
-          </a:xfrm>
-          <a:prstGeom prst="rect">
-            <a:avLst/>
-          </a:prstGeom>
-          <a:noFill/>
-          <a:ln/>
-        </p:spPr>
-        <p:txBody>
-          <a:bodyPr wrap="square" lIns="0" tIns="0" rIns="0" bIns="0" rtlCol="0" anchor="ctr"/>
-          <a:lstStyle/>
-          <a:p>
-            <a:pPr indent="0" marL="0">
-              <a:buNone/>
-            </a:pPr>
-            <a:r>
-              <a:rPr lang="en-US" sz="1100" b="1" spc="200" kern="0" dirty="0">
-                <a:solidFill>
-                  <a:srgbClr val="0E7C86"/>
-                </a:solidFill>
-                <a:latin typeface="Calibri" pitchFamily="34" charset="0"/>
-                <a:ea typeface="Calibri" pitchFamily="34" charset="-122"/>
-                <a:cs typeface="Calibri" pitchFamily="34" charset="-120"/>
-              </a:rPr>
-              <a:t>SEQUENCE</a:t>
-            </a:r>
-            <a:endParaRPr lang="en-US" sz="1100" dirty="0"/>
-          </a:p>
-        </p:txBody>
-      </p:sp>
-      <p:sp>
-        <p:nvSpPr>
-          <p:cNvPr id="3" name="Text 1"/>
-          <p:cNvSpPr/>
-          <p:nvPr/>
-        </p:nvSpPr>
-        <p:spPr>
-          <a:xfrm>
-            <a:off x="685800" y="804672"/>
-            <a:ext cx="10789920" cy="822960"/>
-          </a:xfrm>
-          <a:prstGeom prst="rect">
-            <a:avLst/>
-          </a:prstGeom>
-          <a:noFill/>
-          <a:ln/>
-        </p:spPr>
-        <p:txBody>
-          <a:bodyPr wrap="square" lIns="0" tIns="0" rIns="0" bIns="0" rtlCol="0" anchor="ctr"/>
-          <a:lstStyle/>
-          <a:p>
-            <a:pPr indent="0" marL="0">
-              <a:buNone/>
-            </a:pPr>
-            <a:r>
-              <a:rPr lang="en-US" sz="3600" b="1" dirty="0">
-                <a:solidFill>
-                  <a:srgbClr val="16202A"/>
-                </a:solidFill>
-                <a:latin typeface="Cambria" pitchFamily="34" charset="0"/>
-                <a:ea typeface="Cambria" pitchFamily="34" charset="-122"/>
-                <a:cs typeface="Cambria" pitchFamily="34" charset="-120"/>
-              </a:rPr>
-              <a:t>One semester</a:t>
-            </a:r>
-            <a:endParaRPr lang="en-US" sz="3600" dirty="0"/>
-          </a:p>
-        </p:txBody>
-      </p:sp>
-      <p:sp>
-        <p:nvSpPr>
-          <p:cNvPr id="4" name="Shape 2"/>
-          <p:cNvSpPr/>
-          <p:nvPr/>
-        </p:nvSpPr>
-        <p:spPr>
-          <a:xfrm>
-            <a:off x="685800" y="2377440"/>
-            <a:ext cx="2286000" cy="914400"/>
-          </a:xfrm>
-          <a:prstGeom prst="roundRect">
-            <a:avLst>
-              <a:gd name="adj" fmla="val 6000"/>
-            </a:avLst>
-          </a:prstGeom>
-          <a:solidFill>
-            <a:srgbClr val="0E7C86"/>
-          </a:solidFill>
-          <a:ln w="12700">
-            <a:solidFill>
-              <a:srgbClr val="0E7C86"/>
-            </a:solidFill>
-            <a:prstDash val="solid"/>
-          </a:ln>
-        </p:spPr>
-      </p:sp>
-      <p:sp>
-        <p:nvSpPr>
-          <p:cNvPr id="5" name="Text 3"/>
-          <p:cNvSpPr/>
-          <p:nvPr/>
-        </p:nvSpPr>
-        <p:spPr>
-          <a:xfrm>
-            <a:off x="685800" y="2377440"/>
-            <a:ext cx="2286000" cy="914400"/>
-          </a:xfrm>
-          <a:prstGeom prst="rect">
-            <a:avLst/>
-          </a:prstGeom>
-          <a:noFill/>
-          <a:ln/>
-        </p:spPr>
-        <p:txBody>
-          <a:bodyPr wrap="square" lIns="0" tIns="0" rIns="0" bIns="0" rtlCol="0" anchor="ctr"/>
-          <a:lstStyle/>
-          <a:p>
-            <a:pPr algn="ctr" indent="0" marL="0">
-              <a:buNone/>
-            </a:pPr>
-            <a:r>
-              <a:rPr lang="en-US" sz="1600" b="1" dirty="0">
-                <a:solidFill>
-                  <a:srgbClr val="FFFFFF"/>
-                </a:solidFill>
-                <a:latin typeface="Cambria" pitchFamily="34" charset="0"/>
-                <a:ea typeface="Cambria" pitchFamily="34" charset="-122"/>
-                <a:cs typeface="Cambria" pitchFamily="34" charset="-120"/>
-              </a:rPr>
-              <a:t>Weeks 1–3</a:t>
-            </a:r>
-            <a:endParaRPr lang="en-US" sz="1600" dirty="0"/>
-          </a:p>
-        </p:txBody>
-      </p:sp>
-      <p:sp>
-        <p:nvSpPr>
-          <p:cNvPr id="6" name="Text 4"/>
-          <p:cNvSpPr/>
-          <p:nvPr/>
-        </p:nvSpPr>
-        <p:spPr>
-          <a:xfrm>
-            <a:off x="3337560" y="2377440"/>
-            <a:ext cx="8138160" cy="914400"/>
-          </a:xfrm>
-          <a:prstGeom prst="rect">
-            <a:avLst/>
-          </a:prstGeom>
-          <a:noFill/>
-          <a:ln/>
-        </p:spPr>
-        <p:txBody>
-          <a:bodyPr wrap="square" lIns="0" tIns="0" rIns="0" bIns="0" rtlCol="0" anchor="ctr"/>
-          <a:lstStyle/>
-          <a:p>
-            <a:pPr indent="0" marL="0">
-              <a:buNone/>
-            </a:pPr>
-            <a:r>
-              <a:rPr lang="en-US" sz="1650" dirty="0">
-                <a:solidFill>
-                  <a:srgbClr val="3E4C57"/>
-                </a:solidFill>
-                <a:latin typeface="Calibri" pitchFamily="34" charset="0"/>
-                <a:ea typeface="Calibri" pitchFamily="34" charset="-122"/>
-                <a:cs typeface="Calibri" pitchFamily="34" charset="-120"/>
-              </a:rPr>
-              <a:t>Onboarding; a STUN client on the transport’s own socket. Go/no-go.</a:t>
-            </a:r>
-            <a:endParaRPr lang="en-US" sz="1650" dirty="0"/>
-          </a:p>
-        </p:txBody>
-      </p:sp>
-      <p:sp>
-        <p:nvSpPr>
-          <p:cNvPr id="7" name="Shape 5"/>
-          <p:cNvSpPr/>
-          <p:nvPr/>
-        </p:nvSpPr>
-        <p:spPr>
-          <a:xfrm>
-            <a:off x="685800" y="3566160"/>
-            <a:ext cx="2286000" cy="914400"/>
-          </a:xfrm>
-          <a:prstGeom prst="roundRect">
-            <a:avLst>
-              <a:gd name="adj" fmla="val 6000"/>
-            </a:avLst>
-          </a:prstGeom>
-          <a:solidFill>
-            <a:srgbClr val="0E7C86"/>
-          </a:solidFill>
-          <a:ln w="12700">
-            <a:solidFill>
-              <a:srgbClr val="0E7C86"/>
-            </a:solidFill>
-            <a:prstDash val="solid"/>
-          </a:ln>
-        </p:spPr>
-      </p:sp>
-      <p:sp>
-        <p:nvSpPr>
-          <p:cNvPr id="8" name="Text 6"/>
-          <p:cNvSpPr/>
-          <p:nvPr/>
-        </p:nvSpPr>
-        <p:spPr>
-          <a:xfrm>
-            <a:off x="685800" y="3566160"/>
-            <a:ext cx="2286000" cy="914400"/>
-          </a:xfrm>
-          <a:prstGeom prst="rect">
-            <a:avLst/>
-          </a:prstGeom>
-          <a:noFill/>
-          <a:ln/>
-        </p:spPr>
-        <p:txBody>
-          <a:bodyPr wrap="square" lIns="0" tIns="0" rIns="0" bIns="0" rtlCol="0" anchor="ctr"/>
-          <a:lstStyle/>
-          <a:p>
-            <a:pPr algn="ctr" indent="0" marL="0">
-              <a:buNone/>
-            </a:pPr>
-            <a:r>
-              <a:rPr lang="en-US" sz="1600" b="1" dirty="0">
-                <a:solidFill>
-                  <a:srgbClr val="FFFFFF"/>
-                </a:solidFill>
-                <a:latin typeface="Cambria" pitchFamily="34" charset="0"/>
-                <a:ea typeface="Cambria" pitchFamily="34" charset="-122"/>
-                <a:cs typeface="Cambria" pitchFamily="34" charset="-120"/>
-              </a:rPr>
-              <a:t>Weeks 4–10</a:t>
-            </a:r>
-            <a:endParaRPr lang="en-US" sz="1600" dirty="0"/>
-          </a:p>
-        </p:txBody>
-      </p:sp>
-      <p:sp>
-        <p:nvSpPr>
-          <p:cNvPr id="9" name="Text 7"/>
-          <p:cNvSpPr/>
-          <p:nvPr/>
-        </p:nvSpPr>
-        <p:spPr>
-          <a:xfrm>
-            <a:off x="3337560" y="3566160"/>
-            <a:ext cx="8138160" cy="914400"/>
-          </a:xfrm>
-          <a:prstGeom prst="rect">
-            <a:avLst/>
-          </a:prstGeom>
-          <a:noFill/>
-          <a:ln/>
-        </p:spPr>
-        <p:txBody>
-          <a:bodyPr wrap="square" lIns="0" tIns="0" rIns="0" bIns="0" rtlCol="0" anchor="ctr"/>
-          <a:lstStyle/>
-          <a:p>
-            <a:pPr indent="0" marL="0">
-              <a:buNone/>
-            </a:pPr>
-            <a:r>
-              <a:rPr lang="en-US" sz="1650" dirty="0">
-                <a:solidFill>
-                  <a:srgbClr val="3E4C57"/>
-                </a:solidFill>
-                <a:latin typeface="Calibri" pitchFamily="34" charset="0"/>
-                <a:ea typeface="Calibri" pitchFamily="34" charset="-122"/>
-                <a:cs typeface="Calibri" pitchFamily="34" charset="-120"/>
-              </a:rPr>
-              <a:t>The oracle and labeled bench; then the witness protocol and its classifier.</a:t>
-            </a:r>
-            <a:endParaRPr lang="en-US" sz="1650" dirty="0"/>
-          </a:p>
-        </p:txBody>
-      </p:sp>
-      <p:sp>
-        <p:nvSpPr>
-          <p:cNvPr id="10" name="Shape 8"/>
-          <p:cNvSpPr/>
-          <p:nvPr/>
-        </p:nvSpPr>
-        <p:spPr>
-          <a:xfrm>
-            <a:off x="685800" y="4754880"/>
-            <a:ext cx="2286000" cy="914400"/>
-          </a:xfrm>
-          <a:prstGeom prst="roundRect">
-            <a:avLst>
-              <a:gd name="adj" fmla="val 6000"/>
-            </a:avLst>
-          </a:prstGeom>
-          <a:solidFill>
-            <a:srgbClr val="C25E28"/>
-          </a:solidFill>
-          <a:ln w="12700">
-            <a:solidFill>
-              <a:srgbClr val="C25E28"/>
-            </a:solidFill>
-            <a:prstDash val="solid"/>
-          </a:ln>
-        </p:spPr>
-      </p:sp>
-      <p:sp>
-        <p:nvSpPr>
-          <p:cNvPr id="11" name="Text 9"/>
-          <p:cNvSpPr/>
-          <p:nvPr/>
-        </p:nvSpPr>
-        <p:spPr>
-          <a:xfrm>
-            <a:off x="685800" y="4754880"/>
-            <a:ext cx="2286000" cy="914400"/>
-          </a:xfrm>
-          <a:prstGeom prst="rect">
-            <a:avLst/>
-          </a:prstGeom>
-          <a:noFill/>
-          <a:ln/>
-        </p:spPr>
-        <p:txBody>
-          <a:bodyPr wrap="square" lIns="0" tIns="0" rIns="0" bIns="0" rtlCol="0" anchor="ctr"/>
-          <a:lstStyle/>
-          <a:p>
-            <a:pPr algn="ctr" indent="0" marL="0">
-              <a:buNone/>
-            </a:pPr>
-            <a:r>
-              <a:rPr lang="en-US" sz="1600" b="1" dirty="0">
-                <a:solidFill>
-                  <a:srgbClr val="FFFFFF"/>
-                </a:solidFill>
-                <a:latin typeface="Cambria" pitchFamily="34" charset="0"/>
-                <a:ea typeface="Cambria" pitchFamily="34" charset="-122"/>
-                <a:cs typeface="Cambria" pitchFamily="34" charset="-120"/>
-              </a:rPr>
-              <a:t>Weeks 11–15</a:t>
-            </a:r>
-            <a:endParaRPr lang="en-US" sz="1600" dirty="0"/>
-          </a:p>
-        </p:txBody>
-      </p:sp>
-      <p:sp>
-        <p:nvSpPr>
-          <p:cNvPr id="12" name="Text 10"/>
-          <p:cNvSpPr/>
-          <p:nvPr/>
-        </p:nvSpPr>
-        <p:spPr>
-          <a:xfrm>
-            <a:off x="3337560" y="4754880"/>
-            <a:ext cx="8138160" cy="914400"/>
-          </a:xfrm>
-          <a:prstGeom prst="rect">
-            <a:avLst/>
-          </a:prstGeom>
-          <a:noFill/>
-          <a:ln/>
-        </p:spPr>
-        <p:txBody>
-          <a:bodyPr wrap="square" lIns="0" tIns="0" rIns="0" bIns="0" rtlCol="0" anchor="ctr"/>
-          <a:lstStyle/>
-          <a:p>
-            <a:pPr indent="0" marL="0">
-              <a:buNone/>
-            </a:pPr>
-            <a:r>
-              <a:rPr lang="en-US" sz="1650" dirty="0">
-                <a:solidFill>
-                  <a:srgbClr val="3E4C57"/>
-                </a:solidFill>
-                <a:latin typeface="Calibri" pitchFamily="34" charset="0"/>
-                <a:ea typeface="Calibri" pitchFamily="34" charset="-122"/>
-                <a:cs typeface="Calibri" pitchFamily="34" charset="-120"/>
-              </a:rPr>
-              <a:t>Measurement on our own devices across reachable networks; write-up.</a:t>
-            </a:r>
-            <a:endParaRPr lang="en-US" sz="1650" dirty="0"/>
-          </a:p>
-        </p:txBody>
-      </p:sp>
-      <p:sp>
-        <p:nvSpPr>
-          <p:cNvPr id="13" name="Text 11"/>
-          <p:cNvSpPr/>
-          <p:nvPr/>
-        </p:nvSpPr>
-        <p:spPr>
-          <a:xfrm>
-            <a:off x="685800" y="5806440"/>
-            <a:ext cx="10789920" cy="365760"/>
-          </a:xfrm>
-          <a:prstGeom prst="rect">
-            <a:avLst/>
-          </a:prstGeom>
-          <a:noFill/>
-          <a:ln/>
-        </p:spPr>
-        <p:txBody>
-          <a:bodyPr wrap="square" lIns="0" tIns="0" rIns="0" bIns="0" rtlCol="0" anchor="ctr"/>
-          <a:lstStyle/>
-          <a:p>
-            <a:pPr indent="0" marL="0">
-              <a:buNone/>
-            </a:pPr>
-            <a:r>
-              <a:rPr lang="en-US" sz="1500" i="1" dirty="0">
-                <a:solidFill>
-                  <a:srgbClr val="C25E28"/>
-                </a:solidFill>
-                <a:latin typeface="Calibri" pitchFamily="34" charset="0"/>
-                <a:ea typeface="Calibri" pitchFamily="34" charset="-122"/>
-                <a:cs typeface="Calibri" pitchFamily="34" charset="-120"/>
-              </a:rPr>
-              <a:t>Week one: two public addresses, firewall rules, SIMs and handsets. They gate week four.</a:t>
-            </a:r>
-            <a:endParaRPr lang="en-US" sz="1500" dirty="0"/>
-          </a:p>
-        </p:txBody>
-      </p:sp>
-    </p:spTree>
-  </p:cSld>
-  <p:clrMapOvr>
-    <a:masterClrMapping/>
-  </p:clrMapOvr>
-</p:sld>
-</file>
-
-<file path=ppt/slides/slide11.xml><?xml version="1.0" encoding="utf-8"?>
-<p:sld xmlns:a="http://schemas.openxmlformats.org/drawingml/2006/main" xmlns:r="http://schemas.openxmlformats.org/officeDocument/2006/relationships" xmlns:p="http://schemas.openxmlformats.org/presentationml/2006/main">
-  <p:cSld name="Slide 11">
     <p:bg>
       <p:bgPr>
         <a:solidFill>
@@ -3004,7 +2458,7 @@
                 <a:ea typeface="Cambria" pitchFamily="34" charset="-122"/>
                 <a:cs typeface="Cambria" pitchFamily="34" charset="-120"/>
               </a:rPr>
-              <a:t>Reference server</a:t>
+              <a:t>Inbound UDP</a:t>
             </a:r>
             <a:endParaRPr lang="en-US" sz="1900" dirty="0"/>
           </a:p>
@@ -3043,7 +2497,7 @@
                 <a:ea typeface="Calibri" pitchFamily="34" charset="-122"/>
                 <a:cs typeface="Calibri" pitchFamily="34" charset="-120"/>
               </a:rPr>
-              <a:t>Who provisions it, and from which address block.</a:t>
+              <a:t>May the host receive unsolicited datagrams on two addresses, two ports?</a:t>
             </a:r>
             <a:endParaRPr lang="en-US" sz="1500" dirty="0"/>
           </a:p>
@@ -7706,7 +7160,7 @@
                 <a:ea typeface="Calibri" pitchFamily="34" charset="-122"/>
                 <a:cs typeface="Calibri" pitchFamily="34" charset="-120"/>
               </a:rPr>
-              <a:t>HOW THE CLAIM IS ESTABLISHED</a:t>
+              <a:t>WHAT WE MEASURE, AND FROM WHERE</a:t>
             </a:r>
             <a:endParaRPr lang="en-US" sz="1100" dirty="0"/>
           </a:p>
@@ -7745,7 +7199,7 @@
                 <a:ea typeface="Cambria" pitchFamily="34" charset="-122"/>
                 <a:cs typeface="Cambria" pitchFamily="34" charset="-120"/>
               </a:rPr>
-              <a:t>Validation in two tiers</a:t>
+              <a:t>Testbed and hosting</a:t>
             </a:r>
             <a:endParaRPr lang="en-US" sz="3600" dirty="0"/>
           </a:p>
@@ -7759,12 +7213,12 @@
         </p:nvSpPr>
         <p:spPr>
           <a:xfrm>
-            <a:off x="685800" y="2286000"/>
-            <a:ext cx="10789920" cy="960120"/>
+            <a:off x="685800" y="2103120"/>
+            <a:ext cx="5212080" cy="2743200"/>
           </a:xfrm>
           <a:prstGeom prst="roundRect">
             <a:avLst>
-              <a:gd name="adj" fmla="val 5714"/>
+              <a:gd name="adj" fmla="val 2000"/>
             </a:avLst>
           </a:prstGeom>
           <a:solidFill>
@@ -7780,19 +7234,56 @@
       </p:sp>
       <p:sp>
         <p:nvSpPr>
-          <p:cNvPr id="5" name="Shape 3"/>
-          <p:cNvSpPr/>
-          <p:nvPr/>
-        </p:nvSpPr>
-        <p:spPr>
-          <a:xfrm>
-            <a:off x="960120" y="2514600"/>
-            <a:ext cx="1737360" cy="502920"/>
-          </a:xfrm>
-          <a:prstGeom prst="roundRect">
-            <a:avLst>
-              <a:gd name="adj" fmla="val 9091"/>
-            </a:avLst>
+          <p:cNvPr id="5" name="Text 3"/>
+          <p:cNvSpPr/>
+          <p:nvPr/>
+        </p:nvSpPr>
+        <p:spPr>
+          <a:xfrm>
+            <a:off x="1051560" y="2377440"/>
+            <a:ext cx="4480560" cy="365760"/>
+          </a:xfrm>
+          <a:prstGeom prst="rect">
+            <a:avLst/>
+          </a:prstGeom>
+          <a:noFill/>
+          <a:ln/>
+        </p:spPr>
+        <p:txBody>
+          <a:bodyPr wrap="square" lIns="0" tIns="0" rIns="0" bIns="0" rtlCol="0" anchor="ctr"/>
+          <a:lstStyle/>
+          <a:p>
+            <a:pPr indent="0" marL="0">
+              <a:buNone/>
+            </a:pPr>
+            <a:r>
+              <a:rPr lang="en-US" sz="1900" b="1" dirty="0">
+                <a:solidFill>
+                  <a:srgbClr val="16202A"/>
+                </a:solidFill>
+                <a:latin typeface="Cambria" pitchFamily="34" charset="0"/>
+                <a:ea typeface="Cambria" pitchFamily="34" charset="-122"/>
+                <a:cs typeface="Cambria" pitchFamily="34" charset="-120"/>
+              </a:rPr>
+              <a:t>What we measure</a:t>
+            </a:r>
+            <a:endParaRPr lang="en-US" sz="1900" dirty="0"/>
+          </a:p>
+        </p:txBody>
+      </p:sp>
+      <p:sp>
+        <p:nvSpPr>
+          <p:cNvPr id="6" name="Shape 4"/>
+          <p:cNvSpPr/>
+          <p:nvPr/>
+        </p:nvSpPr>
+        <p:spPr>
+          <a:xfrm>
+            <a:off x="1051560" y="3044952"/>
+            <a:ext cx="118872" cy="118872"/>
+          </a:xfrm>
+          <a:prstGeom prst="ellipse">
+            <a:avLst/>
           </a:prstGeom>
           <a:solidFill>
             <a:srgbClr val="0E7C86"/>
@@ -7807,69 +7298,30 @@
       </p:sp>
       <p:sp>
         <p:nvSpPr>
-          <p:cNvPr id="6" name="Text 4"/>
-          <p:cNvSpPr/>
-          <p:nvPr/>
-        </p:nvSpPr>
-        <p:spPr>
-          <a:xfrm>
-            <a:off x="960120" y="2514600"/>
-            <a:ext cx="1737360" cy="502920"/>
-          </a:xfrm>
-          <a:prstGeom prst="rect">
-            <a:avLst/>
-          </a:prstGeom>
-          <a:noFill/>
-          <a:ln/>
-        </p:spPr>
-        <p:txBody>
-          <a:bodyPr wrap="square" lIns="0" tIns="0" rIns="0" bIns="0" rtlCol="0" anchor="ctr"/>
-          <a:lstStyle/>
-          <a:p>
-            <a:pPr algn="ctr" indent="0" marL="0">
-              <a:buNone/>
-            </a:pPr>
-            <a:r>
-              <a:rPr lang="en-US" sz="1500" b="1" dirty="0">
-                <a:solidFill>
-                  <a:srgbClr val="FFFFFF"/>
-                </a:solidFill>
-                <a:latin typeface="Cambria" pitchFamily="34" charset="0"/>
-                <a:ea typeface="Cambria" pitchFamily="34" charset="-122"/>
-                <a:cs typeface="Cambria" pitchFamily="34" charset="-120"/>
-              </a:rPr>
-              <a:t>Bench</a:t>
-            </a:r>
-            <a:endParaRPr lang="en-US" sz="1500" dirty="0"/>
-          </a:p>
-        </p:txBody>
-      </p:sp>
-      <p:sp>
-        <p:nvSpPr>
           <p:cNvPr id="7" name="Text 5"/>
           <p:cNvSpPr/>
           <p:nvPr/>
         </p:nvSpPr>
         <p:spPr>
           <a:xfrm>
-            <a:off x="2971800" y="2286000"/>
-            <a:ext cx="5852160" cy="960120"/>
-          </a:xfrm>
-          <a:prstGeom prst="rect">
-            <a:avLst/>
-          </a:prstGeom>
-          <a:noFill/>
-          <a:ln/>
-        </p:spPr>
-        <p:txBody>
-          <a:bodyPr wrap="square" lIns="0" tIns="0" rIns="0" bIns="0" rtlCol="0" anchor="ctr"/>
-          <a:lstStyle/>
-          <a:p>
-            <a:pPr indent="0" marL="0">
-              <a:buNone/>
-            </a:pPr>
-            <a:r>
-              <a:rPr lang="en-US" sz="1600" dirty="0">
+            <a:off x="1371600" y="2926080"/>
+            <a:ext cx="4160520" cy="384048"/>
+          </a:xfrm>
+          <a:prstGeom prst="rect">
+            <a:avLst/>
+          </a:prstGeom>
+          <a:noFill/>
+          <a:ln/>
+        </p:spPr>
+        <p:txBody>
+          <a:bodyPr wrap="square" lIns="0" tIns="0" rIns="0" bIns="0" rtlCol="0" anchor="ctr"/>
+          <a:lstStyle/>
+          <a:p>
+            <a:pPr indent="0" marL="0">
+              <a:buNone/>
+            </a:pPr>
+            <a:r>
+              <a:rPr lang="en-US" sz="1350" dirty="0">
                 <a:solidFill>
                   <a:srgbClr val="3E4C57"/>
                 </a:solidFill>
@@ -7877,65 +7329,154 @@
                 <a:ea typeface="Calibri" pitchFamily="34" charset="-122"/>
                 <a:cs typeface="Calibri" pitchFamily="34" charset="-120"/>
               </a:rPr>
-              <a:t>Eight-plus configurations, labeled by construction</a:t>
-            </a:r>
-            <a:endParaRPr lang="en-US" sz="1600" dirty="0"/>
-          </a:p>
-        </p:txBody>
-      </p:sp>
-      <p:sp>
-        <p:nvSpPr>
-          <p:cNvPr id="8" name="Text 6"/>
-          <p:cNvSpPr/>
-          <p:nvPr/>
-        </p:nvSpPr>
-        <p:spPr>
-          <a:xfrm>
-            <a:off x="8915400" y="2286000"/>
-            <a:ext cx="2377440" cy="960120"/>
-          </a:xfrm>
-          <a:prstGeom prst="rect">
-            <a:avLst/>
-          </a:prstGeom>
-          <a:noFill/>
-          <a:ln/>
-        </p:spPr>
-        <p:txBody>
-          <a:bodyPr wrap="square" lIns="0" tIns="0" rIns="0" bIns="0" rtlCol="0" anchor="ctr"/>
-          <a:lstStyle/>
-          <a:p>
-            <a:pPr algn="r" indent="0" marL="0">
-              <a:buNone/>
-            </a:pPr>
-            <a:r>
-              <a:rPr lang="en-US" sz="1300" i="1" dirty="0">
-                <a:solidFill>
-                  <a:srgbClr val="6E7F8B"/>
+              <a:t>Our own handsets, on carrier and home paths.</a:t>
+            </a:r>
+            <a:endParaRPr lang="en-US" sz="1350" dirty="0"/>
+          </a:p>
+        </p:txBody>
+      </p:sp>
+      <p:sp>
+        <p:nvSpPr>
+          <p:cNvPr id="8" name="Shape 6"/>
+          <p:cNvSpPr/>
+          <p:nvPr/>
+        </p:nvSpPr>
+        <p:spPr>
+          <a:xfrm>
+            <a:off x="1051560" y="3520440"/>
+            <a:ext cx="118872" cy="118872"/>
+          </a:xfrm>
+          <a:prstGeom prst="ellipse">
+            <a:avLst/>
+          </a:prstGeom>
+          <a:solidFill>
+            <a:srgbClr val="0E7C86"/>
+          </a:solidFill>
+          <a:ln w="12700">
+            <a:solidFill>
+              <a:srgbClr val="0E7C86"/>
+            </a:solidFill>
+            <a:prstDash val="solid"/>
+          </a:ln>
+        </p:spPr>
+      </p:sp>
+      <p:sp>
+        <p:nvSpPr>
+          <p:cNvPr id="9" name="Text 7"/>
+          <p:cNvSpPr/>
+          <p:nvPr/>
+        </p:nvSpPr>
+        <p:spPr>
+          <a:xfrm>
+            <a:off x="1371600" y="3401568"/>
+            <a:ext cx="4160520" cy="384048"/>
+          </a:xfrm>
+          <a:prstGeom prst="rect">
+            <a:avLst/>
+          </a:prstGeom>
+          <a:noFill/>
+          <a:ln/>
+        </p:spPr>
+        <p:txBody>
+          <a:bodyPr wrap="square" lIns="0" tIns="0" rIns="0" bIns="0" rtlCol="0" anchor="ctr"/>
+          <a:lstStyle/>
+          <a:p>
+            <a:pPr indent="0" marL="0">
+              <a:buNone/>
+            </a:pPr>
+            <a:r>
+              <a:rPr lang="en-US" sz="1350" dirty="0">
+                <a:solidFill>
+                  <a:srgbClr val="3E4C57"/>
                 </a:solidFill>
                 <a:latin typeface="Calibri" pitchFamily="34" charset="0"/>
                 <a:ea typeface="Calibri" pitchFamily="34" charset="-122"/>
                 <a:cs typeface="Calibri" pitchFamily="34" charset="-120"/>
               </a:rPr>
-              <a:t>accuracy is legitimate here</a:t>
-            </a:r>
-            <a:endParaRPr lang="en-US" sz="1300" dirty="0"/>
-          </a:p>
-        </p:txBody>
-      </p:sp>
-      <p:sp>
-        <p:nvSpPr>
-          <p:cNvPr id="9" name="Shape 7"/>
-          <p:cNvSpPr/>
-          <p:nvPr/>
-        </p:nvSpPr>
-        <p:spPr>
-          <a:xfrm>
-            <a:off x="685800" y="3429000"/>
-            <a:ext cx="10789920" cy="960120"/>
+              <a:t>A stratum: one carrier, APN and PDN type.</a:t>
+            </a:r>
+            <a:endParaRPr lang="en-US" sz="1350" dirty="0"/>
+          </a:p>
+        </p:txBody>
+      </p:sp>
+      <p:sp>
+        <p:nvSpPr>
+          <p:cNvPr id="10" name="Shape 8"/>
+          <p:cNvSpPr/>
+          <p:nvPr/>
+        </p:nvSpPr>
+        <p:spPr>
+          <a:xfrm>
+            <a:off x="1051560" y="3995928"/>
+            <a:ext cx="118872" cy="118872"/>
+          </a:xfrm>
+          <a:prstGeom prst="ellipse">
+            <a:avLst/>
+          </a:prstGeom>
+          <a:solidFill>
+            <a:srgbClr val="0E7C86"/>
+          </a:solidFill>
+          <a:ln w="12700">
+            <a:solidFill>
+              <a:srgbClr val="0E7C86"/>
+            </a:solidFill>
+            <a:prstDash val="solid"/>
+          </a:ln>
+        </p:spPr>
+      </p:sp>
+      <p:sp>
+        <p:nvSpPr>
+          <p:cNvPr id="11" name="Text 9"/>
+          <p:cNvSpPr/>
+          <p:nvPr/>
+        </p:nvSpPr>
+        <p:spPr>
+          <a:xfrm>
+            <a:off x="1371600" y="3877056"/>
+            <a:ext cx="4160520" cy="384048"/>
+          </a:xfrm>
+          <a:prstGeom prst="rect">
+            <a:avLst/>
+          </a:prstGeom>
+          <a:noFill/>
+          <a:ln/>
+        </p:spPr>
+        <p:txBody>
+          <a:bodyPr wrap="square" lIns="0" tIns="0" rIns="0" bIns="0" rtlCol="0" anchor="ctr"/>
+          <a:lstStyle/>
+          <a:p>
+            <a:pPr indent="0" marL="0">
+              <a:buNone/>
+            </a:pPr>
+            <a:r>
+              <a:rPr lang="en-US" sz="1350" dirty="0">
+                <a:solidFill>
+                  <a:srgbClr val="3E4C57"/>
+                </a:solidFill>
+                <a:latin typeface="Calibri" pitchFamily="34" charset="0"/>
+                <a:ea typeface="Calibri" pitchFamily="34" charset="-122"/>
+                <a:cs typeface="Calibri" pitchFamily="34" charset="-120"/>
+              </a:rPr>
+              <a:t>Two SIMs and two handset stacks per carrier.</a:t>
+            </a:r>
+            <a:endParaRPr lang="en-US" sz="1350" dirty="0"/>
+          </a:p>
+        </p:txBody>
+      </p:sp>
+      <p:sp>
+        <p:nvSpPr>
+          <p:cNvPr id="12" name="Shape 10"/>
+          <p:cNvSpPr/>
+          <p:nvPr/>
+        </p:nvSpPr>
+        <p:spPr>
+          <a:xfrm>
+            <a:off x="6263640" y="2103120"/>
+            <a:ext cx="5212080" cy="2743200"/>
           </a:xfrm>
           <a:prstGeom prst="roundRect">
             <a:avLst>
-              <a:gd name="adj" fmla="val 5714"/>
+              <a:gd name="adj" fmla="val 2000"/>
             </a:avLst>
           </a:prstGeom>
           <a:solidFill>
@@ -7951,145 +7492,40 @@
       </p:sp>
       <p:sp>
         <p:nvSpPr>
-          <p:cNvPr id="10" name="Shape 8"/>
-          <p:cNvSpPr/>
-          <p:nvPr/>
-        </p:nvSpPr>
-        <p:spPr>
-          <a:xfrm>
-            <a:off x="960120" y="3657600"/>
-            <a:ext cx="1737360" cy="502920"/>
-          </a:xfrm>
-          <a:prstGeom prst="roundRect">
-            <a:avLst>
-              <a:gd name="adj" fmla="val 9091"/>
-            </a:avLst>
-          </a:prstGeom>
-          <a:solidFill>
-            <a:srgbClr val="0E7C86"/>
-          </a:solidFill>
-          <a:ln w="12700">
-            <a:solidFill>
-              <a:srgbClr val="0E7C86"/>
-            </a:solidFill>
-            <a:prstDash val="solid"/>
-          </a:ln>
-        </p:spPr>
-      </p:sp>
-      <p:sp>
-        <p:nvSpPr>
-          <p:cNvPr id="11" name="Text 9"/>
-          <p:cNvSpPr/>
-          <p:nvPr/>
-        </p:nvSpPr>
-        <p:spPr>
-          <a:xfrm>
-            <a:off x="960120" y="3657600"/>
-            <a:ext cx="1737360" cy="502920"/>
-          </a:xfrm>
-          <a:prstGeom prst="rect">
-            <a:avLst/>
-          </a:prstGeom>
-          <a:noFill/>
-          <a:ln/>
-        </p:spPr>
-        <p:txBody>
-          <a:bodyPr wrap="square" lIns="0" tIns="0" rIns="0" bIns="0" rtlCol="0" anchor="ctr"/>
-          <a:lstStyle/>
-          <a:p>
-            <a:pPr algn="ctr" indent="0" marL="0">
-              <a:buNone/>
-            </a:pPr>
-            <a:r>
-              <a:rPr lang="en-US" sz="1500" b="1" dirty="0">
-                <a:solidFill>
-                  <a:srgbClr val="FFFFFF"/>
+          <p:cNvPr id="13" name="Text 11"/>
+          <p:cNvSpPr/>
+          <p:nvPr/>
+        </p:nvSpPr>
+        <p:spPr>
+          <a:xfrm>
+            <a:off x="6629400" y="2377440"/>
+            <a:ext cx="4480560" cy="365760"/>
+          </a:xfrm>
+          <a:prstGeom prst="rect">
+            <a:avLst/>
+          </a:prstGeom>
+          <a:noFill/>
+          <a:ln/>
+        </p:spPr>
+        <p:txBody>
+          <a:bodyPr wrap="square" lIns="0" tIns="0" rIns="0" bIns="0" rtlCol="0" anchor="ctr"/>
+          <a:lstStyle/>
+          <a:p>
+            <a:pPr indent="0" marL="0">
+              <a:buNone/>
+            </a:pPr>
+            <a:r>
+              <a:rPr lang="en-US" sz="1900" b="1" dirty="0">
+                <a:solidFill>
+                  <a:srgbClr val="16202A"/>
                 </a:solidFill>
                 <a:latin typeface="Cambria" pitchFamily="34" charset="0"/>
                 <a:ea typeface="Cambria" pitchFamily="34" charset="-122"/>
                 <a:cs typeface="Cambria" pitchFamily="34" charset="-120"/>
               </a:rPr>
-              <a:t>Sweep</a:t>
-            </a:r>
-            <a:endParaRPr lang="en-US" sz="1500" dirty="0"/>
-          </a:p>
-        </p:txBody>
-      </p:sp>
-      <p:sp>
-        <p:nvSpPr>
-          <p:cNvPr id="12" name="Text 10"/>
-          <p:cNvSpPr/>
-          <p:nvPr/>
-        </p:nvSpPr>
-        <p:spPr>
-          <a:xfrm>
-            <a:off x="2971800" y="3429000"/>
-            <a:ext cx="5852160" cy="960120"/>
-          </a:xfrm>
-          <a:prstGeom prst="rect">
-            <a:avLst/>
-          </a:prstGeom>
-          <a:noFill/>
-          <a:ln/>
-        </p:spPr>
-        <p:txBody>
-          <a:bodyPr wrap="square" lIns="0" tIns="0" rIns="0" bIns="0" rtlCol="0" anchor="ctr"/>
-          <a:lstStyle/>
-          <a:p>
-            <a:pPr indent="0" marL="0">
-              <a:buNone/>
-            </a:pPr>
-            <a:r>
-              <a:rPr lang="en-US" sz="1600" dirty="0">
-                <a:solidFill>
-                  <a:srgbClr val="3E4C57"/>
-                </a:solidFill>
-                <a:latin typeface="Calibri" pitchFamily="34" charset="0"/>
-                <a:ea typeface="Calibri" pitchFamily="34" charset="-122"/>
-                <a:cs typeface="Calibri" pitchFamily="34" charset="-120"/>
-              </a:rPr>
-              <a:t>Witness count k against byzantine fraction f</a:t>
-            </a:r>
-            <a:endParaRPr lang="en-US" sz="1600" dirty="0"/>
-          </a:p>
-        </p:txBody>
-      </p:sp>
-      <p:sp>
-        <p:nvSpPr>
-          <p:cNvPr id="13" name="Text 11"/>
-          <p:cNvSpPr/>
-          <p:nvPr/>
-        </p:nvSpPr>
-        <p:spPr>
-          <a:xfrm>
-            <a:off x="8915400" y="3429000"/>
-            <a:ext cx="2377440" cy="960120"/>
-          </a:xfrm>
-          <a:prstGeom prst="rect">
-            <a:avLst/>
-          </a:prstGeom>
-          <a:noFill/>
-          <a:ln/>
-        </p:spPr>
-        <p:txBody>
-          <a:bodyPr wrap="square" lIns="0" tIns="0" rIns="0" bIns="0" rtlCol="0" anchor="ctr"/>
-          <a:lstStyle/>
-          <a:p>
-            <a:pPr algn="r" indent="0" marL="0">
-              <a:buNone/>
-            </a:pPr>
-            <a:r>
-              <a:rPr lang="en-US" sz="1300" i="1" dirty="0">
-                <a:solidFill>
-                  <a:srgbClr val="6E7F8B"/>
-                </a:solidFill>
-                <a:latin typeface="Calibri" pitchFamily="34" charset="0"/>
-                <a:ea typeface="Calibri" pitchFamily="34" charset="-122"/>
-                <a:cs typeface="Calibri" pitchFamily="34" charset="-120"/>
-              </a:rPr>
-              <a:t>we operate every witness</a:t>
-            </a:r>
-            <a:endParaRPr lang="en-US" sz="1300" dirty="0"/>
+              <a:t>What the institution hosts</a:t>
+            </a:r>
+            <a:endParaRPr lang="en-US" sz="1900" dirty="0"/>
           </a:p>
         </p:txBody>
       </p:sp>
@@ -8101,40 +7537,11 @@
         </p:nvSpPr>
         <p:spPr>
           <a:xfrm>
-            <a:off x="685800" y="4572000"/>
-            <a:ext cx="10789920" cy="960120"/>
-          </a:xfrm>
-          <a:prstGeom prst="roundRect">
-            <a:avLst>
-              <a:gd name="adj" fmla="val 5714"/>
-            </a:avLst>
-          </a:prstGeom>
-          <a:solidFill>
-            <a:srgbClr val="EEF3F4"/>
-          </a:solidFill>
-          <a:ln w="6350">
-            <a:solidFill>
-              <a:srgbClr val="EEF3F4"/>
-            </a:solidFill>
-            <a:prstDash val="solid"/>
-          </a:ln>
-        </p:spPr>
-      </p:sp>
-      <p:sp>
-        <p:nvSpPr>
-          <p:cNvPr id="15" name="Shape 13"/>
-          <p:cNvSpPr/>
-          <p:nvPr/>
-        </p:nvSpPr>
-        <p:spPr>
-          <a:xfrm>
-            <a:off x="960120" y="4800600"/>
-            <a:ext cx="1737360" cy="502920"/>
-          </a:xfrm>
-          <a:prstGeom prst="roundRect">
-            <a:avLst>
-              <a:gd name="adj" fmla="val 9091"/>
-            </a:avLst>
+            <a:off x="6629400" y="3044952"/>
+            <a:ext cx="118872" cy="118872"/>
+          </a:xfrm>
+          <a:prstGeom prst="ellipse">
+            <a:avLst/>
           </a:prstGeom>
           <a:solidFill>
             <a:srgbClr val="C25E28"/>
@@ -8149,69 +7556,30 @@
       </p:sp>
       <p:sp>
         <p:nvSpPr>
-          <p:cNvPr id="16" name="Text 14"/>
-          <p:cNvSpPr/>
-          <p:nvPr/>
-        </p:nvSpPr>
-        <p:spPr>
-          <a:xfrm>
-            <a:off x="960120" y="4800600"/>
-            <a:ext cx="1737360" cy="502920"/>
-          </a:xfrm>
-          <a:prstGeom prst="rect">
-            <a:avLst/>
-          </a:prstGeom>
-          <a:noFill/>
-          <a:ln/>
-        </p:spPr>
-        <p:txBody>
-          <a:bodyPr wrap="square" lIns="0" tIns="0" rIns="0" bIns="0" rtlCol="0" anchor="ctr"/>
-          <a:lstStyle/>
-          <a:p>
-            <a:pPr algn="ctr" indent="0" marL="0">
-              <a:buNone/>
-            </a:pPr>
-            <a:r>
-              <a:rPr lang="en-US" sz="1500" b="1" dirty="0">
-                <a:solidFill>
-                  <a:srgbClr val="FFFFFF"/>
-                </a:solidFill>
-                <a:latin typeface="Cambria" pitchFamily="34" charset="0"/>
-                <a:ea typeface="Cambria" pitchFamily="34" charset="-122"/>
-                <a:cs typeface="Cambria" pitchFamily="34" charset="-120"/>
-              </a:rPr>
-              <a:t>Campaign</a:t>
-            </a:r>
-            <a:endParaRPr lang="en-US" sz="1500" dirty="0"/>
-          </a:p>
-        </p:txBody>
-      </p:sp>
-      <p:sp>
-        <p:nvSpPr>
-          <p:cNvPr id="17" name="Text 15"/>
-          <p:cNvSpPr/>
-          <p:nvPr/>
-        </p:nvSpPr>
-        <p:spPr>
-          <a:xfrm>
-            <a:off x="2971800" y="4572000"/>
-            <a:ext cx="5852160" cy="960120"/>
-          </a:xfrm>
-          <a:prstGeom prst="rect">
-            <a:avLst/>
-          </a:prstGeom>
-          <a:noFill/>
-          <a:ln/>
-        </p:spPr>
-        <p:txBody>
-          <a:bodyPr wrap="square" lIns="0" tIns="0" rIns="0" bIns="0" rtlCol="0" anchor="ctr"/>
-          <a:lstStyle/>
-          <a:p>
-            <a:pPr indent="0" marL="0">
-              <a:buNone/>
-            </a:pPr>
-            <a:r>
-              <a:rPr lang="en-US" sz="1600" dirty="0">
+          <p:cNvPr id="15" name="Text 13"/>
+          <p:cNvSpPr/>
+          <p:nvPr/>
+        </p:nvSpPr>
+        <p:spPr>
+          <a:xfrm>
+            <a:off x="6949440" y="2926080"/>
+            <a:ext cx="4160520" cy="384048"/>
+          </a:xfrm>
+          <a:prstGeom prst="rect">
+            <a:avLst/>
+          </a:prstGeom>
+          <a:noFill/>
+          <a:ln/>
+        </p:spPr>
+        <p:txBody>
+          <a:bodyPr wrap="square" lIns="0" tIns="0" rIns="0" bIns="0" rtlCol="0" anchor="ctr"/>
+          <a:lstStyle/>
+          <a:p>
+            <a:pPr indent="0" marL="0">
+              <a:buNone/>
+            </a:pPr>
+            <a:r>
+              <a:rPr lang="en-US" sz="1350" dirty="0">
                 <a:solidFill>
                   <a:srgbClr val="3E4C57"/>
                 </a:solidFill>
@@ -8219,50 +7587,100 @@
                 <a:ea typeface="Calibri" pitchFamily="34" charset="-122"/>
                 <a:cs typeface="Calibri" pitchFamily="34" charset="-120"/>
               </a:rPr>
-              <a:t>Our own handsets and SIMs across every stratum</a:t>
-            </a:r>
-            <a:endParaRPr lang="en-US" sz="1600" dirty="0"/>
-          </a:p>
-        </p:txBody>
-      </p:sp>
-      <p:sp>
-        <p:nvSpPr>
-          <p:cNvPr id="18" name="Text 16"/>
-          <p:cNvSpPr/>
-          <p:nvPr/>
-        </p:nvSpPr>
-        <p:spPr>
-          <a:xfrm>
-            <a:off x="8915400" y="4572000"/>
-            <a:ext cx="2377440" cy="960120"/>
-          </a:xfrm>
-          <a:prstGeom prst="rect">
-            <a:avLst/>
-          </a:prstGeom>
-          <a:noFill/>
-          <a:ln/>
-        </p:spPr>
-        <p:txBody>
-          <a:bodyPr wrap="square" lIns="0" tIns="0" rIns="0" bIns="0" rtlCol="0" anchor="ctr"/>
-          <a:lstStyle/>
-          <a:p>
-            <a:pPr algn="r" indent="0" marL="0">
-              <a:buNone/>
-            </a:pPr>
-            <a:r>
-              <a:rPr lang="en-US" sz="1300" i="1" dirty="0">
-                <a:solidFill>
-                  <a:srgbClr val="6E7F8B"/>
+              <a:t>Oracle: two addresses, two ports, inbound UDP.</a:t>
+            </a:r>
+            <a:endParaRPr lang="en-US" sz="1350" dirty="0"/>
+          </a:p>
+        </p:txBody>
+      </p:sp>
+      <p:sp>
+        <p:nvSpPr>
+          <p:cNvPr id="16" name="Shape 14"/>
+          <p:cNvSpPr/>
+          <p:nvPr/>
+        </p:nvSpPr>
+        <p:spPr>
+          <a:xfrm>
+            <a:off x="6629400" y="3520440"/>
+            <a:ext cx="118872" cy="118872"/>
+          </a:xfrm>
+          <a:prstGeom prst="ellipse">
+            <a:avLst/>
+          </a:prstGeom>
+          <a:solidFill>
+            <a:srgbClr val="C25E28"/>
+          </a:solidFill>
+          <a:ln w="12700">
+            <a:solidFill>
+              <a:srgbClr val="C25E28"/>
+            </a:solidFill>
+            <a:prstDash val="solid"/>
+          </a:ln>
+        </p:spPr>
+      </p:sp>
+      <p:sp>
+        <p:nvSpPr>
+          <p:cNvPr id="17" name="Text 15"/>
+          <p:cNvSpPr/>
+          <p:nvPr/>
+        </p:nvSpPr>
+        <p:spPr>
+          <a:xfrm>
+            <a:off x="6949440" y="3401568"/>
+            <a:ext cx="4160520" cy="384048"/>
+          </a:xfrm>
+          <a:prstGeom prst="rect">
+            <a:avLst/>
+          </a:prstGeom>
+          <a:noFill/>
+          <a:ln/>
+        </p:spPr>
+        <p:txBody>
+          <a:bodyPr wrap="square" lIns="0" tIns="0" rIns="0" bIns="0" rtlCol="0" anchor="ctr"/>
+          <a:lstStyle/>
+          <a:p>
+            <a:pPr indent="0" marL="0">
+              <a:buNone/>
+            </a:pPr>
+            <a:r>
+              <a:rPr lang="en-US" sz="1350" dirty="0">
+                <a:solidFill>
+                  <a:srgbClr val="3E4C57"/>
                 </a:solidFill>
                 <a:latin typeface="Calibri" pitchFamily="34" charset="0"/>
                 <a:ea typeface="Calibri" pitchFamily="34" charset="-122"/>
                 <a:cs typeface="Calibri" pitchFamily="34" charset="-120"/>
               </a:rPr>
-              <a:t>agreement, never accuracy</a:t>
-            </a:r>
-            <a:endParaRPr lang="en-US" sz="1300" dirty="0"/>
-          </a:p>
-        </p:txBody>
+              <a:t>Witnesses: small hosts on separate subnets.</a:t>
+            </a:r>
+            <a:endParaRPr lang="en-US" sz="1350" dirty="0"/>
+          </a:p>
+        </p:txBody>
+      </p:sp>
+      <p:sp>
+        <p:nvSpPr>
+          <p:cNvPr id="18" name="Shape 16"/>
+          <p:cNvSpPr/>
+          <p:nvPr/>
+        </p:nvSpPr>
+        <p:spPr>
+          <a:xfrm>
+            <a:off x="6629400" y="3995928"/>
+            <a:ext cx="118872" cy="118872"/>
+          </a:xfrm>
+          <a:prstGeom prst="ellipse">
+            <a:avLst/>
+          </a:prstGeom>
+          <a:solidFill>
+            <a:srgbClr val="C25E28"/>
+          </a:solidFill>
+          <a:ln w="12700">
+            <a:solidFill>
+              <a:srgbClr val="C25E28"/>
+            </a:solidFill>
+            <a:prstDash val="solid"/>
+          </a:ln>
+        </p:spPr>
       </p:sp>
       <p:sp>
         <p:nvSpPr>
@@ -8272,34 +7690,34 @@
         </p:nvSpPr>
         <p:spPr>
           <a:xfrm>
-            <a:off x="685800" y="5623560"/>
-            <a:ext cx="10789920" cy="320040"/>
-          </a:xfrm>
-          <a:prstGeom prst="rect">
-            <a:avLst/>
-          </a:prstGeom>
-          <a:noFill/>
-          <a:ln/>
-        </p:spPr>
-        <p:txBody>
-          <a:bodyPr wrap="square" lIns="0" tIns="0" rIns="0" bIns="0" rtlCol="0" anchor="ctr"/>
-          <a:lstStyle/>
-          <a:p>
-            <a:pPr indent="0" marL="0">
-              <a:buNone/>
-            </a:pPr>
-            <a:r>
-              <a:rPr lang="en-US" sz="1500" i="1" dirty="0">
-                <a:solidFill>
-                  <a:srgbClr val="0A5A62"/>
+            <a:off x="6949440" y="3877056"/>
+            <a:ext cx="4160520" cy="384048"/>
+          </a:xfrm>
+          <a:prstGeom prst="rect">
+            <a:avLst/>
+          </a:prstGeom>
+          <a:noFill/>
+          <a:ln/>
+        </p:spPr>
+        <p:txBody>
+          <a:bodyPr wrap="square" lIns="0" tIns="0" rIns="0" bIns="0" rtlCol="0" anchor="ctr"/>
+          <a:lstStyle/>
+          <a:p>
+            <a:pPr indent="0" marL="0">
+              <a:buNone/>
+            </a:pPr>
+            <a:r>
+              <a:rPr lang="en-US" sz="1350" dirty="0">
+                <a:solidFill>
+                  <a:srgbClr val="3E4C57"/>
                 </a:solidFill>
                 <a:latin typeface="Calibri" pitchFamily="34" charset="0"/>
                 <a:ea typeface="Calibri" pitchFamily="34" charset="-122"/>
                 <a:cs typeface="Calibri" pitchFamily="34" charset="-120"/>
               </a:rPr>
-              <a:t>Address-dependent mapping is built deliberately; no netfilter flag produces it.</a:t>
-            </a:r>
-            <a:endParaRPr lang="en-US" sz="1500" dirty="0"/>
+              <a:t>Bench: netfilter inside network namespaces.</a:t>
+            </a:r>
+            <a:endParaRPr lang="en-US" sz="1350" dirty="0"/>
           </a:p>
         </p:txBody>
       </p:sp>
@@ -8311,8 +7729,8 @@
         </p:nvSpPr>
         <p:spPr>
           <a:xfrm>
-            <a:off x="685800" y="5989320"/>
-            <a:ext cx="10789920" cy="320040"/>
+            <a:off x="685800" y="5212080"/>
+            <a:ext cx="10789920" cy="365760"/>
           </a:xfrm>
           <a:prstGeom prst="rect">
             <a:avLst/>
@@ -8336,7 +7754,7 @@
                 <a:ea typeface="Calibri" pitchFamily="34" charset="-122"/>
                 <a:cs typeface="Calibri" pitchFamily="34" charset="-120"/>
               </a:rPr>
-              <a:t>Friends carry the method; public autoNAT nodes are a spot check on reachability only.</a:t>
+              <a:t>A campus is a good place to stand outside a NAT and a poor subject to measure.</a:t>
             </a:r>
             <a:endParaRPr lang="en-US" sz="1500" dirty="0"/>
           </a:p>
@@ -8400,7 +7818,7 @@
                 <a:ea typeface="Calibri" pitchFamily="34" charset="-122"/>
                 <a:cs typeface="Calibri" pitchFamily="34" charset="-120"/>
               </a:rPr>
-              <a:t>WHAT PREVALENCE COSTS</a:t>
+              <a:t>SEQUENCE</a:t>
             </a:r>
             <a:endParaRPr lang="en-US" sz="1100" dirty="0"/>
           </a:p>
@@ -8439,7 +7857,7 @@
                 <a:ea typeface="Cambria" pitchFamily="34" charset="-122"/>
                 <a:cs typeface="Cambria" pitchFamily="34" charset="-120"/>
               </a:rPr>
-              <a:t>The testbed</a:t>
+              <a:t>One semester</a:t>
             </a:r>
             <a:endParaRPr lang="en-US" sz="3600" dirty="0"/>
           </a:p>
@@ -8453,11 +7871,13 @@
         </p:nvSpPr>
         <p:spPr>
           <a:xfrm>
-            <a:off x="685800" y="2404872"/>
-            <a:ext cx="118872" cy="118872"/>
-          </a:xfrm>
-          <a:prstGeom prst="ellipse">
-            <a:avLst/>
+            <a:off x="685800" y="2377440"/>
+            <a:ext cx="2286000" cy="914400"/>
+          </a:xfrm>
+          <a:prstGeom prst="roundRect">
+            <a:avLst>
+              <a:gd name="adj" fmla="val 6000"/>
+            </a:avLst>
           </a:prstGeom>
           <a:solidFill>
             <a:srgbClr val="0E7C86"/>
@@ -8478,24 +7898,63 @@
         </p:nvSpPr>
         <p:spPr>
           <a:xfrm>
-            <a:off x="1005840" y="2286000"/>
-            <a:ext cx="10469880" cy="384048"/>
-          </a:xfrm>
-          <a:prstGeom prst="rect">
-            <a:avLst/>
-          </a:prstGeom>
-          <a:noFill/>
-          <a:ln/>
-        </p:spPr>
-        <p:txBody>
-          <a:bodyPr wrap="square" lIns="0" tIns="0" rIns="0" bIns="0" rtlCol="0" anchor="ctr"/>
-          <a:lstStyle/>
-          <a:p>
-            <a:pPr indent="0" marL="0">
-              <a:buNone/>
-            </a:pPr>
-            <a:r>
-              <a:rPr lang="en-US" sz="1700" dirty="0">
+            <a:off x="685800" y="2377440"/>
+            <a:ext cx="2286000" cy="914400"/>
+          </a:xfrm>
+          <a:prstGeom prst="rect">
+            <a:avLst/>
+          </a:prstGeom>
+          <a:noFill/>
+          <a:ln/>
+        </p:spPr>
+        <p:txBody>
+          <a:bodyPr wrap="square" lIns="0" tIns="0" rIns="0" bIns="0" rtlCol="0" anchor="ctr"/>
+          <a:lstStyle/>
+          <a:p>
+            <a:pPr algn="ctr" indent="0" marL="0">
+              <a:buNone/>
+            </a:pPr>
+            <a:r>
+              <a:rPr lang="en-US" sz="1600" b="1" dirty="0">
+                <a:solidFill>
+                  <a:srgbClr val="FFFFFF"/>
+                </a:solidFill>
+                <a:latin typeface="Cambria" pitchFamily="34" charset="0"/>
+                <a:ea typeface="Cambria" pitchFamily="34" charset="-122"/>
+                <a:cs typeface="Cambria" pitchFamily="34" charset="-120"/>
+              </a:rPr>
+              <a:t>Weeks 1–3</a:t>
+            </a:r>
+            <a:endParaRPr lang="en-US" sz="1600" dirty="0"/>
+          </a:p>
+        </p:txBody>
+      </p:sp>
+      <p:sp>
+        <p:nvSpPr>
+          <p:cNvPr id="6" name="Text 4"/>
+          <p:cNvSpPr/>
+          <p:nvPr/>
+        </p:nvSpPr>
+        <p:spPr>
+          <a:xfrm>
+            <a:off x="3337560" y="2377440"/>
+            <a:ext cx="5669280" cy="914400"/>
+          </a:xfrm>
+          <a:prstGeom prst="rect">
+            <a:avLst/>
+          </a:prstGeom>
+          <a:noFill/>
+          <a:ln/>
+        </p:spPr>
+        <p:txBody>
+          <a:bodyPr wrap="square" lIns="0" tIns="0" rIns="0" bIns="0" rtlCol="0" anchor="ctr"/>
+          <a:lstStyle/>
+          <a:p>
+            <a:pPr indent="0" marL="0">
+              <a:buNone/>
+            </a:pPr>
+            <a:r>
+              <a:rPr lang="en-US" sz="1600" dirty="0">
                 <a:solidFill>
                   <a:srgbClr val="3E4C57"/>
                 </a:solidFill>
@@ -8503,25 +7962,66 @@
                 <a:ea typeface="Calibri" pitchFamily="34" charset="-122"/>
                 <a:cs typeface="Calibri" pitchFamily="34" charset="-120"/>
               </a:rPr>
-              <a:t>NAT behavior is a property of the path, not the subscriber.</a:t>
-            </a:r>
-            <a:endParaRPr lang="en-US" sz="1700" dirty="0"/>
-          </a:p>
-        </p:txBody>
-      </p:sp>
-      <p:sp>
-        <p:nvSpPr>
-          <p:cNvPr id="6" name="Shape 4"/>
-          <p:cNvSpPr/>
-          <p:nvPr/>
-        </p:nvSpPr>
-        <p:spPr>
-          <a:xfrm>
-            <a:off x="685800" y="2971800"/>
-            <a:ext cx="118872" cy="118872"/>
-          </a:xfrm>
-          <a:prstGeom prst="ellipse">
-            <a:avLst/>
+              <a:t>Onboarding; a STUN client on the transport’s own socket.</a:t>
+            </a:r>
+            <a:endParaRPr lang="en-US" sz="1600" dirty="0"/>
+          </a:p>
+        </p:txBody>
+      </p:sp>
+      <p:sp>
+        <p:nvSpPr>
+          <p:cNvPr id="7" name="Text 5"/>
+          <p:cNvSpPr/>
+          <p:nvPr/>
+        </p:nvSpPr>
+        <p:spPr>
+          <a:xfrm>
+            <a:off x="9189720" y="2377440"/>
+            <a:ext cx="2286000" cy="914400"/>
+          </a:xfrm>
+          <a:prstGeom prst="rect">
+            <a:avLst/>
+          </a:prstGeom>
+          <a:noFill/>
+          <a:ln/>
+        </p:spPr>
+        <p:txBody>
+          <a:bodyPr wrap="square" lIns="0" tIns="0" rIns="0" bIns="0" rtlCol="0" anchor="ctr"/>
+          <a:lstStyle/>
+          <a:p>
+            <a:pPr algn="r" indent="0" marL="0">
+              <a:buNone/>
+            </a:pPr>
+            <a:r>
+              <a:rPr lang="en-US" sz="1300" i="1" dirty="0">
+                <a:solidFill>
+                  <a:srgbClr val="6E7F8B"/>
+                </a:solidFill>
+                <a:latin typeface="Calibri" pitchFamily="34" charset="0"/>
+                <a:ea typeface="Calibri" pitchFamily="34" charset="-122"/>
+                <a:cs typeface="Calibri" pitchFamily="34" charset="-120"/>
+              </a:rPr>
+              <a:t>go/no-go checkpoint</a:t>
+            </a:r>
+            <a:endParaRPr lang="en-US" sz="1300" dirty="0"/>
+          </a:p>
+        </p:txBody>
+      </p:sp>
+      <p:sp>
+        <p:nvSpPr>
+          <p:cNvPr id="8" name="Shape 6"/>
+          <p:cNvSpPr/>
+          <p:nvPr/>
+        </p:nvSpPr>
+        <p:spPr>
+          <a:xfrm>
+            <a:off x="685800" y="3566160"/>
+            <a:ext cx="2286000" cy="914400"/>
+          </a:xfrm>
+          <a:prstGeom prst="roundRect">
+            <a:avLst>
+              <a:gd name="adj" fmla="val 6000"/>
+            </a:avLst>
           </a:prstGeom>
           <a:solidFill>
             <a:srgbClr val="0E7C86"/>
@@ -8536,30 +8036,69 @@
       </p:sp>
       <p:sp>
         <p:nvSpPr>
-          <p:cNvPr id="7" name="Text 5"/>
-          <p:cNvSpPr/>
-          <p:nvPr/>
-        </p:nvSpPr>
-        <p:spPr>
-          <a:xfrm>
-            <a:off x="1005840" y="2852928"/>
-            <a:ext cx="10469880" cy="384048"/>
-          </a:xfrm>
-          <a:prstGeom prst="rect">
-            <a:avLst/>
-          </a:prstGeom>
-          <a:noFill/>
-          <a:ln/>
-        </p:spPr>
-        <p:txBody>
-          <a:bodyPr wrap="square" lIns="0" tIns="0" rIns="0" bIns="0" rtlCol="0" anchor="ctr"/>
-          <a:lstStyle/>
-          <a:p>
-            <a:pPr indent="0" marL="0">
-              <a:buNone/>
-            </a:pPr>
-            <a:r>
-              <a:rPr lang="en-US" sz="1700" dirty="0">
+          <p:cNvPr id="9" name="Text 7"/>
+          <p:cNvSpPr/>
+          <p:nvPr/>
+        </p:nvSpPr>
+        <p:spPr>
+          <a:xfrm>
+            <a:off x="685800" y="3566160"/>
+            <a:ext cx="2286000" cy="914400"/>
+          </a:xfrm>
+          <a:prstGeom prst="rect">
+            <a:avLst/>
+          </a:prstGeom>
+          <a:noFill/>
+          <a:ln/>
+        </p:spPr>
+        <p:txBody>
+          <a:bodyPr wrap="square" lIns="0" tIns="0" rIns="0" bIns="0" rtlCol="0" anchor="ctr"/>
+          <a:lstStyle/>
+          <a:p>
+            <a:pPr algn="ctr" indent="0" marL="0">
+              <a:buNone/>
+            </a:pPr>
+            <a:r>
+              <a:rPr lang="en-US" sz="1600" b="1" dirty="0">
+                <a:solidFill>
+                  <a:srgbClr val="FFFFFF"/>
+                </a:solidFill>
+                <a:latin typeface="Cambria" pitchFamily="34" charset="0"/>
+                <a:ea typeface="Cambria" pitchFamily="34" charset="-122"/>
+                <a:cs typeface="Cambria" pitchFamily="34" charset="-120"/>
+              </a:rPr>
+              <a:t>Weeks 4–10</a:t>
+            </a:r>
+            <a:endParaRPr lang="en-US" sz="1600" dirty="0"/>
+          </a:p>
+        </p:txBody>
+      </p:sp>
+      <p:sp>
+        <p:nvSpPr>
+          <p:cNvPr id="10" name="Text 8"/>
+          <p:cNvSpPr/>
+          <p:nvPr/>
+        </p:nvSpPr>
+        <p:spPr>
+          <a:xfrm>
+            <a:off x="3337560" y="3566160"/>
+            <a:ext cx="5669280" cy="914400"/>
+          </a:xfrm>
+          <a:prstGeom prst="rect">
+            <a:avLst/>
+          </a:prstGeom>
+          <a:noFill/>
+          <a:ln/>
+        </p:spPr>
+        <p:txBody>
+          <a:bodyPr wrap="square" lIns="0" tIns="0" rIns="0" bIns="0" rtlCol="0" anchor="ctr"/>
+          <a:lstStyle/>
+          <a:p>
+            <a:pPr indent="0" marL="0">
+              <a:buNone/>
+            </a:pPr>
+            <a:r>
+              <a:rPr lang="en-US" sz="1600" dirty="0">
                 <a:solidFill>
                   <a:srgbClr val="3E4C57"/>
                 </a:solidFill>
@@ -8567,137 +8106,48 @@
                 <a:ea typeface="Calibri" pitchFamily="34" charset="-122"/>
                 <a:cs typeface="Calibri" pitchFamily="34" charset="-120"/>
               </a:rPr>
-              <a:t>A stratum is one carrier, APN and PDN type; or one ISP and CGNAT status.</a:t>
-            </a:r>
-            <a:endParaRPr lang="en-US" sz="1700" dirty="0"/>
-          </a:p>
-        </p:txBody>
-      </p:sp>
-      <p:sp>
-        <p:nvSpPr>
-          <p:cNvPr id="8" name="Shape 6"/>
-          <p:cNvSpPr/>
-          <p:nvPr/>
-        </p:nvSpPr>
-        <p:spPr>
-          <a:xfrm>
-            <a:off x="685800" y="3538728"/>
-            <a:ext cx="118872" cy="118872"/>
-          </a:xfrm>
-          <a:prstGeom prst="ellipse">
-            <a:avLst/>
-          </a:prstGeom>
-          <a:solidFill>
-            <a:srgbClr val="0E7C86"/>
-          </a:solidFill>
-          <a:ln w="12700">
-            <a:solidFill>
-              <a:srgbClr val="0E7C86"/>
-            </a:solidFill>
-            <a:prstDash val="solid"/>
-          </a:ln>
-        </p:spPr>
-      </p:sp>
-      <p:sp>
-        <p:nvSpPr>
-          <p:cNvPr id="9" name="Text 7"/>
-          <p:cNvSpPr/>
-          <p:nvPr/>
-        </p:nvSpPr>
-        <p:spPr>
-          <a:xfrm>
-            <a:off x="1005840" y="3419856"/>
-            <a:ext cx="10469880" cy="384048"/>
-          </a:xfrm>
-          <a:prstGeom prst="rect">
-            <a:avLst/>
-          </a:prstGeom>
-          <a:noFill/>
-          <a:ln/>
-        </p:spPr>
-        <p:txBody>
-          <a:bodyPr wrap="square" lIns="0" tIns="0" rIns="0" bIns="0" rtlCol="0" anchor="ctr"/>
-          <a:lstStyle/>
-          <a:p>
-            <a:pPr indent="0" marL="0">
-              <a:buNone/>
-            </a:pPr>
-            <a:r>
-              <a:rPr lang="en-US" sz="1700" dirty="0">
-                <a:solidFill>
-                  <a:srgbClr val="3E4C57"/>
+              <a:t>The oracle and labeled bench; then the protocol and its classifier.</a:t>
+            </a:r>
+            <a:endParaRPr lang="en-US" sz="1600" dirty="0"/>
+          </a:p>
+        </p:txBody>
+      </p:sp>
+      <p:sp>
+        <p:nvSpPr>
+          <p:cNvPr id="11" name="Text 9"/>
+          <p:cNvSpPr/>
+          <p:nvPr/>
+        </p:nvSpPr>
+        <p:spPr>
+          <a:xfrm>
+            <a:off x="9189720" y="3566160"/>
+            <a:ext cx="2286000" cy="914400"/>
+          </a:xfrm>
+          <a:prstGeom prst="rect">
+            <a:avLst/>
+          </a:prstGeom>
+          <a:noFill/>
+          <a:ln/>
+        </p:spPr>
+        <p:txBody>
+          <a:bodyPr wrap="square" lIns="0" tIns="0" rIns="0" bIns="0" rtlCol="0" anchor="ctr"/>
+          <a:lstStyle/>
+          <a:p>
+            <a:pPr algn="r" indent="0" marL="0">
+              <a:buNone/>
+            </a:pPr>
+            <a:r>
+              <a:rPr lang="en-US" sz="1300" i="1" dirty="0">
+                <a:solidFill>
+                  <a:srgbClr val="6E7F8B"/>
                 </a:solidFill>
                 <a:latin typeface="Calibri" pitchFamily="34" charset="0"/>
                 <a:ea typeface="Calibri" pitchFamily="34" charset="-122"/>
                 <a:cs typeface="Calibri" pitchFamily="34" charset="-120"/>
               </a:rPr>
-              <a:t>Two SIMs and two handset stacks per carrier, before assuming homogeneity.</a:t>
-            </a:r>
-            <a:endParaRPr lang="en-US" sz="1700" dirty="0"/>
-          </a:p>
-        </p:txBody>
-      </p:sp>
-      <p:sp>
-        <p:nvSpPr>
-          <p:cNvPr id="10" name="Shape 8"/>
-          <p:cNvSpPr/>
-          <p:nvPr/>
-        </p:nvSpPr>
-        <p:spPr>
-          <a:xfrm>
-            <a:off x="685800" y="4105656"/>
-            <a:ext cx="118872" cy="118872"/>
-          </a:xfrm>
-          <a:prstGeom prst="ellipse">
-            <a:avLst/>
-          </a:prstGeom>
-          <a:solidFill>
-            <a:srgbClr val="0E7C86"/>
-          </a:solidFill>
-          <a:ln w="12700">
-            <a:solidFill>
-              <a:srgbClr val="0E7C86"/>
-            </a:solidFill>
-            <a:prstDash val="solid"/>
-          </a:ln>
-        </p:spPr>
-      </p:sp>
-      <p:sp>
-        <p:nvSpPr>
-          <p:cNvPr id="11" name="Text 9"/>
-          <p:cNvSpPr/>
-          <p:nvPr/>
-        </p:nvSpPr>
-        <p:spPr>
-          <a:xfrm>
-            <a:off x="1005840" y="3986784"/>
-            <a:ext cx="10469880" cy="384048"/>
-          </a:xfrm>
-          <a:prstGeom prst="rect">
-            <a:avLst/>
-          </a:prstGeom>
-          <a:noFill/>
-          <a:ln/>
-        </p:spPr>
-        <p:txBody>
-          <a:bodyPr wrap="square" lIns="0" tIns="0" rIns="0" bIns="0" rtlCol="0" anchor="ctr"/>
-          <a:lstStyle/>
-          <a:p>
-            <a:pPr indent="0" marL="0">
-              <a:buNone/>
-            </a:pPr>
-            <a:r>
-              <a:rPr lang="en-US" sz="1700" dirty="0">
-                <a:solidFill>
-                  <a:srgbClr val="3E4C57"/>
-                </a:solidFill>
-                <a:latin typeface="Calibri" pitchFamily="34" charset="0"/>
-                <a:ea typeface="Calibri" pitchFamily="34" charset="-122"/>
-                <a:cs typeface="Calibri" pitchFamily="34" charset="-120"/>
-              </a:rPr>
-              <a:t>Weights from published subscriber counts, never announced address space.</a:t>
-            </a:r>
-            <a:endParaRPr lang="en-US" sz="1700" dirty="0"/>
+              <a:t>labels known by construction</a:t>
+            </a:r>
+            <a:endParaRPr lang="en-US" sz="1300" dirty="0"/>
           </a:p>
         </p:txBody>
       </p:sp>
@@ -8709,8 +8159,8 @@
         </p:nvSpPr>
         <p:spPr>
           <a:xfrm>
-            <a:off x="685800" y="4892040"/>
-            <a:ext cx="10789920" cy="914400"/>
+            <a:off x="685800" y="4754880"/>
+            <a:ext cx="2286000" cy="914400"/>
           </a:xfrm>
           <a:prstGeom prst="roundRect">
             <a:avLst>
@@ -8718,11 +8168,11 @@
             </a:avLst>
           </a:prstGeom>
           <a:solidFill>
-            <a:srgbClr val="E7F1F1"/>
+            <a:srgbClr val="C25E28"/>
           </a:solidFill>
-          <a:ln w="6350">
+          <a:ln w="12700">
             <a:solidFill>
-              <a:srgbClr val="E7F1F1"/>
+              <a:srgbClr val="C25E28"/>
             </a:solidFill>
             <a:prstDash val="solid"/>
           </a:ln>
@@ -8736,54 +8186,190 @@
         </p:nvSpPr>
         <p:spPr>
           <a:xfrm>
-            <a:off x="1051560" y="5074920"/>
-            <a:ext cx="10058400" cy="548640"/>
-          </a:xfrm>
-          <a:prstGeom prst="rect">
-            <a:avLst/>
-          </a:prstGeom>
-          <a:noFill/>
-          <a:ln/>
-        </p:spPr>
-        <p:txBody>
-          <a:bodyPr wrap="square" lIns="0" tIns="0" rIns="0" bIns="0" rtlCol="0" anchor="ctr"/>
-          <a:lstStyle/>
-          <a:p>
-            <a:pPr indent="0" marL="0">
-              <a:lnSpc>
-                <a:spcPct val="105000"/>
-              </a:lnSpc>
-              <a:buNone/>
-            </a:pPr>
-            <a:r>
-              <a:rPr lang="en-US" sz="1450" b="1" dirty="0">
-                <a:solidFill>
-                  <a:srgbClr val="0A5A62"/>
+            <a:off x="685800" y="4754880"/>
+            <a:ext cx="2286000" cy="914400"/>
+          </a:xfrm>
+          <a:prstGeom prst="rect">
+            <a:avLst/>
+          </a:prstGeom>
+          <a:noFill/>
+          <a:ln/>
+        </p:spPr>
+        <p:txBody>
+          <a:bodyPr wrap="square" lIns="0" tIns="0" rIns="0" bIns="0" rtlCol="0" anchor="ctr"/>
+          <a:lstStyle/>
+          <a:p>
+            <a:pPr algn="ctr" indent="0" marL="0">
+              <a:buNone/>
+            </a:pPr>
+            <a:r>
+              <a:rPr lang="en-US" sz="1600" b="1" dirty="0">
+                <a:solidFill>
+                  <a:srgbClr val="FFFFFF"/>
+                </a:solidFill>
+                <a:latin typeface="Cambria" pitchFamily="34" charset="0"/>
+                <a:ea typeface="Cambria" pitchFamily="34" charset="-122"/>
+                <a:cs typeface="Cambria" pitchFamily="34" charset="-120"/>
+              </a:rPr>
+              <a:t>Weeks 11–15</a:t>
+            </a:r>
+            <a:endParaRPr lang="en-US" sz="1600" dirty="0"/>
+          </a:p>
+        </p:txBody>
+      </p:sp>
+      <p:sp>
+        <p:nvSpPr>
+          <p:cNvPr id="14" name="Text 12"/>
+          <p:cNvSpPr/>
+          <p:nvPr/>
+        </p:nvSpPr>
+        <p:spPr>
+          <a:xfrm>
+            <a:off x="3337560" y="4754880"/>
+            <a:ext cx="5669280" cy="914400"/>
+          </a:xfrm>
+          <a:prstGeom prst="rect">
+            <a:avLst/>
+          </a:prstGeom>
+          <a:noFill/>
+          <a:ln/>
+        </p:spPr>
+        <p:txBody>
+          <a:bodyPr wrap="square" lIns="0" tIns="0" rIns="0" bIns="0" rtlCol="0" anchor="ctr"/>
+          <a:lstStyle/>
+          <a:p>
+            <a:pPr indent="0" marL="0">
+              <a:buNone/>
+            </a:pPr>
+            <a:r>
+              <a:rPr lang="en-US" sz="1600" dirty="0">
+                <a:solidFill>
+                  <a:srgbClr val="3E4C57"/>
                 </a:solidFill>
                 <a:latin typeface="Calibri" pitchFamily="34" charset="0"/>
                 <a:ea typeface="Calibri" pitchFamily="34" charset="-122"/>
                 <a:cs typeface="Calibri" pitchFamily="34" charset="-120"/>
               </a:rPr>
-              <a:t>A census of strata, not a sample:  </a:t>
-            </a:r>
-            <a:pPr indent="0" marL="0">
-              <a:lnSpc>
-                <a:spcPct val="105000"/>
-              </a:lnSpc>
-              <a:buNone/>
-            </a:pPr>
-            <a:r>
-              <a:rPr lang="en-US" sz="1450" dirty="0">
-                <a:solidFill>
-                  <a:srgbClr val="3E4C57"/>
+              <a:t>Measurement across the networks we can reach; write-up.</a:t>
+            </a:r>
+            <a:endParaRPr lang="en-US" sz="1600" dirty="0"/>
+          </a:p>
+        </p:txBody>
+      </p:sp>
+      <p:sp>
+        <p:nvSpPr>
+          <p:cNvPr id="15" name="Text 13"/>
+          <p:cNvSpPr/>
+          <p:nvPr/>
+        </p:nvSpPr>
+        <p:spPr>
+          <a:xfrm>
+            <a:off x="9189720" y="4754880"/>
+            <a:ext cx="2286000" cy="914400"/>
+          </a:xfrm>
+          <a:prstGeom prst="rect">
+            <a:avLst/>
+          </a:prstGeom>
+          <a:noFill/>
+          <a:ln/>
+        </p:spPr>
+        <p:txBody>
+          <a:bodyPr wrap="square" lIns="0" tIns="0" rIns="0" bIns="0" rtlCol="0" anchor="ctr"/>
+          <a:lstStyle/>
+          <a:p>
+            <a:pPr algn="r" indent="0" marL="0">
+              <a:buNone/>
+            </a:pPr>
+            <a:r>
+              <a:rPr lang="en-US" sz="1300" i="1" dirty="0">
+                <a:solidFill>
+                  <a:srgbClr val="6E7F8B"/>
                 </a:solidFill>
                 <a:latin typeface="Calibri" pitchFamily="34" charset="0"/>
                 <a:ea typeface="Calibri" pitchFamily="34" charset="-122"/>
                 <a:cs typeface="Calibri" pitchFamily="34" charset="-120"/>
               </a:rPr>
-              <a:t>there is no probabilistic sampling within a stratum, so we report sensitivity ranges and never confidence intervals.</a:t>
-            </a:r>
-            <a:endParaRPr lang="en-US" sz="1450" dirty="0"/>
+              <a:t>agreement, never accuracy</a:t>
+            </a:r>
+            <a:endParaRPr lang="en-US" sz="1300" dirty="0"/>
+          </a:p>
+        </p:txBody>
+      </p:sp>
+      <p:sp>
+        <p:nvSpPr>
+          <p:cNvPr id="16" name="Text 14"/>
+          <p:cNvSpPr/>
+          <p:nvPr/>
+        </p:nvSpPr>
+        <p:spPr>
+          <a:xfrm>
+            <a:off x="685800" y="5870448"/>
+            <a:ext cx="10789920" cy="292608"/>
+          </a:xfrm>
+          <a:prstGeom prst="rect">
+            <a:avLst/>
+          </a:prstGeom>
+          <a:noFill/>
+          <a:ln/>
+        </p:spPr>
+        <p:txBody>
+          <a:bodyPr wrap="square" lIns="0" tIns="0" rIns="0" bIns="0" rtlCol="0" anchor="ctr"/>
+          <a:lstStyle/>
+          <a:p>
+            <a:pPr indent="0" marL="0">
+              <a:buNone/>
+            </a:pPr>
+            <a:r>
+              <a:rPr lang="en-US" sz="1400" i="1" dirty="0">
+                <a:solidFill>
+                  <a:srgbClr val="0A5A62"/>
+                </a:solidFill>
+                <a:latin typeface="Calibri" pitchFamily="34" charset="0"/>
+                <a:ea typeface="Calibri" pitchFamily="34" charset="-122"/>
+                <a:cs typeface="Calibri" pitchFamily="34" charset="-120"/>
+              </a:rPr>
+              <a:t>Address-dependent mapping is built deliberately; no netfilter flag produces it.</a:t>
+            </a:r>
+            <a:endParaRPr lang="en-US" sz="1400" dirty="0"/>
+          </a:p>
+        </p:txBody>
+      </p:sp>
+      <p:sp>
+        <p:nvSpPr>
+          <p:cNvPr id="17" name="Text 15"/>
+          <p:cNvSpPr/>
+          <p:nvPr/>
+        </p:nvSpPr>
+        <p:spPr>
+          <a:xfrm>
+            <a:off x="685800" y="6199632"/>
+            <a:ext cx="10789920" cy="292608"/>
+          </a:xfrm>
+          <a:prstGeom prst="rect">
+            <a:avLst/>
+          </a:prstGeom>
+          <a:noFill/>
+          <a:ln/>
+        </p:spPr>
+        <p:txBody>
+          <a:bodyPr wrap="square" lIns="0" tIns="0" rIns="0" bIns="0" rtlCol="0" anchor="ctr"/>
+          <a:lstStyle/>
+          <a:p>
+            <a:pPr indent="0" marL="0">
+              <a:buNone/>
+            </a:pPr>
+            <a:r>
+              <a:rPr lang="en-US" sz="1400" i="1" dirty="0">
+                <a:solidFill>
+                  <a:srgbClr val="C25E28"/>
+                </a:solidFill>
+                <a:latin typeface="Calibri" pitchFamily="34" charset="0"/>
+                <a:ea typeface="Calibri" pitchFamily="34" charset="-122"/>
+                <a:cs typeface="Calibri" pitchFamily="34" charset="-120"/>
+              </a:rPr>
+              <a:t>Week one: addresses, firewall rules, SIMs and handsets. They gate week four.</a:t>
+            </a:r>
+            <a:endParaRPr lang="en-US" sz="1400" dirty="0"/>
           </a:p>
         </p:txBody>
       </p:sp>
